--- a/documentation/Changelog.pptx
+++ b/documentation/Changelog.pptx
@@ -5,72 +5,74 @@
     <p:sldMasterId id="2147483702" r:id="rId1"/>
   </p:sldMasterIdLst>
   <p:notesMasterIdLst>
-    <p:notesMasterId r:id="rId60"/>
+    <p:notesMasterId r:id="rId62"/>
   </p:notesMasterIdLst>
   <p:sldIdLst>
     <p:sldId id="312" r:id="rId2"/>
-    <p:sldId id="317" r:id="rId3"/>
-    <p:sldId id="315" r:id="rId4"/>
-    <p:sldId id="316" r:id="rId5"/>
-    <p:sldId id="318" r:id="rId6"/>
-    <p:sldId id="313" r:id="rId7"/>
-    <p:sldId id="310" r:id="rId8"/>
-    <p:sldId id="311" r:id="rId9"/>
-    <p:sldId id="296" r:id="rId10"/>
-    <p:sldId id="306" r:id="rId11"/>
-    <p:sldId id="308" r:id="rId12"/>
-    <p:sldId id="309" r:id="rId13"/>
-    <p:sldId id="305" r:id="rId14"/>
-    <p:sldId id="304" r:id="rId15"/>
-    <p:sldId id="301" r:id="rId16"/>
-    <p:sldId id="300" r:id="rId17"/>
-    <p:sldId id="302" r:id="rId18"/>
-    <p:sldId id="303" r:id="rId19"/>
-    <p:sldId id="299" r:id="rId20"/>
-    <p:sldId id="297" r:id="rId21"/>
-    <p:sldId id="298" r:id="rId22"/>
-    <p:sldId id="289" r:id="rId23"/>
-    <p:sldId id="291" r:id="rId24"/>
-    <p:sldId id="294" r:id="rId25"/>
-    <p:sldId id="295" r:id="rId26"/>
-    <p:sldId id="292" r:id="rId27"/>
-    <p:sldId id="290" r:id="rId28"/>
-    <p:sldId id="277" r:id="rId29"/>
-    <p:sldId id="284" r:id="rId30"/>
-    <p:sldId id="278" r:id="rId31"/>
-    <p:sldId id="279" r:id="rId32"/>
-    <p:sldId id="280" r:id="rId33"/>
-    <p:sldId id="281" r:id="rId34"/>
-    <p:sldId id="283" r:id="rId35"/>
-    <p:sldId id="287" r:id="rId36"/>
-    <p:sldId id="288" r:id="rId37"/>
-    <p:sldId id="285" r:id="rId38"/>
-    <p:sldId id="256" r:id="rId39"/>
-    <p:sldId id="265" r:id="rId40"/>
-    <p:sldId id="258" r:id="rId41"/>
-    <p:sldId id="260" r:id="rId42"/>
-    <p:sldId id="275" r:id="rId43"/>
-    <p:sldId id="266" r:id="rId44"/>
-    <p:sldId id="276" r:id="rId45"/>
-    <p:sldId id="263" r:id="rId46"/>
-    <p:sldId id="261" r:id="rId47"/>
-    <p:sldId id="262" r:id="rId48"/>
-    <p:sldId id="259" r:id="rId49"/>
-    <p:sldId id="268" r:id="rId50"/>
-    <p:sldId id="257" r:id="rId51"/>
-    <p:sldId id="264" r:id="rId52"/>
-    <p:sldId id="273" r:id="rId53"/>
-    <p:sldId id="269" r:id="rId54"/>
-    <p:sldId id="274" r:id="rId55"/>
-    <p:sldId id="270" r:id="rId56"/>
-    <p:sldId id="267" r:id="rId57"/>
-    <p:sldId id="271" r:id="rId58"/>
-    <p:sldId id="272" r:id="rId59"/>
+    <p:sldId id="320" r:id="rId3"/>
+    <p:sldId id="319" r:id="rId4"/>
+    <p:sldId id="317" r:id="rId5"/>
+    <p:sldId id="315" r:id="rId6"/>
+    <p:sldId id="316" r:id="rId7"/>
+    <p:sldId id="318" r:id="rId8"/>
+    <p:sldId id="313" r:id="rId9"/>
+    <p:sldId id="310" r:id="rId10"/>
+    <p:sldId id="311" r:id="rId11"/>
+    <p:sldId id="296" r:id="rId12"/>
+    <p:sldId id="306" r:id="rId13"/>
+    <p:sldId id="308" r:id="rId14"/>
+    <p:sldId id="309" r:id="rId15"/>
+    <p:sldId id="305" r:id="rId16"/>
+    <p:sldId id="304" r:id="rId17"/>
+    <p:sldId id="301" r:id="rId18"/>
+    <p:sldId id="300" r:id="rId19"/>
+    <p:sldId id="302" r:id="rId20"/>
+    <p:sldId id="303" r:id="rId21"/>
+    <p:sldId id="299" r:id="rId22"/>
+    <p:sldId id="297" r:id="rId23"/>
+    <p:sldId id="298" r:id="rId24"/>
+    <p:sldId id="289" r:id="rId25"/>
+    <p:sldId id="291" r:id="rId26"/>
+    <p:sldId id="294" r:id="rId27"/>
+    <p:sldId id="295" r:id="rId28"/>
+    <p:sldId id="292" r:id="rId29"/>
+    <p:sldId id="290" r:id="rId30"/>
+    <p:sldId id="277" r:id="rId31"/>
+    <p:sldId id="284" r:id="rId32"/>
+    <p:sldId id="278" r:id="rId33"/>
+    <p:sldId id="279" r:id="rId34"/>
+    <p:sldId id="280" r:id="rId35"/>
+    <p:sldId id="281" r:id="rId36"/>
+    <p:sldId id="283" r:id="rId37"/>
+    <p:sldId id="287" r:id="rId38"/>
+    <p:sldId id="288" r:id="rId39"/>
+    <p:sldId id="285" r:id="rId40"/>
+    <p:sldId id="256" r:id="rId41"/>
+    <p:sldId id="265" r:id="rId42"/>
+    <p:sldId id="258" r:id="rId43"/>
+    <p:sldId id="260" r:id="rId44"/>
+    <p:sldId id="275" r:id="rId45"/>
+    <p:sldId id="266" r:id="rId46"/>
+    <p:sldId id="276" r:id="rId47"/>
+    <p:sldId id="263" r:id="rId48"/>
+    <p:sldId id="261" r:id="rId49"/>
+    <p:sldId id="262" r:id="rId50"/>
+    <p:sldId id="259" r:id="rId51"/>
+    <p:sldId id="268" r:id="rId52"/>
+    <p:sldId id="257" r:id="rId53"/>
+    <p:sldId id="264" r:id="rId54"/>
+    <p:sldId id="273" r:id="rId55"/>
+    <p:sldId id="269" r:id="rId56"/>
+    <p:sldId id="274" r:id="rId57"/>
+    <p:sldId id="270" r:id="rId58"/>
+    <p:sldId id="267" r:id="rId59"/>
+    <p:sldId id="271" r:id="rId60"/>
+    <p:sldId id="272" r:id="rId61"/>
   </p:sldIdLst>
   <p:sldSz cx="12192000" cy="6858000"/>
   <p:notesSz cx="6858000" cy="9144000"/>
   <p:custDataLst>
-    <p:tags r:id="rId61"/>
+    <p:tags r:id="rId63"/>
   </p:custDataLst>
   <p:defaultTextStyle>
     <a:defPPr>
@@ -170,9 +172,15 @@
   <p:extLst>
     <p:ext uri="{521415D9-36F7-43E2-AB2F-B90AF26B5E84}">
       <p14:sectionLst xmlns:p14="http://schemas.microsoft.com/office/powerpoint/2010/main">
-        <p14:section name="3.0.2" id="{42B534F3-79D7-4530-959F-78BE97453E2F}">
+        <p14:section name="3.1.0" id="{42B534F3-79D7-4530-959F-78BE97453E2F}">
           <p14:sldIdLst>
             <p14:sldId id="312"/>
+            <p14:sldId id="320"/>
+          </p14:sldIdLst>
+        </p14:section>
+        <p14:section name="3.0.2" id="{15443347-AE3C-4164-A1F3-EB58A54CE7D0}">
+          <p14:sldIdLst>
+            <p14:sldId id="319"/>
             <p14:sldId id="317"/>
             <p14:sldId id="315"/>
             <p14:sldId id="316"/>
@@ -359,7 +367,7 @@
           <a:p>
             <a:fld id="{5EC86055-D2F1-46C3-83FD-A327EBDDB0A8}" type="datetimeFigureOut">
               <a:rPr lang="de-DE" smtClean="0"/>
-              <a:t>24.04.2025</a:t>
+              <a:t>18.02.2026</a:t>
             </a:fld>
             <a:endParaRPr lang="de-DE"/>
           </a:p>
@@ -773,7 +781,7 @@
           <a:p>
             <a:fld id="{83E968C0-E631-4FA5-B66C-A6893089A72C}" type="datetime1">
               <a:rPr lang="de-DE" smtClean="0"/>
-              <a:t>24.04.2025</a:t>
+              <a:t>18.02.2026</a:t>
             </a:fld>
             <a:endParaRPr lang="de-DE"/>
           </a:p>
@@ -971,7 +979,7 @@
           <a:p>
             <a:fld id="{327DFED5-F5BC-4C21-B00D-107757BCB1D5}" type="datetime1">
               <a:rPr lang="de-DE" smtClean="0"/>
-              <a:t>24.04.2025</a:t>
+              <a:t>18.02.2026</a:t>
             </a:fld>
             <a:endParaRPr lang="de-DE"/>
           </a:p>
@@ -1179,7 +1187,7 @@
           <a:p>
             <a:fld id="{D55D80D4-FC22-469B-B760-6A7940AA3138}" type="datetime1">
               <a:rPr lang="de-DE" smtClean="0"/>
-              <a:t>24.04.2025</a:t>
+              <a:t>18.02.2026</a:t>
             </a:fld>
             <a:endParaRPr lang="de-DE"/>
           </a:p>
@@ -1374,7 +1382,7 @@
           <a:p>
             <a:fld id="{146DBEAB-51C5-4FBE-9B54-BC8F608043B0}" type="datetime1">
               <a:rPr lang="de-DE" smtClean="0"/>
-              <a:t>24.04.2025</a:t>
+              <a:t>18.02.2026</a:t>
             </a:fld>
             <a:endParaRPr lang="de-DE" dirty="0"/>
           </a:p>
@@ -1561,7 +1569,7 @@
           <a:p>
             <a:fld id="{B861EB0D-30DD-4E89-8B0D-65B7028FC562}" type="datetime1">
               <a:rPr lang="de-DE" smtClean="0"/>
-              <a:t>24.04.2025</a:t>
+              <a:t>18.02.2026</a:t>
             </a:fld>
             <a:endParaRPr lang="de-DE"/>
           </a:p>
@@ -1836,7 +1844,7 @@
           <a:p>
             <a:fld id="{73CEBF28-F29F-47B0-8445-64F25E1B2731}" type="datetime1">
               <a:rPr lang="de-DE" smtClean="0"/>
-              <a:t>24.04.2025</a:t>
+              <a:t>18.02.2026</a:t>
             </a:fld>
             <a:endParaRPr lang="de-DE"/>
           </a:p>
@@ -2101,7 +2109,7 @@
           <a:p>
             <a:fld id="{70BB8FCB-2F3D-4195-89D6-401F7605A609}" type="datetime1">
               <a:rPr lang="de-DE" smtClean="0"/>
-              <a:t>24.04.2025</a:t>
+              <a:t>18.02.2026</a:t>
             </a:fld>
             <a:endParaRPr lang="de-DE"/>
           </a:p>
@@ -2513,7 +2521,7 @@
           <a:p>
             <a:fld id="{7A814B83-3C3F-4E43-9685-CE4AC483A9CE}" type="datetime1">
               <a:rPr lang="de-DE" smtClean="0"/>
-              <a:t>24.04.2025</a:t>
+              <a:t>18.02.2026</a:t>
             </a:fld>
             <a:endParaRPr lang="de-DE"/>
           </a:p>
@@ -2655,7 +2663,7 @@
           <a:p>
             <a:fld id="{5A2175DA-8D38-4A58-A54F-1168D09756FD}" type="datetime1">
               <a:rPr lang="de-DE" smtClean="0"/>
-              <a:t>24.04.2025</a:t>
+              <a:t>18.02.2026</a:t>
             </a:fld>
             <a:endParaRPr lang="de-DE"/>
           </a:p>
@@ -2768,7 +2776,7 @@
           <a:p>
             <a:fld id="{8F6AF57F-AE76-4C94-AABC-F8C3359A6250}" type="datetime1">
               <a:rPr lang="de-DE" smtClean="0"/>
-              <a:t>24.04.2025</a:t>
+              <a:t>18.02.2026</a:t>
             </a:fld>
             <a:endParaRPr lang="de-DE"/>
           </a:p>
@@ -3079,7 +3087,7 @@
           <a:p>
             <a:fld id="{5582B541-E7EC-488F-97C5-20BBF6BE4B06}" type="datetime1">
               <a:rPr lang="de-DE" smtClean="0"/>
-              <a:t>24.04.2025</a:t>
+              <a:t>18.02.2026</a:t>
             </a:fld>
             <a:endParaRPr lang="de-DE"/>
           </a:p>
@@ -3370,7 +3378,7 @@
           <a:p>
             <a:fld id="{07C6A342-1575-4CB6-868D-A21133827D71}" type="datetime1">
               <a:rPr lang="de-DE" smtClean="0"/>
-              <a:t>24.04.2025</a:t>
+              <a:t>18.02.2026</a:t>
             </a:fld>
             <a:endParaRPr lang="de-DE"/>
           </a:p>
@@ -3720,7 +3728,7 @@
           <a:p>
             <a:fld id="{EC197B76-F97A-42BE-B66C-1432418DB8F2}" type="datetime1">
               <a:rPr lang="de-DE" smtClean="0"/>
-              <a:t>24.04.2025</a:t>
+              <a:t>18.02.2026</a:t>
             </a:fld>
             <a:endParaRPr lang="de-DE"/>
           </a:p>
@@ -4163,7 +4171,7 @@
             </p:custDataLst>
             <p:extLst>
               <p:ext uri="{D42A27DB-BD31-4B8C-83A1-F6EECF244321}">
-                <p14:modId xmlns:p14="http://schemas.microsoft.com/office/powerpoint/2010/main" val="3764379916"/>
+                <p14:modId xmlns:p14="http://schemas.microsoft.com/office/powerpoint/2010/main" val="1073447536"/>
               </p:ext>
             </p:extLst>
           </p:nvPr>
@@ -4296,7 +4304,7 @@
           <a:p>
             <a:r>
               <a:rPr lang="de-DE" dirty="0"/>
-              <a:t>BKT v3.0.2</a:t>
+              <a:t>BKT v3.1.0</a:t>
             </a:r>
           </a:p>
         </p:txBody>
@@ -4391,6 +4399,431 @@
 </file>
 
 <file path=ppt/slides/slide10.xml><?xml version="1.0" encoding="utf-8"?>
+<p:sld xmlns:a="http://schemas.openxmlformats.org/drawingml/2006/main" xmlns:r="http://schemas.openxmlformats.org/officeDocument/2006/relationships" xmlns:p="http://schemas.openxmlformats.org/presentationml/2006/main">
+  <p:cSld>
+    <p:spTree>
+      <p:nvGrpSpPr>
+        <p:cNvPr id="1" name=""/>
+        <p:cNvGrpSpPr/>
+        <p:nvPr/>
+      </p:nvGrpSpPr>
+      <p:grpSpPr>
+        <a:xfrm>
+          <a:off x="0" y="0"/>
+          <a:ext cx="0" cy="0"/>
+          <a:chOff x="0" y="0"/>
+          <a:chExt cx="0" cy="0"/>
+        </a:xfrm>
+      </p:grpSpPr>
+      <p:graphicFrame>
+        <p:nvGraphicFramePr>
+          <p:cNvPr id="5" name="think-cell data - do not delete" hidden="1">
+            <a:extLst>
+              <a:ext uri="{FF2B5EF4-FFF2-40B4-BE49-F238E27FC236}">
+                <a16:creationId xmlns:a16="http://schemas.microsoft.com/office/drawing/2014/main" id="{B3E647CA-BD1F-94A9-09D9-98D87C881453}"/>
+              </a:ext>
+            </a:extLst>
+          </p:cNvPr>
+          <p:cNvGraphicFramePr>
+            <a:graphicFrameLocks noChangeAspect="1"/>
+          </p:cNvGraphicFramePr>
+          <p:nvPr>
+            <p:custDataLst>
+              <p:tags r:id="rId1"/>
+            </p:custDataLst>
+            <p:extLst>
+              <p:ext uri="{D42A27DB-BD31-4B8C-83A1-F6EECF244321}">
+                <p14:modId xmlns:p14="http://schemas.microsoft.com/office/powerpoint/2010/main" val="2425650701"/>
+              </p:ext>
+            </p:extLst>
+          </p:nvPr>
+        </p:nvGraphicFramePr>
+        <p:xfrm>
+          <a:off x="1588" y="1588"/>
+          <a:ext cx="1588" cy="1588"/>
+        </p:xfrm>
+        <a:graphic>
+          <a:graphicData uri="http://schemas.openxmlformats.org/presentationml/2006/ole">
+            <mc:AlternateContent xmlns:mc="http://schemas.openxmlformats.org/markup-compatibility/2006">
+              <mc:Choice xmlns:v="urn:schemas-microsoft-com:vml" Requires="v">
+                <p:oleObj name="think-cell Folie" r:id="rId3" imgW="592" imgH="595" progId="TCLayout.ActiveDocument.1">
+                  <p:embed/>
+                </p:oleObj>
+              </mc:Choice>
+              <mc:Fallback>
+                <p:oleObj name="think-cell Folie" r:id="rId3" imgW="592" imgH="595" progId="TCLayout.ActiveDocument.1">
+                  <p:embed/>
+                  <p:pic>
+                    <p:nvPicPr>
+                      <p:cNvPr id="0" name=""/>
+                      <p:cNvPicPr/>
+                      <p:nvPr/>
+                    </p:nvPicPr>
+                    <p:blipFill>
+                      <a:blip r:embed="rId4"/>
+                      <a:stretch>
+                        <a:fillRect/>
+                      </a:stretch>
+                    </p:blipFill>
+                    <p:spPr>
+                      <a:xfrm>
+                        <a:off x="1588" y="1588"/>
+                        <a:ext cx="1588" cy="1588"/>
+                      </a:xfrm>
+                      <a:prstGeom prst="rect">
+                        <a:avLst/>
+                      </a:prstGeom>
+                    </p:spPr>
+                  </p:pic>
+                </p:oleObj>
+              </mc:Fallback>
+            </mc:AlternateContent>
+          </a:graphicData>
+        </a:graphic>
+      </p:graphicFrame>
+      <p:sp>
+        <p:nvSpPr>
+          <p:cNvPr id="2" name="Titel 1">
+            <a:extLst>
+              <a:ext uri="{FF2B5EF4-FFF2-40B4-BE49-F238E27FC236}">
+                <a16:creationId xmlns:a16="http://schemas.microsoft.com/office/drawing/2014/main" id="{36B99A4E-E562-AF2E-DCB9-089C7EA5BCB9}"/>
+              </a:ext>
+            </a:extLst>
+          </p:cNvPr>
+          <p:cNvSpPr>
+            <a:spLocks noGrp="1"/>
+          </p:cNvSpPr>
+          <p:nvPr>
+            <p:ph type="title"/>
+          </p:nvPr>
+        </p:nvSpPr>
+        <p:spPr/>
+        <p:txBody>
+          <a:bodyPr vert="horz"/>
+          <a:lstStyle/>
+          <a:p>
+            <a:r>
+              <a:rPr lang="en-US"/>
+              <a:t>Upgrade auf IronPython</a:t>
+            </a:r>
+            <a:r>
+              <a:rPr lang="en-US" dirty="0"/>
+              <a:t> 3.4.1</a:t>
+            </a:r>
+          </a:p>
+        </p:txBody>
+      </p:sp>
+      <p:pic>
+        <p:nvPicPr>
+          <p:cNvPr id="1026" name="Picture 2" descr="IronPython - 开放百科- 灰狐">
+            <a:extLst>
+              <a:ext uri="{FF2B5EF4-FFF2-40B4-BE49-F238E27FC236}">
+                <a16:creationId xmlns:a16="http://schemas.microsoft.com/office/drawing/2014/main" id="{2055868C-1067-5774-6DD1-34DA6E7289B2}"/>
+              </a:ext>
+            </a:extLst>
+          </p:cNvPr>
+          <p:cNvPicPr>
+            <a:picLocks noChangeAspect="1" noChangeArrowheads="1"/>
+          </p:cNvPicPr>
+          <p:nvPr/>
+        </p:nvPicPr>
+        <p:blipFill>
+          <a:blip r:embed="rId5">
+            <a:extLst>
+              <a:ext uri="{28A0092B-C50C-407E-A947-70E740481C1C}">
+                <a14:useLocalDpi xmlns:a14="http://schemas.microsoft.com/office/drawing/2010/main" val="0"/>
+              </a:ext>
+            </a:extLst>
+          </a:blip>
+          <a:srcRect/>
+          <a:stretch>
+            <a:fillRect/>
+          </a:stretch>
+        </p:blipFill>
+        <p:spPr bwMode="auto">
+          <a:xfrm>
+            <a:off x="3729038" y="2786063"/>
+            <a:ext cx="4733925" cy="1285875"/>
+          </a:xfrm>
+          <a:prstGeom prst="rect">
+            <a:avLst/>
+          </a:prstGeom>
+          <a:noFill/>
+          <a:extLst>
+            <a:ext uri="{909E8E84-426E-40DD-AFC4-6F175D3DCCD1}">
+              <a14:hiddenFill xmlns:a14="http://schemas.microsoft.com/office/drawing/2010/main">
+                <a:solidFill>
+                  <a:srgbClr val="FFFFFF"/>
+                </a:solidFill>
+              </a14:hiddenFill>
+            </a:ext>
+          </a:extLst>
+        </p:spPr>
+      </p:pic>
+    </p:spTree>
+    <p:extLst>
+      <p:ext uri="{BB962C8B-B14F-4D97-AF65-F5344CB8AC3E}">
+        <p14:creationId xmlns:p14="http://schemas.microsoft.com/office/powerpoint/2010/main" val="3710865324"/>
+      </p:ext>
+    </p:extLst>
+  </p:cSld>
+  <p:clrMapOvr>
+    <a:masterClrMapping/>
+  </p:clrMapOvr>
+</p:sld>
+</file>
+
+<file path=ppt/slides/slide11.xml><?xml version="1.0" encoding="utf-8"?>
+<p:sld xmlns:a="http://schemas.openxmlformats.org/drawingml/2006/main" xmlns:r="http://schemas.openxmlformats.org/officeDocument/2006/relationships" xmlns:p="http://schemas.openxmlformats.org/presentationml/2006/main">
+  <p:cSld>
+    <p:spTree>
+      <p:nvGrpSpPr>
+        <p:cNvPr id="1" name=""/>
+        <p:cNvGrpSpPr/>
+        <p:nvPr/>
+      </p:nvGrpSpPr>
+      <p:grpSpPr>
+        <a:xfrm>
+          <a:off x="0" y="0"/>
+          <a:ext cx="0" cy="0"/>
+          <a:chOff x="0" y="0"/>
+          <a:chExt cx="0" cy="0"/>
+        </a:xfrm>
+      </p:grpSpPr>
+      <p:graphicFrame>
+        <p:nvGraphicFramePr>
+          <p:cNvPr id="3" name="Objekt 2" hidden="1"/>
+          <p:cNvGraphicFramePr>
+            <a:graphicFrameLocks noChangeAspect="1"/>
+          </p:cNvGraphicFramePr>
+          <p:nvPr>
+            <p:custDataLst>
+              <p:tags r:id="rId1"/>
+            </p:custDataLst>
+            <p:extLst>
+              <p:ext uri="{D42A27DB-BD31-4B8C-83A1-F6EECF244321}">
+                <p14:modId xmlns:p14="http://schemas.microsoft.com/office/powerpoint/2010/main" val="965112342"/>
+              </p:ext>
+            </p:extLst>
+          </p:nvPr>
+        </p:nvGraphicFramePr>
+        <p:xfrm>
+          <a:off x="1588" y="1588"/>
+          <a:ext cx="1588" cy="1588"/>
+        </p:xfrm>
+        <a:graphic>
+          <a:graphicData uri="http://schemas.openxmlformats.org/presentationml/2006/ole">
+            <mc:AlternateContent xmlns:mc="http://schemas.openxmlformats.org/markup-compatibility/2006">
+              <mc:Choice xmlns:v="urn:schemas-microsoft-com:vml" Requires="v">
+                <p:oleObj name="think-cell Folie" r:id="rId4" imgW="526" imgH="526" progId="TCLayout.ActiveDocument.1">
+                  <p:embed/>
+                </p:oleObj>
+              </mc:Choice>
+              <mc:Fallback>
+                <p:oleObj name="think-cell Folie" r:id="rId4" imgW="526" imgH="526" progId="TCLayout.ActiveDocument.1">
+                  <p:embed/>
+                  <p:pic>
+                    <p:nvPicPr>
+                      <p:cNvPr id="3" name="Objekt 2" hidden="1"/>
+                      <p:cNvPicPr/>
+                      <p:nvPr/>
+                    </p:nvPicPr>
+                    <p:blipFill>
+                      <a:blip r:embed="rId5"/>
+                      <a:stretch>
+                        <a:fillRect/>
+                      </a:stretch>
+                    </p:blipFill>
+                    <p:spPr>
+                      <a:xfrm>
+                        <a:off x="1588" y="1588"/>
+                        <a:ext cx="1588" cy="1588"/>
+                      </a:xfrm>
+                      <a:prstGeom prst="rect">
+                        <a:avLst/>
+                      </a:prstGeom>
+                    </p:spPr>
+                  </p:pic>
+                </p:oleObj>
+              </mc:Fallback>
+            </mc:AlternateContent>
+          </a:graphicData>
+        </a:graphic>
+      </p:graphicFrame>
+      <p:sp>
+        <p:nvSpPr>
+          <p:cNvPr id="2" name="Rechteck 1" hidden="1"/>
+          <p:cNvSpPr/>
+          <p:nvPr>
+            <p:custDataLst>
+              <p:tags r:id="rId2"/>
+            </p:custDataLst>
+          </p:nvPr>
+        </p:nvSpPr>
+        <p:spPr>
+          <a:xfrm>
+            <a:off x="0" y="0"/>
+            <a:ext cx="158750" cy="158750"/>
+          </a:xfrm>
+          <a:prstGeom prst="rect">
+            <a:avLst/>
+          </a:prstGeom>
+        </p:spPr>
+        <p:style>
+          <a:lnRef idx="2">
+            <a:schemeClr val="accent1">
+              <a:shade val="50000"/>
+            </a:schemeClr>
+          </a:lnRef>
+          <a:fillRef idx="1">
+            <a:schemeClr val="accent1"/>
+          </a:fillRef>
+          <a:effectRef idx="0">
+            <a:schemeClr val="accent1"/>
+          </a:effectRef>
+          <a:fontRef idx="minor">
+            <a:schemeClr val="lt1"/>
+          </a:fontRef>
+        </p:style>
+        <p:txBody>
+          <a:bodyPr wrap="none" lIns="0" tIns="0" rIns="0" bIns="0" numCol="1" spcCol="0" rtlCol="0" anchor="ctr" anchorCtr="0">
+            <a:noAutofit/>
+          </a:bodyPr>
+          <a:lstStyle/>
+          <a:p>
+            <a:pPr algn="ctr"/>
+            <a:endParaRPr lang="de-DE" sz="6000" dirty="0">
+              <a:latin typeface="Consolas" panose="020B0609020204030204" pitchFamily="49" charset="0"/>
+              <a:ea typeface="+mj-ea"/>
+              <a:cs typeface="+mj-cs"/>
+              <a:sym typeface="Consolas" panose="020B0609020204030204" pitchFamily="49" charset="0"/>
+            </a:endParaRPr>
+          </a:p>
+        </p:txBody>
+      </p:sp>
+      <p:sp>
+        <p:nvSpPr>
+          <p:cNvPr id="4" name="Titel 3">
+            <a:extLst>
+              <a:ext uri="{FF2B5EF4-FFF2-40B4-BE49-F238E27FC236}">
+                <a16:creationId xmlns:a16="http://schemas.microsoft.com/office/drawing/2014/main" id="{EF97E3DC-D649-402F-8C47-2BB766F2F884}"/>
+              </a:ext>
+            </a:extLst>
+          </p:cNvPr>
+          <p:cNvSpPr>
+            <a:spLocks noGrp="1"/>
+          </p:cNvSpPr>
+          <p:nvPr>
+            <p:ph type="ctrTitle"/>
+          </p:nvPr>
+        </p:nvSpPr>
+        <p:spPr>
+          <a:xfrm>
+            <a:off x="1524000" y="1122363"/>
+            <a:ext cx="9144000" cy="2387600"/>
+          </a:xfrm>
+        </p:spPr>
+        <p:txBody>
+          <a:bodyPr vert="horz"/>
+          <a:lstStyle/>
+          <a:p>
+            <a:r>
+              <a:rPr lang="de-DE" dirty="0"/>
+              <a:t>BKT v2.7.5</a:t>
+            </a:r>
+          </a:p>
+        </p:txBody>
+      </p:sp>
+      <p:pic>
+        <p:nvPicPr>
+          <p:cNvPr id="7" name="Grafik 6">
+            <a:extLst>
+              <a:ext uri="{FF2B5EF4-FFF2-40B4-BE49-F238E27FC236}">
+                <a16:creationId xmlns:a16="http://schemas.microsoft.com/office/drawing/2014/main" id="{3536E11D-4A04-4FF1-B181-F60850174264}"/>
+              </a:ext>
+            </a:extLst>
+          </p:cNvPr>
+          <p:cNvPicPr>
+            <a:picLocks noChangeAspect="1"/>
+          </p:cNvPicPr>
+          <p:nvPr/>
+        </p:nvPicPr>
+        <p:blipFill>
+          <a:blip r:embed="rId6" cstate="hqprint">
+            <a:extLst>
+              <a:ext uri="{28A0092B-C50C-407E-A947-70E740481C1C}">
+                <a14:useLocalDpi xmlns:a14="http://schemas.microsoft.com/office/drawing/2010/main" val="0"/>
+              </a:ext>
+            </a:extLst>
+          </a:blip>
+          <a:stretch>
+            <a:fillRect/>
+          </a:stretch>
+        </p:blipFill>
+        <p:spPr>
+          <a:xfrm>
+            <a:off x="5362575" y="849313"/>
+            <a:ext cx="1466850" cy="1466850"/>
+          </a:xfrm>
+          <a:prstGeom prst="rect">
+            <a:avLst/>
+          </a:prstGeom>
+        </p:spPr>
+      </p:pic>
+      <p:sp>
+        <p:nvSpPr>
+          <p:cNvPr id="6" name="Rechteck 5">
+            <a:extLst>
+              <a:ext uri="{FF2B5EF4-FFF2-40B4-BE49-F238E27FC236}">
+                <a16:creationId xmlns:a16="http://schemas.microsoft.com/office/drawing/2014/main" id="{D1F145E7-73BA-4E3F-9DD8-F650B27DFACB}"/>
+              </a:ext>
+            </a:extLst>
+          </p:cNvPr>
+          <p:cNvSpPr/>
+          <p:nvPr/>
+        </p:nvSpPr>
+        <p:spPr>
+          <a:xfrm>
+            <a:off x="3473616" y="3783013"/>
+            <a:ext cx="5244769" cy="369332"/>
+          </a:xfrm>
+          <a:prstGeom prst="rect">
+            <a:avLst/>
+          </a:prstGeom>
+        </p:spPr>
+        <p:txBody>
+          <a:bodyPr wrap="none">
+            <a:spAutoFit/>
+          </a:bodyPr>
+          <a:lstStyle/>
+          <a:p>
+            <a:r>
+              <a:rPr lang="de-DE" dirty="0">
+                <a:hlinkClick r:id="rId7"/>
+              </a:rPr>
+              <a:t>https://www.bkt-toolbox.de/overview.html</a:t>
+            </a:r>
+            <a:r>
+              <a:rPr lang="de-DE" dirty="0"/>
+              <a:t> </a:t>
+            </a:r>
+          </a:p>
+        </p:txBody>
+      </p:sp>
+    </p:spTree>
+    <p:extLst>
+      <p:ext uri="{BB962C8B-B14F-4D97-AF65-F5344CB8AC3E}">
+        <p14:creationId xmlns:p14="http://schemas.microsoft.com/office/powerpoint/2010/main" val="3388339299"/>
+      </p:ext>
+    </p:extLst>
+  </p:cSld>
+  <p:clrMapOvr>
+    <a:masterClrMapping/>
+  </p:clrMapOvr>
+</p:sld>
+</file>
+
+<file path=ppt/slides/slide12.xml><?xml version="1.0" encoding="utf-8"?>
 <p:sld xmlns:a="http://schemas.openxmlformats.org/drawingml/2006/main" xmlns:r="http://schemas.openxmlformats.org/officeDocument/2006/relationships" xmlns:p="http://schemas.openxmlformats.org/presentationml/2006/main">
   <p:cSld>
     <p:spTree>
@@ -4760,7 +5193,7 @@
 </p:sld>
 </file>
 
-<file path=ppt/slides/slide11.xml><?xml version="1.0" encoding="utf-8"?>
+<file path=ppt/slides/slide13.xml><?xml version="1.0" encoding="utf-8"?>
 <p:sld xmlns:a="http://schemas.openxmlformats.org/drawingml/2006/main" xmlns:r="http://schemas.openxmlformats.org/officeDocument/2006/relationships" xmlns:p="http://schemas.openxmlformats.org/presentationml/2006/main">
   <p:cSld>
     <p:spTree>
@@ -6017,7 +6450,7 @@
 </p:sld>
 </file>
 
-<file path=ppt/slides/slide12.xml><?xml version="1.0" encoding="utf-8"?>
+<file path=ppt/slides/slide14.xml><?xml version="1.0" encoding="utf-8"?>
 <p:sld xmlns:a="http://schemas.openxmlformats.org/drawingml/2006/main" xmlns:r="http://schemas.openxmlformats.org/officeDocument/2006/relationships" xmlns:p="http://schemas.openxmlformats.org/presentationml/2006/main">
   <p:cSld>
     <p:spTree>
@@ -6352,7 +6785,7 @@
 </p:sld>
 </file>
 
-<file path=ppt/slides/slide13.xml><?xml version="1.0" encoding="utf-8"?>
+<file path=ppt/slides/slide15.xml><?xml version="1.0" encoding="utf-8"?>
 <p:sld xmlns:a="http://schemas.openxmlformats.org/drawingml/2006/main" xmlns:r="http://schemas.openxmlformats.org/officeDocument/2006/relationships" xmlns:p="http://schemas.openxmlformats.org/presentationml/2006/main">
   <p:cSld>
     <p:spTree>
@@ -6762,7 +7195,7 @@
 </p:sld>
 </file>
 
-<file path=ppt/slides/slide14.xml><?xml version="1.0" encoding="utf-8"?>
+<file path=ppt/slides/slide16.xml><?xml version="1.0" encoding="utf-8"?>
 <p:sld xmlns:a="http://schemas.openxmlformats.org/drawingml/2006/main" xmlns:r="http://schemas.openxmlformats.org/officeDocument/2006/relationships" xmlns:p="http://schemas.openxmlformats.org/presentationml/2006/main">
   <p:cSld>
     <p:spTree>
@@ -7007,7 +7440,7 @@
 </p:sld>
 </file>
 
-<file path=ppt/slides/slide15.xml><?xml version="1.0" encoding="utf-8"?>
+<file path=ppt/slides/slide17.xml><?xml version="1.0" encoding="utf-8"?>
 <p:sld xmlns:a="http://schemas.openxmlformats.org/drawingml/2006/main" xmlns:r="http://schemas.openxmlformats.org/officeDocument/2006/relationships" xmlns:p="http://schemas.openxmlformats.org/presentationml/2006/main">
   <p:cSld>
     <p:spTree>
@@ -14473,7 +14906,7 @@
 </p:sld>
 </file>
 
-<file path=ppt/slides/slide16.xml><?xml version="1.0" encoding="utf-8"?>
+<file path=ppt/slides/slide18.xml><?xml version="1.0" encoding="utf-8"?>
 <p:sld xmlns:a="http://schemas.openxmlformats.org/drawingml/2006/main" xmlns:r="http://schemas.openxmlformats.org/officeDocument/2006/relationships" xmlns:p="http://schemas.openxmlformats.org/presentationml/2006/main">
   <p:cSld>
     <p:spTree>
@@ -15310,7 +15743,7 @@
 </p:sld>
 </file>
 
-<file path=ppt/slides/slide17.xml><?xml version="1.0" encoding="utf-8"?>
+<file path=ppt/slides/slide19.xml><?xml version="1.0" encoding="utf-8"?>
 <p:sld xmlns:a="http://schemas.openxmlformats.org/drawingml/2006/main" xmlns:r="http://schemas.openxmlformats.org/officeDocument/2006/relationships" xmlns:p="http://schemas.openxmlformats.org/presentationml/2006/main">
   <p:cSld>
     <p:spTree>
@@ -15931,7 +16364,225 @@
 </p:sld>
 </file>
 
-<file path=ppt/slides/slide18.xml><?xml version="1.0" encoding="utf-8"?>
+<file path=ppt/slides/slide2.xml><?xml version="1.0" encoding="utf-8"?>
+<p:sld xmlns:a="http://schemas.openxmlformats.org/drawingml/2006/main" xmlns:r="http://schemas.openxmlformats.org/officeDocument/2006/relationships" xmlns:p="http://schemas.openxmlformats.org/presentationml/2006/main">
+  <p:cSld>
+    <p:spTree>
+      <p:nvGrpSpPr>
+        <p:cNvPr id="1" name="">
+          <a:extLst>
+            <a:ext uri="{FF2B5EF4-FFF2-40B4-BE49-F238E27FC236}">
+              <a16:creationId xmlns:a16="http://schemas.microsoft.com/office/drawing/2014/main" id="{F8B4E138-BDB7-8D0F-F5AD-92CBC70A700D}"/>
+            </a:ext>
+          </a:extLst>
+        </p:cNvPr>
+        <p:cNvGrpSpPr/>
+        <p:nvPr/>
+      </p:nvGrpSpPr>
+      <p:grpSpPr>
+        <a:xfrm>
+          <a:off x="0" y="0"/>
+          <a:ext cx="0" cy="0"/>
+          <a:chOff x="0" y="0"/>
+          <a:chExt cx="0" cy="0"/>
+        </a:xfrm>
+      </p:grpSpPr>
+      <p:graphicFrame>
+        <p:nvGraphicFramePr>
+          <p:cNvPr id="4" name="think-cell data - do not delete" hidden="1">
+            <a:extLst>
+              <a:ext uri="{FF2B5EF4-FFF2-40B4-BE49-F238E27FC236}">
+                <a16:creationId xmlns:a16="http://schemas.microsoft.com/office/drawing/2014/main" id="{09602E37-423B-8189-F013-0FB584BAF377}"/>
+              </a:ext>
+            </a:extLst>
+          </p:cNvPr>
+          <p:cNvGraphicFramePr>
+            <a:graphicFrameLocks noChangeAspect="1"/>
+          </p:cNvGraphicFramePr>
+          <p:nvPr>
+            <p:custDataLst>
+              <p:tags r:id="rId1"/>
+            </p:custDataLst>
+          </p:nvPr>
+        </p:nvGraphicFramePr>
+        <p:xfrm>
+          <a:off x="1588" y="1588"/>
+          <a:ext cx="1588" cy="1588"/>
+        </p:xfrm>
+        <a:graphic>
+          <a:graphicData uri="http://schemas.openxmlformats.org/presentationml/2006/ole">
+            <mc:AlternateContent xmlns:mc="http://schemas.openxmlformats.org/markup-compatibility/2006">
+              <mc:Choice xmlns:v="urn:schemas-microsoft-com:vml" Requires="v">
+                <p:oleObj name="think-cell Folie" r:id="rId3" imgW="540" imgH="540" progId="TCLayout.ActiveDocument.1">
+                  <p:embed/>
+                </p:oleObj>
+              </mc:Choice>
+              <mc:Fallback>
+                <p:oleObj name="think-cell Folie" r:id="rId3" imgW="540" imgH="540" progId="TCLayout.ActiveDocument.1">
+                  <p:embed/>
+                  <p:pic>
+                    <p:nvPicPr>
+                      <p:cNvPr id="4" name="think-cell data - do not delete" hidden="1">
+                        <a:extLst>
+                          <a:ext uri="{FF2B5EF4-FFF2-40B4-BE49-F238E27FC236}">
+                            <a16:creationId xmlns:a16="http://schemas.microsoft.com/office/drawing/2014/main" id="{4E8F6816-2DC6-10C0-7650-23B599DDA6C8}"/>
+                          </a:ext>
+                        </a:extLst>
+                      </p:cNvPr>
+                      <p:cNvPicPr/>
+                      <p:nvPr/>
+                    </p:nvPicPr>
+                    <p:blipFill>
+                      <a:blip r:embed="rId4"/>
+                      <a:stretch>
+                        <a:fillRect/>
+                      </a:stretch>
+                    </p:blipFill>
+                    <p:spPr>
+                      <a:xfrm>
+                        <a:off x="1588" y="1588"/>
+                        <a:ext cx="1588" cy="1588"/>
+                      </a:xfrm>
+                      <a:prstGeom prst="rect">
+                        <a:avLst/>
+                      </a:prstGeom>
+                    </p:spPr>
+                  </p:pic>
+                </p:oleObj>
+              </mc:Fallback>
+            </mc:AlternateContent>
+          </a:graphicData>
+        </a:graphic>
+      </p:graphicFrame>
+      <p:sp>
+        <p:nvSpPr>
+          <p:cNvPr id="2" name="Titel 1">
+            <a:extLst>
+              <a:ext uri="{FF2B5EF4-FFF2-40B4-BE49-F238E27FC236}">
+                <a16:creationId xmlns:a16="http://schemas.microsoft.com/office/drawing/2014/main" id="{1DD48A96-FDB1-FA8E-B2ED-B901E5EF74D5}"/>
+              </a:ext>
+            </a:extLst>
+          </p:cNvPr>
+          <p:cNvSpPr>
+            <a:spLocks noGrp="1"/>
+          </p:cNvSpPr>
+          <p:nvPr>
+            <p:ph type="title"/>
+          </p:nvPr>
+        </p:nvSpPr>
+        <p:spPr/>
+        <p:txBody>
+          <a:bodyPr vert="horz"/>
+          <a:lstStyle/>
+          <a:p>
+            <a:r>
+              <a:rPr lang="de-DE" dirty="0"/>
+              <a:t>Erwähnenswerte Bugfixes</a:t>
+            </a:r>
+            <a:endParaRPr lang="en-US" dirty="0"/>
+          </a:p>
+        </p:txBody>
+      </p:sp>
+      <p:sp>
+        <p:nvSpPr>
+          <p:cNvPr id="3" name="Inhaltsplatzhalter 2">
+            <a:extLst>
+              <a:ext uri="{FF2B5EF4-FFF2-40B4-BE49-F238E27FC236}">
+                <a16:creationId xmlns:a16="http://schemas.microsoft.com/office/drawing/2014/main" id="{5811B08B-7652-77AE-F963-6D9E4A790513}"/>
+              </a:ext>
+            </a:extLst>
+          </p:cNvPr>
+          <p:cNvSpPr>
+            <a:spLocks noGrp="1"/>
+          </p:cNvSpPr>
+          <p:nvPr>
+            <p:ph idx="1"/>
+          </p:nvPr>
+        </p:nvSpPr>
+        <p:spPr/>
+        <p:txBody>
+          <a:bodyPr/>
+          <a:lstStyle/>
+          <a:p>
+            <a:pPr marL="447675" indent="-447675">
+              <a:spcBef>
+                <a:spcPts val="1500"/>
+              </a:spcBef>
+              <a:spcAft>
+                <a:spcPts val="1500"/>
+              </a:spcAft>
+              <a:buFont typeface="Wingdings" panose="05000000000000000000" pitchFamily="2" charset="2"/>
+              <a:buChar char="Ø"/>
+            </a:pPr>
+            <a:r>
+              <a:rPr lang="de-DE"/>
+              <a:t>Agenda</a:t>
+            </a:r>
+            <a:r>
+              <a:rPr lang="de-DE" dirty="0"/>
+              <a:t>: Color None geht wieder, leerer Absatz bei </a:t>
+            </a:r>
+            <a:r>
+              <a:rPr lang="de-DE" dirty="0" err="1"/>
+              <a:t>Subitems</a:t>
+            </a:r>
+            <a:r>
+              <a:rPr lang="de-DE" dirty="0"/>
+              <a:t> wird korrekt gelöscht</a:t>
+            </a:r>
+          </a:p>
+          <a:p>
+            <a:pPr marL="447675" indent="-447675">
+              <a:spcBef>
+                <a:spcPts val="1500"/>
+              </a:spcBef>
+              <a:spcAft>
+                <a:spcPts val="1500"/>
+              </a:spcAft>
+              <a:buFont typeface="Wingdings" panose="05000000000000000000" pitchFamily="2" charset="2"/>
+              <a:buChar char="Ø"/>
+            </a:pPr>
+            <a:r>
+              <a:rPr lang="de-DE" dirty="0"/>
+              <a:t>Asynchroner Startup massiv verbessert und im Installer aktivierbar gemacht</a:t>
+            </a:r>
+          </a:p>
+          <a:p>
+            <a:pPr marL="447675" indent="-447675">
+              <a:spcBef>
+                <a:spcPts val="1500"/>
+              </a:spcBef>
+              <a:spcAft>
+                <a:spcPts val="1500"/>
+              </a:spcAft>
+              <a:buFont typeface="Wingdings" panose="05000000000000000000" pitchFamily="2" charset="2"/>
+              <a:buChar char="Ø"/>
+            </a:pPr>
+            <a:r>
+              <a:rPr lang="de-DE" dirty="0" err="1"/>
+              <a:t>FontAwesome</a:t>
+            </a:r>
+            <a:r>
+              <a:rPr lang="de-DE" dirty="0"/>
+              <a:t> Update auf 7.2.0</a:t>
+            </a:r>
+          </a:p>
+        </p:txBody>
+      </p:sp>
+    </p:spTree>
+    <p:extLst>
+      <p:ext uri="{BB962C8B-B14F-4D97-AF65-F5344CB8AC3E}">
+        <p14:creationId xmlns:p14="http://schemas.microsoft.com/office/powerpoint/2010/main" val="1742615742"/>
+      </p:ext>
+    </p:extLst>
+  </p:cSld>
+  <p:clrMapOvr>
+    <a:masterClrMapping/>
+  </p:clrMapOvr>
+</p:sld>
+</file>
+
+<file path=ppt/slides/slide20.xml><?xml version="1.0" encoding="utf-8"?>
 <p:sld xmlns:a="http://schemas.openxmlformats.org/drawingml/2006/main" xmlns:r="http://schemas.openxmlformats.org/officeDocument/2006/relationships" xmlns:p="http://schemas.openxmlformats.org/presentationml/2006/main">
   <p:cSld>
     <p:spTree>
@@ -16258,7 +16909,7 @@
 </p:sld>
 </file>
 
-<file path=ppt/slides/slide19.xml><?xml version="1.0" encoding="utf-8"?>
+<file path=ppt/slides/slide21.xml><?xml version="1.0" encoding="utf-8"?>
 <p:sld xmlns:a="http://schemas.openxmlformats.org/drawingml/2006/main" xmlns:r="http://schemas.openxmlformats.org/officeDocument/2006/relationships" xmlns:p="http://schemas.openxmlformats.org/presentationml/2006/main">
   <p:cSld>
     <p:spTree>
@@ -16503,394 +17154,7 @@
 </p:sld>
 </file>
 
-<file path=ppt/slides/slide2.xml><?xml version="1.0" encoding="utf-8"?>
-<p:sld xmlns:a="http://schemas.openxmlformats.org/drawingml/2006/main" xmlns:r="http://schemas.openxmlformats.org/officeDocument/2006/relationships" xmlns:p="http://schemas.openxmlformats.org/presentationml/2006/main">
-  <p:cSld>
-    <p:spTree>
-      <p:nvGrpSpPr>
-        <p:cNvPr id="1" name=""/>
-        <p:cNvGrpSpPr/>
-        <p:nvPr/>
-      </p:nvGrpSpPr>
-      <p:grpSpPr>
-        <a:xfrm>
-          <a:off x="0" y="0"/>
-          <a:ext cx="0" cy="0"/>
-          <a:chOff x="0" y="0"/>
-          <a:chExt cx="0" cy="0"/>
-        </a:xfrm>
-      </p:grpSpPr>
-      <p:graphicFrame>
-        <p:nvGraphicFramePr>
-          <p:cNvPr id="15" name="think-cell data - do not delete" hidden="1">
-            <a:extLst>
-              <a:ext uri="{FF2B5EF4-FFF2-40B4-BE49-F238E27FC236}">
-                <a16:creationId xmlns:a16="http://schemas.microsoft.com/office/drawing/2014/main" id="{CE68ADB7-A038-8F7C-0C1B-25DBA8DDE11D}"/>
-              </a:ext>
-            </a:extLst>
-          </p:cNvPr>
-          <p:cNvGraphicFramePr>
-            <a:graphicFrameLocks noChangeAspect="1"/>
-          </p:cNvGraphicFramePr>
-          <p:nvPr>
-            <p:custDataLst>
-              <p:tags r:id="rId1"/>
-            </p:custDataLst>
-            <p:extLst>
-              <p:ext uri="{D42A27DB-BD31-4B8C-83A1-F6EECF244321}">
-                <p14:modId xmlns:p14="http://schemas.microsoft.com/office/powerpoint/2010/main" val="3427017127"/>
-              </p:ext>
-            </p:extLst>
-          </p:nvPr>
-        </p:nvGraphicFramePr>
-        <p:xfrm>
-          <a:off x="1588" y="1588"/>
-          <a:ext cx="1588" cy="1588"/>
-        </p:xfrm>
-        <a:graphic>
-          <a:graphicData uri="http://schemas.openxmlformats.org/presentationml/2006/ole">
-            <mc:AlternateContent xmlns:mc="http://schemas.openxmlformats.org/markup-compatibility/2006">
-              <mc:Choice xmlns:v="urn:schemas-microsoft-com:vml" Requires="v">
-                <p:oleObj name="think-cell Folie" r:id="rId3" imgW="540" imgH="540" progId="TCLayout.ActiveDocument.1">
-                  <p:embed/>
-                </p:oleObj>
-              </mc:Choice>
-              <mc:Fallback>
-                <p:oleObj name="think-cell Folie" r:id="rId3" imgW="540" imgH="540" progId="TCLayout.ActiveDocument.1">
-                  <p:embed/>
-                  <p:pic>
-                    <p:nvPicPr>
-                      <p:cNvPr id="0" name=""/>
-                      <p:cNvPicPr/>
-                      <p:nvPr/>
-                    </p:nvPicPr>
-                    <p:blipFill>
-                      <a:blip r:embed="rId4"/>
-                      <a:stretch>
-                        <a:fillRect/>
-                      </a:stretch>
-                    </p:blipFill>
-                    <p:spPr>
-                      <a:xfrm>
-                        <a:off x="1588" y="1588"/>
-                        <a:ext cx="1588" cy="1588"/>
-                      </a:xfrm>
-                      <a:prstGeom prst="rect">
-                        <a:avLst/>
-                      </a:prstGeom>
-                    </p:spPr>
-                  </p:pic>
-                </p:oleObj>
-              </mc:Fallback>
-            </mc:AlternateContent>
-          </a:graphicData>
-        </a:graphic>
-      </p:graphicFrame>
-      <p:sp>
-        <p:nvSpPr>
-          <p:cNvPr id="2" name="Titel 1">
-            <a:extLst>
-              <a:ext uri="{FF2B5EF4-FFF2-40B4-BE49-F238E27FC236}">
-                <a16:creationId xmlns:a16="http://schemas.microsoft.com/office/drawing/2014/main" id="{A8E773DA-3D5C-F5D3-F0D2-F453757D0668}"/>
-              </a:ext>
-            </a:extLst>
-          </p:cNvPr>
-          <p:cNvSpPr>
-            <a:spLocks noGrp="1"/>
-          </p:cNvSpPr>
-          <p:nvPr>
-            <p:ph type="title"/>
-          </p:nvPr>
-        </p:nvSpPr>
-        <p:spPr/>
-        <p:txBody>
-          <a:bodyPr vert="horz"/>
-          <a:lstStyle/>
-          <a:p>
-            <a:r>
-              <a:rPr lang="de-DE"/>
-              <a:t>Verbesserte Font-Icon Suche</a:t>
-            </a:r>
-            <a:endParaRPr lang="de-DE" dirty="0"/>
-          </a:p>
-        </p:txBody>
-      </p:sp>
-      <p:pic>
-        <p:nvPicPr>
-          <p:cNvPr id="5" name="Grafik 4">
-            <a:extLst>
-              <a:ext uri="{FF2B5EF4-FFF2-40B4-BE49-F238E27FC236}">
-                <a16:creationId xmlns:a16="http://schemas.microsoft.com/office/drawing/2014/main" id="{EE640ECA-4708-211E-7802-0778B614982F}"/>
-              </a:ext>
-            </a:extLst>
-          </p:cNvPr>
-          <p:cNvPicPr>
-            <a:picLocks noChangeAspect="1"/>
-          </p:cNvPicPr>
-          <p:nvPr/>
-        </p:nvPicPr>
-        <p:blipFill>
-          <a:blip r:embed="rId5"/>
-          <a:stretch>
-            <a:fillRect/>
-          </a:stretch>
-        </p:blipFill>
-        <p:spPr>
-          <a:xfrm>
-            <a:off x="761971" y="2419799"/>
-            <a:ext cx="3686689" cy="1000265"/>
-          </a:xfrm>
-          <a:prstGeom prst="rect">
-            <a:avLst/>
-          </a:prstGeom>
-        </p:spPr>
-      </p:pic>
-      <p:pic>
-        <p:nvPicPr>
-          <p:cNvPr id="7" name="Grafik 6">
-            <a:extLst>
-              <a:ext uri="{FF2B5EF4-FFF2-40B4-BE49-F238E27FC236}">
-                <a16:creationId xmlns:a16="http://schemas.microsoft.com/office/drawing/2014/main" id="{6157AC2F-FA5F-07F2-18B6-3806885E71C7}"/>
-              </a:ext>
-            </a:extLst>
-          </p:cNvPr>
-          <p:cNvPicPr>
-            <a:picLocks noChangeAspect="1"/>
-          </p:cNvPicPr>
-          <p:nvPr/>
-        </p:nvPicPr>
-        <p:blipFill>
-          <a:blip r:embed="rId6"/>
-          <a:stretch>
-            <a:fillRect/>
-          </a:stretch>
-        </p:blipFill>
-        <p:spPr>
-          <a:xfrm>
-            <a:off x="2009957" y="4438947"/>
-            <a:ext cx="1181265" cy="895475"/>
-          </a:xfrm>
-          <a:prstGeom prst="rect">
-            <a:avLst/>
-          </a:prstGeom>
-        </p:spPr>
-      </p:pic>
-      <p:pic>
-        <p:nvPicPr>
-          <p:cNvPr id="9" name="Grafik 8">
-            <a:extLst>
-              <a:ext uri="{FF2B5EF4-FFF2-40B4-BE49-F238E27FC236}">
-                <a16:creationId xmlns:a16="http://schemas.microsoft.com/office/drawing/2014/main" id="{E2106EBF-716D-C94F-5041-B1A7FBDF19DE}"/>
-              </a:ext>
-            </a:extLst>
-          </p:cNvPr>
-          <p:cNvPicPr>
-            <a:picLocks noChangeAspect="1"/>
-          </p:cNvPicPr>
-          <p:nvPr/>
-        </p:nvPicPr>
-        <p:blipFill>
-          <a:blip r:embed="rId7"/>
-          <a:stretch>
-            <a:fillRect/>
-          </a:stretch>
-        </p:blipFill>
-        <p:spPr>
-          <a:xfrm>
-            <a:off x="5543284" y="2104841"/>
-            <a:ext cx="2666949" cy="2413371"/>
-          </a:xfrm>
-          <a:prstGeom prst="rect">
-            <a:avLst/>
-          </a:prstGeom>
-        </p:spPr>
-      </p:pic>
-      <p:pic>
-        <p:nvPicPr>
-          <p:cNvPr id="13" name="Grafik 12">
-            <a:extLst>
-              <a:ext uri="{FF2B5EF4-FFF2-40B4-BE49-F238E27FC236}">
-                <a16:creationId xmlns:a16="http://schemas.microsoft.com/office/drawing/2014/main" id="{61457CE1-F4AE-9B17-673B-DA7C6F939C6B}"/>
-              </a:ext>
-            </a:extLst>
-          </p:cNvPr>
-          <p:cNvPicPr>
-            <a:picLocks noChangeAspect="1"/>
-          </p:cNvPicPr>
-          <p:nvPr/>
-        </p:nvPicPr>
-        <p:blipFill>
-          <a:blip r:embed="rId8"/>
-          <a:stretch>
-            <a:fillRect/>
-          </a:stretch>
-        </p:blipFill>
-        <p:spPr>
-          <a:xfrm>
-            <a:off x="8937693" y="3876736"/>
-            <a:ext cx="2299782" cy="2183259"/>
-          </a:xfrm>
-          <a:prstGeom prst="rect">
-            <a:avLst/>
-          </a:prstGeom>
-        </p:spPr>
-      </p:pic>
-      <p:sp>
-        <p:nvSpPr>
-          <p:cNvPr id="18" name="Textfeld 17">
-            <a:extLst>
-              <a:ext uri="{FF2B5EF4-FFF2-40B4-BE49-F238E27FC236}">
-                <a16:creationId xmlns:a16="http://schemas.microsoft.com/office/drawing/2014/main" id="{60DED448-6A93-5BE4-95B2-2200BBB5B91C}"/>
-              </a:ext>
-            </a:extLst>
-          </p:cNvPr>
-          <p:cNvSpPr txBox="1"/>
-          <p:nvPr/>
-        </p:nvSpPr>
-        <p:spPr>
-          <a:xfrm>
-            <a:off x="752522" y="3553571"/>
-            <a:ext cx="3696137" cy="646331"/>
-          </a:xfrm>
-          <a:prstGeom prst="rect">
-            <a:avLst/>
-          </a:prstGeom>
-          <a:noFill/>
-        </p:spPr>
-        <p:txBody>
-          <a:bodyPr wrap="square" rtlCol="0">
-            <a:spAutoFit/>
-          </a:bodyPr>
-          <a:lstStyle/>
-          <a:p>
-            <a:r>
-              <a:rPr lang="de-DE"/>
-              <a:t>Fortschrittsbalken während Indexierung</a:t>
-            </a:r>
-            <a:endParaRPr lang="de-DE" dirty="0"/>
-          </a:p>
-        </p:txBody>
-      </p:sp>
-      <p:sp>
-        <p:nvSpPr>
-          <p:cNvPr id="19" name="Textfeld 18">
-            <a:extLst>
-              <a:ext uri="{FF2B5EF4-FFF2-40B4-BE49-F238E27FC236}">
-                <a16:creationId xmlns:a16="http://schemas.microsoft.com/office/drawing/2014/main" id="{F983D71D-167B-0228-3B8B-D1F672584DB1}"/>
-              </a:ext>
-            </a:extLst>
-          </p:cNvPr>
-          <p:cNvSpPr txBox="1"/>
-          <p:nvPr/>
-        </p:nvSpPr>
-        <p:spPr>
-          <a:xfrm>
-            <a:off x="752522" y="5449943"/>
-            <a:ext cx="3696137" cy="369332"/>
-          </a:xfrm>
-          <a:prstGeom prst="rect">
-            <a:avLst/>
-          </a:prstGeom>
-          <a:noFill/>
-        </p:spPr>
-        <p:txBody>
-          <a:bodyPr wrap="square" rtlCol="0">
-            <a:spAutoFit/>
-          </a:bodyPr>
-          <a:lstStyle/>
-          <a:p>
-            <a:r>
-              <a:rPr lang="de-DE"/>
-              <a:t>Ergebnisse an neuer Position</a:t>
-            </a:r>
-            <a:endParaRPr lang="de-DE" dirty="0"/>
-          </a:p>
-        </p:txBody>
-      </p:sp>
-      <p:sp>
-        <p:nvSpPr>
-          <p:cNvPr id="20" name="Textfeld 19">
-            <a:extLst>
-              <a:ext uri="{FF2B5EF4-FFF2-40B4-BE49-F238E27FC236}">
-                <a16:creationId xmlns:a16="http://schemas.microsoft.com/office/drawing/2014/main" id="{4566C024-9C6E-0DBB-AC4E-1E9C397A2B1D}"/>
-              </a:ext>
-            </a:extLst>
-          </p:cNvPr>
-          <p:cNvSpPr txBox="1"/>
-          <p:nvPr/>
-        </p:nvSpPr>
-        <p:spPr>
-          <a:xfrm>
-            <a:off x="8354593" y="2104841"/>
-            <a:ext cx="2999207" cy="923330"/>
-          </a:xfrm>
-          <a:prstGeom prst="rect">
-            <a:avLst/>
-          </a:prstGeom>
-          <a:noFill/>
-        </p:spPr>
-        <p:txBody>
-          <a:bodyPr wrap="square" rtlCol="0">
-            <a:spAutoFit/>
-          </a:bodyPr>
-          <a:lstStyle/>
-          <a:p>
-            <a:r>
-              <a:rPr lang="de-DE" dirty="0"/>
-              <a:t>Suche in der gesamten Unicode-Datenbank nach Symbolen</a:t>
-            </a:r>
-          </a:p>
-        </p:txBody>
-      </p:sp>
-      <p:sp>
-        <p:nvSpPr>
-          <p:cNvPr id="21" name="Textfeld 20">
-            <a:extLst>
-              <a:ext uri="{FF2B5EF4-FFF2-40B4-BE49-F238E27FC236}">
-                <a16:creationId xmlns:a16="http://schemas.microsoft.com/office/drawing/2014/main" id="{CA07DB4B-7A46-8B78-E9AA-696AF6D19548}"/>
-              </a:ext>
-            </a:extLst>
-          </p:cNvPr>
-          <p:cNvSpPr txBox="1"/>
-          <p:nvPr/>
-        </p:nvSpPr>
-        <p:spPr>
-          <a:xfrm>
-            <a:off x="5779775" y="4943248"/>
-            <a:ext cx="3165054" cy="1200329"/>
-          </a:xfrm>
-          <a:prstGeom prst="rect">
-            <a:avLst/>
-          </a:prstGeom>
-          <a:noFill/>
-        </p:spPr>
-        <p:txBody>
-          <a:bodyPr wrap="square" rtlCol="0">
-            <a:spAutoFit/>
-          </a:bodyPr>
-          <a:lstStyle/>
-          <a:p>
-            <a:r>
-              <a:rPr lang="de-DE" dirty="0"/>
-              <a:t>Wählbare Schriftart für Rendering der Unicode-Symbole (Standard ist Segoe UI Emoji)</a:t>
-            </a:r>
-          </a:p>
-        </p:txBody>
-      </p:sp>
-    </p:spTree>
-    <p:extLst>
-      <p:ext uri="{BB962C8B-B14F-4D97-AF65-F5344CB8AC3E}">
-        <p14:creationId xmlns:p14="http://schemas.microsoft.com/office/powerpoint/2010/main" val="3726683438"/>
-      </p:ext>
-    </p:extLst>
-  </p:cSld>
-  <p:clrMapOvr>
-    <a:masterClrMapping/>
-  </p:clrMapOvr>
-</p:sld>
-</file>
-
-<file path=ppt/slides/slide20.xml><?xml version="1.0" encoding="utf-8"?>
+<file path=ppt/slides/slide22.xml><?xml version="1.0" encoding="utf-8"?>
 <p:sld xmlns:a="http://schemas.openxmlformats.org/drawingml/2006/main" xmlns:r="http://schemas.openxmlformats.org/officeDocument/2006/relationships" xmlns:p="http://schemas.openxmlformats.org/presentationml/2006/main">
   <p:cSld>
     <p:spTree>
@@ -18085,7 +18349,7 @@
 </p:sld>
 </file>
 
-<file path=ppt/slides/slide21.xml><?xml version="1.0" encoding="utf-8"?>
+<file path=ppt/slides/slide23.xml><?xml version="1.0" encoding="utf-8"?>
 <p:sld xmlns:a="http://schemas.openxmlformats.org/drawingml/2006/main" xmlns:r="http://schemas.openxmlformats.org/officeDocument/2006/relationships" xmlns:p="http://schemas.openxmlformats.org/presentationml/2006/main">
   <p:cSld>
     <p:spTree>
@@ -18446,7 +18710,7 @@
 </p:sld>
 </file>
 
-<file path=ppt/slides/slide22.xml><?xml version="1.0" encoding="utf-8"?>
+<file path=ppt/slides/slide24.xml><?xml version="1.0" encoding="utf-8"?>
 <p:sld xmlns:a="http://schemas.openxmlformats.org/drawingml/2006/main" xmlns:r="http://schemas.openxmlformats.org/officeDocument/2006/relationships" xmlns:p="http://schemas.openxmlformats.org/presentationml/2006/main">
   <p:cSld>
     <p:spTree>
@@ -18696,7 +18960,7 @@
 </p:sld>
 </file>
 
-<file path=ppt/slides/slide23.xml><?xml version="1.0" encoding="utf-8"?>
+<file path=ppt/slides/slide25.xml><?xml version="1.0" encoding="utf-8"?>
 <p:sld xmlns:a="http://schemas.openxmlformats.org/drawingml/2006/main" xmlns:r="http://schemas.openxmlformats.org/officeDocument/2006/relationships" xmlns:p="http://schemas.openxmlformats.org/presentationml/2006/main">
   <p:cSld>
     <p:spTree>
@@ -20129,7 +20393,7 @@
 </p:sld>
 </file>
 
-<file path=ppt/slides/slide24.xml><?xml version="1.0" encoding="utf-8"?>
+<file path=ppt/slides/slide26.xml><?xml version="1.0" encoding="utf-8"?>
 <p:sld xmlns:a="http://schemas.openxmlformats.org/drawingml/2006/main" xmlns:r="http://schemas.openxmlformats.org/officeDocument/2006/relationships" xmlns:p="http://schemas.openxmlformats.org/presentationml/2006/main">
   <p:cSld>
     <p:spTree>
@@ -22663,7 +22927,7 @@
 </p:sld>
 </file>
 
-<file path=ppt/slides/slide25.xml><?xml version="1.0" encoding="utf-8"?>
+<file path=ppt/slides/slide27.xml><?xml version="1.0" encoding="utf-8"?>
 <p:sld xmlns:a="http://schemas.openxmlformats.org/drawingml/2006/main" xmlns:r="http://schemas.openxmlformats.org/officeDocument/2006/relationships" xmlns:p="http://schemas.openxmlformats.org/presentationml/2006/main">
   <p:cSld>
     <p:spTree>
@@ -24187,7 +24451,7 @@
 </p:sld>
 </file>
 
-<file path=ppt/slides/slide26.xml><?xml version="1.0" encoding="utf-8"?>
+<file path=ppt/slides/slide28.xml><?xml version="1.0" encoding="utf-8"?>
 <p:sld xmlns:a="http://schemas.openxmlformats.org/drawingml/2006/main" xmlns:r="http://schemas.openxmlformats.org/officeDocument/2006/relationships" xmlns:p="http://schemas.openxmlformats.org/presentationml/2006/main">
   <p:cSld>
     <p:spTree>
@@ -24698,7 +24962,7 @@
 </p:sld>
 </file>
 
-<file path=ppt/slides/slide27.xml><?xml version="1.0" encoding="utf-8"?>
+<file path=ppt/slides/slide29.xml><?xml version="1.0" encoding="utf-8"?>
 <p:sld xmlns:a="http://schemas.openxmlformats.org/drawingml/2006/main" xmlns:r="http://schemas.openxmlformats.org/officeDocument/2006/relationships" xmlns:p="http://schemas.openxmlformats.org/presentationml/2006/main">
   <p:cSld>
     <p:spTree>
@@ -25387,7 +25651,276 @@
 </p:sld>
 </file>
 
-<file path=ppt/slides/slide28.xml><?xml version="1.0" encoding="utf-8"?>
+<file path=ppt/slides/slide3.xml><?xml version="1.0" encoding="utf-8"?>
+<p:sld xmlns:a="http://schemas.openxmlformats.org/drawingml/2006/main" xmlns:r="http://schemas.openxmlformats.org/officeDocument/2006/relationships" xmlns:p="http://schemas.openxmlformats.org/presentationml/2006/main">
+  <p:cSld>
+    <p:spTree>
+      <p:nvGrpSpPr>
+        <p:cNvPr id="1" name="">
+          <a:extLst>
+            <a:ext uri="{FF2B5EF4-FFF2-40B4-BE49-F238E27FC236}">
+              <a16:creationId xmlns:a16="http://schemas.microsoft.com/office/drawing/2014/main" id="{5C68B313-D615-6EF2-F717-0C169B64A989}"/>
+            </a:ext>
+          </a:extLst>
+        </p:cNvPr>
+        <p:cNvGrpSpPr/>
+        <p:nvPr/>
+      </p:nvGrpSpPr>
+      <p:grpSpPr>
+        <a:xfrm>
+          <a:off x="0" y="0"/>
+          <a:ext cx="0" cy="0"/>
+          <a:chOff x="0" y="0"/>
+          <a:chExt cx="0" cy="0"/>
+        </a:xfrm>
+      </p:grpSpPr>
+      <p:graphicFrame>
+        <p:nvGraphicFramePr>
+          <p:cNvPr id="3" name="Objekt 2" hidden="1">
+            <a:extLst>
+              <a:ext uri="{FF2B5EF4-FFF2-40B4-BE49-F238E27FC236}">
+                <a16:creationId xmlns:a16="http://schemas.microsoft.com/office/drawing/2014/main" id="{074D1BBD-4567-C640-2103-1D143C407921}"/>
+              </a:ext>
+            </a:extLst>
+          </p:cNvPr>
+          <p:cNvGraphicFramePr>
+            <a:graphicFrameLocks noChangeAspect="1"/>
+          </p:cNvGraphicFramePr>
+          <p:nvPr>
+            <p:custDataLst>
+              <p:tags r:id="rId1"/>
+            </p:custDataLst>
+          </p:nvPr>
+        </p:nvGraphicFramePr>
+        <p:xfrm>
+          <a:off x="1588" y="1588"/>
+          <a:ext cx="1588" cy="1588"/>
+        </p:xfrm>
+        <a:graphic>
+          <a:graphicData uri="http://schemas.openxmlformats.org/presentationml/2006/ole">
+            <mc:AlternateContent xmlns:mc="http://schemas.openxmlformats.org/markup-compatibility/2006">
+              <mc:Choice xmlns:v="urn:schemas-microsoft-com:vml" Requires="v">
+                <p:oleObj name="think-cell Folie" r:id="rId4" imgW="526" imgH="526" progId="TCLayout.ActiveDocument.1">
+                  <p:embed/>
+                </p:oleObj>
+              </mc:Choice>
+              <mc:Fallback>
+                <p:oleObj name="think-cell Folie" r:id="rId4" imgW="526" imgH="526" progId="TCLayout.ActiveDocument.1">
+                  <p:embed/>
+                  <p:pic>
+                    <p:nvPicPr>
+                      <p:cNvPr id="3" name="Objekt 2" hidden="1">
+                        <a:extLst>
+                          <a:ext uri="{FF2B5EF4-FFF2-40B4-BE49-F238E27FC236}">
+                            <a16:creationId xmlns:a16="http://schemas.microsoft.com/office/drawing/2014/main" id="{2A5AE5A0-7D28-9336-300F-2720E370263C}"/>
+                          </a:ext>
+                        </a:extLst>
+                      </p:cNvPr>
+                      <p:cNvPicPr/>
+                      <p:nvPr/>
+                    </p:nvPicPr>
+                    <p:blipFill>
+                      <a:blip r:embed="rId5"/>
+                      <a:stretch>
+                        <a:fillRect/>
+                      </a:stretch>
+                    </p:blipFill>
+                    <p:spPr>
+                      <a:xfrm>
+                        <a:off x="1588" y="1588"/>
+                        <a:ext cx="1588" cy="1588"/>
+                      </a:xfrm>
+                      <a:prstGeom prst="rect">
+                        <a:avLst/>
+                      </a:prstGeom>
+                    </p:spPr>
+                  </p:pic>
+                </p:oleObj>
+              </mc:Fallback>
+            </mc:AlternateContent>
+          </a:graphicData>
+        </a:graphic>
+      </p:graphicFrame>
+      <p:sp>
+        <p:nvSpPr>
+          <p:cNvPr id="2" name="Rechteck 1" hidden="1">
+            <a:extLst>
+              <a:ext uri="{FF2B5EF4-FFF2-40B4-BE49-F238E27FC236}">
+                <a16:creationId xmlns:a16="http://schemas.microsoft.com/office/drawing/2014/main" id="{DFEDCEB6-E445-5815-7253-0AAA86E23E44}"/>
+              </a:ext>
+            </a:extLst>
+          </p:cNvPr>
+          <p:cNvSpPr/>
+          <p:nvPr>
+            <p:custDataLst>
+              <p:tags r:id="rId2"/>
+            </p:custDataLst>
+          </p:nvPr>
+        </p:nvSpPr>
+        <p:spPr>
+          <a:xfrm>
+            <a:off x="0" y="0"/>
+            <a:ext cx="158750" cy="158750"/>
+          </a:xfrm>
+          <a:prstGeom prst="rect">
+            <a:avLst/>
+          </a:prstGeom>
+        </p:spPr>
+        <p:style>
+          <a:lnRef idx="2">
+            <a:schemeClr val="accent1">
+              <a:shade val="50000"/>
+            </a:schemeClr>
+          </a:lnRef>
+          <a:fillRef idx="1">
+            <a:schemeClr val="accent1"/>
+          </a:fillRef>
+          <a:effectRef idx="0">
+            <a:schemeClr val="accent1"/>
+          </a:effectRef>
+          <a:fontRef idx="minor">
+            <a:schemeClr val="lt1"/>
+          </a:fontRef>
+        </p:style>
+        <p:txBody>
+          <a:bodyPr wrap="none" lIns="0" tIns="0" rIns="0" bIns="0" numCol="1" spcCol="0" rtlCol="0" anchor="ctr" anchorCtr="0">
+            <a:noAutofit/>
+          </a:bodyPr>
+          <a:lstStyle/>
+          <a:p>
+            <a:pPr algn="ctr"/>
+            <a:endParaRPr lang="de-DE" sz="6000" dirty="0">
+              <a:latin typeface="Consolas" panose="020B0609020204030204" pitchFamily="49" charset="0"/>
+              <a:ea typeface="+mj-ea"/>
+              <a:cs typeface="+mj-cs"/>
+              <a:sym typeface="Consolas" panose="020B0609020204030204" pitchFamily="49" charset="0"/>
+            </a:endParaRPr>
+          </a:p>
+        </p:txBody>
+      </p:sp>
+      <p:sp>
+        <p:nvSpPr>
+          <p:cNvPr id="4" name="Titel 3">
+            <a:extLst>
+              <a:ext uri="{FF2B5EF4-FFF2-40B4-BE49-F238E27FC236}">
+                <a16:creationId xmlns:a16="http://schemas.microsoft.com/office/drawing/2014/main" id="{553BE662-0194-B55C-C921-39902C675005}"/>
+              </a:ext>
+            </a:extLst>
+          </p:cNvPr>
+          <p:cNvSpPr>
+            <a:spLocks noGrp="1"/>
+          </p:cNvSpPr>
+          <p:nvPr>
+            <p:ph type="ctrTitle"/>
+          </p:nvPr>
+        </p:nvSpPr>
+        <p:spPr>
+          <a:xfrm>
+            <a:off x="1524000" y="1122363"/>
+            <a:ext cx="9144000" cy="2387600"/>
+          </a:xfrm>
+        </p:spPr>
+        <p:txBody>
+          <a:bodyPr vert="horz"/>
+          <a:lstStyle/>
+          <a:p>
+            <a:r>
+              <a:rPr lang="de-DE" dirty="0"/>
+              <a:t>BKT v3.0.2</a:t>
+            </a:r>
+          </a:p>
+        </p:txBody>
+      </p:sp>
+      <p:pic>
+        <p:nvPicPr>
+          <p:cNvPr id="7" name="Grafik 6">
+            <a:extLst>
+              <a:ext uri="{FF2B5EF4-FFF2-40B4-BE49-F238E27FC236}">
+                <a16:creationId xmlns:a16="http://schemas.microsoft.com/office/drawing/2014/main" id="{399C4CEB-6024-2244-6F54-0D4F6377B360}"/>
+              </a:ext>
+            </a:extLst>
+          </p:cNvPr>
+          <p:cNvPicPr>
+            <a:picLocks noChangeAspect="1"/>
+          </p:cNvPicPr>
+          <p:nvPr/>
+        </p:nvPicPr>
+        <p:blipFill>
+          <a:blip r:embed="rId6" cstate="hqprint">
+            <a:extLst>
+              <a:ext uri="{28A0092B-C50C-407E-A947-70E740481C1C}">
+                <a14:useLocalDpi xmlns:a14="http://schemas.microsoft.com/office/drawing/2010/main" val="0"/>
+              </a:ext>
+            </a:extLst>
+          </a:blip>
+          <a:stretch>
+            <a:fillRect/>
+          </a:stretch>
+        </p:blipFill>
+        <p:spPr>
+          <a:xfrm>
+            <a:off x="5362575" y="849313"/>
+            <a:ext cx="1466850" cy="1466850"/>
+          </a:xfrm>
+          <a:prstGeom prst="rect">
+            <a:avLst/>
+          </a:prstGeom>
+        </p:spPr>
+      </p:pic>
+      <p:sp>
+        <p:nvSpPr>
+          <p:cNvPr id="6" name="Rechteck 5">
+            <a:extLst>
+              <a:ext uri="{FF2B5EF4-FFF2-40B4-BE49-F238E27FC236}">
+                <a16:creationId xmlns:a16="http://schemas.microsoft.com/office/drawing/2014/main" id="{11AF48A0-10C6-8C95-C1A7-E41E86FAFF96}"/>
+              </a:ext>
+            </a:extLst>
+          </p:cNvPr>
+          <p:cNvSpPr/>
+          <p:nvPr/>
+        </p:nvSpPr>
+        <p:spPr>
+          <a:xfrm>
+            <a:off x="3473616" y="3783013"/>
+            <a:ext cx="5244769" cy="369332"/>
+          </a:xfrm>
+          <a:prstGeom prst="rect">
+            <a:avLst/>
+          </a:prstGeom>
+        </p:spPr>
+        <p:txBody>
+          <a:bodyPr wrap="none">
+            <a:spAutoFit/>
+          </a:bodyPr>
+          <a:lstStyle/>
+          <a:p>
+            <a:r>
+              <a:rPr lang="de-DE" dirty="0">
+                <a:hlinkClick r:id="rId7"/>
+              </a:rPr>
+              <a:t>https://www.bkt-toolbox.de/overview.html</a:t>
+            </a:r>
+            <a:r>
+              <a:rPr lang="de-DE" dirty="0"/>
+              <a:t> </a:t>
+            </a:r>
+          </a:p>
+        </p:txBody>
+      </p:sp>
+    </p:spTree>
+    <p:extLst>
+      <p:ext uri="{BB962C8B-B14F-4D97-AF65-F5344CB8AC3E}">
+        <p14:creationId xmlns:p14="http://schemas.microsoft.com/office/powerpoint/2010/main" val="1741877162"/>
+      </p:ext>
+    </p:extLst>
+  </p:cSld>
+  <p:clrMapOvr>
+    <a:masterClrMapping/>
+  </p:clrMapOvr>
+</p:sld>
+</file>
+
+<file path=ppt/slides/slide30.xml><?xml version="1.0" encoding="utf-8"?>
 <p:sld xmlns:a="http://schemas.openxmlformats.org/drawingml/2006/main" xmlns:r="http://schemas.openxmlformats.org/officeDocument/2006/relationships" xmlns:p="http://schemas.openxmlformats.org/presentationml/2006/main">
   <p:cSld>
     <p:spTree>
@@ -25635,7 +26168,7 @@
 </p:sld>
 </file>
 
-<file path=ppt/slides/slide29.xml><?xml version="1.0" encoding="utf-8"?>
+<file path=ppt/slides/slide31.xml><?xml version="1.0" encoding="utf-8"?>
 <p:sld xmlns:a="http://schemas.openxmlformats.org/drawingml/2006/main" xmlns:r="http://schemas.openxmlformats.org/officeDocument/2006/relationships" xmlns:p="http://schemas.openxmlformats.org/presentationml/2006/main">
   <p:cSld>
     <p:spTree>
@@ -26252,1538 +26785,7 @@
 </p:sld>
 </file>
 
-<file path=ppt/slides/slide3.xml><?xml version="1.0" encoding="utf-8"?>
-<p:sld xmlns:a="http://schemas.openxmlformats.org/drawingml/2006/main" xmlns:r="http://schemas.openxmlformats.org/officeDocument/2006/relationships" xmlns:p="http://schemas.openxmlformats.org/presentationml/2006/main">
-  <p:cSld>
-    <p:spTree>
-      <p:nvGrpSpPr>
-        <p:cNvPr id="1" name=""/>
-        <p:cNvGrpSpPr/>
-        <p:nvPr/>
-      </p:nvGrpSpPr>
-      <p:grpSpPr>
-        <a:xfrm>
-          <a:off x="0" y="0"/>
-          <a:ext cx="0" cy="0"/>
-          <a:chOff x="0" y="0"/>
-          <a:chExt cx="0" cy="0"/>
-        </a:xfrm>
-      </p:grpSpPr>
-      <p:graphicFrame>
-        <p:nvGraphicFramePr>
-          <p:cNvPr id="14" name="think-cell data - do not delete" hidden="1">
-            <a:extLst>
-              <a:ext uri="{FF2B5EF4-FFF2-40B4-BE49-F238E27FC236}">
-                <a16:creationId xmlns:a16="http://schemas.microsoft.com/office/drawing/2014/main" id="{2CA4BE77-C99B-A484-EF69-C5E20B814EDF}"/>
-              </a:ext>
-            </a:extLst>
-          </p:cNvPr>
-          <p:cNvGraphicFramePr>
-            <a:graphicFrameLocks noChangeAspect="1"/>
-          </p:cNvGraphicFramePr>
-          <p:nvPr>
-            <p:custDataLst>
-              <p:tags r:id="rId1"/>
-            </p:custDataLst>
-            <p:extLst>
-              <p:ext uri="{D42A27DB-BD31-4B8C-83A1-F6EECF244321}">
-                <p14:modId xmlns:p14="http://schemas.microsoft.com/office/powerpoint/2010/main" val="2712584616"/>
-              </p:ext>
-            </p:extLst>
-          </p:nvPr>
-        </p:nvGraphicFramePr>
-        <p:xfrm>
-          <a:off x="1588" y="1588"/>
-          <a:ext cx="1588" cy="1588"/>
-        </p:xfrm>
-        <a:graphic>
-          <a:graphicData uri="http://schemas.openxmlformats.org/presentationml/2006/ole">
-            <mc:AlternateContent xmlns:mc="http://schemas.openxmlformats.org/markup-compatibility/2006">
-              <mc:Choice xmlns:v="urn:schemas-microsoft-com:vml" Requires="v">
-                <p:oleObj name="think-cell Folie" r:id="rId3" imgW="540" imgH="540" progId="TCLayout.ActiveDocument.1">
-                  <p:embed/>
-                </p:oleObj>
-              </mc:Choice>
-              <mc:Fallback>
-                <p:oleObj name="think-cell Folie" r:id="rId3" imgW="540" imgH="540" progId="TCLayout.ActiveDocument.1">
-                  <p:embed/>
-                  <p:pic>
-                    <p:nvPicPr>
-                      <p:cNvPr id="0" name=""/>
-                      <p:cNvPicPr/>
-                      <p:nvPr/>
-                    </p:nvPicPr>
-                    <p:blipFill>
-                      <a:blip r:embed="rId4"/>
-                      <a:stretch>
-                        <a:fillRect/>
-                      </a:stretch>
-                    </p:blipFill>
-                    <p:spPr>
-                      <a:xfrm>
-                        <a:off x="1588" y="1588"/>
-                        <a:ext cx="1588" cy="1588"/>
-                      </a:xfrm>
-                      <a:prstGeom prst="rect">
-                        <a:avLst/>
-                      </a:prstGeom>
-                    </p:spPr>
-                  </p:pic>
-                </p:oleObj>
-              </mc:Fallback>
-            </mc:AlternateContent>
-          </a:graphicData>
-        </a:graphic>
-      </p:graphicFrame>
-      <p:sp>
-        <p:nvSpPr>
-          <p:cNvPr id="2" name="Titel 1">
-            <a:extLst>
-              <a:ext uri="{FF2B5EF4-FFF2-40B4-BE49-F238E27FC236}">
-                <a16:creationId xmlns:a16="http://schemas.microsoft.com/office/drawing/2014/main" id="{7B746243-3BAC-B12A-47F8-882032E76405}"/>
-              </a:ext>
-            </a:extLst>
-          </p:cNvPr>
-          <p:cNvSpPr>
-            <a:spLocks noGrp="1"/>
-          </p:cNvSpPr>
-          <p:nvPr>
-            <p:ph type="title"/>
-          </p:nvPr>
-        </p:nvSpPr>
-        <p:spPr/>
-        <p:txBody>
-          <a:bodyPr vert="horz"/>
-          <a:lstStyle/>
-          <a:p>
-            <a:r>
-              <a:rPr lang="de-DE"/>
-              <a:t>Funktion Auto-Gruppieren</a:t>
-            </a:r>
-            <a:endParaRPr lang="de-DE" dirty="0"/>
-          </a:p>
-        </p:txBody>
-      </p:sp>
-      <p:sp>
-        <p:nvSpPr>
-          <p:cNvPr id="4" name="Rechteck 3">
-            <a:extLst>
-              <a:ext uri="{FF2B5EF4-FFF2-40B4-BE49-F238E27FC236}">
-                <a16:creationId xmlns:a16="http://schemas.microsoft.com/office/drawing/2014/main" id="{DCBD4C88-83B5-C7AF-59CA-43C2C07D834C}"/>
-              </a:ext>
-            </a:extLst>
-          </p:cNvPr>
-          <p:cNvSpPr/>
-          <p:nvPr/>
-        </p:nvSpPr>
-        <p:spPr>
-          <a:xfrm>
-            <a:off x="4966447" y="1546411"/>
-            <a:ext cx="2259105" cy="1882589"/>
-          </a:xfrm>
-          <a:prstGeom prst="rect">
-            <a:avLst/>
-          </a:prstGeom>
-        </p:spPr>
-        <p:style>
-          <a:lnRef idx="2">
-            <a:schemeClr val="accent1">
-              <a:shade val="15000"/>
-            </a:schemeClr>
-          </a:lnRef>
-          <a:fillRef idx="1">
-            <a:schemeClr val="accent1"/>
-          </a:fillRef>
-          <a:effectRef idx="0">
-            <a:schemeClr val="accent1"/>
-          </a:effectRef>
-          <a:fontRef idx="minor">
-            <a:schemeClr val="lt1"/>
-          </a:fontRef>
-        </p:style>
-        <p:txBody>
-          <a:bodyPr rtlCol="0" anchor="ctr"/>
-          <a:lstStyle/>
-          <a:p>
-            <a:pPr algn="ctr"/>
-            <a:endParaRPr lang="de-DE" dirty="0"/>
-          </a:p>
-        </p:txBody>
-      </p:sp>
-      <p:sp>
-        <p:nvSpPr>
-          <p:cNvPr id="6" name="Rechteck 5">
-            <a:extLst>
-              <a:ext uri="{FF2B5EF4-FFF2-40B4-BE49-F238E27FC236}">
-                <a16:creationId xmlns:a16="http://schemas.microsoft.com/office/drawing/2014/main" id="{FD3BE575-CF60-189C-36E3-9BBB0AE4E725}"/>
-              </a:ext>
-            </a:extLst>
-          </p:cNvPr>
-          <p:cNvSpPr/>
-          <p:nvPr/>
-        </p:nvSpPr>
-        <p:spPr>
-          <a:xfrm>
-            <a:off x="5118849" y="1734670"/>
-            <a:ext cx="1954304" cy="394447"/>
-          </a:xfrm>
-          <a:prstGeom prst="rect">
-            <a:avLst/>
-          </a:prstGeom>
-          <a:solidFill>
-            <a:schemeClr val="tx2"/>
-          </a:solidFill>
-        </p:spPr>
-        <p:style>
-          <a:lnRef idx="2">
-            <a:schemeClr val="accent1">
-              <a:shade val="15000"/>
-            </a:schemeClr>
-          </a:lnRef>
-          <a:fillRef idx="1">
-            <a:schemeClr val="accent1"/>
-          </a:fillRef>
-          <a:effectRef idx="0">
-            <a:schemeClr val="accent1"/>
-          </a:effectRef>
-          <a:fontRef idx="minor">
-            <a:schemeClr val="lt1"/>
-          </a:fontRef>
-        </p:style>
-        <p:txBody>
-          <a:bodyPr rtlCol="0" anchor="ctr"/>
-          <a:lstStyle/>
-          <a:p>
-            <a:pPr algn="ctr"/>
-            <a:r>
-              <a:rPr lang="de-DE"/>
-              <a:t>A</a:t>
-            </a:r>
-            <a:endParaRPr lang="de-DE" dirty="0"/>
-          </a:p>
-        </p:txBody>
-      </p:sp>
-      <p:sp>
-        <p:nvSpPr>
-          <p:cNvPr id="8" name="Rechteck 7">
-            <a:extLst>
-              <a:ext uri="{FF2B5EF4-FFF2-40B4-BE49-F238E27FC236}">
-                <a16:creationId xmlns:a16="http://schemas.microsoft.com/office/drawing/2014/main" id="{880F4995-031B-030B-20EA-EA4CEC091AE5}"/>
-              </a:ext>
-            </a:extLst>
-          </p:cNvPr>
-          <p:cNvSpPr/>
-          <p:nvPr/>
-        </p:nvSpPr>
-        <p:spPr>
-          <a:xfrm>
-            <a:off x="5118849" y="2320737"/>
-            <a:ext cx="1954304" cy="394447"/>
-          </a:xfrm>
-          <a:prstGeom prst="rect">
-            <a:avLst/>
-          </a:prstGeom>
-          <a:solidFill>
-            <a:schemeClr val="tx2"/>
-          </a:solidFill>
-        </p:spPr>
-        <p:style>
-          <a:lnRef idx="2">
-            <a:schemeClr val="accent1">
-              <a:shade val="15000"/>
-            </a:schemeClr>
-          </a:lnRef>
-          <a:fillRef idx="1">
-            <a:schemeClr val="accent1"/>
-          </a:fillRef>
-          <a:effectRef idx="0">
-            <a:schemeClr val="accent1"/>
-          </a:effectRef>
-          <a:fontRef idx="minor">
-            <a:schemeClr val="lt1"/>
-          </a:fontRef>
-        </p:style>
-        <p:txBody>
-          <a:bodyPr rtlCol="0" anchor="ctr"/>
-          <a:lstStyle/>
-          <a:p>
-            <a:pPr algn="ctr"/>
-            <a:r>
-              <a:rPr lang="de-DE"/>
-              <a:t>B</a:t>
-            </a:r>
-            <a:endParaRPr lang="de-DE" dirty="0"/>
-          </a:p>
-        </p:txBody>
-      </p:sp>
-      <p:sp>
-        <p:nvSpPr>
-          <p:cNvPr id="9" name="Rechteck 8">
-            <a:extLst>
-              <a:ext uri="{FF2B5EF4-FFF2-40B4-BE49-F238E27FC236}">
-                <a16:creationId xmlns:a16="http://schemas.microsoft.com/office/drawing/2014/main" id="{B5A67D58-CFB1-434D-C153-046912B98971}"/>
-              </a:ext>
-            </a:extLst>
-          </p:cNvPr>
-          <p:cNvSpPr/>
-          <p:nvPr/>
-        </p:nvSpPr>
-        <p:spPr>
-          <a:xfrm>
-            <a:off x="5118849" y="2906805"/>
-            <a:ext cx="1954304" cy="394447"/>
-          </a:xfrm>
-          <a:prstGeom prst="rect">
-            <a:avLst/>
-          </a:prstGeom>
-          <a:solidFill>
-            <a:schemeClr val="tx2"/>
-          </a:solidFill>
-        </p:spPr>
-        <p:style>
-          <a:lnRef idx="2">
-            <a:schemeClr val="accent1">
-              <a:shade val="15000"/>
-            </a:schemeClr>
-          </a:lnRef>
-          <a:fillRef idx="1">
-            <a:schemeClr val="accent1"/>
-          </a:fillRef>
-          <a:effectRef idx="0">
-            <a:schemeClr val="accent1"/>
-          </a:effectRef>
-          <a:fontRef idx="minor">
-            <a:schemeClr val="lt1"/>
-          </a:fontRef>
-        </p:style>
-        <p:txBody>
-          <a:bodyPr rtlCol="0" anchor="ctr"/>
-          <a:lstStyle/>
-          <a:p>
-            <a:pPr algn="ctr"/>
-            <a:r>
-              <a:rPr lang="de-DE"/>
-              <a:t>C</a:t>
-            </a:r>
-            <a:endParaRPr lang="de-DE" dirty="0"/>
-          </a:p>
-        </p:txBody>
-      </p:sp>
-      <p:sp>
-        <p:nvSpPr>
-          <p:cNvPr id="5" name="Rechteck 4">
-            <a:extLst>
-              <a:ext uri="{FF2B5EF4-FFF2-40B4-BE49-F238E27FC236}">
-                <a16:creationId xmlns:a16="http://schemas.microsoft.com/office/drawing/2014/main" id="{AB894D3B-538A-438D-53A8-1B8B72B488BB}"/>
-              </a:ext>
-            </a:extLst>
-          </p:cNvPr>
-          <p:cNvSpPr/>
-          <p:nvPr/>
-        </p:nvSpPr>
-        <p:spPr>
-          <a:xfrm>
-            <a:off x="7566212" y="1546412"/>
-            <a:ext cx="1949824" cy="730624"/>
-          </a:xfrm>
-          <a:prstGeom prst="rect">
-            <a:avLst/>
-          </a:prstGeom>
-        </p:spPr>
-        <p:style>
-          <a:lnRef idx="2">
-            <a:schemeClr val="accent1">
-              <a:shade val="15000"/>
-            </a:schemeClr>
-          </a:lnRef>
-          <a:fillRef idx="1">
-            <a:schemeClr val="accent1"/>
-          </a:fillRef>
-          <a:effectRef idx="0">
-            <a:schemeClr val="accent1"/>
-          </a:effectRef>
-          <a:fontRef idx="minor">
-            <a:schemeClr val="lt1"/>
-          </a:fontRef>
-        </p:style>
-        <p:txBody>
-          <a:bodyPr rtlCol="0" anchor="ctr"/>
-          <a:lstStyle/>
-          <a:p>
-            <a:pPr algn="ctr"/>
-            <a:endParaRPr lang="de-DE" dirty="0"/>
-          </a:p>
-        </p:txBody>
-      </p:sp>
-      <p:sp>
-        <p:nvSpPr>
-          <p:cNvPr id="7" name="Rechteck 6">
-            <a:extLst>
-              <a:ext uri="{FF2B5EF4-FFF2-40B4-BE49-F238E27FC236}">
-                <a16:creationId xmlns:a16="http://schemas.microsoft.com/office/drawing/2014/main" id="{2A3B6802-3FFD-9DC1-8BAC-200B6CE74278}"/>
-              </a:ext>
-            </a:extLst>
-          </p:cNvPr>
-          <p:cNvSpPr/>
-          <p:nvPr/>
-        </p:nvSpPr>
-        <p:spPr>
-          <a:xfrm>
-            <a:off x="7566212" y="2698376"/>
-            <a:ext cx="1949824" cy="730624"/>
-          </a:xfrm>
-          <a:prstGeom prst="rect">
-            <a:avLst/>
-          </a:prstGeom>
-        </p:spPr>
-        <p:style>
-          <a:lnRef idx="2">
-            <a:schemeClr val="accent1">
-              <a:shade val="15000"/>
-            </a:schemeClr>
-          </a:lnRef>
-          <a:fillRef idx="1">
-            <a:schemeClr val="accent1"/>
-          </a:fillRef>
-          <a:effectRef idx="0">
-            <a:schemeClr val="accent1"/>
-          </a:effectRef>
-          <a:fontRef idx="minor">
-            <a:schemeClr val="lt1"/>
-          </a:fontRef>
-        </p:style>
-        <p:txBody>
-          <a:bodyPr rtlCol="0" anchor="ctr"/>
-          <a:lstStyle/>
-          <a:p>
-            <a:pPr algn="ctr"/>
-            <a:endParaRPr lang="de-DE" dirty="0"/>
-          </a:p>
-        </p:txBody>
-      </p:sp>
-      <p:sp>
-        <p:nvSpPr>
-          <p:cNvPr id="10" name="Rechteck 9">
-            <a:extLst>
-              <a:ext uri="{FF2B5EF4-FFF2-40B4-BE49-F238E27FC236}">
-                <a16:creationId xmlns:a16="http://schemas.microsoft.com/office/drawing/2014/main" id="{D657ADDD-4340-6D2F-A2A4-3E3F5826C89B}"/>
-              </a:ext>
-            </a:extLst>
-          </p:cNvPr>
-          <p:cNvSpPr/>
-          <p:nvPr/>
-        </p:nvSpPr>
-        <p:spPr>
-          <a:xfrm>
-            <a:off x="7696616" y="1597959"/>
-            <a:ext cx="794831" cy="611841"/>
-          </a:xfrm>
-          <a:prstGeom prst="rect">
-            <a:avLst/>
-          </a:prstGeom>
-          <a:solidFill>
-            <a:schemeClr val="tx2"/>
-          </a:solidFill>
-        </p:spPr>
-        <p:style>
-          <a:lnRef idx="2">
-            <a:schemeClr val="accent1">
-              <a:shade val="15000"/>
-            </a:schemeClr>
-          </a:lnRef>
-          <a:fillRef idx="1">
-            <a:schemeClr val="accent1"/>
-          </a:fillRef>
-          <a:effectRef idx="0">
-            <a:schemeClr val="accent1"/>
-          </a:effectRef>
-          <a:fontRef idx="minor">
-            <a:schemeClr val="lt1"/>
-          </a:fontRef>
-        </p:style>
-        <p:txBody>
-          <a:bodyPr rtlCol="0" anchor="ctr"/>
-          <a:lstStyle/>
-          <a:p>
-            <a:pPr algn="ctr"/>
-            <a:r>
-              <a:rPr lang="de-DE"/>
-              <a:t>1</a:t>
-            </a:r>
-            <a:endParaRPr lang="de-DE" dirty="0"/>
-          </a:p>
-        </p:txBody>
-      </p:sp>
-      <p:sp>
-        <p:nvSpPr>
-          <p:cNvPr id="11" name="Rechteck 10">
-            <a:extLst>
-              <a:ext uri="{FF2B5EF4-FFF2-40B4-BE49-F238E27FC236}">
-                <a16:creationId xmlns:a16="http://schemas.microsoft.com/office/drawing/2014/main" id="{76A23486-2920-9BEC-5B79-30F4A9472250}"/>
-              </a:ext>
-            </a:extLst>
-          </p:cNvPr>
-          <p:cNvSpPr/>
-          <p:nvPr/>
-        </p:nvSpPr>
-        <p:spPr>
-          <a:xfrm>
-            <a:off x="8578382" y="1597959"/>
-            <a:ext cx="794831" cy="611841"/>
-          </a:xfrm>
-          <a:prstGeom prst="rect">
-            <a:avLst/>
-          </a:prstGeom>
-          <a:solidFill>
-            <a:schemeClr val="tx2"/>
-          </a:solidFill>
-        </p:spPr>
-        <p:style>
-          <a:lnRef idx="2">
-            <a:schemeClr val="accent1">
-              <a:shade val="15000"/>
-            </a:schemeClr>
-          </a:lnRef>
-          <a:fillRef idx="1">
-            <a:schemeClr val="accent1"/>
-          </a:fillRef>
-          <a:effectRef idx="0">
-            <a:schemeClr val="accent1"/>
-          </a:effectRef>
-          <a:fontRef idx="minor">
-            <a:schemeClr val="lt1"/>
-          </a:fontRef>
-        </p:style>
-        <p:txBody>
-          <a:bodyPr rtlCol="0" anchor="ctr"/>
-          <a:lstStyle/>
-          <a:p>
-            <a:pPr algn="ctr"/>
-            <a:r>
-              <a:rPr lang="de-DE"/>
-              <a:t>2</a:t>
-            </a:r>
-            <a:endParaRPr lang="de-DE" dirty="0"/>
-          </a:p>
-        </p:txBody>
-      </p:sp>
-      <p:sp>
-        <p:nvSpPr>
-          <p:cNvPr id="12" name="Rechteck 11">
-            <a:extLst>
-              <a:ext uri="{FF2B5EF4-FFF2-40B4-BE49-F238E27FC236}">
-                <a16:creationId xmlns:a16="http://schemas.microsoft.com/office/drawing/2014/main" id="{ADC31D66-FF25-0279-99E4-B51289C4E766}"/>
-              </a:ext>
-            </a:extLst>
-          </p:cNvPr>
-          <p:cNvSpPr/>
-          <p:nvPr/>
-        </p:nvSpPr>
-        <p:spPr>
-          <a:xfrm>
-            <a:off x="7696616" y="2751044"/>
-            <a:ext cx="794831" cy="611841"/>
-          </a:xfrm>
-          <a:prstGeom prst="rect">
-            <a:avLst/>
-          </a:prstGeom>
-          <a:solidFill>
-            <a:schemeClr val="tx2"/>
-          </a:solidFill>
-        </p:spPr>
-        <p:style>
-          <a:lnRef idx="2">
-            <a:schemeClr val="accent1">
-              <a:shade val="15000"/>
-            </a:schemeClr>
-          </a:lnRef>
-          <a:fillRef idx="1">
-            <a:schemeClr val="accent1"/>
-          </a:fillRef>
-          <a:effectRef idx="0">
-            <a:schemeClr val="accent1"/>
-          </a:effectRef>
-          <a:fontRef idx="minor">
-            <a:schemeClr val="lt1"/>
-          </a:fontRef>
-        </p:style>
-        <p:txBody>
-          <a:bodyPr rtlCol="0" anchor="ctr"/>
-          <a:lstStyle/>
-          <a:p>
-            <a:pPr algn="ctr"/>
-            <a:r>
-              <a:rPr lang="de-DE"/>
-              <a:t>X</a:t>
-            </a:r>
-            <a:endParaRPr lang="de-DE" dirty="0"/>
-          </a:p>
-        </p:txBody>
-      </p:sp>
-      <p:sp>
-        <p:nvSpPr>
-          <p:cNvPr id="13" name="Rechteck 12">
-            <a:extLst>
-              <a:ext uri="{FF2B5EF4-FFF2-40B4-BE49-F238E27FC236}">
-                <a16:creationId xmlns:a16="http://schemas.microsoft.com/office/drawing/2014/main" id="{CDA4C86F-9CA7-6C08-5C0C-A7A12106D250}"/>
-              </a:ext>
-            </a:extLst>
-          </p:cNvPr>
-          <p:cNvSpPr/>
-          <p:nvPr/>
-        </p:nvSpPr>
-        <p:spPr>
-          <a:xfrm>
-            <a:off x="8578382" y="2751044"/>
-            <a:ext cx="794831" cy="611841"/>
-          </a:xfrm>
-          <a:prstGeom prst="rect">
-            <a:avLst/>
-          </a:prstGeom>
-          <a:solidFill>
-            <a:schemeClr val="tx2"/>
-          </a:solidFill>
-        </p:spPr>
-        <p:style>
-          <a:lnRef idx="2">
-            <a:schemeClr val="accent1">
-              <a:shade val="15000"/>
-            </a:schemeClr>
-          </a:lnRef>
-          <a:fillRef idx="1">
-            <a:schemeClr val="accent1"/>
-          </a:fillRef>
-          <a:effectRef idx="0">
-            <a:schemeClr val="accent1"/>
-          </a:effectRef>
-          <a:fontRef idx="minor">
-            <a:schemeClr val="lt1"/>
-          </a:fontRef>
-        </p:style>
-        <p:txBody>
-          <a:bodyPr rtlCol="0" anchor="ctr"/>
-          <a:lstStyle/>
-          <a:p>
-            <a:pPr algn="ctr"/>
-            <a:r>
-              <a:rPr lang="de-DE"/>
-              <a:t>Y</a:t>
-            </a:r>
-            <a:endParaRPr lang="de-DE" dirty="0"/>
-          </a:p>
-        </p:txBody>
-      </p:sp>
-      <p:grpSp>
-        <p:nvGrpSpPr>
-          <p:cNvPr id="33" name="Gruppieren 32">
-            <a:extLst>
-              <a:ext uri="{FF2B5EF4-FFF2-40B4-BE49-F238E27FC236}">
-                <a16:creationId xmlns:a16="http://schemas.microsoft.com/office/drawing/2014/main" id="{7929F89F-858F-0652-D3C8-0FCA61337C5C}"/>
-              </a:ext>
-            </a:extLst>
-          </p:cNvPr>
-          <p:cNvGrpSpPr/>
-          <p:nvPr/>
-        </p:nvGrpSpPr>
-        <p:grpSpPr>
-          <a:xfrm>
-            <a:off x="6804211" y="3993774"/>
-            <a:ext cx="2259105" cy="1882589"/>
-            <a:chOff x="6804211" y="3307976"/>
-            <a:chExt cx="2259105" cy="1882589"/>
-          </a:xfrm>
-        </p:grpSpPr>
-        <p:sp>
-          <p:nvSpPr>
-            <p:cNvPr id="19" name="Rechteck 18">
-              <a:extLst>
-                <a:ext uri="{FF2B5EF4-FFF2-40B4-BE49-F238E27FC236}">
-                  <a16:creationId xmlns:a16="http://schemas.microsoft.com/office/drawing/2014/main" id="{A7639287-0ED7-6C9C-3468-B44393CE345F}"/>
-                </a:ext>
-              </a:extLst>
-            </p:cNvPr>
-            <p:cNvSpPr/>
-            <p:nvPr/>
-          </p:nvSpPr>
-          <p:spPr>
-            <a:xfrm>
-              <a:off x="6804211" y="3307976"/>
-              <a:ext cx="2259105" cy="1882589"/>
-            </a:xfrm>
-            <a:prstGeom prst="rect">
-              <a:avLst/>
-            </a:prstGeom>
-          </p:spPr>
-          <p:style>
-            <a:lnRef idx="2">
-              <a:schemeClr val="accent1">
-                <a:shade val="15000"/>
-              </a:schemeClr>
-            </a:lnRef>
-            <a:fillRef idx="1">
-              <a:schemeClr val="accent1"/>
-            </a:fillRef>
-            <a:effectRef idx="0">
-              <a:schemeClr val="accent1"/>
-            </a:effectRef>
-            <a:fontRef idx="minor">
-              <a:schemeClr val="lt1"/>
-            </a:fontRef>
-          </p:style>
-          <p:txBody>
-            <a:bodyPr rtlCol="0" anchor="ctr"/>
-            <a:lstStyle/>
-            <a:p>
-              <a:pPr algn="ctr"/>
-              <a:endParaRPr lang="de-DE" dirty="0"/>
-            </a:p>
-          </p:txBody>
-        </p:sp>
-        <p:sp>
-          <p:nvSpPr>
-            <p:cNvPr id="20" name="Rechteck 19">
-              <a:extLst>
-                <a:ext uri="{FF2B5EF4-FFF2-40B4-BE49-F238E27FC236}">
-                  <a16:creationId xmlns:a16="http://schemas.microsoft.com/office/drawing/2014/main" id="{2330F30C-2952-C167-4374-378B837C8B3F}"/>
-                </a:ext>
-              </a:extLst>
-            </p:cNvPr>
-            <p:cNvSpPr/>
-            <p:nvPr/>
-          </p:nvSpPr>
-          <p:spPr>
-            <a:xfrm>
-              <a:off x="6956613" y="3496235"/>
-              <a:ext cx="1954304" cy="394447"/>
-            </a:xfrm>
-            <a:prstGeom prst="rect">
-              <a:avLst/>
-            </a:prstGeom>
-            <a:solidFill>
-              <a:schemeClr val="tx2"/>
-            </a:solidFill>
-          </p:spPr>
-          <p:style>
-            <a:lnRef idx="2">
-              <a:schemeClr val="accent1">
-                <a:shade val="15000"/>
-              </a:schemeClr>
-            </a:lnRef>
-            <a:fillRef idx="1">
-              <a:schemeClr val="accent1"/>
-            </a:fillRef>
-            <a:effectRef idx="0">
-              <a:schemeClr val="accent1"/>
-            </a:effectRef>
-            <a:fontRef idx="minor">
-              <a:schemeClr val="lt1"/>
-            </a:fontRef>
-          </p:style>
-          <p:txBody>
-            <a:bodyPr rtlCol="0" anchor="ctr"/>
-            <a:lstStyle/>
-            <a:p>
-              <a:pPr algn="ctr"/>
-              <a:r>
-                <a:rPr lang="de-DE"/>
-                <a:t>A</a:t>
-              </a:r>
-              <a:endParaRPr lang="de-DE" dirty="0"/>
-            </a:p>
-          </p:txBody>
-        </p:sp>
-        <p:sp>
-          <p:nvSpPr>
-            <p:cNvPr id="21" name="Rechteck 20">
-              <a:extLst>
-                <a:ext uri="{FF2B5EF4-FFF2-40B4-BE49-F238E27FC236}">
-                  <a16:creationId xmlns:a16="http://schemas.microsoft.com/office/drawing/2014/main" id="{61E11F0D-5E19-33BC-31C0-4A583B6D4138}"/>
-                </a:ext>
-              </a:extLst>
-            </p:cNvPr>
-            <p:cNvSpPr/>
-            <p:nvPr/>
-          </p:nvSpPr>
-          <p:spPr>
-            <a:xfrm>
-              <a:off x="6956613" y="4082302"/>
-              <a:ext cx="1954304" cy="394447"/>
-            </a:xfrm>
-            <a:prstGeom prst="rect">
-              <a:avLst/>
-            </a:prstGeom>
-            <a:solidFill>
-              <a:schemeClr val="tx2"/>
-            </a:solidFill>
-          </p:spPr>
-          <p:style>
-            <a:lnRef idx="2">
-              <a:schemeClr val="accent1">
-                <a:shade val="15000"/>
-              </a:schemeClr>
-            </a:lnRef>
-            <a:fillRef idx="1">
-              <a:schemeClr val="accent1"/>
-            </a:fillRef>
-            <a:effectRef idx="0">
-              <a:schemeClr val="accent1"/>
-            </a:effectRef>
-            <a:fontRef idx="minor">
-              <a:schemeClr val="lt1"/>
-            </a:fontRef>
-          </p:style>
-          <p:txBody>
-            <a:bodyPr rtlCol="0" anchor="ctr"/>
-            <a:lstStyle/>
-            <a:p>
-              <a:pPr algn="ctr"/>
-              <a:r>
-                <a:rPr lang="de-DE"/>
-                <a:t>B</a:t>
-              </a:r>
-              <a:endParaRPr lang="de-DE" dirty="0"/>
-            </a:p>
-          </p:txBody>
-        </p:sp>
-        <p:sp>
-          <p:nvSpPr>
-            <p:cNvPr id="22" name="Rechteck 21">
-              <a:extLst>
-                <a:ext uri="{FF2B5EF4-FFF2-40B4-BE49-F238E27FC236}">
-                  <a16:creationId xmlns:a16="http://schemas.microsoft.com/office/drawing/2014/main" id="{C58EEFBE-DC9D-79C7-61FF-A168A1A03411}"/>
-                </a:ext>
-              </a:extLst>
-            </p:cNvPr>
-            <p:cNvSpPr/>
-            <p:nvPr/>
-          </p:nvSpPr>
-          <p:spPr>
-            <a:xfrm>
-              <a:off x="6956613" y="4668370"/>
-              <a:ext cx="1954304" cy="394447"/>
-            </a:xfrm>
-            <a:prstGeom prst="rect">
-              <a:avLst/>
-            </a:prstGeom>
-            <a:solidFill>
-              <a:schemeClr val="tx2"/>
-            </a:solidFill>
-          </p:spPr>
-          <p:style>
-            <a:lnRef idx="2">
-              <a:schemeClr val="accent1">
-                <a:shade val="15000"/>
-              </a:schemeClr>
-            </a:lnRef>
-            <a:fillRef idx="1">
-              <a:schemeClr val="accent1"/>
-            </a:fillRef>
-            <a:effectRef idx="0">
-              <a:schemeClr val="accent1"/>
-            </a:effectRef>
-            <a:fontRef idx="minor">
-              <a:schemeClr val="lt1"/>
-            </a:fontRef>
-          </p:style>
-          <p:txBody>
-            <a:bodyPr rtlCol="0" anchor="ctr"/>
-            <a:lstStyle/>
-            <a:p>
-              <a:pPr algn="ctr"/>
-              <a:r>
-                <a:rPr lang="de-DE"/>
-                <a:t>C</a:t>
-              </a:r>
-              <a:endParaRPr lang="de-DE" dirty="0"/>
-            </a:p>
-          </p:txBody>
-        </p:sp>
-      </p:grpSp>
-      <p:grpSp>
-        <p:nvGrpSpPr>
-          <p:cNvPr id="34" name="Gruppieren 33">
-            <a:extLst>
-              <a:ext uri="{FF2B5EF4-FFF2-40B4-BE49-F238E27FC236}">
-                <a16:creationId xmlns:a16="http://schemas.microsoft.com/office/drawing/2014/main" id="{347C00EF-E1C4-7AFD-B2BA-0EDA162B4C6F}"/>
-              </a:ext>
-            </a:extLst>
-          </p:cNvPr>
-          <p:cNvGrpSpPr/>
-          <p:nvPr/>
-        </p:nvGrpSpPr>
-        <p:grpSpPr>
-          <a:xfrm>
-            <a:off x="9403976" y="3993775"/>
-            <a:ext cx="1949824" cy="730624"/>
-            <a:chOff x="9403976" y="3307977"/>
-            <a:chExt cx="1949824" cy="730624"/>
-          </a:xfrm>
-        </p:grpSpPr>
-        <p:sp>
-          <p:nvSpPr>
-            <p:cNvPr id="23" name="Rechteck 22">
-              <a:extLst>
-                <a:ext uri="{FF2B5EF4-FFF2-40B4-BE49-F238E27FC236}">
-                  <a16:creationId xmlns:a16="http://schemas.microsoft.com/office/drawing/2014/main" id="{5C80F88B-CB2A-9C41-A307-F810D7B39A79}"/>
-                </a:ext>
-              </a:extLst>
-            </p:cNvPr>
-            <p:cNvSpPr/>
-            <p:nvPr/>
-          </p:nvSpPr>
-          <p:spPr>
-            <a:xfrm>
-              <a:off x="9403976" y="3307977"/>
-              <a:ext cx="1949824" cy="730624"/>
-            </a:xfrm>
-            <a:prstGeom prst="rect">
-              <a:avLst/>
-            </a:prstGeom>
-          </p:spPr>
-          <p:style>
-            <a:lnRef idx="2">
-              <a:schemeClr val="accent1">
-                <a:shade val="15000"/>
-              </a:schemeClr>
-            </a:lnRef>
-            <a:fillRef idx="1">
-              <a:schemeClr val="accent1"/>
-            </a:fillRef>
-            <a:effectRef idx="0">
-              <a:schemeClr val="accent1"/>
-            </a:effectRef>
-            <a:fontRef idx="minor">
-              <a:schemeClr val="lt1"/>
-            </a:fontRef>
-          </p:style>
-          <p:txBody>
-            <a:bodyPr rtlCol="0" anchor="ctr"/>
-            <a:lstStyle/>
-            <a:p>
-              <a:pPr algn="ctr"/>
-              <a:endParaRPr lang="de-DE" dirty="0"/>
-            </a:p>
-          </p:txBody>
-        </p:sp>
-        <p:sp>
-          <p:nvSpPr>
-            <p:cNvPr id="25" name="Rechteck 24">
-              <a:extLst>
-                <a:ext uri="{FF2B5EF4-FFF2-40B4-BE49-F238E27FC236}">
-                  <a16:creationId xmlns:a16="http://schemas.microsoft.com/office/drawing/2014/main" id="{C4742D42-927D-D2E5-A8F3-D6992ADB1CBE}"/>
-                </a:ext>
-              </a:extLst>
-            </p:cNvPr>
-            <p:cNvSpPr/>
-            <p:nvPr/>
-          </p:nvSpPr>
-          <p:spPr>
-            <a:xfrm>
-              <a:off x="9534380" y="3359524"/>
-              <a:ext cx="794831" cy="611841"/>
-            </a:xfrm>
-            <a:prstGeom prst="rect">
-              <a:avLst/>
-            </a:prstGeom>
-            <a:solidFill>
-              <a:schemeClr val="tx2"/>
-            </a:solidFill>
-          </p:spPr>
-          <p:style>
-            <a:lnRef idx="2">
-              <a:schemeClr val="accent1">
-                <a:shade val="15000"/>
-              </a:schemeClr>
-            </a:lnRef>
-            <a:fillRef idx="1">
-              <a:schemeClr val="accent1"/>
-            </a:fillRef>
-            <a:effectRef idx="0">
-              <a:schemeClr val="accent1"/>
-            </a:effectRef>
-            <a:fontRef idx="minor">
-              <a:schemeClr val="lt1"/>
-            </a:fontRef>
-          </p:style>
-          <p:txBody>
-            <a:bodyPr rtlCol="0" anchor="ctr"/>
-            <a:lstStyle/>
-            <a:p>
-              <a:pPr algn="ctr"/>
-              <a:r>
-                <a:rPr lang="de-DE"/>
-                <a:t>1</a:t>
-              </a:r>
-              <a:endParaRPr lang="de-DE" dirty="0"/>
-            </a:p>
-          </p:txBody>
-        </p:sp>
-        <p:sp>
-          <p:nvSpPr>
-            <p:cNvPr id="26" name="Rechteck 25">
-              <a:extLst>
-                <a:ext uri="{FF2B5EF4-FFF2-40B4-BE49-F238E27FC236}">
-                  <a16:creationId xmlns:a16="http://schemas.microsoft.com/office/drawing/2014/main" id="{883883DD-F727-3098-517D-DECB5CFA1CED}"/>
-                </a:ext>
-              </a:extLst>
-            </p:cNvPr>
-            <p:cNvSpPr/>
-            <p:nvPr/>
-          </p:nvSpPr>
-          <p:spPr>
-            <a:xfrm>
-              <a:off x="10416146" y="3359524"/>
-              <a:ext cx="794831" cy="611841"/>
-            </a:xfrm>
-            <a:prstGeom prst="rect">
-              <a:avLst/>
-            </a:prstGeom>
-            <a:solidFill>
-              <a:schemeClr val="tx2"/>
-            </a:solidFill>
-          </p:spPr>
-          <p:style>
-            <a:lnRef idx="2">
-              <a:schemeClr val="accent1">
-                <a:shade val="15000"/>
-              </a:schemeClr>
-            </a:lnRef>
-            <a:fillRef idx="1">
-              <a:schemeClr val="accent1"/>
-            </a:fillRef>
-            <a:effectRef idx="0">
-              <a:schemeClr val="accent1"/>
-            </a:effectRef>
-            <a:fontRef idx="minor">
-              <a:schemeClr val="lt1"/>
-            </a:fontRef>
-          </p:style>
-          <p:txBody>
-            <a:bodyPr rtlCol="0" anchor="ctr"/>
-            <a:lstStyle/>
-            <a:p>
-              <a:pPr algn="ctr"/>
-              <a:r>
-                <a:rPr lang="de-DE"/>
-                <a:t>2</a:t>
-              </a:r>
-              <a:endParaRPr lang="de-DE" dirty="0"/>
-            </a:p>
-          </p:txBody>
-        </p:sp>
-      </p:grpSp>
-      <p:grpSp>
-        <p:nvGrpSpPr>
-          <p:cNvPr id="35" name="Gruppieren 34">
-            <a:extLst>
-              <a:ext uri="{FF2B5EF4-FFF2-40B4-BE49-F238E27FC236}">
-                <a16:creationId xmlns:a16="http://schemas.microsoft.com/office/drawing/2014/main" id="{37D67B96-C1DC-2CC7-2C43-CCF8ECF05459}"/>
-              </a:ext>
-            </a:extLst>
-          </p:cNvPr>
-          <p:cNvGrpSpPr/>
-          <p:nvPr/>
-        </p:nvGrpSpPr>
-        <p:grpSpPr>
-          <a:xfrm>
-            <a:off x="9403976" y="5145739"/>
-            <a:ext cx="1949824" cy="730624"/>
-            <a:chOff x="9403976" y="4459941"/>
-            <a:chExt cx="1949824" cy="730624"/>
-          </a:xfrm>
-        </p:grpSpPr>
-        <p:sp>
-          <p:nvSpPr>
-            <p:cNvPr id="24" name="Rechteck 23">
-              <a:extLst>
-                <a:ext uri="{FF2B5EF4-FFF2-40B4-BE49-F238E27FC236}">
-                  <a16:creationId xmlns:a16="http://schemas.microsoft.com/office/drawing/2014/main" id="{2E727E6F-9DFF-ECC2-5DC6-75166C035089}"/>
-                </a:ext>
-              </a:extLst>
-            </p:cNvPr>
-            <p:cNvSpPr/>
-            <p:nvPr/>
-          </p:nvSpPr>
-          <p:spPr>
-            <a:xfrm>
-              <a:off x="9403976" y="4459941"/>
-              <a:ext cx="1949824" cy="730624"/>
-            </a:xfrm>
-            <a:prstGeom prst="rect">
-              <a:avLst/>
-            </a:prstGeom>
-          </p:spPr>
-          <p:style>
-            <a:lnRef idx="2">
-              <a:schemeClr val="accent1">
-                <a:shade val="15000"/>
-              </a:schemeClr>
-            </a:lnRef>
-            <a:fillRef idx="1">
-              <a:schemeClr val="accent1"/>
-            </a:fillRef>
-            <a:effectRef idx="0">
-              <a:schemeClr val="accent1"/>
-            </a:effectRef>
-            <a:fontRef idx="minor">
-              <a:schemeClr val="lt1"/>
-            </a:fontRef>
-          </p:style>
-          <p:txBody>
-            <a:bodyPr rtlCol="0" anchor="ctr"/>
-            <a:lstStyle/>
-            <a:p>
-              <a:pPr algn="ctr"/>
-              <a:endParaRPr lang="de-DE" dirty="0"/>
-            </a:p>
-          </p:txBody>
-        </p:sp>
-        <p:sp>
-          <p:nvSpPr>
-            <p:cNvPr id="27" name="Rechteck 26">
-              <a:extLst>
-                <a:ext uri="{FF2B5EF4-FFF2-40B4-BE49-F238E27FC236}">
-                  <a16:creationId xmlns:a16="http://schemas.microsoft.com/office/drawing/2014/main" id="{54CB4F1B-F95D-7FFE-2BB9-7E0E5B484985}"/>
-                </a:ext>
-              </a:extLst>
-            </p:cNvPr>
-            <p:cNvSpPr/>
-            <p:nvPr/>
-          </p:nvSpPr>
-          <p:spPr>
-            <a:xfrm>
-              <a:off x="9534380" y="4512609"/>
-              <a:ext cx="794831" cy="611841"/>
-            </a:xfrm>
-            <a:prstGeom prst="rect">
-              <a:avLst/>
-            </a:prstGeom>
-            <a:solidFill>
-              <a:schemeClr val="tx2"/>
-            </a:solidFill>
-          </p:spPr>
-          <p:style>
-            <a:lnRef idx="2">
-              <a:schemeClr val="accent1">
-                <a:shade val="15000"/>
-              </a:schemeClr>
-            </a:lnRef>
-            <a:fillRef idx="1">
-              <a:schemeClr val="accent1"/>
-            </a:fillRef>
-            <a:effectRef idx="0">
-              <a:schemeClr val="accent1"/>
-            </a:effectRef>
-            <a:fontRef idx="minor">
-              <a:schemeClr val="lt1"/>
-            </a:fontRef>
-          </p:style>
-          <p:txBody>
-            <a:bodyPr rtlCol="0" anchor="ctr"/>
-            <a:lstStyle/>
-            <a:p>
-              <a:pPr algn="ctr"/>
-              <a:r>
-                <a:rPr lang="de-DE"/>
-                <a:t>X</a:t>
-              </a:r>
-              <a:endParaRPr lang="de-DE" dirty="0"/>
-            </a:p>
-          </p:txBody>
-        </p:sp>
-        <p:sp>
-          <p:nvSpPr>
-            <p:cNvPr id="28" name="Rechteck 27">
-              <a:extLst>
-                <a:ext uri="{FF2B5EF4-FFF2-40B4-BE49-F238E27FC236}">
-                  <a16:creationId xmlns:a16="http://schemas.microsoft.com/office/drawing/2014/main" id="{484C0CAE-57E3-DD01-F0F1-7A0E2C601515}"/>
-                </a:ext>
-              </a:extLst>
-            </p:cNvPr>
-            <p:cNvSpPr/>
-            <p:nvPr/>
-          </p:nvSpPr>
-          <p:spPr>
-            <a:xfrm>
-              <a:off x="10416146" y="4512609"/>
-              <a:ext cx="794831" cy="611841"/>
-            </a:xfrm>
-            <a:prstGeom prst="rect">
-              <a:avLst/>
-            </a:prstGeom>
-            <a:solidFill>
-              <a:schemeClr val="tx2"/>
-            </a:solidFill>
-          </p:spPr>
-          <p:style>
-            <a:lnRef idx="2">
-              <a:schemeClr val="accent1">
-                <a:shade val="15000"/>
-              </a:schemeClr>
-            </a:lnRef>
-            <a:fillRef idx="1">
-              <a:schemeClr val="accent1"/>
-            </a:fillRef>
-            <a:effectRef idx="0">
-              <a:schemeClr val="accent1"/>
-            </a:effectRef>
-            <a:fontRef idx="minor">
-              <a:schemeClr val="lt1"/>
-            </a:fontRef>
-          </p:style>
-          <p:txBody>
-            <a:bodyPr rtlCol="0" anchor="ctr"/>
-            <a:lstStyle/>
-            <a:p>
-              <a:pPr algn="ctr"/>
-              <a:r>
-                <a:rPr lang="de-DE"/>
-                <a:t>Y</a:t>
-              </a:r>
-              <a:endParaRPr lang="de-DE" dirty="0"/>
-            </a:p>
-          </p:txBody>
-        </p:sp>
-      </p:grpSp>
-      <p:pic>
-        <p:nvPicPr>
-          <p:cNvPr id="32" name="Grafik 31">
-            <a:extLst>
-              <a:ext uri="{FF2B5EF4-FFF2-40B4-BE49-F238E27FC236}">
-                <a16:creationId xmlns:a16="http://schemas.microsoft.com/office/drawing/2014/main" id="{43A18EB7-8D0F-3F21-AECB-4F538A40A1DA}"/>
-              </a:ext>
-            </a:extLst>
-          </p:cNvPr>
-          <p:cNvPicPr>
-            <a:picLocks noChangeAspect="1"/>
-          </p:cNvPicPr>
-          <p:nvPr/>
-        </p:nvPicPr>
-        <p:blipFill>
-          <a:blip r:embed="rId5"/>
-          <a:stretch>
-            <a:fillRect/>
-          </a:stretch>
-        </p:blipFill>
-        <p:spPr>
-          <a:xfrm>
-            <a:off x="838200" y="2847560"/>
-            <a:ext cx="3458058" cy="2962688"/>
-          </a:xfrm>
-          <a:prstGeom prst="rect">
-            <a:avLst/>
-          </a:prstGeom>
-        </p:spPr>
-      </p:pic>
-      <p:sp>
-        <p:nvSpPr>
-          <p:cNvPr id="36" name="Rechteck 35">
-            <a:extLst>
-              <a:ext uri="{FF2B5EF4-FFF2-40B4-BE49-F238E27FC236}">
-                <a16:creationId xmlns:a16="http://schemas.microsoft.com/office/drawing/2014/main" id="{F631D783-ABF3-830D-84F7-05B19C3948BD}"/>
-              </a:ext>
-            </a:extLst>
-          </p:cNvPr>
-          <p:cNvSpPr/>
-          <p:nvPr/>
-        </p:nvSpPr>
-        <p:spPr>
-          <a:xfrm>
-            <a:off x="6678706" y="3877233"/>
-            <a:ext cx="2492188" cy="2124636"/>
-          </a:xfrm>
-          <a:prstGeom prst="rect">
-            <a:avLst/>
-          </a:prstGeom>
-          <a:noFill/>
-          <a:ln>
-            <a:solidFill>
-              <a:schemeClr val="tx1"/>
-            </a:solidFill>
-            <a:prstDash val="dash"/>
-          </a:ln>
-        </p:spPr>
-        <p:style>
-          <a:lnRef idx="2">
-            <a:schemeClr val="accent1">
-              <a:shade val="15000"/>
-            </a:schemeClr>
-          </a:lnRef>
-          <a:fillRef idx="1">
-            <a:schemeClr val="accent1"/>
-          </a:fillRef>
-          <a:effectRef idx="0">
-            <a:schemeClr val="accent1"/>
-          </a:effectRef>
-          <a:fontRef idx="minor">
-            <a:schemeClr val="lt1"/>
-          </a:fontRef>
-        </p:style>
-        <p:txBody>
-          <a:bodyPr rtlCol="0" anchor="ctr"/>
-          <a:lstStyle/>
-          <a:p>
-            <a:pPr algn="ctr"/>
-            <a:endParaRPr lang="de-DE" dirty="0"/>
-          </a:p>
-        </p:txBody>
-      </p:sp>
-      <p:sp>
-        <p:nvSpPr>
-          <p:cNvPr id="37" name="Rechteck 36">
-            <a:extLst>
-              <a:ext uri="{FF2B5EF4-FFF2-40B4-BE49-F238E27FC236}">
-                <a16:creationId xmlns:a16="http://schemas.microsoft.com/office/drawing/2014/main" id="{0543D131-5ED8-A8BE-2CC6-4125391D0609}"/>
-              </a:ext>
-            </a:extLst>
-          </p:cNvPr>
-          <p:cNvSpPr/>
-          <p:nvPr/>
-        </p:nvSpPr>
-        <p:spPr>
-          <a:xfrm>
-            <a:off x="9278474" y="3904128"/>
-            <a:ext cx="2169455" cy="890867"/>
-          </a:xfrm>
-          <a:prstGeom prst="rect">
-            <a:avLst/>
-          </a:prstGeom>
-          <a:noFill/>
-          <a:ln>
-            <a:solidFill>
-              <a:schemeClr val="tx1"/>
-            </a:solidFill>
-            <a:prstDash val="dash"/>
-          </a:ln>
-        </p:spPr>
-        <p:style>
-          <a:lnRef idx="2">
-            <a:schemeClr val="accent1">
-              <a:shade val="15000"/>
-            </a:schemeClr>
-          </a:lnRef>
-          <a:fillRef idx="1">
-            <a:schemeClr val="accent1"/>
-          </a:fillRef>
-          <a:effectRef idx="0">
-            <a:schemeClr val="accent1"/>
-          </a:effectRef>
-          <a:fontRef idx="minor">
-            <a:schemeClr val="lt1"/>
-          </a:fontRef>
-        </p:style>
-        <p:txBody>
-          <a:bodyPr rtlCol="0" anchor="ctr"/>
-          <a:lstStyle/>
-          <a:p>
-            <a:pPr algn="ctr"/>
-            <a:endParaRPr lang="de-DE" dirty="0"/>
-          </a:p>
-        </p:txBody>
-      </p:sp>
-      <p:sp>
-        <p:nvSpPr>
-          <p:cNvPr id="38" name="Rechteck 37">
-            <a:extLst>
-              <a:ext uri="{FF2B5EF4-FFF2-40B4-BE49-F238E27FC236}">
-                <a16:creationId xmlns:a16="http://schemas.microsoft.com/office/drawing/2014/main" id="{98004468-80A7-E9A3-5515-FEACF905AF35}"/>
-              </a:ext>
-            </a:extLst>
-          </p:cNvPr>
-          <p:cNvSpPr/>
-          <p:nvPr/>
-        </p:nvSpPr>
-        <p:spPr>
-          <a:xfrm>
-            <a:off x="9278474" y="5065617"/>
-            <a:ext cx="2169455" cy="890867"/>
-          </a:xfrm>
-          <a:prstGeom prst="rect">
-            <a:avLst/>
-          </a:prstGeom>
-          <a:noFill/>
-          <a:ln>
-            <a:solidFill>
-              <a:schemeClr val="tx1"/>
-            </a:solidFill>
-            <a:prstDash val="dash"/>
-          </a:ln>
-        </p:spPr>
-        <p:style>
-          <a:lnRef idx="2">
-            <a:schemeClr val="accent1">
-              <a:shade val="15000"/>
-            </a:schemeClr>
-          </a:lnRef>
-          <a:fillRef idx="1">
-            <a:schemeClr val="accent1"/>
-          </a:fillRef>
-          <a:effectRef idx="0">
-            <a:schemeClr val="accent1"/>
-          </a:effectRef>
-          <a:fontRef idx="minor">
-            <a:schemeClr val="lt1"/>
-          </a:fontRef>
-        </p:style>
-        <p:txBody>
-          <a:bodyPr rtlCol="0" anchor="ctr"/>
-          <a:lstStyle/>
-          <a:p>
-            <a:pPr algn="ctr"/>
-            <a:endParaRPr lang="de-DE" dirty="0"/>
-          </a:p>
-        </p:txBody>
-      </p:sp>
-      <p:sp>
-        <p:nvSpPr>
-          <p:cNvPr id="40" name="Rechteck 39">
-            <a:extLst>
-              <a:ext uri="{FF2B5EF4-FFF2-40B4-BE49-F238E27FC236}">
-                <a16:creationId xmlns:a16="http://schemas.microsoft.com/office/drawing/2014/main" id="{1B296C9C-DC74-7DFF-E4CB-46429053023E}"/>
-              </a:ext>
-            </a:extLst>
-          </p:cNvPr>
-          <p:cNvSpPr/>
-          <p:nvPr/>
-        </p:nvSpPr>
-        <p:spPr>
-          <a:xfrm>
-            <a:off x="873195" y="4980093"/>
-            <a:ext cx="1484523" cy="288911"/>
-          </a:xfrm>
-          <a:prstGeom prst="rect">
-            <a:avLst/>
-          </a:prstGeom>
-          <a:noFill/>
-          <a:ln w="28575" cap="flat" cmpd="sng" algn="ctr">
-            <a:solidFill>
-              <a:srgbClr val="FF0000"/>
-            </a:solidFill>
-            <a:prstDash val="solid"/>
-            <a:miter lim="800000"/>
-          </a:ln>
-          <a:effectLst/>
-          <a:extLst>
-            <a:ext uri="{909E8E84-426E-40DD-AFC4-6F175D3DCCD1}">
-              <a14:hiddenFill xmlns:a14="http://schemas.microsoft.com/office/drawing/2010/main">
-                <a:solidFill>
-                  <a:schemeClr val="accent1"/>
-                </a:solidFill>
-              </a14:hiddenFill>
-            </a:ext>
-          </a:extLst>
-        </p:spPr>
-        <p:style>
-          <a:lnRef idx="2">
-            <a:schemeClr val="accent1">
-              <a:shade val="50000"/>
-            </a:schemeClr>
-          </a:lnRef>
-          <a:fillRef idx="1">
-            <a:schemeClr val="accent1"/>
-          </a:fillRef>
-          <a:effectRef idx="0">
-            <a:schemeClr val="accent1"/>
-          </a:effectRef>
-          <a:fontRef idx="minor">
-            <a:schemeClr val="lt1"/>
-          </a:fontRef>
-        </p:style>
-        <p:txBody>
-          <a:bodyPr rtlCol="0" anchor="ctr"/>
-          <a:lstStyle/>
-          <a:p>
-            <a:pPr algn="ctr"/>
-            <a:endParaRPr lang="de-DE" dirty="0"/>
-          </a:p>
-        </p:txBody>
-      </p:sp>
-      <p:sp>
-        <p:nvSpPr>
-          <p:cNvPr id="41" name="Textfeld 40">
-            <a:extLst>
-              <a:ext uri="{FF2B5EF4-FFF2-40B4-BE49-F238E27FC236}">
-                <a16:creationId xmlns:a16="http://schemas.microsoft.com/office/drawing/2014/main" id="{CA7864DD-8893-7250-CE67-EB8E39F583E1}"/>
-              </a:ext>
-            </a:extLst>
-          </p:cNvPr>
-          <p:cNvSpPr txBox="1"/>
-          <p:nvPr/>
-        </p:nvSpPr>
-        <p:spPr>
-          <a:xfrm>
-            <a:off x="3186956" y="1550004"/>
-            <a:ext cx="1609161" cy="646331"/>
-          </a:xfrm>
-          <a:prstGeom prst="rect">
-            <a:avLst/>
-          </a:prstGeom>
-          <a:noFill/>
-        </p:spPr>
-        <p:txBody>
-          <a:bodyPr wrap="square" rtlCol="0">
-            <a:spAutoFit/>
-          </a:bodyPr>
-          <a:lstStyle/>
-          <a:p>
-            <a:r>
-              <a:rPr lang="de-DE"/>
-              <a:t>Alle Shapes auswählen</a:t>
-            </a:r>
-            <a:endParaRPr lang="de-DE" dirty="0"/>
-          </a:p>
-        </p:txBody>
-      </p:sp>
-      <p:sp>
-        <p:nvSpPr>
-          <p:cNvPr id="42" name="Textfeld 41">
-            <a:extLst>
-              <a:ext uri="{FF2B5EF4-FFF2-40B4-BE49-F238E27FC236}">
-                <a16:creationId xmlns:a16="http://schemas.microsoft.com/office/drawing/2014/main" id="{49C16D75-FA95-4255-9210-59780EE62654}"/>
-              </a:ext>
-            </a:extLst>
-          </p:cNvPr>
-          <p:cNvSpPr txBox="1"/>
-          <p:nvPr/>
-        </p:nvSpPr>
-        <p:spPr>
-          <a:xfrm>
-            <a:off x="4448660" y="3858867"/>
-            <a:ext cx="2142554" cy="646331"/>
-          </a:xfrm>
-          <a:prstGeom prst="rect">
-            <a:avLst/>
-          </a:prstGeom>
-          <a:noFill/>
-        </p:spPr>
-        <p:txBody>
-          <a:bodyPr wrap="square" rtlCol="0">
-            <a:spAutoFit/>
-          </a:bodyPr>
-          <a:lstStyle/>
-          <a:p>
-            <a:r>
-              <a:rPr lang="de-DE"/>
-              <a:t>Es werden 3 Gruppen erstellt</a:t>
-            </a:r>
-            <a:endParaRPr lang="de-DE" dirty="0"/>
-          </a:p>
-        </p:txBody>
-      </p:sp>
-    </p:spTree>
-    <p:extLst>
-      <p:ext uri="{BB962C8B-B14F-4D97-AF65-F5344CB8AC3E}">
-        <p14:creationId xmlns:p14="http://schemas.microsoft.com/office/powerpoint/2010/main" val="2085700823"/>
-      </p:ext>
-    </p:extLst>
-  </p:cSld>
-  <p:clrMapOvr>
-    <a:masterClrMapping/>
-  </p:clrMapOvr>
-</p:sld>
-</file>
-
-<file path=ppt/slides/slide30.xml><?xml version="1.0" encoding="utf-8"?>
+<file path=ppt/slides/slide32.xml><?xml version="1.0" encoding="utf-8"?>
 <p:sld xmlns:a="http://schemas.openxmlformats.org/drawingml/2006/main" xmlns:r="http://schemas.openxmlformats.org/officeDocument/2006/relationships" xmlns:p="http://schemas.openxmlformats.org/presentationml/2006/main">
   <p:cSld>
     <p:spTree>
@@ -28926,7 +27928,7 @@
 </p:sld>
 </file>
 
-<file path=ppt/slides/slide31.xml><?xml version="1.0" encoding="utf-8"?>
+<file path=ppt/slides/slide33.xml><?xml version="1.0" encoding="utf-8"?>
 <p:sld xmlns:a="http://schemas.openxmlformats.org/drawingml/2006/main" xmlns:r="http://schemas.openxmlformats.org/officeDocument/2006/relationships" xmlns:p="http://schemas.openxmlformats.org/presentationml/2006/main">
   <p:cSld>
     <p:spTree>
@@ -29833,7 +28835,7 @@
 </p:sld>
 </file>
 
-<file path=ppt/slides/slide32.xml><?xml version="1.0" encoding="utf-8"?>
+<file path=ppt/slides/slide34.xml><?xml version="1.0" encoding="utf-8"?>
 <p:sld xmlns:a="http://schemas.openxmlformats.org/drawingml/2006/main" xmlns:r="http://schemas.openxmlformats.org/officeDocument/2006/relationships" xmlns:p="http://schemas.openxmlformats.org/presentationml/2006/main">
   <p:cSld>
     <p:spTree>
@@ -30587,7 +29589,7 @@
 </p:sld>
 </file>
 
-<file path=ppt/slides/slide33.xml><?xml version="1.0" encoding="utf-8"?>
+<file path=ppt/slides/slide35.xml><?xml version="1.0" encoding="utf-8"?>
 <p:sld xmlns:a="http://schemas.openxmlformats.org/drawingml/2006/main" xmlns:r="http://schemas.openxmlformats.org/officeDocument/2006/relationships" xmlns:p="http://schemas.openxmlformats.org/presentationml/2006/main">
   <p:cSld>
     <p:spTree>
@@ -30933,7 +29935,7 @@
 </p:sld>
 </file>
 
-<file path=ppt/slides/slide34.xml><?xml version="1.0" encoding="utf-8"?>
+<file path=ppt/slides/slide36.xml><?xml version="1.0" encoding="utf-8"?>
 <p:sld xmlns:a="http://schemas.openxmlformats.org/drawingml/2006/main" xmlns:r="http://schemas.openxmlformats.org/officeDocument/2006/relationships" xmlns:p="http://schemas.openxmlformats.org/presentationml/2006/main">
   <p:cSld>
     <p:spTree>
@@ -31545,7 +30547,7 @@
 </p:sld>
 </file>
 
-<file path=ppt/slides/slide35.xml><?xml version="1.0" encoding="utf-8"?>
+<file path=ppt/slides/slide37.xml><?xml version="1.0" encoding="utf-8"?>
 <p:sld xmlns:a="http://schemas.openxmlformats.org/drawingml/2006/main" xmlns:r="http://schemas.openxmlformats.org/officeDocument/2006/relationships" xmlns:p="http://schemas.openxmlformats.org/presentationml/2006/main">
   <p:cSld>
     <p:spTree>
@@ -31875,7 +30877,7 @@
 </p:sld>
 </file>
 
-<file path=ppt/slides/slide36.xml><?xml version="1.0" encoding="utf-8"?>
+<file path=ppt/slides/slide38.xml><?xml version="1.0" encoding="utf-8"?>
 <p:sld xmlns:a="http://schemas.openxmlformats.org/drawingml/2006/main" xmlns:r="http://schemas.openxmlformats.org/officeDocument/2006/relationships" xmlns:p="http://schemas.openxmlformats.org/presentationml/2006/main">
   <p:cSld>
     <p:spTree>
@@ -32746,7 +31748,7 @@
 </p:sld>
 </file>
 
-<file path=ppt/slides/slide37.xml><?xml version="1.0" encoding="utf-8"?>
+<file path=ppt/slides/slide39.xml><?xml version="1.0" encoding="utf-8"?>
 <p:sld xmlns:a="http://schemas.openxmlformats.org/drawingml/2006/main" xmlns:r="http://schemas.openxmlformats.org/officeDocument/2006/relationships" xmlns:p="http://schemas.openxmlformats.org/presentationml/2006/main">
   <p:cSld>
     <p:spTree>
@@ -33116,7 +32118,7 @@
 </p:sld>
 </file>
 
-<file path=ppt/slides/slide38.xml><?xml version="1.0" encoding="utf-8"?>
+<file path=ppt/slides/slide4.xml><?xml version="1.0" encoding="utf-8"?>
 <p:sld xmlns:a="http://schemas.openxmlformats.org/drawingml/2006/main" xmlns:r="http://schemas.openxmlformats.org/officeDocument/2006/relationships" xmlns:p="http://schemas.openxmlformats.org/presentationml/2006/main">
   <p:cSld>
     <p:spTree>
@@ -33133,6 +32135,393 @@
           <a:chExt cx="0" cy="0"/>
         </a:xfrm>
       </p:grpSpPr>
+      <p:graphicFrame>
+        <p:nvGraphicFramePr>
+          <p:cNvPr id="15" name="think-cell data - do not delete" hidden="1">
+            <a:extLst>
+              <a:ext uri="{FF2B5EF4-FFF2-40B4-BE49-F238E27FC236}">
+                <a16:creationId xmlns:a16="http://schemas.microsoft.com/office/drawing/2014/main" id="{CE68ADB7-A038-8F7C-0C1B-25DBA8DDE11D}"/>
+              </a:ext>
+            </a:extLst>
+          </p:cNvPr>
+          <p:cNvGraphicFramePr>
+            <a:graphicFrameLocks noChangeAspect="1"/>
+          </p:cNvGraphicFramePr>
+          <p:nvPr>
+            <p:custDataLst>
+              <p:tags r:id="rId1"/>
+            </p:custDataLst>
+            <p:extLst>
+              <p:ext uri="{D42A27DB-BD31-4B8C-83A1-F6EECF244321}">
+                <p14:modId xmlns:p14="http://schemas.microsoft.com/office/powerpoint/2010/main" val="3427017127"/>
+              </p:ext>
+            </p:extLst>
+          </p:nvPr>
+        </p:nvGraphicFramePr>
+        <p:xfrm>
+          <a:off x="1588" y="1588"/>
+          <a:ext cx="1588" cy="1588"/>
+        </p:xfrm>
+        <a:graphic>
+          <a:graphicData uri="http://schemas.openxmlformats.org/presentationml/2006/ole">
+            <mc:AlternateContent xmlns:mc="http://schemas.openxmlformats.org/markup-compatibility/2006">
+              <mc:Choice xmlns:v="urn:schemas-microsoft-com:vml" Requires="v">
+                <p:oleObj name="think-cell Folie" r:id="rId3" imgW="540" imgH="540" progId="TCLayout.ActiveDocument.1">
+                  <p:embed/>
+                </p:oleObj>
+              </mc:Choice>
+              <mc:Fallback>
+                <p:oleObj name="think-cell Folie" r:id="rId3" imgW="540" imgH="540" progId="TCLayout.ActiveDocument.1">
+                  <p:embed/>
+                  <p:pic>
+                    <p:nvPicPr>
+                      <p:cNvPr id="0" name=""/>
+                      <p:cNvPicPr/>
+                      <p:nvPr/>
+                    </p:nvPicPr>
+                    <p:blipFill>
+                      <a:blip r:embed="rId4"/>
+                      <a:stretch>
+                        <a:fillRect/>
+                      </a:stretch>
+                    </p:blipFill>
+                    <p:spPr>
+                      <a:xfrm>
+                        <a:off x="1588" y="1588"/>
+                        <a:ext cx="1588" cy="1588"/>
+                      </a:xfrm>
+                      <a:prstGeom prst="rect">
+                        <a:avLst/>
+                      </a:prstGeom>
+                    </p:spPr>
+                  </p:pic>
+                </p:oleObj>
+              </mc:Fallback>
+            </mc:AlternateContent>
+          </a:graphicData>
+        </a:graphic>
+      </p:graphicFrame>
+      <p:sp>
+        <p:nvSpPr>
+          <p:cNvPr id="2" name="Titel 1">
+            <a:extLst>
+              <a:ext uri="{FF2B5EF4-FFF2-40B4-BE49-F238E27FC236}">
+                <a16:creationId xmlns:a16="http://schemas.microsoft.com/office/drawing/2014/main" id="{A8E773DA-3D5C-F5D3-F0D2-F453757D0668}"/>
+              </a:ext>
+            </a:extLst>
+          </p:cNvPr>
+          <p:cNvSpPr>
+            <a:spLocks noGrp="1"/>
+          </p:cNvSpPr>
+          <p:nvPr>
+            <p:ph type="title"/>
+          </p:nvPr>
+        </p:nvSpPr>
+        <p:spPr/>
+        <p:txBody>
+          <a:bodyPr vert="horz"/>
+          <a:lstStyle/>
+          <a:p>
+            <a:r>
+              <a:rPr lang="de-DE"/>
+              <a:t>Verbesserte Font-Icon Suche</a:t>
+            </a:r>
+            <a:endParaRPr lang="de-DE" dirty="0"/>
+          </a:p>
+        </p:txBody>
+      </p:sp>
+      <p:pic>
+        <p:nvPicPr>
+          <p:cNvPr id="5" name="Grafik 4">
+            <a:extLst>
+              <a:ext uri="{FF2B5EF4-FFF2-40B4-BE49-F238E27FC236}">
+                <a16:creationId xmlns:a16="http://schemas.microsoft.com/office/drawing/2014/main" id="{EE640ECA-4708-211E-7802-0778B614982F}"/>
+              </a:ext>
+            </a:extLst>
+          </p:cNvPr>
+          <p:cNvPicPr>
+            <a:picLocks noChangeAspect="1"/>
+          </p:cNvPicPr>
+          <p:nvPr/>
+        </p:nvPicPr>
+        <p:blipFill>
+          <a:blip r:embed="rId5"/>
+          <a:stretch>
+            <a:fillRect/>
+          </a:stretch>
+        </p:blipFill>
+        <p:spPr>
+          <a:xfrm>
+            <a:off x="761971" y="2419799"/>
+            <a:ext cx="3686689" cy="1000265"/>
+          </a:xfrm>
+          <a:prstGeom prst="rect">
+            <a:avLst/>
+          </a:prstGeom>
+        </p:spPr>
+      </p:pic>
+      <p:pic>
+        <p:nvPicPr>
+          <p:cNvPr id="7" name="Grafik 6">
+            <a:extLst>
+              <a:ext uri="{FF2B5EF4-FFF2-40B4-BE49-F238E27FC236}">
+                <a16:creationId xmlns:a16="http://schemas.microsoft.com/office/drawing/2014/main" id="{6157AC2F-FA5F-07F2-18B6-3806885E71C7}"/>
+              </a:ext>
+            </a:extLst>
+          </p:cNvPr>
+          <p:cNvPicPr>
+            <a:picLocks noChangeAspect="1"/>
+          </p:cNvPicPr>
+          <p:nvPr/>
+        </p:nvPicPr>
+        <p:blipFill>
+          <a:blip r:embed="rId6"/>
+          <a:stretch>
+            <a:fillRect/>
+          </a:stretch>
+        </p:blipFill>
+        <p:spPr>
+          <a:xfrm>
+            <a:off x="2009957" y="4438947"/>
+            <a:ext cx="1181265" cy="895475"/>
+          </a:xfrm>
+          <a:prstGeom prst="rect">
+            <a:avLst/>
+          </a:prstGeom>
+        </p:spPr>
+      </p:pic>
+      <p:pic>
+        <p:nvPicPr>
+          <p:cNvPr id="9" name="Grafik 8">
+            <a:extLst>
+              <a:ext uri="{FF2B5EF4-FFF2-40B4-BE49-F238E27FC236}">
+                <a16:creationId xmlns:a16="http://schemas.microsoft.com/office/drawing/2014/main" id="{E2106EBF-716D-C94F-5041-B1A7FBDF19DE}"/>
+              </a:ext>
+            </a:extLst>
+          </p:cNvPr>
+          <p:cNvPicPr>
+            <a:picLocks noChangeAspect="1"/>
+          </p:cNvPicPr>
+          <p:nvPr/>
+        </p:nvPicPr>
+        <p:blipFill>
+          <a:blip r:embed="rId7"/>
+          <a:stretch>
+            <a:fillRect/>
+          </a:stretch>
+        </p:blipFill>
+        <p:spPr>
+          <a:xfrm>
+            <a:off x="5543284" y="2104841"/>
+            <a:ext cx="2666949" cy="2413371"/>
+          </a:xfrm>
+          <a:prstGeom prst="rect">
+            <a:avLst/>
+          </a:prstGeom>
+        </p:spPr>
+      </p:pic>
+      <p:pic>
+        <p:nvPicPr>
+          <p:cNvPr id="13" name="Grafik 12">
+            <a:extLst>
+              <a:ext uri="{FF2B5EF4-FFF2-40B4-BE49-F238E27FC236}">
+                <a16:creationId xmlns:a16="http://schemas.microsoft.com/office/drawing/2014/main" id="{61457CE1-F4AE-9B17-673B-DA7C6F939C6B}"/>
+              </a:ext>
+            </a:extLst>
+          </p:cNvPr>
+          <p:cNvPicPr>
+            <a:picLocks noChangeAspect="1"/>
+          </p:cNvPicPr>
+          <p:nvPr/>
+        </p:nvPicPr>
+        <p:blipFill>
+          <a:blip r:embed="rId8"/>
+          <a:stretch>
+            <a:fillRect/>
+          </a:stretch>
+        </p:blipFill>
+        <p:spPr>
+          <a:xfrm>
+            <a:off x="8937693" y="3876736"/>
+            <a:ext cx="2299782" cy="2183259"/>
+          </a:xfrm>
+          <a:prstGeom prst="rect">
+            <a:avLst/>
+          </a:prstGeom>
+        </p:spPr>
+      </p:pic>
+      <p:sp>
+        <p:nvSpPr>
+          <p:cNvPr id="18" name="Textfeld 17">
+            <a:extLst>
+              <a:ext uri="{FF2B5EF4-FFF2-40B4-BE49-F238E27FC236}">
+                <a16:creationId xmlns:a16="http://schemas.microsoft.com/office/drawing/2014/main" id="{60DED448-6A93-5BE4-95B2-2200BBB5B91C}"/>
+              </a:ext>
+            </a:extLst>
+          </p:cNvPr>
+          <p:cNvSpPr txBox="1"/>
+          <p:nvPr/>
+        </p:nvSpPr>
+        <p:spPr>
+          <a:xfrm>
+            <a:off x="752522" y="3553571"/>
+            <a:ext cx="3696137" cy="646331"/>
+          </a:xfrm>
+          <a:prstGeom prst="rect">
+            <a:avLst/>
+          </a:prstGeom>
+          <a:noFill/>
+        </p:spPr>
+        <p:txBody>
+          <a:bodyPr wrap="square" rtlCol="0">
+            <a:spAutoFit/>
+          </a:bodyPr>
+          <a:lstStyle/>
+          <a:p>
+            <a:r>
+              <a:rPr lang="de-DE"/>
+              <a:t>Fortschrittsbalken während Indexierung</a:t>
+            </a:r>
+            <a:endParaRPr lang="de-DE" dirty="0"/>
+          </a:p>
+        </p:txBody>
+      </p:sp>
+      <p:sp>
+        <p:nvSpPr>
+          <p:cNvPr id="19" name="Textfeld 18">
+            <a:extLst>
+              <a:ext uri="{FF2B5EF4-FFF2-40B4-BE49-F238E27FC236}">
+                <a16:creationId xmlns:a16="http://schemas.microsoft.com/office/drawing/2014/main" id="{F983D71D-167B-0228-3B8B-D1F672584DB1}"/>
+              </a:ext>
+            </a:extLst>
+          </p:cNvPr>
+          <p:cNvSpPr txBox="1"/>
+          <p:nvPr/>
+        </p:nvSpPr>
+        <p:spPr>
+          <a:xfrm>
+            <a:off x="752522" y="5449943"/>
+            <a:ext cx="3696137" cy="369332"/>
+          </a:xfrm>
+          <a:prstGeom prst="rect">
+            <a:avLst/>
+          </a:prstGeom>
+          <a:noFill/>
+        </p:spPr>
+        <p:txBody>
+          <a:bodyPr wrap="square" rtlCol="0">
+            <a:spAutoFit/>
+          </a:bodyPr>
+          <a:lstStyle/>
+          <a:p>
+            <a:r>
+              <a:rPr lang="de-DE"/>
+              <a:t>Ergebnisse an neuer Position</a:t>
+            </a:r>
+            <a:endParaRPr lang="de-DE" dirty="0"/>
+          </a:p>
+        </p:txBody>
+      </p:sp>
+      <p:sp>
+        <p:nvSpPr>
+          <p:cNvPr id="20" name="Textfeld 19">
+            <a:extLst>
+              <a:ext uri="{FF2B5EF4-FFF2-40B4-BE49-F238E27FC236}">
+                <a16:creationId xmlns:a16="http://schemas.microsoft.com/office/drawing/2014/main" id="{4566C024-9C6E-0DBB-AC4E-1E9C397A2B1D}"/>
+              </a:ext>
+            </a:extLst>
+          </p:cNvPr>
+          <p:cNvSpPr txBox="1"/>
+          <p:nvPr/>
+        </p:nvSpPr>
+        <p:spPr>
+          <a:xfrm>
+            <a:off x="8354593" y="2104841"/>
+            <a:ext cx="2999207" cy="923330"/>
+          </a:xfrm>
+          <a:prstGeom prst="rect">
+            <a:avLst/>
+          </a:prstGeom>
+          <a:noFill/>
+        </p:spPr>
+        <p:txBody>
+          <a:bodyPr wrap="square" rtlCol="0">
+            <a:spAutoFit/>
+          </a:bodyPr>
+          <a:lstStyle/>
+          <a:p>
+            <a:r>
+              <a:rPr lang="de-DE" dirty="0"/>
+              <a:t>Suche in der gesamten Unicode-Datenbank nach Symbolen</a:t>
+            </a:r>
+          </a:p>
+        </p:txBody>
+      </p:sp>
+      <p:sp>
+        <p:nvSpPr>
+          <p:cNvPr id="21" name="Textfeld 20">
+            <a:extLst>
+              <a:ext uri="{FF2B5EF4-FFF2-40B4-BE49-F238E27FC236}">
+                <a16:creationId xmlns:a16="http://schemas.microsoft.com/office/drawing/2014/main" id="{CA07DB4B-7A46-8B78-E9AA-696AF6D19548}"/>
+              </a:ext>
+            </a:extLst>
+          </p:cNvPr>
+          <p:cNvSpPr txBox="1"/>
+          <p:nvPr/>
+        </p:nvSpPr>
+        <p:spPr>
+          <a:xfrm>
+            <a:off x="5779775" y="4943248"/>
+            <a:ext cx="3165054" cy="1200329"/>
+          </a:xfrm>
+          <a:prstGeom prst="rect">
+            <a:avLst/>
+          </a:prstGeom>
+          <a:noFill/>
+        </p:spPr>
+        <p:txBody>
+          <a:bodyPr wrap="square" rtlCol="0">
+            <a:spAutoFit/>
+          </a:bodyPr>
+          <a:lstStyle/>
+          <a:p>
+            <a:r>
+              <a:rPr lang="de-DE" dirty="0"/>
+              <a:t>Wählbare Schriftart für Rendering der Unicode-Symbole (Standard ist Segoe UI Emoji)</a:t>
+            </a:r>
+          </a:p>
+        </p:txBody>
+      </p:sp>
+    </p:spTree>
+    <p:extLst>
+      <p:ext uri="{BB962C8B-B14F-4D97-AF65-F5344CB8AC3E}">
+        <p14:creationId xmlns:p14="http://schemas.microsoft.com/office/powerpoint/2010/main" val="3726683438"/>
+      </p:ext>
+    </p:extLst>
+  </p:cSld>
+  <p:clrMapOvr>
+    <a:masterClrMapping/>
+  </p:clrMapOvr>
+</p:sld>
+</file>
+
+<file path=ppt/slides/slide40.xml><?xml version="1.0" encoding="utf-8"?>
+<p:sld xmlns:a="http://schemas.openxmlformats.org/drawingml/2006/main" xmlns:r="http://schemas.openxmlformats.org/officeDocument/2006/relationships" xmlns:p="http://schemas.openxmlformats.org/presentationml/2006/main">
+  <p:cSld>
+    <p:spTree>
+      <p:nvGrpSpPr>
+        <p:cNvPr id="1" name=""/>
+        <p:cNvGrpSpPr/>
+        <p:nvPr/>
+      </p:nvGrpSpPr>
+      <p:grpSpPr>
+        <a:xfrm>
+          <a:off x="0" y="0"/>
+          <a:ext cx="0" cy="0"/>
+          <a:chOff x="0" y="0"/>
+          <a:chExt cx="0" cy="0"/>
+        </a:xfrm>
+      </p:grpSpPr>
       <p:sp>
         <p:nvSpPr>
           <p:cNvPr id="4" name="Titel 3">
@@ -33215,7 +32604,7 @@
 </p:sld>
 </file>
 
-<file path=ppt/slides/slide39.xml><?xml version="1.0" encoding="utf-8"?>
+<file path=ppt/slides/slide41.xml><?xml version="1.0" encoding="utf-8"?>
 <p:sld xmlns:a="http://schemas.openxmlformats.org/drawingml/2006/main" xmlns:r="http://schemas.openxmlformats.org/officeDocument/2006/relationships" xmlns:p="http://schemas.openxmlformats.org/presentationml/2006/main">
   <p:cSld>
     <p:spTree>
@@ -33434,7 +32823,7 @@
 </p:sld>
 </file>
 
-<file path=ppt/slides/slide4.xml><?xml version="1.0" encoding="utf-8"?>
+<file path=ppt/slides/slide42.xml><?xml version="1.0" encoding="utf-8"?>
 <p:sld xmlns:a="http://schemas.openxmlformats.org/drawingml/2006/main" xmlns:r="http://schemas.openxmlformats.org/officeDocument/2006/relationships" xmlns:p="http://schemas.openxmlformats.org/presentationml/2006/main">
   <p:cSld>
     <p:spTree>
@@ -33451,78 +32840,12 @@
           <a:chExt cx="0" cy="0"/>
         </a:xfrm>
       </p:grpSpPr>
-      <p:graphicFrame>
-        <p:nvGraphicFramePr>
-          <p:cNvPr id="8" name="think-cell data - do not delete" hidden="1">
+      <p:sp>
+        <p:nvSpPr>
+          <p:cNvPr id="4" name="Titel 3">
             <a:extLst>
               <a:ext uri="{FF2B5EF4-FFF2-40B4-BE49-F238E27FC236}">
-                <a16:creationId xmlns:a16="http://schemas.microsoft.com/office/drawing/2014/main" id="{A8B022A5-FB0C-1D48-AC2A-29461A1E4CED}"/>
-              </a:ext>
-            </a:extLst>
-          </p:cNvPr>
-          <p:cNvGraphicFramePr>
-            <a:graphicFrameLocks noChangeAspect="1"/>
-          </p:cNvGraphicFramePr>
-          <p:nvPr>
-            <p:custDataLst>
-              <p:tags r:id="rId1"/>
-            </p:custDataLst>
-            <p:extLst>
-              <p:ext uri="{D42A27DB-BD31-4B8C-83A1-F6EECF244321}">
-                <p14:modId xmlns:p14="http://schemas.microsoft.com/office/powerpoint/2010/main" val="1008553636"/>
-              </p:ext>
-            </p:extLst>
-          </p:nvPr>
-        </p:nvGraphicFramePr>
-        <p:xfrm>
-          <a:off x="1588" y="1588"/>
-          <a:ext cx="1588" cy="1588"/>
-        </p:xfrm>
-        <a:graphic>
-          <a:graphicData uri="http://schemas.openxmlformats.org/presentationml/2006/ole">
-            <mc:AlternateContent xmlns:mc="http://schemas.openxmlformats.org/markup-compatibility/2006">
-              <mc:Choice xmlns:v="urn:schemas-microsoft-com:vml" Requires="v">
-                <p:oleObj name="think-cell Folie" r:id="rId3" imgW="540" imgH="540" progId="TCLayout.ActiveDocument.1">
-                  <p:embed/>
-                </p:oleObj>
-              </mc:Choice>
-              <mc:Fallback>
-                <p:oleObj name="think-cell Folie" r:id="rId3" imgW="540" imgH="540" progId="TCLayout.ActiveDocument.1">
-                  <p:embed/>
-                  <p:pic>
-                    <p:nvPicPr>
-                      <p:cNvPr id="0" name=""/>
-                      <p:cNvPicPr/>
-                      <p:nvPr/>
-                    </p:nvPicPr>
-                    <p:blipFill>
-                      <a:blip r:embed="rId4"/>
-                      <a:stretch>
-                        <a:fillRect/>
-                      </a:stretch>
-                    </p:blipFill>
-                    <p:spPr>
-                      <a:xfrm>
-                        <a:off x="1588" y="1588"/>
-                        <a:ext cx="1588" cy="1588"/>
-                      </a:xfrm>
-                      <a:prstGeom prst="rect">
-                        <a:avLst/>
-                      </a:prstGeom>
-                    </p:spPr>
-                  </p:pic>
-                </p:oleObj>
-              </mc:Fallback>
-            </mc:AlternateContent>
-          </a:graphicData>
-        </a:graphic>
-      </p:graphicFrame>
-      <p:sp>
-        <p:nvSpPr>
-          <p:cNvPr id="2" name="Titel 1">
-            <a:extLst>
-              <a:ext uri="{FF2B5EF4-FFF2-40B4-BE49-F238E27FC236}">
-                <a16:creationId xmlns:a16="http://schemas.microsoft.com/office/drawing/2014/main" id="{C6E360AC-D065-54D4-D2F4-A158C3710DF5}"/>
+                <a16:creationId xmlns:a16="http://schemas.microsoft.com/office/drawing/2014/main" id="{29886C5F-6436-48D8-B536-C84031C2EE08}"/>
               </a:ext>
             </a:extLst>
           </p:cNvPr>
@@ -33535,21 +32858,253 @@
         </p:nvSpPr>
         <p:spPr/>
         <p:txBody>
-          <a:bodyPr vert="horz"/>
-          <a:lstStyle/>
-          <a:p>
-            <a:r>
-              <a:rPr lang="de-DE"/>
-              <a:t>Shape verknüpfen </a:t>
-            </a:r>
-            <a:br>
-              <a:rPr lang="de-DE"/>
-            </a:br>
-            <a:r>
-              <a:rPr lang="de-DE"/>
-              <a:t>und synchronisieren</a:t>
-            </a:r>
-            <a:endParaRPr lang="de-DE" dirty="0"/>
+          <a:bodyPr/>
+          <a:lstStyle/>
+          <a:p>
+            <a:r>
+              <a:rPr lang="de-DE" dirty="0"/>
+              <a:t>Font-Icon Suche &amp; </a:t>
+            </a:r>
+            <a:r>
+              <a:rPr lang="de-DE" dirty="0" err="1"/>
+              <a:t>IcoMoon</a:t>
+            </a:r>
+            <a:r>
+              <a:rPr lang="de-DE" dirty="0"/>
+              <a:t>-Free</a:t>
+            </a:r>
+          </a:p>
+        </p:txBody>
+      </p:sp>
+      <p:pic>
+        <p:nvPicPr>
+          <p:cNvPr id="2" name="Grafik 1">
+            <a:extLst>
+              <a:ext uri="{FF2B5EF4-FFF2-40B4-BE49-F238E27FC236}">
+                <a16:creationId xmlns:a16="http://schemas.microsoft.com/office/drawing/2014/main" id="{E3A33437-7E5E-4986-B175-2FA0A653D80C}"/>
+              </a:ext>
+            </a:extLst>
+          </p:cNvPr>
+          <p:cNvPicPr>
+            <a:picLocks noChangeAspect="1"/>
+          </p:cNvPicPr>
+          <p:nvPr/>
+        </p:nvPicPr>
+        <p:blipFill>
+          <a:blip r:embed="rId2"/>
+          <a:stretch>
+            <a:fillRect/>
+          </a:stretch>
+        </p:blipFill>
+        <p:spPr>
+          <a:xfrm>
+            <a:off x="2911559" y="4631933"/>
+            <a:ext cx="714475" cy="1609950"/>
+          </a:xfrm>
+          <a:prstGeom prst="rect">
+            <a:avLst/>
+          </a:prstGeom>
+        </p:spPr>
+      </p:pic>
+      <p:sp>
+        <p:nvSpPr>
+          <p:cNvPr id="6" name="Textfeld 5">
+            <a:extLst>
+              <a:ext uri="{FF2B5EF4-FFF2-40B4-BE49-F238E27FC236}">
+                <a16:creationId xmlns:a16="http://schemas.microsoft.com/office/drawing/2014/main" id="{51CB6955-BDD7-44AE-B192-A5E56CD2DAA9}"/>
+              </a:ext>
+            </a:extLst>
+          </p:cNvPr>
+          <p:cNvSpPr txBox="1"/>
+          <p:nvPr/>
+        </p:nvSpPr>
+        <p:spPr>
+          <a:xfrm>
+            <a:off x="2788683" y="1588534"/>
+            <a:ext cx="6046080" cy="646331"/>
+          </a:xfrm>
+          <a:prstGeom prst="rect">
+            <a:avLst/>
+          </a:prstGeom>
+          <a:noFill/>
+        </p:spPr>
+        <p:txBody>
+          <a:bodyPr wrap="square" rtlCol="0">
+            <a:spAutoFit/>
+          </a:bodyPr>
+          <a:lstStyle/>
+          <a:p>
+            <a:r>
+              <a:rPr lang="de-DE" dirty="0"/>
+              <a:t>Die Font-Icons können nun nach (englischen) Stichwörtern durchsucht werden</a:t>
+            </a:r>
+          </a:p>
+        </p:txBody>
+      </p:sp>
+      <p:sp>
+        <p:nvSpPr>
+          <p:cNvPr id="7" name="Textfeld 6">
+            <a:extLst>
+              <a:ext uri="{FF2B5EF4-FFF2-40B4-BE49-F238E27FC236}">
+                <a16:creationId xmlns:a16="http://schemas.microsoft.com/office/drawing/2014/main" id="{1F49078F-FDBB-411D-95AB-8EE3E83F9A69}"/>
+              </a:ext>
+            </a:extLst>
+          </p:cNvPr>
+          <p:cNvSpPr txBox="1"/>
+          <p:nvPr/>
+        </p:nvSpPr>
+        <p:spPr>
+          <a:xfrm>
+            <a:off x="3668452" y="4836743"/>
+            <a:ext cx="2192342" cy="1200329"/>
+          </a:xfrm>
+          <a:prstGeom prst="rect">
+            <a:avLst/>
+          </a:prstGeom>
+          <a:noFill/>
+        </p:spPr>
+        <p:txBody>
+          <a:bodyPr wrap="square" rtlCol="0">
+            <a:spAutoFit/>
+          </a:bodyPr>
+          <a:lstStyle/>
+          <a:p>
+            <a:r>
+              <a:rPr lang="de-DE" dirty="0"/>
+              <a:t>Die letzten Suchanfragen werden gespeichert</a:t>
+            </a:r>
+          </a:p>
+        </p:txBody>
+      </p:sp>
+      <p:sp>
+        <p:nvSpPr>
+          <p:cNvPr id="8" name="Textfeld 7">
+            <a:extLst>
+              <a:ext uri="{FF2B5EF4-FFF2-40B4-BE49-F238E27FC236}">
+                <a16:creationId xmlns:a16="http://schemas.microsoft.com/office/drawing/2014/main" id="{60C1B7E7-4E3C-47DE-8029-4B77C86CA0A0}"/>
+              </a:ext>
+            </a:extLst>
+          </p:cNvPr>
+          <p:cNvSpPr txBox="1"/>
+          <p:nvPr/>
+        </p:nvSpPr>
+        <p:spPr>
+          <a:xfrm>
+            <a:off x="2788683" y="3784557"/>
+            <a:ext cx="7344747" cy="646331"/>
+          </a:xfrm>
+          <a:prstGeom prst="rect">
+            <a:avLst/>
+          </a:prstGeom>
+          <a:noFill/>
+        </p:spPr>
+        <p:txBody>
+          <a:bodyPr wrap="square" rtlCol="0">
+            <a:spAutoFit/>
+          </a:bodyPr>
+          <a:lstStyle/>
+          <a:p>
+            <a:r>
+              <a:rPr lang="de-DE" dirty="0"/>
+              <a:t>Wenn die exakte Suche deaktiviert wird, wird bei „</a:t>
+            </a:r>
+            <a:r>
+              <a:rPr lang="de-DE" dirty="0" err="1"/>
+              <a:t>person</a:t>
+            </a:r>
+            <a:r>
+              <a:rPr lang="de-DE" dirty="0"/>
+              <a:t>“ auch „</a:t>
+            </a:r>
+            <a:r>
+              <a:rPr lang="de-DE" dirty="0" err="1"/>
+              <a:t>persons</a:t>
+            </a:r>
+            <a:r>
+              <a:rPr lang="de-DE" dirty="0"/>
+              <a:t>“, „</a:t>
+            </a:r>
+            <a:r>
+              <a:rPr lang="de-DE" dirty="0" err="1"/>
+              <a:t>personality</a:t>
+            </a:r>
+            <a:r>
+              <a:rPr lang="de-DE" dirty="0"/>
+              <a:t>“, und „</a:t>
+            </a:r>
+            <a:r>
+              <a:rPr lang="de-DE" dirty="0" err="1"/>
+              <a:t>impersonal</a:t>
+            </a:r>
+            <a:r>
+              <a:rPr lang="de-DE" dirty="0"/>
+              <a:t>“ gefunden</a:t>
+            </a:r>
+          </a:p>
+        </p:txBody>
+      </p:sp>
+      <p:pic>
+        <p:nvPicPr>
+          <p:cNvPr id="13" name="Grafik 12">
+            <a:extLst>
+              <a:ext uri="{FF2B5EF4-FFF2-40B4-BE49-F238E27FC236}">
+                <a16:creationId xmlns:a16="http://schemas.microsoft.com/office/drawing/2014/main" id="{CB89A9BB-15E6-4CF4-A7E9-E89276BF5298}"/>
+              </a:ext>
+            </a:extLst>
+          </p:cNvPr>
+          <p:cNvPicPr>
+            <a:picLocks noChangeAspect="1"/>
+          </p:cNvPicPr>
+          <p:nvPr/>
+        </p:nvPicPr>
+        <p:blipFill>
+          <a:blip r:embed="rId3"/>
+          <a:stretch>
+            <a:fillRect/>
+          </a:stretch>
+        </p:blipFill>
+        <p:spPr>
+          <a:xfrm>
+            <a:off x="4210638" y="2364841"/>
+            <a:ext cx="1721239" cy="1305038"/>
+          </a:xfrm>
+          <a:prstGeom prst="rect">
+            <a:avLst/>
+          </a:prstGeom>
+        </p:spPr>
+      </p:pic>
+      <p:sp>
+        <p:nvSpPr>
+          <p:cNvPr id="10" name="Textfeld 9">
+            <a:extLst>
+              <a:ext uri="{FF2B5EF4-FFF2-40B4-BE49-F238E27FC236}">
+                <a16:creationId xmlns:a16="http://schemas.microsoft.com/office/drawing/2014/main" id="{22C3487A-63F4-4486-8ACE-70D9039A33A6}"/>
+              </a:ext>
+            </a:extLst>
+          </p:cNvPr>
+          <p:cNvSpPr txBox="1"/>
+          <p:nvPr/>
+        </p:nvSpPr>
+        <p:spPr>
+          <a:xfrm>
+            <a:off x="6093324" y="2364840"/>
+            <a:ext cx="4442541" cy="646331"/>
+          </a:xfrm>
+          <a:prstGeom prst="rect">
+            <a:avLst/>
+          </a:prstGeom>
+          <a:noFill/>
+        </p:spPr>
+        <p:txBody>
+          <a:bodyPr wrap="square" rtlCol="0">
+            <a:spAutoFit/>
+          </a:bodyPr>
+          <a:lstStyle/>
+          <a:p>
+            <a:r>
+              <a:rPr lang="de-DE" dirty="0"/>
+              <a:t>Bei Eingabe mehrerer Wörter wird eine UND-Suche durchgeführt</a:t>
+            </a:r>
           </a:p>
         </p:txBody>
       </p:sp>
@@ -33558,7 +33113,37 @@
           <p:cNvPr id="5" name="Grafik 4">
             <a:extLst>
               <a:ext uri="{FF2B5EF4-FFF2-40B4-BE49-F238E27FC236}">
-                <a16:creationId xmlns:a16="http://schemas.microsoft.com/office/drawing/2014/main" id="{E2BA60E0-BA3E-597E-4019-347FAFBADC8B}"/>
+                <a16:creationId xmlns:a16="http://schemas.microsoft.com/office/drawing/2014/main" id="{BDD3D5E6-1926-4D2B-9DA9-D2453FC11C1E}"/>
+              </a:ext>
+            </a:extLst>
+          </p:cNvPr>
+          <p:cNvPicPr>
+            <a:picLocks noChangeAspect="1"/>
+          </p:cNvPicPr>
+          <p:nvPr/>
+        </p:nvPicPr>
+        <p:blipFill>
+          <a:blip r:embed="rId4"/>
+          <a:stretch>
+            <a:fillRect/>
+          </a:stretch>
+        </p:blipFill>
+        <p:spPr>
+          <a:xfrm>
+            <a:off x="685442" y="1619238"/>
+            <a:ext cx="1925807" cy="3859347"/>
+          </a:xfrm>
+          <a:prstGeom prst="rect">
+            <a:avLst/>
+          </a:prstGeom>
+        </p:spPr>
+      </p:pic>
+      <p:pic>
+        <p:nvPicPr>
+          <p:cNvPr id="3" name="Grafik 2">
+            <a:extLst>
+              <a:ext uri="{FF2B5EF4-FFF2-40B4-BE49-F238E27FC236}">
+                <a16:creationId xmlns:a16="http://schemas.microsoft.com/office/drawing/2014/main" id="{FEC06AE5-BD12-4980-B733-BF5064C7BE9B}"/>
               </a:ext>
             </a:extLst>
           </p:cNvPr>
@@ -33575,8 +33160,8 @@
         </p:blipFill>
         <p:spPr>
           <a:xfrm>
-            <a:off x="7941717" y="1244566"/>
-            <a:ext cx="3258005" cy="5039428"/>
+            <a:off x="6854093" y="4998115"/>
+            <a:ext cx="4210638" cy="800212"/>
           </a:xfrm>
           <a:prstGeom prst="rect">
             <a:avLst/>
@@ -33585,74 +33170,10 @@
       </p:pic>
       <p:sp>
         <p:nvSpPr>
-          <p:cNvPr id="6" name="Rechteck 5">
+          <p:cNvPr id="12" name="Textfeld 11">
             <a:extLst>
               <a:ext uri="{FF2B5EF4-FFF2-40B4-BE49-F238E27FC236}">
-                <a16:creationId xmlns:a16="http://schemas.microsoft.com/office/drawing/2014/main" id="{E71042C2-F7F7-F214-427A-477C536F2036}"/>
-              </a:ext>
-            </a:extLst>
-          </p:cNvPr>
-          <p:cNvSpPr/>
-          <p:nvPr/>
-        </p:nvSpPr>
-        <p:spPr>
-          <a:xfrm>
-            <a:off x="8086196" y="4949613"/>
-            <a:ext cx="3028844" cy="933027"/>
-          </a:xfrm>
-          <a:prstGeom prst="rect">
-            <a:avLst/>
-          </a:prstGeom>
-          <a:noFill/>
-          <a:ln w="28575" cap="flat" cmpd="sng" algn="ctr">
-            <a:solidFill>
-              <a:srgbClr val="FF0000"/>
-            </a:solidFill>
-            <a:prstDash val="solid"/>
-            <a:miter lim="800000"/>
-          </a:ln>
-          <a:effectLst/>
-          <a:extLst>
-            <a:ext uri="{909E8E84-426E-40DD-AFC4-6F175D3DCCD1}">
-              <a14:hiddenFill xmlns:a14="http://schemas.microsoft.com/office/drawing/2010/main">
-                <a:solidFill>
-                  <a:schemeClr val="accent1"/>
-                </a:solidFill>
-              </a14:hiddenFill>
-            </a:ext>
-          </a:extLst>
-        </p:spPr>
-        <p:style>
-          <a:lnRef idx="2">
-            <a:schemeClr val="accent1">
-              <a:shade val="50000"/>
-            </a:schemeClr>
-          </a:lnRef>
-          <a:fillRef idx="1">
-            <a:schemeClr val="accent1"/>
-          </a:fillRef>
-          <a:effectRef idx="0">
-            <a:schemeClr val="accent1"/>
-          </a:effectRef>
-          <a:fontRef idx="minor">
-            <a:schemeClr val="lt1"/>
-          </a:fontRef>
-        </p:style>
-        <p:txBody>
-          <a:bodyPr rtlCol="0" anchor="ctr"/>
-          <a:lstStyle/>
-          <a:p>
-            <a:pPr algn="ctr"/>
-            <a:endParaRPr lang="de-DE" dirty="0"/>
-          </a:p>
-        </p:txBody>
-      </p:sp>
-      <p:sp>
-        <p:nvSpPr>
-          <p:cNvPr id="16" name="Textfeld 15">
-            <a:extLst>
-              <a:ext uri="{FF2B5EF4-FFF2-40B4-BE49-F238E27FC236}">
-                <a16:creationId xmlns:a16="http://schemas.microsoft.com/office/drawing/2014/main" id="{616C1703-EC83-6349-0EE1-C46C5BA28BD8}"/>
+                <a16:creationId xmlns:a16="http://schemas.microsoft.com/office/drawing/2014/main" id="{678C5FAF-AD4B-4005-BD9A-2741EACEE996}"/>
               </a:ext>
             </a:extLst>
           </p:cNvPr>
@@ -33661,8 +33182,8 @@
         </p:nvSpPr>
         <p:spPr>
           <a:xfrm>
-            <a:off x="2245360" y="3227030"/>
-            <a:ext cx="5371369" cy="923330"/>
+            <a:off x="7001131" y="5848441"/>
+            <a:ext cx="3916561" cy="646331"/>
           </a:xfrm>
           <a:prstGeom prst="rect">
             <a:avLst/>
@@ -33677,7 +33198,15 @@
           <a:p>
             <a:r>
               <a:rPr lang="de-DE" dirty="0"/>
-              <a:t>Beim suchen und verknüpfen von Shapes kann sofort danach eine Synchronisierung der wesentlichen Eigenschaften stattfinden.</a:t>
+              <a:t>Außerdem: Icons für </a:t>
+            </a:r>
+            <a:r>
+              <a:rPr lang="de-DE" dirty="0" err="1"/>
+              <a:t>IcoMoo</a:t>
+            </a:r>
+            <a:r>
+              <a:rPr lang="de-DE" dirty="0"/>
+              <a:t>-Free Font hinzugefügt</a:t>
             </a:r>
           </a:p>
         </p:txBody>
@@ -33685,7 +33214,7 @@
     </p:spTree>
     <p:extLst>
       <p:ext uri="{BB962C8B-B14F-4D97-AF65-F5344CB8AC3E}">
-        <p14:creationId xmlns:p14="http://schemas.microsoft.com/office/powerpoint/2010/main" val="3367903751"/>
+        <p14:creationId xmlns:p14="http://schemas.microsoft.com/office/powerpoint/2010/main" val="3783324837"/>
       </p:ext>
     </p:extLst>
   </p:cSld>
@@ -33695,7 +33224,7 @@
 </p:sld>
 </file>
 
-<file path=ppt/slides/slide40.xml><?xml version="1.0" encoding="utf-8"?>
+<file path=ppt/slides/slide43.xml><?xml version="1.0" encoding="utf-8"?>
 <p:sld xmlns:a="http://schemas.openxmlformats.org/drawingml/2006/main" xmlns:r="http://schemas.openxmlformats.org/officeDocument/2006/relationships" xmlns:p="http://schemas.openxmlformats.org/presentationml/2006/main">
   <p:cSld>
     <p:spTree>
@@ -33714,407 +33243,6 @@
       </p:grpSpPr>
       <p:sp>
         <p:nvSpPr>
-          <p:cNvPr id="4" name="Titel 3">
-            <a:extLst>
-              <a:ext uri="{FF2B5EF4-FFF2-40B4-BE49-F238E27FC236}">
-                <a16:creationId xmlns:a16="http://schemas.microsoft.com/office/drawing/2014/main" id="{29886C5F-6436-48D8-B536-C84031C2EE08}"/>
-              </a:ext>
-            </a:extLst>
-          </p:cNvPr>
-          <p:cNvSpPr>
-            <a:spLocks noGrp="1"/>
-          </p:cNvSpPr>
-          <p:nvPr>
-            <p:ph type="title"/>
-          </p:nvPr>
-        </p:nvSpPr>
-        <p:spPr/>
-        <p:txBody>
-          <a:bodyPr/>
-          <a:lstStyle/>
-          <a:p>
-            <a:r>
-              <a:rPr lang="de-DE" dirty="0"/>
-              <a:t>Font-Icon Suche &amp; </a:t>
-            </a:r>
-            <a:r>
-              <a:rPr lang="de-DE" dirty="0" err="1"/>
-              <a:t>IcoMoon</a:t>
-            </a:r>
-            <a:r>
-              <a:rPr lang="de-DE" dirty="0"/>
-              <a:t>-Free</a:t>
-            </a:r>
-          </a:p>
-        </p:txBody>
-      </p:sp>
-      <p:pic>
-        <p:nvPicPr>
-          <p:cNvPr id="2" name="Grafik 1">
-            <a:extLst>
-              <a:ext uri="{FF2B5EF4-FFF2-40B4-BE49-F238E27FC236}">
-                <a16:creationId xmlns:a16="http://schemas.microsoft.com/office/drawing/2014/main" id="{E3A33437-7E5E-4986-B175-2FA0A653D80C}"/>
-              </a:ext>
-            </a:extLst>
-          </p:cNvPr>
-          <p:cNvPicPr>
-            <a:picLocks noChangeAspect="1"/>
-          </p:cNvPicPr>
-          <p:nvPr/>
-        </p:nvPicPr>
-        <p:blipFill>
-          <a:blip r:embed="rId2"/>
-          <a:stretch>
-            <a:fillRect/>
-          </a:stretch>
-        </p:blipFill>
-        <p:spPr>
-          <a:xfrm>
-            <a:off x="2911559" y="4631933"/>
-            <a:ext cx="714475" cy="1609950"/>
-          </a:xfrm>
-          <a:prstGeom prst="rect">
-            <a:avLst/>
-          </a:prstGeom>
-        </p:spPr>
-      </p:pic>
-      <p:sp>
-        <p:nvSpPr>
-          <p:cNvPr id="6" name="Textfeld 5">
-            <a:extLst>
-              <a:ext uri="{FF2B5EF4-FFF2-40B4-BE49-F238E27FC236}">
-                <a16:creationId xmlns:a16="http://schemas.microsoft.com/office/drawing/2014/main" id="{51CB6955-BDD7-44AE-B192-A5E56CD2DAA9}"/>
-              </a:ext>
-            </a:extLst>
-          </p:cNvPr>
-          <p:cNvSpPr txBox="1"/>
-          <p:nvPr/>
-        </p:nvSpPr>
-        <p:spPr>
-          <a:xfrm>
-            <a:off x="2788683" y="1588534"/>
-            <a:ext cx="6046080" cy="646331"/>
-          </a:xfrm>
-          <a:prstGeom prst="rect">
-            <a:avLst/>
-          </a:prstGeom>
-          <a:noFill/>
-        </p:spPr>
-        <p:txBody>
-          <a:bodyPr wrap="square" rtlCol="0">
-            <a:spAutoFit/>
-          </a:bodyPr>
-          <a:lstStyle/>
-          <a:p>
-            <a:r>
-              <a:rPr lang="de-DE" dirty="0"/>
-              <a:t>Die Font-Icons können nun nach (englischen) Stichwörtern durchsucht werden</a:t>
-            </a:r>
-          </a:p>
-        </p:txBody>
-      </p:sp>
-      <p:sp>
-        <p:nvSpPr>
-          <p:cNvPr id="7" name="Textfeld 6">
-            <a:extLst>
-              <a:ext uri="{FF2B5EF4-FFF2-40B4-BE49-F238E27FC236}">
-                <a16:creationId xmlns:a16="http://schemas.microsoft.com/office/drawing/2014/main" id="{1F49078F-FDBB-411D-95AB-8EE3E83F9A69}"/>
-              </a:ext>
-            </a:extLst>
-          </p:cNvPr>
-          <p:cNvSpPr txBox="1"/>
-          <p:nvPr/>
-        </p:nvSpPr>
-        <p:spPr>
-          <a:xfrm>
-            <a:off x="3668452" y="4836743"/>
-            <a:ext cx="2192342" cy="1200329"/>
-          </a:xfrm>
-          <a:prstGeom prst="rect">
-            <a:avLst/>
-          </a:prstGeom>
-          <a:noFill/>
-        </p:spPr>
-        <p:txBody>
-          <a:bodyPr wrap="square" rtlCol="0">
-            <a:spAutoFit/>
-          </a:bodyPr>
-          <a:lstStyle/>
-          <a:p>
-            <a:r>
-              <a:rPr lang="de-DE" dirty="0"/>
-              <a:t>Die letzten Suchanfragen werden gespeichert</a:t>
-            </a:r>
-          </a:p>
-        </p:txBody>
-      </p:sp>
-      <p:sp>
-        <p:nvSpPr>
-          <p:cNvPr id="8" name="Textfeld 7">
-            <a:extLst>
-              <a:ext uri="{FF2B5EF4-FFF2-40B4-BE49-F238E27FC236}">
-                <a16:creationId xmlns:a16="http://schemas.microsoft.com/office/drawing/2014/main" id="{60C1B7E7-4E3C-47DE-8029-4B77C86CA0A0}"/>
-              </a:ext>
-            </a:extLst>
-          </p:cNvPr>
-          <p:cNvSpPr txBox="1"/>
-          <p:nvPr/>
-        </p:nvSpPr>
-        <p:spPr>
-          <a:xfrm>
-            <a:off x="2788683" y="3784557"/>
-            <a:ext cx="7344747" cy="646331"/>
-          </a:xfrm>
-          <a:prstGeom prst="rect">
-            <a:avLst/>
-          </a:prstGeom>
-          <a:noFill/>
-        </p:spPr>
-        <p:txBody>
-          <a:bodyPr wrap="square" rtlCol="0">
-            <a:spAutoFit/>
-          </a:bodyPr>
-          <a:lstStyle/>
-          <a:p>
-            <a:r>
-              <a:rPr lang="de-DE" dirty="0"/>
-              <a:t>Wenn die exakte Suche deaktiviert wird, wird bei „</a:t>
-            </a:r>
-            <a:r>
-              <a:rPr lang="de-DE" dirty="0" err="1"/>
-              <a:t>person</a:t>
-            </a:r>
-            <a:r>
-              <a:rPr lang="de-DE" dirty="0"/>
-              <a:t>“ auch „</a:t>
-            </a:r>
-            <a:r>
-              <a:rPr lang="de-DE" dirty="0" err="1"/>
-              <a:t>persons</a:t>
-            </a:r>
-            <a:r>
-              <a:rPr lang="de-DE" dirty="0"/>
-              <a:t>“, „</a:t>
-            </a:r>
-            <a:r>
-              <a:rPr lang="de-DE" dirty="0" err="1"/>
-              <a:t>personality</a:t>
-            </a:r>
-            <a:r>
-              <a:rPr lang="de-DE" dirty="0"/>
-              <a:t>“, und „</a:t>
-            </a:r>
-            <a:r>
-              <a:rPr lang="de-DE" dirty="0" err="1"/>
-              <a:t>impersonal</a:t>
-            </a:r>
-            <a:r>
-              <a:rPr lang="de-DE" dirty="0"/>
-              <a:t>“ gefunden</a:t>
-            </a:r>
-          </a:p>
-        </p:txBody>
-      </p:sp>
-      <p:pic>
-        <p:nvPicPr>
-          <p:cNvPr id="13" name="Grafik 12">
-            <a:extLst>
-              <a:ext uri="{FF2B5EF4-FFF2-40B4-BE49-F238E27FC236}">
-                <a16:creationId xmlns:a16="http://schemas.microsoft.com/office/drawing/2014/main" id="{CB89A9BB-15E6-4CF4-A7E9-E89276BF5298}"/>
-              </a:ext>
-            </a:extLst>
-          </p:cNvPr>
-          <p:cNvPicPr>
-            <a:picLocks noChangeAspect="1"/>
-          </p:cNvPicPr>
-          <p:nvPr/>
-        </p:nvPicPr>
-        <p:blipFill>
-          <a:blip r:embed="rId3"/>
-          <a:stretch>
-            <a:fillRect/>
-          </a:stretch>
-        </p:blipFill>
-        <p:spPr>
-          <a:xfrm>
-            <a:off x="4210638" y="2364841"/>
-            <a:ext cx="1721239" cy="1305038"/>
-          </a:xfrm>
-          <a:prstGeom prst="rect">
-            <a:avLst/>
-          </a:prstGeom>
-        </p:spPr>
-      </p:pic>
-      <p:sp>
-        <p:nvSpPr>
-          <p:cNvPr id="10" name="Textfeld 9">
-            <a:extLst>
-              <a:ext uri="{FF2B5EF4-FFF2-40B4-BE49-F238E27FC236}">
-                <a16:creationId xmlns:a16="http://schemas.microsoft.com/office/drawing/2014/main" id="{22C3487A-63F4-4486-8ACE-70D9039A33A6}"/>
-              </a:ext>
-            </a:extLst>
-          </p:cNvPr>
-          <p:cNvSpPr txBox="1"/>
-          <p:nvPr/>
-        </p:nvSpPr>
-        <p:spPr>
-          <a:xfrm>
-            <a:off x="6093324" y="2364840"/>
-            <a:ext cx="4442541" cy="646331"/>
-          </a:xfrm>
-          <a:prstGeom prst="rect">
-            <a:avLst/>
-          </a:prstGeom>
-          <a:noFill/>
-        </p:spPr>
-        <p:txBody>
-          <a:bodyPr wrap="square" rtlCol="0">
-            <a:spAutoFit/>
-          </a:bodyPr>
-          <a:lstStyle/>
-          <a:p>
-            <a:r>
-              <a:rPr lang="de-DE" dirty="0"/>
-              <a:t>Bei Eingabe mehrerer Wörter wird eine UND-Suche durchgeführt</a:t>
-            </a:r>
-          </a:p>
-        </p:txBody>
-      </p:sp>
-      <p:pic>
-        <p:nvPicPr>
-          <p:cNvPr id="5" name="Grafik 4">
-            <a:extLst>
-              <a:ext uri="{FF2B5EF4-FFF2-40B4-BE49-F238E27FC236}">
-                <a16:creationId xmlns:a16="http://schemas.microsoft.com/office/drawing/2014/main" id="{BDD3D5E6-1926-4D2B-9DA9-D2453FC11C1E}"/>
-              </a:ext>
-            </a:extLst>
-          </p:cNvPr>
-          <p:cNvPicPr>
-            <a:picLocks noChangeAspect="1"/>
-          </p:cNvPicPr>
-          <p:nvPr/>
-        </p:nvPicPr>
-        <p:blipFill>
-          <a:blip r:embed="rId4"/>
-          <a:stretch>
-            <a:fillRect/>
-          </a:stretch>
-        </p:blipFill>
-        <p:spPr>
-          <a:xfrm>
-            <a:off x="685442" y="1619238"/>
-            <a:ext cx="1925807" cy="3859347"/>
-          </a:xfrm>
-          <a:prstGeom prst="rect">
-            <a:avLst/>
-          </a:prstGeom>
-        </p:spPr>
-      </p:pic>
-      <p:pic>
-        <p:nvPicPr>
-          <p:cNvPr id="3" name="Grafik 2">
-            <a:extLst>
-              <a:ext uri="{FF2B5EF4-FFF2-40B4-BE49-F238E27FC236}">
-                <a16:creationId xmlns:a16="http://schemas.microsoft.com/office/drawing/2014/main" id="{FEC06AE5-BD12-4980-B733-BF5064C7BE9B}"/>
-              </a:ext>
-            </a:extLst>
-          </p:cNvPr>
-          <p:cNvPicPr>
-            <a:picLocks noChangeAspect="1"/>
-          </p:cNvPicPr>
-          <p:nvPr/>
-        </p:nvPicPr>
-        <p:blipFill>
-          <a:blip r:embed="rId5"/>
-          <a:stretch>
-            <a:fillRect/>
-          </a:stretch>
-        </p:blipFill>
-        <p:spPr>
-          <a:xfrm>
-            <a:off x="6854093" y="4998115"/>
-            <a:ext cx="4210638" cy="800212"/>
-          </a:xfrm>
-          <a:prstGeom prst="rect">
-            <a:avLst/>
-          </a:prstGeom>
-        </p:spPr>
-      </p:pic>
-      <p:sp>
-        <p:nvSpPr>
-          <p:cNvPr id="12" name="Textfeld 11">
-            <a:extLst>
-              <a:ext uri="{FF2B5EF4-FFF2-40B4-BE49-F238E27FC236}">
-                <a16:creationId xmlns:a16="http://schemas.microsoft.com/office/drawing/2014/main" id="{678C5FAF-AD4B-4005-BD9A-2741EACEE996}"/>
-              </a:ext>
-            </a:extLst>
-          </p:cNvPr>
-          <p:cNvSpPr txBox="1"/>
-          <p:nvPr/>
-        </p:nvSpPr>
-        <p:spPr>
-          <a:xfrm>
-            <a:off x="7001131" y="5848441"/>
-            <a:ext cx="3916561" cy="646331"/>
-          </a:xfrm>
-          <a:prstGeom prst="rect">
-            <a:avLst/>
-          </a:prstGeom>
-          <a:noFill/>
-        </p:spPr>
-        <p:txBody>
-          <a:bodyPr wrap="square" rtlCol="0">
-            <a:spAutoFit/>
-          </a:bodyPr>
-          <a:lstStyle/>
-          <a:p>
-            <a:r>
-              <a:rPr lang="de-DE" dirty="0"/>
-              <a:t>Außerdem: Icons für </a:t>
-            </a:r>
-            <a:r>
-              <a:rPr lang="de-DE" dirty="0" err="1"/>
-              <a:t>IcoMoo</a:t>
-            </a:r>
-            <a:r>
-              <a:rPr lang="de-DE" dirty="0"/>
-              <a:t>-Free Font hinzugefügt</a:t>
-            </a:r>
-          </a:p>
-        </p:txBody>
-      </p:sp>
-    </p:spTree>
-    <p:extLst>
-      <p:ext uri="{BB962C8B-B14F-4D97-AF65-F5344CB8AC3E}">
-        <p14:creationId xmlns:p14="http://schemas.microsoft.com/office/powerpoint/2010/main" val="3783324837"/>
-      </p:ext>
-    </p:extLst>
-  </p:cSld>
-  <p:clrMapOvr>
-    <a:masterClrMapping/>
-  </p:clrMapOvr>
-</p:sld>
-</file>
-
-<file path=ppt/slides/slide41.xml><?xml version="1.0" encoding="utf-8"?>
-<p:sld xmlns:a="http://schemas.openxmlformats.org/drawingml/2006/main" xmlns:r="http://schemas.openxmlformats.org/officeDocument/2006/relationships" xmlns:p="http://schemas.openxmlformats.org/presentationml/2006/main">
-  <p:cSld>
-    <p:spTree>
-      <p:nvGrpSpPr>
-        <p:cNvPr id="1" name=""/>
-        <p:cNvGrpSpPr/>
-        <p:nvPr/>
-      </p:nvGrpSpPr>
-      <p:grpSpPr>
-        <a:xfrm>
-          <a:off x="0" y="0"/>
-          <a:ext cx="0" cy="0"/>
-          <a:chOff x="0" y="0"/>
-          <a:chExt cx="0" cy="0"/>
-        </a:xfrm>
-      </p:grpSpPr>
-      <p:sp>
-        <p:nvSpPr>
           <p:cNvPr id="2" name="Titel 1">
             <a:extLst>
               <a:ext uri="{FF2B5EF4-FFF2-40B4-BE49-F238E27FC236}">
@@ -34349,7 +33477,7 @@
 </p:sld>
 </file>
 
-<file path=ppt/slides/slide42.xml><?xml version="1.0" encoding="utf-8"?>
+<file path=ppt/slides/slide44.xml><?xml version="1.0" encoding="utf-8"?>
 <p:sld xmlns:a="http://schemas.openxmlformats.org/drawingml/2006/main" xmlns:r="http://schemas.openxmlformats.org/officeDocument/2006/relationships" xmlns:p="http://schemas.openxmlformats.org/presentationml/2006/main">
   <p:cSld>
     <p:spTree>
@@ -34569,7 +33697,7 @@
 </p:sld>
 </file>
 
-<file path=ppt/slides/slide43.xml><?xml version="1.0" encoding="utf-8"?>
+<file path=ppt/slides/slide45.xml><?xml version="1.0" encoding="utf-8"?>
 <p:sld xmlns:a="http://schemas.openxmlformats.org/drawingml/2006/main" xmlns:r="http://schemas.openxmlformats.org/officeDocument/2006/relationships" xmlns:p="http://schemas.openxmlformats.org/presentationml/2006/main">
   <p:cSld>
     <p:spTree>
@@ -34913,7 +34041,7 @@
 </p:sld>
 </file>
 
-<file path=ppt/slides/slide44.xml><?xml version="1.0" encoding="utf-8"?>
+<file path=ppt/slides/slide46.xml><?xml version="1.0" encoding="utf-8"?>
 <p:sld xmlns:a="http://schemas.openxmlformats.org/drawingml/2006/main" xmlns:r="http://schemas.openxmlformats.org/officeDocument/2006/relationships" xmlns:p="http://schemas.openxmlformats.org/presentationml/2006/main">
   <p:cSld>
     <p:spTree>
@@ -35190,7 +34318,7 @@
 </p:sld>
 </file>
 
-<file path=ppt/slides/slide45.xml><?xml version="1.0" encoding="utf-8"?>
+<file path=ppt/slides/slide47.xml><?xml version="1.0" encoding="utf-8"?>
 <p:sld xmlns:a="http://schemas.openxmlformats.org/drawingml/2006/main" xmlns:r="http://schemas.openxmlformats.org/officeDocument/2006/relationships" xmlns:p="http://schemas.openxmlformats.org/presentationml/2006/main">
   <p:cSld>
     <p:spTree>
@@ -35343,7 +34471,7 @@
 </p:sld>
 </file>
 
-<file path=ppt/slides/slide46.xml><?xml version="1.0" encoding="utf-8"?>
+<file path=ppt/slides/slide48.xml><?xml version="1.0" encoding="utf-8"?>
 <p:sld xmlns:a="http://schemas.openxmlformats.org/drawingml/2006/main" xmlns:r="http://schemas.openxmlformats.org/officeDocument/2006/relationships" xmlns:p="http://schemas.openxmlformats.org/presentationml/2006/main">
   <p:cSld>
     <p:spTree>
@@ -35526,7 +34654,7 @@
 </p:sld>
 </file>
 
-<file path=ppt/slides/slide47.xml><?xml version="1.0" encoding="utf-8"?>
+<file path=ppt/slides/slide49.xml><?xml version="1.0" encoding="utf-8"?>
 <p:sld xmlns:a="http://schemas.openxmlformats.org/drawingml/2006/main" xmlns:r="http://schemas.openxmlformats.org/officeDocument/2006/relationships" xmlns:p="http://schemas.openxmlformats.org/presentationml/2006/main">
   <p:cSld>
     <p:spTree>
@@ -37961,566 +37089,6 @@
 </p:sld>
 </file>
 
-<file path=ppt/slides/slide48.xml><?xml version="1.0" encoding="utf-8"?>
-<p:sld xmlns:a="http://schemas.openxmlformats.org/drawingml/2006/main" xmlns:r="http://schemas.openxmlformats.org/officeDocument/2006/relationships" xmlns:p="http://schemas.openxmlformats.org/presentationml/2006/main">
-  <p:cSld>
-    <p:spTree>
-      <p:nvGrpSpPr>
-        <p:cNvPr id="1" name=""/>
-        <p:cNvGrpSpPr/>
-        <p:nvPr/>
-      </p:nvGrpSpPr>
-      <p:grpSpPr>
-        <a:xfrm>
-          <a:off x="0" y="0"/>
-          <a:ext cx="0" cy="0"/>
-          <a:chOff x="0" y="0"/>
-          <a:chExt cx="0" cy="0"/>
-        </a:xfrm>
-      </p:grpSpPr>
-      <p:sp>
-        <p:nvSpPr>
-          <p:cNvPr id="2" name="Titel 1">
-            <a:extLst>
-              <a:ext uri="{FF2B5EF4-FFF2-40B4-BE49-F238E27FC236}">
-                <a16:creationId xmlns:a16="http://schemas.microsoft.com/office/drawing/2014/main" id="{9533EF00-2B50-4F2C-920E-407267A8D16A}"/>
-              </a:ext>
-            </a:extLst>
-          </p:cNvPr>
-          <p:cNvSpPr>
-            <a:spLocks noGrp="1"/>
-          </p:cNvSpPr>
-          <p:nvPr>
-            <p:ph type="title"/>
-          </p:nvPr>
-        </p:nvSpPr>
-        <p:spPr/>
-        <p:txBody>
-          <a:bodyPr/>
-          <a:lstStyle/>
-          <a:p>
-            <a:r>
-              <a:rPr lang="de-DE" dirty="0"/>
-              <a:t>Für Excel: Zeilen/Spalten zusammenführen</a:t>
-            </a:r>
-          </a:p>
-        </p:txBody>
-      </p:sp>
-      <p:pic>
-        <p:nvPicPr>
-          <p:cNvPr id="3" name="Grafik 2">
-            <a:extLst>
-              <a:ext uri="{FF2B5EF4-FFF2-40B4-BE49-F238E27FC236}">
-                <a16:creationId xmlns:a16="http://schemas.microsoft.com/office/drawing/2014/main" id="{BD2449E8-EB02-481F-8E59-50B032835A3D}"/>
-              </a:ext>
-            </a:extLst>
-          </p:cNvPr>
-          <p:cNvPicPr>
-            <a:picLocks noChangeAspect="1"/>
-          </p:cNvPicPr>
-          <p:nvPr/>
-        </p:nvPicPr>
-        <p:blipFill>
-          <a:blip r:embed="rId2"/>
-          <a:stretch>
-            <a:fillRect/>
-          </a:stretch>
-        </p:blipFill>
-        <p:spPr>
-          <a:xfrm>
-            <a:off x="3430508" y="2241028"/>
-            <a:ext cx="2876951" cy="2219635"/>
-          </a:xfrm>
-          <a:prstGeom prst="rect">
-            <a:avLst/>
-          </a:prstGeom>
-        </p:spPr>
-      </p:pic>
-      <p:pic>
-        <p:nvPicPr>
-          <p:cNvPr id="4" name="Grafik 3">
-            <a:extLst>
-              <a:ext uri="{FF2B5EF4-FFF2-40B4-BE49-F238E27FC236}">
-                <a16:creationId xmlns:a16="http://schemas.microsoft.com/office/drawing/2014/main" id="{27462A0E-1DF8-4F64-9186-727F3604BAFF}"/>
-              </a:ext>
-            </a:extLst>
-          </p:cNvPr>
-          <p:cNvPicPr>
-            <a:picLocks noChangeAspect="1"/>
-          </p:cNvPicPr>
-          <p:nvPr/>
-        </p:nvPicPr>
-        <p:blipFill>
-          <a:blip r:embed="rId3"/>
-          <a:stretch>
-            <a:fillRect/>
-          </a:stretch>
-        </p:blipFill>
-        <p:spPr>
-          <a:xfrm>
-            <a:off x="1053005" y="2771683"/>
-            <a:ext cx="1676634" cy="1314633"/>
-          </a:xfrm>
-          <a:prstGeom prst="rect">
-            <a:avLst/>
-          </a:prstGeom>
-        </p:spPr>
-      </p:pic>
-      <p:pic>
-        <p:nvPicPr>
-          <p:cNvPr id="7" name="Grafik 6">
-            <a:extLst>
-              <a:ext uri="{FF2B5EF4-FFF2-40B4-BE49-F238E27FC236}">
-                <a16:creationId xmlns:a16="http://schemas.microsoft.com/office/drawing/2014/main" id="{C48B4069-8CAB-4212-9DA6-DDAB7967637B}"/>
-              </a:ext>
-            </a:extLst>
-          </p:cNvPr>
-          <p:cNvPicPr>
-            <a:picLocks noChangeAspect="1"/>
-          </p:cNvPicPr>
-          <p:nvPr/>
-        </p:nvPicPr>
-        <p:blipFill>
-          <a:blip r:embed="rId4"/>
-          <a:stretch>
-            <a:fillRect/>
-          </a:stretch>
-        </p:blipFill>
-        <p:spPr>
-          <a:xfrm>
-            <a:off x="8333332" y="4879578"/>
-            <a:ext cx="1705213" cy="1324160"/>
-          </a:xfrm>
-          <a:prstGeom prst="rect">
-            <a:avLst/>
-          </a:prstGeom>
-        </p:spPr>
-      </p:pic>
-      <p:pic>
-        <p:nvPicPr>
-          <p:cNvPr id="8" name="Grafik 7">
-            <a:extLst>
-              <a:ext uri="{FF2B5EF4-FFF2-40B4-BE49-F238E27FC236}">
-                <a16:creationId xmlns:a16="http://schemas.microsoft.com/office/drawing/2014/main" id="{032CAFF8-4407-431E-93B6-8FE6BA4EE620}"/>
-              </a:ext>
-            </a:extLst>
-          </p:cNvPr>
-          <p:cNvPicPr>
-            <a:picLocks noChangeAspect="1"/>
-          </p:cNvPicPr>
-          <p:nvPr/>
-        </p:nvPicPr>
-        <p:blipFill>
-          <a:blip r:embed="rId5"/>
-          <a:stretch>
-            <a:fillRect/>
-          </a:stretch>
-        </p:blipFill>
-        <p:spPr>
-          <a:xfrm>
-            <a:off x="7240723" y="3105878"/>
-            <a:ext cx="933580" cy="1457528"/>
-          </a:xfrm>
-          <a:prstGeom prst="rect">
-            <a:avLst/>
-          </a:prstGeom>
-        </p:spPr>
-      </p:pic>
-      <p:pic>
-        <p:nvPicPr>
-          <p:cNvPr id="9" name="Grafik 8">
-            <a:extLst>
-              <a:ext uri="{FF2B5EF4-FFF2-40B4-BE49-F238E27FC236}">
-                <a16:creationId xmlns:a16="http://schemas.microsoft.com/office/drawing/2014/main" id="{3663A837-FF8C-415F-9359-EF6093EDB181}"/>
-              </a:ext>
-            </a:extLst>
-          </p:cNvPr>
-          <p:cNvPicPr>
-            <a:picLocks noChangeAspect="1"/>
-          </p:cNvPicPr>
-          <p:nvPr/>
-        </p:nvPicPr>
-        <p:blipFill>
-          <a:blip r:embed="rId6"/>
-          <a:stretch>
-            <a:fillRect/>
-          </a:stretch>
-        </p:blipFill>
-        <p:spPr>
-          <a:xfrm>
-            <a:off x="8554733" y="1350628"/>
-            <a:ext cx="914528" cy="2438740"/>
-          </a:xfrm>
-          <a:prstGeom prst="rect">
-            <a:avLst/>
-          </a:prstGeom>
-        </p:spPr>
-      </p:pic>
-      <p:cxnSp>
-        <p:nvCxnSpPr>
-          <p:cNvPr id="11" name="Gerade Verbindung mit Pfeil 10">
-            <a:extLst>
-              <a:ext uri="{FF2B5EF4-FFF2-40B4-BE49-F238E27FC236}">
-                <a16:creationId xmlns:a16="http://schemas.microsoft.com/office/drawing/2014/main" id="{A5AEB315-AF39-4FBC-B2E0-67D885C24070}"/>
-              </a:ext>
-            </a:extLst>
-          </p:cNvPr>
-          <p:cNvCxnSpPr>
-            <a:cxnSpLocks/>
-          </p:cNvCxnSpPr>
-          <p:nvPr/>
-        </p:nvCxnSpPr>
-        <p:spPr>
-          <a:xfrm flipV="1">
-            <a:off x="6096000" y="2089621"/>
-            <a:ext cx="2237332" cy="1112162"/>
-          </a:xfrm>
-          <a:prstGeom prst="straightConnector1">
-            <a:avLst/>
-          </a:prstGeom>
-          <a:ln>
-            <a:tailEnd type="triangle"/>
-          </a:ln>
-        </p:spPr>
-        <p:style>
-          <a:lnRef idx="1">
-            <a:schemeClr val="accent1"/>
-          </a:lnRef>
-          <a:fillRef idx="0">
-            <a:schemeClr val="accent1"/>
-          </a:fillRef>
-          <a:effectRef idx="0">
-            <a:schemeClr val="accent1"/>
-          </a:effectRef>
-          <a:fontRef idx="minor">
-            <a:schemeClr val="tx1"/>
-          </a:fontRef>
-        </p:style>
-      </p:cxnSp>
-      <p:cxnSp>
-        <p:nvCxnSpPr>
-          <p:cNvPr id="12" name="Gerade Verbindung mit Pfeil 11">
-            <a:extLst>
-              <a:ext uri="{FF2B5EF4-FFF2-40B4-BE49-F238E27FC236}">
-                <a16:creationId xmlns:a16="http://schemas.microsoft.com/office/drawing/2014/main" id="{14181C82-C1A3-4607-88BE-520F54D9796A}"/>
-              </a:ext>
-            </a:extLst>
-          </p:cNvPr>
-          <p:cNvCxnSpPr>
-            <a:cxnSpLocks/>
-          </p:cNvCxnSpPr>
-          <p:nvPr/>
-        </p:nvCxnSpPr>
-        <p:spPr>
-          <a:xfrm>
-            <a:off x="6096000" y="3449310"/>
-            <a:ext cx="969365" cy="216403"/>
-          </a:xfrm>
-          <a:prstGeom prst="straightConnector1">
-            <a:avLst/>
-          </a:prstGeom>
-          <a:ln>
-            <a:tailEnd type="triangle"/>
-          </a:ln>
-        </p:spPr>
-        <p:style>
-          <a:lnRef idx="1">
-            <a:schemeClr val="accent1"/>
-          </a:lnRef>
-          <a:fillRef idx="0">
-            <a:schemeClr val="accent1"/>
-          </a:fillRef>
-          <a:effectRef idx="0">
-            <a:schemeClr val="accent1"/>
-          </a:effectRef>
-          <a:fontRef idx="minor">
-            <a:schemeClr val="tx1"/>
-          </a:fontRef>
-        </p:style>
-      </p:cxnSp>
-      <p:cxnSp>
-        <p:nvCxnSpPr>
-          <p:cNvPr id="15" name="Gerade Verbindung mit Pfeil 14">
-            <a:extLst>
-              <a:ext uri="{FF2B5EF4-FFF2-40B4-BE49-F238E27FC236}">
-                <a16:creationId xmlns:a16="http://schemas.microsoft.com/office/drawing/2014/main" id="{684FDD4B-75E5-457A-8170-BC4DDFFE014D}"/>
-              </a:ext>
-            </a:extLst>
-          </p:cNvPr>
-          <p:cNvCxnSpPr>
-            <a:cxnSpLocks/>
-          </p:cNvCxnSpPr>
-          <p:nvPr/>
-        </p:nvCxnSpPr>
-        <p:spPr>
-          <a:xfrm>
-            <a:off x="2886187" y="3428999"/>
-            <a:ext cx="328350" cy="0"/>
-          </a:xfrm>
-          <a:prstGeom prst="straightConnector1">
-            <a:avLst/>
-          </a:prstGeom>
-          <a:ln>
-            <a:tailEnd type="triangle"/>
-          </a:ln>
-        </p:spPr>
-        <p:style>
-          <a:lnRef idx="1">
-            <a:schemeClr val="accent1"/>
-          </a:lnRef>
-          <a:fillRef idx="0">
-            <a:schemeClr val="accent1"/>
-          </a:fillRef>
-          <a:effectRef idx="0">
-            <a:schemeClr val="accent1"/>
-          </a:effectRef>
-          <a:fontRef idx="minor">
-            <a:schemeClr val="tx1"/>
-          </a:fontRef>
-        </p:style>
-      </p:cxnSp>
-      <p:cxnSp>
-        <p:nvCxnSpPr>
-          <p:cNvPr id="17" name="Gerade Verbindung mit Pfeil 16">
-            <a:extLst>
-              <a:ext uri="{FF2B5EF4-FFF2-40B4-BE49-F238E27FC236}">
-                <a16:creationId xmlns:a16="http://schemas.microsoft.com/office/drawing/2014/main" id="{F14CE581-BC47-416B-81B3-F692705DA692}"/>
-              </a:ext>
-            </a:extLst>
-          </p:cNvPr>
-          <p:cNvCxnSpPr>
-            <a:cxnSpLocks/>
-          </p:cNvCxnSpPr>
-          <p:nvPr/>
-        </p:nvCxnSpPr>
-        <p:spPr>
-          <a:xfrm>
-            <a:off x="6178395" y="3752122"/>
-            <a:ext cx="1848005" cy="1632678"/>
-          </a:xfrm>
-          <a:prstGeom prst="straightConnector1">
-            <a:avLst/>
-          </a:prstGeom>
-          <a:ln>
-            <a:tailEnd type="triangle"/>
-          </a:ln>
-        </p:spPr>
-        <p:style>
-          <a:lnRef idx="1">
-            <a:schemeClr val="accent1"/>
-          </a:lnRef>
-          <a:fillRef idx="0">
-            <a:schemeClr val="accent1"/>
-          </a:fillRef>
-          <a:effectRef idx="0">
-            <a:schemeClr val="accent1"/>
-          </a:effectRef>
-          <a:fontRef idx="minor">
-            <a:schemeClr val="tx1"/>
-          </a:fontRef>
-        </p:style>
-      </p:cxnSp>
-      <p:sp>
-        <p:nvSpPr>
-          <p:cNvPr id="21" name="Textfeld 20">
-            <a:extLst>
-              <a:ext uri="{FF2B5EF4-FFF2-40B4-BE49-F238E27FC236}">
-                <a16:creationId xmlns:a16="http://schemas.microsoft.com/office/drawing/2014/main" id="{C30C8485-A5C8-4D82-AB6C-62E03891C1EF}"/>
-              </a:ext>
-            </a:extLst>
-          </p:cNvPr>
-          <p:cNvSpPr txBox="1"/>
-          <p:nvPr/>
-        </p:nvSpPr>
-        <p:spPr>
-          <a:xfrm>
-            <a:off x="838199" y="5079993"/>
-            <a:ext cx="5914293" cy="923330"/>
-          </a:xfrm>
-          <a:prstGeom prst="rect">
-            <a:avLst/>
-          </a:prstGeom>
-          <a:noFill/>
-        </p:spPr>
-        <p:txBody>
-          <a:bodyPr wrap="square" rtlCol="0">
-            <a:spAutoFit/>
-          </a:bodyPr>
-          <a:lstStyle/>
-          <a:p>
-            <a:r>
-              <a:rPr lang="de-DE" dirty="0"/>
-              <a:t>Neue Funktionen zum spalten- oder zeilenweise zusammenführen von Zellen, sowie Funktionen um diese wieder zu trennen.</a:t>
-            </a:r>
-          </a:p>
-        </p:txBody>
-      </p:sp>
-    </p:spTree>
-    <p:extLst>
-      <p:ext uri="{BB962C8B-B14F-4D97-AF65-F5344CB8AC3E}">
-        <p14:creationId xmlns:p14="http://schemas.microsoft.com/office/powerpoint/2010/main" val="1034647483"/>
-      </p:ext>
-    </p:extLst>
-  </p:cSld>
-  <p:clrMapOvr>
-    <a:masterClrMapping/>
-  </p:clrMapOvr>
-</p:sld>
-</file>
-
-<file path=ppt/slides/slide49.xml><?xml version="1.0" encoding="utf-8"?>
-<p:sld xmlns:a="http://schemas.openxmlformats.org/drawingml/2006/main" xmlns:r="http://schemas.openxmlformats.org/officeDocument/2006/relationships" xmlns:p="http://schemas.openxmlformats.org/presentationml/2006/main">
-  <p:cSld>
-    <p:spTree>
-      <p:nvGrpSpPr>
-        <p:cNvPr id="1" name=""/>
-        <p:cNvGrpSpPr/>
-        <p:nvPr/>
-      </p:nvGrpSpPr>
-      <p:grpSpPr>
-        <a:xfrm>
-          <a:off x="0" y="0"/>
-          <a:ext cx="0" cy="0"/>
-          <a:chOff x="0" y="0"/>
-          <a:chExt cx="0" cy="0"/>
-        </a:xfrm>
-      </p:grpSpPr>
-      <p:sp>
-        <p:nvSpPr>
-          <p:cNvPr id="2" name="Titel 1">
-            <a:extLst>
-              <a:ext uri="{FF2B5EF4-FFF2-40B4-BE49-F238E27FC236}">
-                <a16:creationId xmlns:a16="http://schemas.microsoft.com/office/drawing/2014/main" id="{F844096B-E1B1-474F-822E-A45C7BA9F1A7}"/>
-              </a:ext>
-            </a:extLst>
-          </p:cNvPr>
-          <p:cNvSpPr>
-            <a:spLocks noGrp="1"/>
-          </p:cNvSpPr>
-          <p:nvPr>
-            <p:ph type="title"/>
-          </p:nvPr>
-        </p:nvSpPr>
-        <p:spPr/>
-        <p:txBody>
-          <a:bodyPr/>
-          <a:lstStyle/>
-          <a:p>
-            <a:r>
-              <a:rPr lang="de-DE" dirty="0"/>
-              <a:t>Für Excel: Reguläre Ausdrücke auf Zellen anwenden</a:t>
-            </a:r>
-          </a:p>
-        </p:txBody>
-      </p:sp>
-      <p:pic>
-        <p:nvPicPr>
-          <p:cNvPr id="3" name="Grafik 2">
-            <a:extLst>
-              <a:ext uri="{FF2B5EF4-FFF2-40B4-BE49-F238E27FC236}">
-                <a16:creationId xmlns:a16="http://schemas.microsoft.com/office/drawing/2014/main" id="{7065A4C2-3BBD-4980-9452-7EC0014A9125}"/>
-              </a:ext>
-            </a:extLst>
-          </p:cNvPr>
-          <p:cNvPicPr>
-            <a:picLocks noChangeAspect="1"/>
-          </p:cNvPicPr>
-          <p:nvPr/>
-        </p:nvPicPr>
-        <p:blipFill>
-          <a:blip r:embed="rId2"/>
-          <a:stretch>
-            <a:fillRect/>
-          </a:stretch>
-        </p:blipFill>
-        <p:spPr>
-          <a:xfrm>
-            <a:off x="1930114" y="2703433"/>
-            <a:ext cx="2248214" cy="1600423"/>
-          </a:xfrm>
-          <a:prstGeom prst="rect">
-            <a:avLst/>
-          </a:prstGeom>
-        </p:spPr>
-      </p:pic>
-      <p:pic>
-        <p:nvPicPr>
-          <p:cNvPr id="4" name="Grafik 3">
-            <a:extLst>
-              <a:ext uri="{FF2B5EF4-FFF2-40B4-BE49-F238E27FC236}">
-                <a16:creationId xmlns:a16="http://schemas.microsoft.com/office/drawing/2014/main" id="{24AAF6A7-0B21-4832-8F7F-D233896E51F4}"/>
-              </a:ext>
-            </a:extLst>
-          </p:cNvPr>
-          <p:cNvPicPr>
-            <a:picLocks noChangeAspect="1"/>
-          </p:cNvPicPr>
-          <p:nvPr/>
-        </p:nvPicPr>
-        <p:blipFill>
-          <a:blip r:embed="rId3"/>
-          <a:stretch>
-            <a:fillRect/>
-          </a:stretch>
-        </p:blipFill>
-        <p:spPr>
-          <a:xfrm>
-            <a:off x="6246541" y="1476818"/>
-            <a:ext cx="4696480" cy="3381847"/>
-          </a:xfrm>
-          <a:prstGeom prst="rect">
-            <a:avLst/>
-          </a:prstGeom>
-        </p:spPr>
-      </p:pic>
-      <p:sp>
-        <p:nvSpPr>
-          <p:cNvPr id="5" name="Textfeld 4">
-            <a:extLst>
-              <a:ext uri="{FF2B5EF4-FFF2-40B4-BE49-F238E27FC236}">
-                <a16:creationId xmlns:a16="http://schemas.microsoft.com/office/drawing/2014/main" id="{D61631A0-D4D0-4971-AFF6-64C87360B81A}"/>
-              </a:ext>
-            </a:extLst>
-          </p:cNvPr>
-          <p:cNvSpPr txBox="1"/>
-          <p:nvPr/>
-        </p:nvSpPr>
-        <p:spPr>
-          <a:xfrm>
-            <a:off x="2217695" y="5316601"/>
-            <a:ext cx="8598798" cy="646331"/>
-          </a:xfrm>
-          <a:prstGeom prst="rect">
-            <a:avLst/>
-          </a:prstGeom>
-          <a:noFill/>
-        </p:spPr>
-        <p:txBody>
-          <a:bodyPr wrap="square" rtlCol="0">
-            <a:spAutoFit/>
-          </a:bodyPr>
-          <a:lstStyle/>
-          <a:p>
-            <a:r>
-              <a:rPr lang="de-DE" dirty="0"/>
-              <a:t>Mit regulären Ausdrücken können Filter erstellt werden, Daten getrennt werden, oder komplexe Suchen und Ersetzen Anfragen erstellt werden</a:t>
-            </a:r>
-          </a:p>
-        </p:txBody>
-      </p:sp>
-    </p:spTree>
-    <p:extLst>
-      <p:ext uri="{BB962C8B-B14F-4D97-AF65-F5344CB8AC3E}">
-        <p14:creationId xmlns:p14="http://schemas.microsoft.com/office/powerpoint/2010/main" val="3808148863"/>
-      </p:ext>
-    </p:extLst>
-  </p:cSld>
-  <p:clrMapOvr>
-    <a:masterClrMapping/>
-  </p:clrMapOvr>
-</p:sld>
-</file>
-
 <file path=ppt/slides/slide5.xml><?xml version="1.0" encoding="utf-8"?>
 <p:sld xmlns:a="http://schemas.openxmlformats.org/drawingml/2006/main" xmlns:r="http://schemas.openxmlformats.org/officeDocument/2006/relationships" xmlns:p="http://schemas.openxmlformats.org/presentationml/2006/main">
   <p:cSld>
@@ -38540,10 +37108,10 @@
       </p:grpSpPr>
       <p:graphicFrame>
         <p:nvGraphicFramePr>
-          <p:cNvPr id="5" name="think-cell data - do not delete" hidden="1">
+          <p:cNvPr id="14" name="think-cell data - do not delete" hidden="1">
             <a:extLst>
               <a:ext uri="{FF2B5EF4-FFF2-40B4-BE49-F238E27FC236}">
-                <a16:creationId xmlns:a16="http://schemas.microsoft.com/office/drawing/2014/main" id="{3F2898AB-8B0B-31B8-E446-A3D7BC1A9782}"/>
+                <a16:creationId xmlns:a16="http://schemas.microsoft.com/office/drawing/2014/main" id="{2CA4BE77-C99B-A484-EF69-C5E20B814EDF}"/>
               </a:ext>
             </a:extLst>
           </p:cNvPr>
@@ -38556,7 +37124,7 @@
             </p:custDataLst>
             <p:extLst>
               <p:ext uri="{D42A27DB-BD31-4B8C-83A1-F6EECF244321}">
-                <p14:modId xmlns:p14="http://schemas.microsoft.com/office/powerpoint/2010/main" val="2712840536"/>
+                <p14:modId xmlns:p14="http://schemas.microsoft.com/office/powerpoint/2010/main" val="2712584616"/>
               </p:ext>
             </p:extLst>
           </p:nvPr>
@@ -38609,7 +37177,7 @@
           <p:cNvPr id="2" name="Titel 1">
             <a:extLst>
               <a:ext uri="{FF2B5EF4-FFF2-40B4-BE49-F238E27FC236}">
-                <a16:creationId xmlns:a16="http://schemas.microsoft.com/office/drawing/2014/main" id="{EA65AC97-7BB1-3E98-0D76-C51E6EE702A7}"/>
+                <a16:creationId xmlns:a16="http://schemas.microsoft.com/office/drawing/2014/main" id="{7B746243-3BAC-B12A-47F8-882032E76405}"/>
               </a:ext>
             </a:extLst>
           </p:cNvPr>
@@ -38626,91 +37194,19 @@
           <a:lstStyle/>
           <a:p>
             <a:r>
-              <a:rPr lang="de-DE" dirty="0"/>
-              <a:t>Verbesserte UI</a:t>
-            </a:r>
-          </a:p>
-        </p:txBody>
-      </p:sp>
-      <p:sp>
-        <p:nvSpPr>
-          <p:cNvPr id="11" name="Textfeld 10">
+              <a:rPr lang="de-DE"/>
+              <a:t>Funktion Auto-Gruppieren</a:t>
+            </a:r>
+            <a:endParaRPr lang="de-DE" dirty="0"/>
+          </a:p>
+        </p:txBody>
+      </p:sp>
+      <p:sp>
+        <p:nvSpPr>
+          <p:cNvPr id="4" name="Rechteck 3">
             <a:extLst>
               <a:ext uri="{FF2B5EF4-FFF2-40B4-BE49-F238E27FC236}">
-                <a16:creationId xmlns:a16="http://schemas.microsoft.com/office/drawing/2014/main" id="{FF663BB1-D2E8-AED3-1669-BD05D88BECB5}"/>
-              </a:ext>
-            </a:extLst>
-          </p:cNvPr>
-          <p:cNvSpPr txBox="1"/>
-          <p:nvPr/>
-        </p:nvSpPr>
-        <p:spPr>
-          <a:xfrm>
-            <a:off x="838200" y="2282831"/>
-            <a:ext cx="10515600" cy="646331"/>
-          </a:xfrm>
-          <a:prstGeom prst="rect">
-            <a:avLst/>
-          </a:prstGeom>
-          <a:noFill/>
-        </p:spPr>
-        <p:txBody>
-          <a:bodyPr wrap="square" rtlCol="0">
-            <a:spAutoFit/>
-          </a:bodyPr>
-          <a:lstStyle/>
-          <a:p>
-            <a:r>
-              <a:rPr lang="de-DE" dirty="0"/>
-              <a:t>Bei typischer Notebook-Auflösung (bspw. 2560x1600 mit 150% Skalierung) passt die gesamte Toolbar ohne Einklappen von Gruppen auf den Bildschirm (insb. unter </a:t>
-            </a:r>
-            <a:r>
-              <a:rPr lang="de-DE" dirty="0" err="1"/>
-              <a:t>Win</a:t>
-            </a:r>
-            <a:r>
-              <a:rPr lang="de-DE" dirty="0"/>
-              <a:t> 11)</a:t>
-            </a:r>
-          </a:p>
-        </p:txBody>
-      </p:sp>
-      <p:pic>
-        <p:nvPicPr>
-          <p:cNvPr id="14" name="Grafik 13">
-            <a:extLst>
-              <a:ext uri="{FF2B5EF4-FFF2-40B4-BE49-F238E27FC236}">
-                <a16:creationId xmlns:a16="http://schemas.microsoft.com/office/drawing/2014/main" id="{8CBA523A-C877-B886-8E76-C646866158A5}"/>
-              </a:ext>
-            </a:extLst>
-          </p:cNvPr>
-          <p:cNvPicPr>
-            <a:picLocks noChangeAspect="1"/>
-          </p:cNvPicPr>
-          <p:nvPr/>
-        </p:nvPicPr>
-        <p:blipFill>
-          <a:blip r:embed="rId5"/>
-          <a:stretch>
-            <a:fillRect/>
-          </a:stretch>
-        </p:blipFill>
-        <p:spPr>
-          <a:xfrm>
-            <a:off x="0" y="4932332"/>
-            <a:ext cx="12192000" cy="725232"/>
-          </a:xfrm>
-          <a:prstGeom prst="rect">
-            <a:avLst/>
-          </a:prstGeom>
-        </p:spPr>
-      </p:pic>
-      <p:sp>
-        <p:nvSpPr>
-          <p:cNvPr id="15" name="Pfeil: nach unten 14">
-            <a:extLst>
-              <a:ext uri="{FF2B5EF4-FFF2-40B4-BE49-F238E27FC236}">
-                <a16:creationId xmlns:a16="http://schemas.microsoft.com/office/drawing/2014/main" id="{5110ABB1-EC34-1746-540D-87E7D5D42202}"/>
+                <a16:creationId xmlns:a16="http://schemas.microsoft.com/office/drawing/2014/main" id="{DCBD4C88-83B5-C7AF-59CA-43C2C07D834C}"/>
               </a:ext>
             </a:extLst>
           </p:cNvPr>
@@ -38719,10 +37215,10 @@
         </p:nvSpPr>
         <p:spPr>
           <a:xfrm>
-            <a:off x="5939118" y="4313312"/>
-            <a:ext cx="313765" cy="322730"/>
-          </a:xfrm>
-          <a:prstGeom prst="downArrow">
+            <a:off x="4966447" y="1546411"/>
+            <a:ext cx="2259105" cy="1882589"/>
+          </a:xfrm>
+          <a:prstGeom prst="rect">
             <a:avLst/>
           </a:prstGeom>
         </p:spPr>
@@ -38747,16 +37243,1051 @@
           <a:lstStyle/>
           <a:p>
             <a:pPr algn="ctr"/>
-            <a:endParaRPr lang="en-US"/>
-          </a:p>
-        </p:txBody>
-      </p:sp>
+            <a:endParaRPr lang="de-DE" dirty="0"/>
+          </a:p>
+        </p:txBody>
+      </p:sp>
+      <p:sp>
+        <p:nvSpPr>
+          <p:cNvPr id="6" name="Rechteck 5">
+            <a:extLst>
+              <a:ext uri="{FF2B5EF4-FFF2-40B4-BE49-F238E27FC236}">
+                <a16:creationId xmlns:a16="http://schemas.microsoft.com/office/drawing/2014/main" id="{FD3BE575-CF60-189C-36E3-9BBB0AE4E725}"/>
+              </a:ext>
+            </a:extLst>
+          </p:cNvPr>
+          <p:cNvSpPr/>
+          <p:nvPr/>
+        </p:nvSpPr>
+        <p:spPr>
+          <a:xfrm>
+            <a:off x="5118849" y="1734670"/>
+            <a:ext cx="1954304" cy="394447"/>
+          </a:xfrm>
+          <a:prstGeom prst="rect">
+            <a:avLst/>
+          </a:prstGeom>
+          <a:solidFill>
+            <a:schemeClr val="tx2"/>
+          </a:solidFill>
+        </p:spPr>
+        <p:style>
+          <a:lnRef idx="2">
+            <a:schemeClr val="accent1">
+              <a:shade val="15000"/>
+            </a:schemeClr>
+          </a:lnRef>
+          <a:fillRef idx="1">
+            <a:schemeClr val="accent1"/>
+          </a:fillRef>
+          <a:effectRef idx="0">
+            <a:schemeClr val="accent1"/>
+          </a:effectRef>
+          <a:fontRef idx="minor">
+            <a:schemeClr val="lt1"/>
+          </a:fontRef>
+        </p:style>
+        <p:txBody>
+          <a:bodyPr rtlCol="0" anchor="ctr"/>
+          <a:lstStyle/>
+          <a:p>
+            <a:pPr algn="ctr"/>
+            <a:r>
+              <a:rPr lang="de-DE"/>
+              <a:t>A</a:t>
+            </a:r>
+            <a:endParaRPr lang="de-DE" dirty="0"/>
+          </a:p>
+        </p:txBody>
+      </p:sp>
+      <p:sp>
+        <p:nvSpPr>
+          <p:cNvPr id="8" name="Rechteck 7">
+            <a:extLst>
+              <a:ext uri="{FF2B5EF4-FFF2-40B4-BE49-F238E27FC236}">
+                <a16:creationId xmlns:a16="http://schemas.microsoft.com/office/drawing/2014/main" id="{880F4995-031B-030B-20EA-EA4CEC091AE5}"/>
+              </a:ext>
+            </a:extLst>
+          </p:cNvPr>
+          <p:cNvSpPr/>
+          <p:nvPr/>
+        </p:nvSpPr>
+        <p:spPr>
+          <a:xfrm>
+            <a:off x="5118849" y="2320737"/>
+            <a:ext cx="1954304" cy="394447"/>
+          </a:xfrm>
+          <a:prstGeom prst="rect">
+            <a:avLst/>
+          </a:prstGeom>
+          <a:solidFill>
+            <a:schemeClr val="tx2"/>
+          </a:solidFill>
+        </p:spPr>
+        <p:style>
+          <a:lnRef idx="2">
+            <a:schemeClr val="accent1">
+              <a:shade val="15000"/>
+            </a:schemeClr>
+          </a:lnRef>
+          <a:fillRef idx="1">
+            <a:schemeClr val="accent1"/>
+          </a:fillRef>
+          <a:effectRef idx="0">
+            <a:schemeClr val="accent1"/>
+          </a:effectRef>
+          <a:fontRef idx="minor">
+            <a:schemeClr val="lt1"/>
+          </a:fontRef>
+        </p:style>
+        <p:txBody>
+          <a:bodyPr rtlCol="0" anchor="ctr"/>
+          <a:lstStyle/>
+          <a:p>
+            <a:pPr algn="ctr"/>
+            <a:r>
+              <a:rPr lang="de-DE"/>
+              <a:t>B</a:t>
+            </a:r>
+            <a:endParaRPr lang="de-DE" dirty="0"/>
+          </a:p>
+        </p:txBody>
+      </p:sp>
+      <p:sp>
+        <p:nvSpPr>
+          <p:cNvPr id="9" name="Rechteck 8">
+            <a:extLst>
+              <a:ext uri="{FF2B5EF4-FFF2-40B4-BE49-F238E27FC236}">
+                <a16:creationId xmlns:a16="http://schemas.microsoft.com/office/drawing/2014/main" id="{B5A67D58-CFB1-434D-C153-046912B98971}"/>
+              </a:ext>
+            </a:extLst>
+          </p:cNvPr>
+          <p:cNvSpPr/>
+          <p:nvPr/>
+        </p:nvSpPr>
+        <p:spPr>
+          <a:xfrm>
+            <a:off x="5118849" y="2906805"/>
+            <a:ext cx="1954304" cy="394447"/>
+          </a:xfrm>
+          <a:prstGeom prst="rect">
+            <a:avLst/>
+          </a:prstGeom>
+          <a:solidFill>
+            <a:schemeClr val="tx2"/>
+          </a:solidFill>
+        </p:spPr>
+        <p:style>
+          <a:lnRef idx="2">
+            <a:schemeClr val="accent1">
+              <a:shade val="15000"/>
+            </a:schemeClr>
+          </a:lnRef>
+          <a:fillRef idx="1">
+            <a:schemeClr val="accent1"/>
+          </a:fillRef>
+          <a:effectRef idx="0">
+            <a:schemeClr val="accent1"/>
+          </a:effectRef>
+          <a:fontRef idx="minor">
+            <a:schemeClr val="lt1"/>
+          </a:fontRef>
+        </p:style>
+        <p:txBody>
+          <a:bodyPr rtlCol="0" anchor="ctr"/>
+          <a:lstStyle/>
+          <a:p>
+            <a:pPr algn="ctr"/>
+            <a:r>
+              <a:rPr lang="de-DE"/>
+              <a:t>C</a:t>
+            </a:r>
+            <a:endParaRPr lang="de-DE" dirty="0"/>
+          </a:p>
+        </p:txBody>
+      </p:sp>
+      <p:sp>
+        <p:nvSpPr>
+          <p:cNvPr id="5" name="Rechteck 4">
+            <a:extLst>
+              <a:ext uri="{FF2B5EF4-FFF2-40B4-BE49-F238E27FC236}">
+                <a16:creationId xmlns:a16="http://schemas.microsoft.com/office/drawing/2014/main" id="{AB894D3B-538A-438D-53A8-1B8B72B488BB}"/>
+              </a:ext>
+            </a:extLst>
+          </p:cNvPr>
+          <p:cNvSpPr/>
+          <p:nvPr/>
+        </p:nvSpPr>
+        <p:spPr>
+          <a:xfrm>
+            <a:off x="7566212" y="1546412"/>
+            <a:ext cx="1949824" cy="730624"/>
+          </a:xfrm>
+          <a:prstGeom prst="rect">
+            <a:avLst/>
+          </a:prstGeom>
+        </p:spPr>
+        <p:style>
+          <a:lnRef idx="2">
+            <a:schemeClr val="accent1">
+              <a:shade val="15000"/>
+            </a:schemeClr>
+          </a:lnRef>
+          <a:fillRef idx="1">
+            <a:schemeClr val="accent1"/>
+          </a:fillRef>
+          <a:effectRef idx="0">
+            <a:schemeClr val="accent1"/>
+          </a:effectRef>
+          <a:fontRef idx="minor">
+            <a:schemeClr val="lt1"/>
+          </a:fontRef>
+        </p:style>
+        <p:txBody>
+          <a:bodyPr rtlCol="0" anchor="ctr"/>
+          <a:lstStyle/>
+          <a:p>
+            <a:pPr algn="ctr"/>
+            <a:endParaRPr lang="de-DE" dirty="0"/>
+          </a:p>
+        </p:txBody>
+      </p:sp>
+      <p:sp>
+        <p:nvSpPr>
+          <p:cNvPr id="7" name="Rechteck 6">
+            <a:extLst>
+              <a:ext uri="{FF2B5EF4-FFF2-40B4-BE49-F238E27FC236}">
+                <a16:creationId xmlns:a16="http://schemas.microsoft.com/office/drawing/2014/main" id="{2A3B6802-3FFD-9DC1-8BAC-200B6CE74278}"/>
+              </a:ext>
+            </a:extLst>
+          </p:cNvPr>
+          <p:cNvSpPr/>
+          <p:nvPr/>
+        </p:nvSpPr>
+        <p:spPr>
+          <a:xfrm>
+            <a:off x="7566212" y="2698376"/>
+            <a:ext cx="1949824" cy="730624"/>
+          </a:xfrm>
+          <a:prstGeom prst="rect">
+            <a:avLst/>
+          </a:prstGeom>
+        </p:spPr>
+        <p:style>
+          <a:lnRef idx="2">
+            <a:schemeClr val="accent1">
+              <a:shade val="15000"/>
+            </a:schemeClr>
+          </a:lnRef>
+          <a:fillRef idx="1">
+            <a:schemeClr val="accent1"/>
+          </a:fillRef>
+          <a:effectRef idx="0">
+            <a:schemeClr val="accent1"/>
+          </a:effectRef>
+          <a:fontRef idx="minor">
+            <a:schemeClr val="lt1"/>
+          </a:fontRef>
+        </p:style>
+        <p:txBody>
+          <a:bodyPr rtlCol="0" anchor="ctr"/>
+          <a:lstStyle/>
+          <a:p>
+            <a:pPr algn="ctr"/>
+            <a:endParaRPr lang="de-DE" dirty="0"/>
+          </a:p>
+        </p:txBody>
+      </p:sp>
+      <p:sp>
+        <p:nvSpPr>
+          <p:cNvPr id="10" name="Rechteck 9">
+            <a:extLst>
+              <a:ext uri="{FF2B5EF4-FFF2-40B4-BE49-F238E27FC236}">
+                <a16:creationId xmlns:a16="http://schemas.microsoft.com/office/drawing/2014/main" id="{D657ADDD-4340-6D2F-A2A4-3E3F5826C89B}"/>
+              </a:ext>
+            </a:extLst>
+          </p:cNvPr>
+          <p:cNvSpPr/>
+          <p:nvPr/>
+        </p:nvSpPr>
+        <p:spPr>
+          <a:xfrm>
+            <a:off x="7696616" y="1597959"/>
+            <a:ext cx="794831" cy="611841"/>
+          </a:xfrm>
+          <a:prstGeom prst="rect">
+            <a:avLst/>
+          </a:prstGeom>
+          <a:solidFill>
+            <a:schemeClr val="tx2"/>
+          </a:solidFill>
+        </p:spPr>
+        <p:style>
+          <a:lnRef idx="2">
+            <a:schemeClr val="accent1">
+              <a:shade val="15000"/>
+            </a:schemeClr>
+          </a:lnRef>
+          <a:fillRef idx="1">
+            <a:schemeClr val="accent1"/>
+          </a:fillRef>
+          <a:effectRef idx="0">
+            <a:schemeClr val="accent1"/>
+          </a:effectRef>
+          <a:fontRef idx="minor">
+            <a:schemeClr val="lt1"/>
+          </a:fontRef>
+        </p:style>
+        <p:txBody>
+          <a:bodyPr rtlCol="0" anchor="ctr"/>
+          <a:lstStyle/>
+          <a:p>
+            <a:pPr algn="ctr"/>
+            <a:r>
+              <a:rPr lang="de-DE"/>
+              <a:t>1</a:t>
+            </a:r>
+            <a:endParaRPr lang="de-DE" dirty="0"/>
+          </a:p>
+        </p:txBody>
+      </p:sp>
+      <p:sp>
+        <p:nvSpPr>
+          <p:cNvPr id="11" name="Rechteck 10">
+            <a:extLst>
+              <a:ext uri="{FF2B5EF4-FFF2-40B4-BE49-F238E27FC236}">
+                <a16:creationId xmlns:a16="http://schemas.microsoft.com/office/drawing/2014/main" id="{76A23486-2920-9BEC-5B79-30F4A9472250}"/>
+              </a:ext>
+            </a:extLst>
+          </p:cNvPr>
+          <p:cNvSpPr/>
+          <p:nvPr/>
+        </p:nvSpPr>
+        <p:spPr>
+          <a:xfrm>
+            <a:off x="8578382" y="1597959"/>
+            <a:ext cx="794831" cy="611841"/>
+          </a:xfrm>
+          <a:prstGeom prst="rect">
+            <a:avLst/>
+          </a:prstGeom>
+          <a:solidFill>
+            <a:schemeClr val="tx2"/>
+          </a:solidFill>
+        </p:spPr>
+        <p:style>
+          <a:lnRef idx="2">
+            <a:schemeClr val="accent1">
+              <a:shade val="15000"/>
+            </a:schemeClr>
+          </a:lnRef>
+          <a:fillRef idx="1">
+            <a:schemeClr val="accent1"/>
+          </a:fillRef>
+          <a:effectRef idx="0">
+            <a:schemeClr val="accent1"/>
+          </a:effectRef>
+          <a:fontRef idx="minor">
+            <a:schemeClr val="lt1"/>
+          </a:fontRef>
+        </p:style>
+        <p:txBody>
+          <a:bodyPr rtlCol="0" anchor="ctr"/>
+          <a:lstStyle/>
+          <a:p>
+            <a:pPr algn="ctr"/>
+            <a:r>
+              <a:rPr lang="de-DE"/>
+              <a:t>2</a:t>
+            </a:r>
+            <a:endParaRPr lang="de-DE" dirty="0"/>
+          </a:p>
+        </p:txBody>
+      </p:sp>
+      <p:sp>
+        <p:nvSpPr>
+          <p:cNvPr id="12" name="Rechteck 11">
+            <a:extLst>
+              <a:ext uri="{FF2B5EF4-FFF2-40B4-BE49-F238E27FC236}">
+                <a16:creationId xmlns:a16="http://schemas.microsoft.com/office/drawing/2014/main" id="{ADC31D66-FF25-0279-99E4-B51289C4E766}"/>
+              </a:ext>
+            </a:extLst>
+          </p:cNvPr>
+          <p:cNvSpPr/>
+          <p:nvPr/>
+        </p:nvSpPr>
+        <p:spPr>
+          <a:xfrm>
+            <a:off x="7696616" y="2751044"/>
+            <a:ext cx="794831" cy="611841"/>
+          </a:xfrm>
+          <a:prstGeom prst="rect">
+            <a:avLst/>
+          </a:prstGeom>
+          <a:solidFill>
+            <a:schemeClr val="tx2"/>
+          </a:solidFill>
+        </p:spPr>
+        <p:style>
+          <a:lnRef idx="2">
+            <a:schemeClr val="accent1">
+              <a:shade val="15000"/>
+            </a:schemeClr>
+          </a:lnRef>
+          <a:fillRef idx="1">
+            <a:schemeClr val="accent1"/>
+          </a:fillRef>
+          <a:effectRef idx="0">
+            <a:schemeClr val="accent1"/>
+          </a:effectRef>
+          <a:fontRef idx="minor">
+            <a:schemeClr val="lt1"/>
+          </a:fontRef>
+        </p:style>
+        <p:txBody>
+          <a:bodyPr rtlCol="0" anchor="ctr"/>
+          <a:lstStyle/>
+          <a:p>
+            <a:pPr algn="ctr"/>
+            <a:r>
+              <a:rPr lang="de-DE"/>
+              <a:t>X</a:t>
+            </a:r>
+            <a:endParaRPr lang="de-DE" dirty="0"/>
+          </a:p>
+        </p:txBody>
+      </p:sp>
+      <p:sp>
+        <p:nvSpPr>
+          <p:cNvPr id="13" name="Rechteck 12">
+            <a:extLst>
+              <a:ext uri="{FF2B5EF4-FFF2-40B4-BE49-F238E27FC236}">
+                <a16:creationId xmlns:a16="http://schemas.microsoft.com/office/drawing/2014/main" id="{CDA4C86F-9CA7-6C08-5C0C-A7A12106D250}"/>
+              </a:ext>
+            </a:extLst>
+          </p:cNvPr>
+          <p:cNvSpPr/>
+          <p:nvPr/>
+        </p:nvSpPr>
+        <p:spPr>
+          <a:xfrm>
+            <a:off x="8578382" y="2751044"/>
+            <a:ext cx="794831" cy="611841"/>
+          </a:xfrm>
+          <a:prstGeom prst="rect">
+            <a:avLst/>
+          </a:prstGeom>
+          <a:solidFill>
+            <a:schemeClr val="tx2"/>
+          </a:solidFill>
+        </p:spPr>
+        <p:style>
+          <a:lnRef idx="2">
+            <a:schemeClr val="accent1">
+              <a:shade val="15000"/>
+            </a:schemeClr>
+          </a:lnRef>
+          <a:fillRef idx="1">
+            <a:schemeClr val="accent1"/>
+          </a:fillRef>
+          <a:effectRef idx="0">
+            <a:schemeClr val="accent1"/>
+          </a:effectRef>
+          <a:fontRef idx="minor">
+            <a:schemeClr val="lt1"/>
+          </a:fontRef>
+        </p:style>
+        <p:txBody>
+          <a:bodyPr rtlCol="0" anchor="ctr"/>
+          <a:lstStyle/>
+          <a:p>
+            <a:pPr algn="ctr"/>
+            <a:r>
+              <a:rPr lang="de-DE"/>
+              <a:t>Y</a:t>
+            </a:r>
+            <a:endParaRPr lang="de-DE" dirty="0"/>
+          </a:p>
+        </p:txBody>
+      </p:sp>
+      <p:grpSp>
+        <p:nvGrpSpPr>
+          <p:cNvPr id="33" name="Gruppieren 32">
+            <a:extLst>
+              <a:ext uri="{FF2B5EF4-FFF2-40B4-BE49-F238E27FC236}">
+                <a16:creationId xmlns:a16="http://schemas.microsoft.com/office/drawing/2014/main" id="{7929F89F-858F-0652-D3C8-0FCA61337C5C}"/>
+              </a:ext>
+            </a:extLst>
+          </p:cNvPr>
+          <p:cNvGrpSpPr/>
+          <p:nvPr/>
+        </p:nvGrpSpPr>
+        <p:grpSpPr>
+          <a:xfrm>
+            <a:off x="6804211" y="3993774"/>
+            <a:ext cx="2259105" cy="1882589"/>
+            <a:chOff x="6804211" y="3307976"/>
+            <a:chExt cx="2259105" cy="1882589"/>
+          </a:xfrm>
+        </p:grpSpPr>
+        <p:sp>
+          <p:nvSpPr>
+            <p:cNvPr id="19" name="Rechteck 18">
+              <a:extLst>
+                <a:ext uri="{FF2B5EF4-FFF2-40B4-BE49-F238E27FC236}">
+                  <a16:creationId xmlns:a16="http://schemas.microsoft.com/office/drawing/2014/main" id="{A7639287-0ED7-6C9C-3468-B44393CE345F}"/>
+                </a:ext>
+              </a:extLst>
+            </p:cNvPr>
+            <p:cNvSpPr/>
+            <p:nvPr/>
+          </p:nvSpPr>
+          <p:spPr>
+            <a:xfrm>
+              <a:off x="6804211" y="3307976"/>
+              <a:ext cx="2259105" cy="1882589"/>
+            </a:xfrm>
+            <a:prstGeom prst="rect">
+              <a:avLst/>
+            </a:prstGeom>
+          </p:spPr>
+          <p:style>
+            <a:lnRef idx="2">
+              <a:schemeClr val="accent1">
+                <a:shade val="15000"/>
+              </a:schemeClr>
+            </a:lnRef>
+            <a:fillRef idx="1">
+              <a:schemeClr val="accent1"/>
+            </a:fillRef>
+            <a:effectRef idx="0">
+              <a:schemeClr val="accent1"/>
+            </a:effectRef>
+            <a:fontRef idx="minor">
+              <a:schemeClr val="lt1"/>
+            </a:fontRef>
+          </p:style>
+          <p:txBody>
+            <a:bodyPr rtlCol="0" anchor="ctr"/>
+            <a:lstStyle/>
+            <a:p>
+              <a:pPr algn="ctr"/>
+              <a:endParaRPr lang="de-DE" dirty="0"/>
+            </a:p>
+          </p:txBody>
+        </p:sp>
+        <p:sp>
+          <p:nvSpPr>
+            <p:cNvPr id="20" name="Rechteck 19">
+              <a:extLst>
+                <a:ext uri="{FF2B5EF4-FFF2-40B4-BE49-F238E27FC236}">
+                  <a16:creationId xmlns:a16="http://schemas.microsoft.com/office/drawing/2014/main" id="{2330F30C-2952-C167-4374-378B837C8B3F}"/>
+                </a:ext>
+              </a:extLst>
+            </p:cNvPr>
+            <p:cNvSpPr/>
+            <p:nvPr/>
+          </p:nvSpPr>
+          <p:spPr>
+            <a:xfrm>
+              <a:off x="6956613" y="3496235"/>
+              <a:ext cx="1954304" cy="394447"/>
+            </a:xfrm>
+            <a:prstGeom prst="rect">
+              <a:avLst/>
+            </a:prstGeom>
+            <a:solidFill>
+              <a:schemeClr val="tx2"/>
+            </a:solidFill>
+          </p:spPr>
+          <p:style>
+            <a:lnRef idx="2">
+              <a:schemeClr val="accent1">
+                <a:shade val="15000"/>
+              </a:schemeClr>
+            </a:lnRef>
+            <a:fillRef idx="1">
+              <a:schemeClr val="accent1"/>
+            </a:fillRef>
+            <a:effectRef idx="0">
+              <a:schemeClr val="accent1"/>
+            </a:effectRef>
+            <a:fontRef idx="minor">
+              <a:schemeClr val="lt1"/>
+            </a:fontRef>
+          </p:style>
+          <p:txBody>
+            <a:bodyPr rtlCol="0" anchor="ctr"/>
+            <a:lstStyle/>
+            <a:p>
+              <a:pPr algn="ctr"/>
+              <a:r>
+                <a:rPr lang="de-DE"/>
+                <a:t>A</a:t>
+              </a:r>
+              <a:endParaRPr lang="de-DE" dirty="0"/>
+            </a:p>
+          </p:txBody>
+        </p:sp>
+        <p:sp>
+          <p:nvSpPr>
+            <p:cNvPr id="21" name="Rechteck 20">
+              <a:extLst>
+                <a:ext uri="{FF2B5EF4-FFF2-40B4-BE49-F238E27FC236}">
+                  <a16:creationId xmlns:a16="http://schemas.microsoft.com/office/drawing/2014/main" id="{61E11F0D-5E19-33BC-31C0-4A583B6D4138}"/>
+                </a:ext>
+              </a:extLst>
+            </p:cNvPr>
+            <p:cNvSpPr/>
+            <p:nvPr/>
+          </p:nvSpPr>
+          <p:spPr>
+            <a:xfrm>
+              <a:off x="6956613" y="4082302"/>
+              <a:ext cx="1954304" cy="394447"/>
+            </a:xfrm>
+            <a:prstGeom prst="rect">
+              <a:avLst/>
+            </a:prstGeom>
+            <a:solidFill>
+              <a:schemeClr val="tx2"/>
+            </a:solidFill>
+          </p:spPr>
+          <p:style>
+            <a:lnRef idx="2">
+              <a:schemeClr val="accent1">
+                <a:shade val="15000"/>
+              </a:schemeClr>
+            </a:lnRef>
+            <a:fillRef idx="1">
+              <a:schemeClr val="accent1"/>
+            </a:fillRef>
+            <a:effectRef idx="0">
+              <a:schemeClr val="accent1"/>
+            </a:effectRef>
+            <a:fontRef idx="minor">
+              <a:schemeClr val="lt1"/>
+            </a:fontRef>
+          </p:style>
+          <p:txBody>
+            <a:bodyPr rtlCol="0" anchor="ctr"/>
+            <a:lstStyle/>
+            <a:p>
+              <a:pPr algn="ctr"/>
+              <a:r>
+                <a:rPr lang="de-DE"/>
+                <a:t>B</a:t>
+              </a:r>
+              <a:endParaRPr lang="de-DE" dirty="0"/>
+            </a:p>
+          </p:txBody>
+        </p:sp>
+        <p:sp>
+          <p:nvSpPr>
+            <p:cNvPr id="22" name="Rechteck 21">
+              <a:extLst>
+                <a:ext uri="{FF2B5EF4-FFF2-40B4-BE49-F238E27FC236}">
+                  <a16:creationId xmlns:a16="http://schemas.microsoft.com/office/drawing/2014/main" id="{C58EEFBE-DC9D-79C7-61FF-A168A1A03411}"/>
+                </a:ext>
+              </a:extLst>
+            </p:cNvPr>
+            <p:cNvSpPr/>
+            <p:nvPr/>
+          </p:nvSpPr>
+          <p:spPr>
+            <a:xfrm>
+              <a:off x="6956613" y="4668370"/>
+              <a:ext cx="1954304" cy="394447"/>
+            </a:xfrm>
+            <a:prstGeom prst="rect">
+              <a:avLst/>
+            </a:prstGeom>
+            <a:solidFill>
+              <a:schemeClr val="tx2"/>
+            </a:solidFill>
+          </p:spPr>
+          <p:style>
+            <a:lnRef idx="2">
+              <a:schemeClr val="accent1">
+                <a:shade val="15000"/>
+              </a:schemeClr>
+            </a:lnRef>
+            <a:fillRef idx="1">
+              <a:schemeClr val="accent1"/>
+            </a:fillRef>
+            <a:effectRef idx="0">
+              <a:schemeClr val="accent1"/>
+            </a:effectRef>
+            <a:fontRef idx="minor">
+              <a:schemeClr val="lt1"/>
+            </a:fontRef>
+          </p:style>
+          <p:txBody>
+            <a:bodyPr rtlCol="0" anchor="ctr"/>
+            <a:lstStyle/>
+            <a:p>
+              <a:pPr algn="ctr"/>
+              <a:r>
+                <a:rPr lang="de-DE"/>
+                <a:t>C</a:t>
+              </a:r>
+              <a:endParaRPr lang="de-DE" dirty="0"/>
+            </a:p>
+          </p:txBody>
+        </p:sp>
+      </p:grpSp>
+      <p:grpSp>
+        <p:nvGrpSpPr>
+          <p:cNvPr id="34" name="Gruppieren 33">
+            <a:extLst>
+              <a:ext uri="{FF2B5EF4-FFF2-40B4-BE49-F238E27FC236}">
+                <a16:creationId xmlns:a16="http://schemas.microsoft.com/office/drawing/2014/main" id="{347C00EF-E1C4-7AFD-B2BA-0EDA162B4C6F}"/>
+              </a:ext>
+            </a:extLst>
+          </p:cNvPr>
+          <p:cNvGrpSpPr/>
+          <p:nvPr/>
+        </p:nvGrpSpPr>
+        <p:grpSpPr>
+          <a:xfrm>
+            <a:off x="9403976" y="3993775"/>
+            <a:ext cx="1949824" cy="730624"/>
+            <a:chOff x="9403976" y="3307977"/>
+            <a:chExt cx="1949824" cy="730624"/>
+          </a:xfrm>
+        </p:grpSpPr>
+        <p:sp>
+          <p:nvSpPr>
+            <p:cNvPr id="23" name="Rechteck 22">
+              <a:extLst>
+                <a:ext uri="{FF2B5EF4-FFF2-40B4-BE49-F238E27FC236}">
+                  <a16:creationId xmlns:a16="http://schemas.microsoft.com/office/drawing/2014/main" id="{5C80F88B-CB2A-9C41-A307-F810D7B39A79}"/>
+                </a:ext>
+              </a:extLst>
+            </p:cNvPr>
+            <p:cNvSpPr/>
+            <p:nvPr/>
+          </p:nvSpPr>
+          <p:spPr>
+            <a:xfrm>
+              <a:off x="9403976" y="3307977"/>
+              <a:ext cx="1949824" cy="730624"/>
+            </a:xfrm>
+            <a:prstGeom prst="rect">
+              <a:avLst/>
+            </a:prstGeom>
+          </p:spPr>
+          <p:style>
+            <a:lnRef idx="2">
+              <a:schemeClr val="accent1">
+                <a:shade val="15000"/>
+              </a:schemeClr>
+            </a:lnRef>
+            <a:fillRef idx="1">
+              <a:schemeClr val="accent1"/>
+            </a:fillRef>
+            <a:effectRef idx="0">
+              <a:schemeClr val="accent1"/>
+            </a:effectRef>
+            <a:fontRef idx="minor">
+              <a:schemeClr val="lt1"/>
+            </a:fontRef>
+          </p:style>
+          <p:txBody>
+            <a:bodyPr rtlCol="0" anchor="ctr"/>
+            <a:lstStyle/>
+            <a:p>
+              <a:pPr algn="ctr"/>
+              <a:endParaRPr lang="de-DE" dirty="0"/>
+            </a:p>
+          </p:txBody>
+        </p:sp>
+        <p:sp>
+          <p:nvSpPr>
+            <p:cNvPr id="25" name="Rechteck 24">
+              <a:extLst>
+                <a:ext uri="{FF2B5EF4-FFF2-40B4-BE49-F238E27FC236}">
+                  <a16:creationId xmlns:a16="http://schemas.microsoft.com/office/drawing/2014/main" id="{C4742D42-927D-D2E5-A8F3-D6992ADB1CBE}"/>
+                </a:ext>
+              </a:extLst>
+            </p:cNvPr>
+            <p:cNvSpPr/>
+            <p:nvPr/>
+          </p:nvSpPr>
+          <p:spPr>
+            <a:xfrm>
+              <a:off x="9534380" y="3359524"/>
+              <a:ext cx="794831" cy="611841"/>
+            </a:xfrm>
+            <a:prstGeom prst="rect">
+              <a:avLst/>
+            </a:prstGeom>
+            <a:solidFill>
+              <a:schemeClr val="tx2"/>
+            </a:solidFill>
+          </p:spPr>
+          <p:style>
+            <a:lnRef idx="2">
+              <a:schemeClr val="accent1">
+                <a:shade val="15000"/>
+              </a:schemeClr>
+            </a:lnRef>
+            <a:fillRef idx="1">
+              <a:schemeClr val="accent1"/>
+            </a:fillRef>
+            <a:effectRef idx="0">
+              <a:schemeClr val="accent1"/>
+            </a:effectRef>
+            <a:fontRef idx="minor">
+              <a:schemeClr val="lt1"/>
+            </a:fontRef>
+          </p:style>
+          <p:txBody>
+            <a:bodyPr rtlCol="0" anchor="ctr"/>
+            <a:lstStyle/>
+            <a:p>
+              <a:pPr algn="ctr"/>
+              <a:r>
+                <a:rPr lang="de-DE"/>
+                <a:t>1</a:t>
+              </a:r>
+              <a:endParaRPr lang="de-DE" dirty="0"/>
+            </a:p>
+          </p:txBody>
+        </p:sp>
+        <p:sp>
+          <p:nvSpPr>
+            <p:cNvPr id="26" name="Rechteck 25">
+              <a:extLst>
+                <a:ext uri="{FF2B5EF4-FFF2-40B4-BE49-F238E27FC236}">
+                  <a16:creationId xmlns:a16="http://schemas.microsoft.com/office/drawing/2014/main" id="{883883DD-F727-3098-517D-DECB5CFA1CED}"/>
+                </a:ext>
+              </a:extLst>
+            </p:cNvPr>
+            <p:cNvSpPr/>
+            <p:nvPr/>
+          </p:nvSpPr>
+          <p:spPr>
+            <a:xfrm>
+              <a:off x="10416146" y="3359524"/>
+              <a:ext cx="794831" cy="611841"/>
+            </a:xfrm>
+            <a:prstGeom prst="rect">
+              <a:avLst/>
+            </a:prstGeom>
+            <a:solidFill>
+              <a:schemeClr val="tx2"/>
+            </a:solidFill>
+          </p:spPr>
+          <p:style>
+            <a:lnRef idx="2">
+              <a:schemeClr val="accent1">
+                <a:shade val="15000"/>
+              </a:schemeClr>
+            </a:lnRef>
+            <a:fillRef idx="1">
+              <a:schemeClr val="accent1"/>
+            </a:fillRef>
+            <a:effectRef idx="0">
+              <a:schemeClr val="accent1"/>
+            </a:effectRef>
+            <a:fontRef idx="minor">
+              <a:schemeClr val="lt1"/>
+            </a:fontRef>
+          </p:style>
+          <p:txBody>
+            <a:bodyPr rtlCol="0" anchor="ctr"/>
+            <a:lstStyle/>
+            <a:p>
+              <a:pPr algn="ctr"/>
+              <a:r>
+                <a:rPr lang="de-DE"/>
+                <a:t>2</a:t>
+              </a:r>
+              <a:endParaRPr lang="de-DE" dirty="0"/>
+            </a:p>
+          </p:txBody>
+        </p:sp>
+      </p:grpSp>
+      <p:grpSp>
+        <p:nvGrpSpPr>
+          <p:cNvPr id="35" name="Gruppieren 34">
+            <a:extLst>
+              <a:ext uri="{FF2B5EF4-FFF2-40B4-BE49-F238E27FC236}">
+                <a16:creationId xmlns:a16="http://schemas.microsoft.com/office/drawing/2014/main" id="{37D67B96-C1DC-2CC7-2C43-CCF8ECF05459}"/>
+              </a:ext>
+            </a:extLst>
+          </p:cNvPr>
+          <p:cNvGrpSpPr/>
+          <p:nvPr/>
+        </p:nvGrpSpPr>
+        <p:grpSpPr>
+          <a:xfrm>
+            <a:off x="9403976" y="5145739"/>
+            <a:ext cx="1949824" cy="730624"/>
+            <a:chOff x="9403976" y="4459941"/>
+            <a:chExt cx="1949824" cy="730624"/>
+          </a:xfrm>
+        </p:grpSpPr>
+        <p:sp>
+          <p:nvSpPr>
+            <p:cNvPr id="24" name="Rechteck 23">
+              <a:extLst>
+                <a:ext uri="{FF2B5EF4-FFF2-40B4-BE49-F238E27FC236}">
+                  <a16:creationId xmlns:a16="http://schemas.microsoft.com/office/drawing/2014/main" id="{2E727E6F-9DFF-ECC2-5DC6-75166C035089}"/>
+                </a:ext>
+              </a:extLst>
+            </p:cNvPr>
+            <p:cNvSpPr/>
+            <p:nvPr/>
+          </p:nvSpPr>
+          <p:spPr>
+            <a:xfrm>
+              <a:off x="9403976" y="4459941"/>
+              <a:ext cx="1949824" cy="730624"/>
+            </a:xfrm>
+            <a:prstGeom prst="rect">
+              <a:avLst/>
+            </a:prstGeom>
+          </p:spPr>
+          <p:style>
+            <a:lnRef idx="2">
+              <a:schemeClr val="accent1">
+                <a:shade val="15000"/>
+              </a:schemeClr>
+            </a:lnRef>
+            <a:fillRef idx="1">
+              <a:schemeClr val="accent1"/>
+            </a:fillRef>
+            <a:effectRef idx="0">
+              <a:schemeClr val="accent1"/>
+            </a:effectRef>
+            <a:fontRef idx="minor">
+              <a:schemeClr val="lt1"/>
+            </a:fontRef>
+          </p:style>
+          <p:txBody>
+            <a:bodyPr rtlCol="0" anchor="ctr"/>
+            <a:lstStyle/>
+            <a:p>
+              <a:pPr algn="ctr"/>
+              <a:endParaRPr lang="de-DE" dirty="0"/>
+            </a:p>
+          </p:txBody>
+        </p:sp>
+        <p:sp>
+          <p:nvSpPr>
+            <p:cNvPr id="27" name="Rechteck 26">
+              <a:extLst>
+                <a:ext uri="{FF2B5EF4-FFF2-40B4-BE49-F238E27FC236}">
+                  <a16:creationId xmlns:a16="http://schemas.microsoft.com/office/drawing/2014/main" id="{54CB4F1B-F95D-7FFE-2BB9-7E0E5B484985}"/>
+                </a:ext>
+              </a:extLst>
+            </p:cNvPr>
+            <p:cNvSpPr/>
+            <p:nvPr/>
+          </p:nvSpPr>
+          <p:spPr>
+            <a:xfrm>
+              <a:off x="9534380" y="4512609"/>
+              <a:ext cx="794831" cy="611841"/>
+            </a:xfrm>
+            <a:prstGeom prst="rect">
+              <a:avLst/>
+            </a:prstGeom>
+            <a:solidFill>
+              <a:schemeClr val="tx2"/>
+            </a:solidFill>
+          </p:spPr>
+          <p:style>
+            <a:lnRef idx="2">
+              <a:schemeClr val="accent1">
+                <a:shade val="15000"/>
+              </a:schemeClr>
+            </a:lnRef>
+            <a:fillRef idx="1">
+              <a:schemeClr val="accent1"/>
+            </a:fillRef>
+            <a:effectRef idx="0">
+              <a:schemeClr val="accent1"/>
+            </a:effectRef>
+            <a:fontRef idx="minor">
+              <a:schemeClr val="lt1"/>
+            </a:fontRef>
+          </p:style>
+          <p:txBody>
+            <a:bodyPr rtlCol="0" anchor="ctr"/>
+            <a:lstStyle/>
+            <a:p>
+              <a:pPr algn="ctr"/>
+              <a:r>
+                <a:rPr lang="de-DE"/>
+                <a:t>X</a:t>
+              </a:r>
+              <a:endParaRPr lang="de-DE" dirty="0"/>
+            </a:p>
+          </p:txBody>
+        </p:sp>
+        <p:sp>
+          <p:nvSpPr>
+            <p:cNvPr id="28" name="Rechteck 27">
+              <a:extLst>
+                <a:ext uri="{FF2B5EF4-FFF2-40B4-BE49-F238E27FC236}">
+                  <a16:creationId xmlns:a16="http://schemas.microsoft.com/office/drawing/2014/main" id="{484C0CAE-57E3-DD01-F0F1-7A0E2C601515}"/>
+                </a:ext>
+              </a:extLst>
+            </p:cNvPr>
+            <p:cNvSpPr/>
+            <p:nvPr/>
+          </p:nvSpPr>
+          <p:spPr>
+            <a:xfrm>
+              <a:off x="10416146" y="4512609"/>
+              <a:ext cx="794831" cy="611841"/>
+            </a:xfrm>
+            <a:prstGeom prst="rect">
+              <a:avLst/>
+            </a:prstGeom>
+            <a:solidFill>
+              <a:schemeClr val="tx2"/>
+            </a:solidFill>
+          </p:spPr>
+          <p:style>
+            <a:lnRef idx="2">
+              <a:schemeClr val="accent1">
+                <a:shade val="15000"/>
+              </a:schemeClr>
+            </a:lnRef>
+            <a:fillRef idx="1">
+              <a:schemeClr val="accent1"/>
+            </a:fillRef>
+            <a:effectRef idx="0">
+              <a:schemeClr val="accent1"/>
+            </a:effectRef>
+            <a:fontRef idx="minor">
+              <a:schemeClr val="lt1"/>
+            </a:fontRef>
+          </p:style>
+          <p:txBody>
+            <a:bodyPr rtlCol="0" anchor="ctr"/>
+            <a:lstStyle/>
+            <a:p>
+              <a:pPr algn="ctr"/>
+              <a:r>
+                <a:rPr lang="de-DE"/>
+                <a:t>Y</a:t>
+              </a:r>
+              <a:endParaRPr lang="de-DE" dirty="0"/>
+            </a:p>
+          </p:txBody>
+        </p:sp>
+      </p:grpSp>
       <p:pic>
         <p:nvPicPr>
-          <p:cNvPr id="4" name="Grafik 3">
+          <p:cNvPr id="32" name="Grafik 31">
             <a:extLst>
               <a:ext uri="{FF2B5EF4-FFF2-40B4-BE49-F238E27FC236}">
-                <a16:creationId xmlns:a16="http://schemas.microsoft.com/office/drawing/2014/main" id="{DEB116EB-EAF9-7C19-D36A-FCC8D4B84054}"/>
+                <a16:creationId xmlns:a16="http://schemas.microsoft.com/office/drawing/2014/main" id="{43A18EB7-8D0F-3F21-AECB-4F538A40A1DA}"/>
               </a:ext>
             </a:extLst>
           </p:cNvPr>
@@ -38766,15 +38297,15 @@
           <p:nvPr/>
         </p:nvPicPr>
         <p:blipFill>
-          <a:blip r:embed="rId6"/>
+          <a:blip r:embed="rId5"/>
           <a:stretch>
             <a:fillRect/>
           </a:stretch>
         </p:blipFill>
         <p:spPr>
           <a:xfrm>
-            <a:off x="0" y="3291791"/>
-            <a:ext cx="12192000" cy="725232"/>
+            <a:off x="838200" y="2847560"/>
+            <a:ext cx="3458058" cy="2962688"/>
           </a:xfrm>
           <a:prstGeom prst="rect">
             <a:avLst/>
@@ -38783,10 +38314,10 @@
       </p:pic>
       <p:sp>
         <p:nvSpPr>
-          <p:cNvPr id="6" name="Rechteck 5">
+          <p:cNvPr id="36" name="Rechteck 35">
             <a:extLst>
               <a:ext uri="{FF2B5EF4-FFF2-40B4-BE49-F238E27FC236}">
-                <a16:creationId xmlns:a16="http://schemas.microsoft.com/office/drawing/2014/main" id="{BB1E9A52-023D-5BF6-6880-B51A0B413C39}"/>
+                <a16:creationId xmlns:a16="http://schemas.microsoft.com/office/drawing/2014/main" id="{F631D783-ABF3-830D-84F7-05B19C3948BD}"/>
               </a:ext>
             </a:extLst>
           </p:cNvPr>
@@ -38795,8 +38326,167 @@
         </p:nvSpPr>
         <p:spPr>
           <a:xfrm>
-            <a:off x="9242191" y="3240291"/>
-            <a:ext cx="2906850" cy="2468774"/>
+            <a:off x="6678706" y="3877233"/>
+            <a:ext cx="2492188" cy="2124636"/>
+          </a:xfrm>
+          <a:prstGeom prst="rect">
+            <a:avLst/>
+          </a:prstGeom>
+          <a:noFill/>
+          <a:ln>
+            <a:solidFill>
+              <a:schemeClr val="tx1"/>
+            </a:solidFill>
+            <a:prstDash val="dash"/>
+          </a:ln>
+        </p:spPr>
+        <p:style>
+          <a:lnRef idx="2">
+            <a:schemeClr val="accent1">
+              <a:shade val="15000"/>
+            </a:schemeClr>
+          </a:lnRef>
+          <a:fillRef idx="1">
+            <a:schemeClr val="accent1"/>
+          </a:fillRef>
+          <a:effectRef idx="0">
+            <a:schemeClr val="accent1"/>
+          </a:effectRef>
+          <a:fontRef idx="minor">
+            <a:schemeClr val="lt1"/>
+          </a:fontRef>
+        </p:style>
+        <p:txBody>
+          <a:bodyPr rtlCol="0" anchor="ctr"/>
+          <a:lstStyle/>
+          <a:p>
+            <a:pPr algn="ctr"/>
+            <a:endParaRPr lang="de-DE" dirty="0"/>
+          </a:p>
+        </p:txBody>
+      </p:sp>
+      <p:sp>
+        <p:nvSpPr>
+          <p:cNvPr id="37" name="Rechteck 36">
+            <a:extLst>
+              <a:ext uri="{FF2B5EF4-FFF2-40B4-BE49-F238E27FC236}">
+                <a16:creationId xmlns:a16="http://schemas.microsoft.com/office/drawing/2014/main" id="{0543D131-5ED8-A8BE-2CC6-4125391D0609}"/>
+              </a:ext>
+            </a:extLst>
+          </p:cNvPr>
+          <p:cNvSpPr/>
+          <p:nvPr/>
+        </p:nvSpPr>
+        <p:spPr>
+          <a:xfrm>
+            <a:off x="9278474" y="3904128"/>
+            <a:ext cx="2169455" cy="890867"/>
+          </a:xfrm>
+          <a:prstGeom prst="rect">
+            <a:avLst/>
+          </a:prstGeom>
+          <a:noFill/>
+          <a:ln>
+            <a:solidFill>
+              <a:schemeClr val="tx1"/>
+            </a:solidFill>
+            <a:prstDash val="dash"/>
+          </a:ln>
+        </p:spPr>
+        <p:style>
+          <a:lnRef idx="2">
+            <a:schemeClr val="accent1">
+              <a:shade val="15000"/>
+            </a:schemeClr>
+          </a:lnRef>
+          <a:fillRef idx="1">
+            <a:schemeClr val="accent1"/>
+          </a:fillRef>
+          <a:effectRef idx="0">
+            <a:schemeClr val="accent1"/>
+          </a:effectRef>
+          <a:fontRef idx="minor">
+            <a:schemeClr val="lt1"/>
+          </a:fontRef>
+        </p:style>
+        <p:txBody>
+          <a:bodyPr rtlCol="0" anchor="ctr"/>
+          <a:lstStyle/>
+          <a:p>
+            <a:pPr algn="ctr"/>
+            <a:endParaRPr lang="de-DE" dirty="0"/>
+          </a:p>
+        </p:txBody>
+      </p:sp>
+      <p:sp>
+        <p:nvSpPr>
+          <p:cNvPr id="38" name="Rechteck 37">
+            <a:extLst>
+              <a:ext uri="{FF2B5EF4-FFF2-40B4-BE49-F238E27FC236}">
+                <a16:creationId xmlns:a16="http://schemas.microsoft.com/office/drawing/2014/main" id="{98004468-80A7-E9A3-5515-FEACF905AF35}"/>
+              </a:ext>
+            </a:extLst>
+          </p:cNvPr>
+          <p:cNvSpPr/>
+          <p:nvPr/>
+        </p:nvSpPr>
+        <p:spPr>
+          <a:xfrm>
+            <a:off x="9278474" y="5065617"/>
+            <a:ext cx="2169455" cy="890867"/>
+          </a:xfrm>
+          <a:prstGeom prst="rect">
+            <a:avLst/>
+          </a:prstGeom>
+          <a:noFill/>
+          <a:ln>
+            <a:solidFill>
+              <a:schemeClr val="tx1"/>
+            </a:solidFill>
+            <a:prstDash val="dash"/>
+          </a:ln>
+        </p:spPr>
+        <p:style>
+          <a:lnRef idx="2">
+            <a:schemeClr val="accent1">
+              <a:shade val="15000"/>
+            </a:schemeClr>
+          </a:lnRef>
+          <a:fillRef idx="1">
+            <a:schemeClr val="accent1"/>
+          </a:fillRef>
+          <a:effectRef idx="0">
+            <a:schemeClr val="accent1"/>
+          </a:effectRef>
+          <a:fontRef idx="minor">
+            <a:schemeClr val="lt1"/>
+          </a:fontRef>
+        </p:style>
+        <p:txBody>
+          <a:bodyPr rtlCol="0" anchor="ctr"/>
+          <a:lstStyle/>
+          <a:p>
+            <a:pPr algn="ctr"/>
+            <a:endParaRPr lang="de-DE" dirty="0"/>
+          </a:p>
+        </p:txBody>
+      </p:sp>
+      <p:sp>
+        <p:nvSpPr>
+          <p:cNvPr id="40" name="Rechteck 39">
+            <a:extLst>
+              <a:ext uri="{FF2B5EF4-FFF2-40B4-BE49-F238E27FC236}">
+                <a16:creationId xmlns:a16="http://schemas.microsoft.com/office/drawing/2014/main" id="{1B296C9C-DC74-7DFF-E4CB-46429053023E}"/>
+              </a:ext>
+            </a:extLst>
+          </p:cNvPr>
+          <p:cNvSpPr/>
+          <p:nvPr/>
+        </p:nvSpPr>
+        <p:spPr>
+          <a:xfrm>
+            <a:off x="873195" y="4980093"/>
+            <a:ext cx="1484523" cy="288911"/>
           </a:xfrm>
           <a:prstGeom prst="rect">
             <a:avLst/>
@@ -38845,10 +38535,82 @@
           </a:p>
         </p:txBody>
       </p:sp>
+      <p:sp>
+        <p:nvSpPr>
+          <p:cNvPr id="41" name="Textfeld 40">
+            <a:extLst>
+              <a:ext uri="{FF2B5EF4-FFF2-40B4-BE49-F238E27FC236}">
+                <a16:creationId xmlns:a16="http://schemas.microsoft.com/office/drawing/2014/main" id="{CA7864DD-8893-7250-CE67-EB8E39F583E1}"/>
+              </a:ext>
+            </a:extLst>
+          </p:cNvPr>
+          <p:cNvSpPr txBox="1"/>
+          <p:nvPr/>
+        </p:nvSpPr>
+        <p:spPr>
+          <a:xfrm>
+            <a:off x="3186956" y="1550004"/>
+            <a:ext cx="1609161" cy="646331"/>
+          </a:xfrm>
+          <a:prstGeom prst="rect">
+            <a:avLst/>
+          </a:prstGeom>
+          <a:noFill/>
+        </p:spPr>
+        <p:txBody>
+          <a:bodyPr wrap="square" rtlCol="0">
+            <a:spAutoFit/>
+          </a:bodyPr>
+          <a:lstStyle/>
+          <a:p>
+            <a:r>
+              <a:rPr lang="de-DE"/>
+              <a:t>Alle Shapes auswählen</a:t>
+            </a:r>
+            <a:endParaRPr lang="de-DE" dirty="0"/>
+          </a:p>
+        </p:txBody>
+      </p:sp>
+      <p:sp>
+        <p:nvSpPr>
+          <p:cNvPr id="42" name="Textfeld 41">
+            <a:extLst>
+              <a:ext uri="{FF2B5EF4-FFF2-40B4-BE49-F238E27FC236}">
+                <a16:creationId xmlns:a16="http://schemas.microsoft.com/office/drawing/2014/main" id="{49C16D75-FA95-4255-9210-59780EE62654}"/>
+              </a:ext>
+            </a:extLst>
+          </p:cNvPr>
+          <p:cNvSpPr txBox="1"/>
+          <p:nvPr/>
+        </p:nvSpPr>
+        <p:spPr>
+          <a:xfrm>
+            <a:off x="4448660" y="3858867"/>
+            <a:ext cx="2142554" cy="646331"/>
+          </a:xfrm>
+          <a:prstGeom prst="rect">
+            <a:avLst/>
+          </a:prstGeom>
+          <a:noFill/>
+        </p:spPr>
+        <p:txBody>
+          <a:bodyPr wrap="square" rtlCol="0">
+            <a:spAutoFit/>
+          </a:bodyPr>
+          <a:lstStyle/>
+          <a:p>
+            <a:r>
+              <a:rPr lang="de-DE"/>
+              <a:t>Es werden 3 Gruppen erstellt</a:t>
+            </a:r>
+            <a:endParaRPr lang="de-DE" dirty="0"/>
+          </a:p>
+        </p:txBody>
+      </p:sp>
     </p:spTree>
     <p:extLst>
       <p:ext uri="{BB962C8B-B14F-4D97-AF65-F5344CB8AC3E}">
-        <p14:creationId xmlns:p14="http://schemas.microsoft.com/office/powerpoint/2010/main" val="2494079803"/>
+        <p14:creationId xmlns:p14="http://schemas.microsoft.com/office/powerpoint/2010/main" val="2085700823"/>
       </p:ext>
     </p:extLst>
   </p:cSld>
@@ -38877,6 +38639,566 @@
       </p:grpSpPr>
       <p:sp>
         <p:nvSpPr>
+          <p:cNvPr id="2" name="Titel 1">
+            <a:extLst>
+              <a:ext uri="{FF2B5EF4-FFF2-40B4-BE49-F238E27FC236}">
+                <a16:creationId xmlns:a16="http://schemas.microsoft.com/office/drawing/2014/main" id="{9533EF00-2B50-4F2C-920E-407267A8D16A}"/>
+              </a:ext>
+            </a:extLst>
+          </p:cNvPr>
+          <p:cNvSpPr>
+            <a:spLocks noGrp="1"/>
+          </p:cNvSpPr>
+          <p:nvPr>
+            <p:ph type="title"/>
+          </p:nvPr>
+        </p:nvSpPr>
+        <p:spPr/>
+        <p:txBody>
+          <a:bodyPr/>
+          <a:lstStyle/>
+          <a:p>
+            <a:r>
+              <a:rPr lang="de-DE" dirty="0"/>
+              <a:t>Für Excel: Zeilen/Spalten zusammenführen</a:t>
+            </a:r>
+          </a:p>
+        </p:txBody>
+      </p:sp>
+      <p:pic>
+        <p:nvPicPr>
+          <p:cNvPr id="3" name="Grafik 2">
+            <a:extLst>
+              <a:ext uri="{FF2B5EF4-FFF2-40B4-BE49-F238E27FC236}">
+                <a16:creationId xmlns:a16="http://schemas.microsoft.com/office/drawing/2014/main" id="{BD2449E8-EB02-481F-8E59-50B032835A3D}"/>
+              </a:ext>
+            </a:extLst>
+          </p:cNvPr>
+          <p:cNvPicPr>
+            <a:picLocks noChangeAspect="1"/>
+          </p:cNvPicPr>
+          <p:nvPr/>
+        </p:nvPicPr>
+        <p:blipFill>
+          <a:blip r:embed="rId2"/>
+          <a:stretch>
+            <a:fillRect/>
+          </a:stretch>
+        </p:blipFill>
+        <p:spPr>
+          <a:xfrm>
+            <a:off x="3430508" y="2241028"/>
+            <a:ext cx="2876951" cy="2219635"/>
+          </a:xfrm>
+          <a:prstGeom prst="rect">
+            <a:avLst/>
+          </a:prstGeom>
+        </p:spPr>
+      </p:pic>
+      <p:pic>
+        <p:nvPicPr>
+          <p:cNvPr id="4" name="Grafik 3">
+            <a:extLst>
+              <a:ext uri="{FF2B5EF4-FFF2-40B4-BE49-F238E27FC236}">
+                <a16:creationId xmlns:a16="http://schemas.microsoft.com/office/drawing/2014/main" id="{27462A0E-1DF8-4F64-9186-727F3604BAFF}"/>
+              </a:ext>
+            </a:extLst>
+          </p:cNvPr>
+          <p:cNvPicPr>
+            <a:picLocks noChangeAspect="1"/>
+          </p:cNvPicPr>
+          <p:nvPr/>
+        </p:nvPicPr>
+        <p:blipFill>
+          <a:blip r:embed="rId3"/>
+          <a:stretch>
+            <a:fillRect/>
+          </a:stretch>
+        </p:blipFill>
+        <p:spPr>
+          <a:xfrm>
+            <a:off x="1053005" y="2771683"/>
+            <a:ext cx="1676634" cy="1314633"/>
+          </a:xfrm>
+          <a:prstGeom prst="rect">
+            <a:avLst/>
+          </a:prstGeom>
+        </p:spPr>
+      </p:pic>
+      <p:pic>
+        <p:nvPicPr>
+          <p:cNvPr id="7" name="Grafik 6">
+            <a:extLst>
+              <a:ext uri="{FF2B5EF4-FFF2-40B4-BE49-F238E27FC236}">
+                <a16:creationId xmlns:a16="http://schemas.microsoft.com/office/drawing/2014/main" id="{C48B4069-8CAB-4212-9DA6-DDAB7967637B}"/>
+              </a:ext>
+            </a:extLst>
+          </p:cNvPr>
+          <p:cNvPicPr>
+            <a:picLocks noChangeAspect="1"/>
+          </p:cNvPicPr>
+          <p:nvPr/>
+        </p:nvPicPr>
+        <p:blipFill>
+          <a:blip r:embed="rId4"/>
+          <a:stretch>
+            <a:fillRect/>
+          </a:stretch>
+        </p:blipFill>
+        <p:spPr>
+          <a:xfrm>
+            <a:off x="8333332" y="4879578"/>
+            <a:ext cx="1705213" cy="1324160"/>
+          </a:xfrm>
+          <a:prstGeom prst="rect">
+            <a:avLst/>
+          </a:prstGeom>
+        </p:spPr>
+      </p:pic>
+      <p:pic>
+        <p:nvPicPr>
+          <p:cNvPr id="8" name="Grafik 7">
+            <a:extLst>
+              <a:ext uri="{FF2B5EF4-FFF2-40B4-BE49-F238E27FC236}">
+                <a16:creationId xmlns:a16="http://schemas.microsoft.com/office/drawing/2014/main" id="{032CAFF8-4407-431E-93B6-8FE6BA4EE620}"/>
+              </a:ext>
+            </a:extLst>
+          </p:cNvPr>
+          <p:cNvPicPr>
+            <a:picLocks noChangeAspect="1"/>
+          </p:cNvPicPr>
+          <p:nvPr/>
+        </p:nvPicPr>
+        <p:blipFill>
+          <a:blip r:embed="rId5"/>
+          <a:stretch>
+            <a:fillRect/>
+          </a:stretch>
+        </p:blipFill>
+        <p:spPr>
+          <a:xfrm>
+            <a:off x="7240723" y="3105878"/>
+            <a:ext cx="933580" cy="1457528"/>
+          </a:xfrm>
+          <a:prstGeom prst="rect">
+            <a:avLst/>
+          </a:prstGeom>
+        </p:spPr>
+      </p:pic>
+      <p:pic>
+        <p:nvPicPr>
+          <p:cNvPr id="9" name="Grafik 8">
+            <a:extLst>
+              <a:ext uri="{FF2B5EF4-FFF2-40B4-BE49-F238E27FC236}">
+                <a16:creationId xmlns:a16="http://schemas.microsoft.com/office/drawing/2014/main" id="{3663A837-FF8C-415F-9359-EF6093EDB181}"/>
+              </a:ext>
+            </a:extLst>
+          </p:cNvPr>
+          <p:cNvPicPr>
+            <a:picLocks noChangeAspect="1"/>
+          </p:cNvPicPr>
+          <p:nvPr/>
+        </p:nvPicPr>
+        <p:blipFill>
+          <a:blip r:embed="rId6"/>
+          <a:stretch>
+            <a:fillRect/>
+          </a:stretch>
+        </p:blipFill>
+        <p:spPr>
+          <a:xfrm>
+            <a:off x="8554733" y="1350628"/>
+            <a:ext cx="914528" cy="2438740"/>
+          </a:xfrm>
+          <a:prstGeom prst="rect">
+            <a:avLst/>
+          </a:prstGeom>
+        </p:spPr>
+      </p:pic>
+      <p:cxnSp>
+        <p:nvCxnSpPr>
+          <p:cNvPr id="11" name="Gerade Verbindung mit Pfeil 10">
+            <a:extLst>
+              <a:ext uri="{FF2B5EF4-FFF2-40B4-BE49-F238E27FC236}">
+                <a16:creationId xmlns:a16="http://schemas.microsoft.com/office/drawing/2014/main" id="{A5AEB315-AF39-4FBC-B2E0-67D885C24070}"/>
+              </a:ext>
+            </a:extLst>
+          </p:cNvPr>
+          <p:cNvCxnSpPr>
+            <a:cxnSpLocks/>
+          </p:cNvCxnSpPr>
+          <p:nvPr/>
+        </p:nvCxnSpPr>
+        <p:spPr>
+          <a:xfrm flipV="1">
+            <a:off x="6096000" y="2089621"/>
+            <a:ext cx="2237332" cy="1112162"/>
+          </a:xfrm>
+          <a:prstGeom prst="straightConnector1">
+            <a:avLst/>
+          </a:prstGeom>
+          <a:ln>
+            <a:tailEnd type="triangle"/>
+          </a:ln>
+        </p:spPr>
+        <p:style>
+          <a:lnRef idx="1">
+            <a:schemeClr val="accent1"/>
+          </a:lnRef>
+          <a:fillRef idx="0">
+            <a:schemeClr val="accent1"/>
+          </a:fillRef>
+          <a:effectRef idx="0">
+            <a:schemeClr val="accent1"/>
+          </a:effectRef>
+          <a:fontRef idx="minor">
+            <a:schemeClr val="tx1"/>
+          </a:fontRef>
+        </p:style>
+      </p:cxnSp>
+      <p:cxnSp>
+        <p:nvCxnSpPr>
+          <p:cNvPr id="12" name="Gerade Verbindung mit Pfeil 11">
+            <a:extLst>
+              <a:ext uri="{FF2B5EF4-FFF2-40B4-BE49-F238E27FC236}">
+                <a16:creationId xmlns:a16="http://schemas.microsoft.com/office/drawing/2014/main" id="{14181C82-C1A3-4607-88BE-520F54D9796A}"/>
+              </a:ext>
+            </a:extLst>
+          </p:cNvPr>
+          <p:cNvCxnSpPr>
+            <a:cxnSpLocks/>
+          </p:cNvCxnSpPr>
+          <p:nvPr/>
+        </p:nvCxnSpPr>
+        <p:spPr>
+          <a:xfrm>
+            <a:off x="6096000" y="3449310"/>
+            <a:ext cx="969365" cy="216403"/>
+          </a:xfrm>
+          <a:prstGeom prst="straightConnector1">
+            <a:avLst/>
+          </a:prstGeom>
+          <a:ln>
+            <a:tailEnd type="triangle"/>
+          </a:ln>
+        </p:spPr>
+        <p:style>
+          <a:lnRef idx="1">
+            <a:schemeClr val="accent1"/>
+          </a:lnRef>
+          <a:fillRef idx="0">
+            <a:schemeClr val="accent1"/>
+          </a:fillRef>
+          <a:effectRef idx="0">
+            <a:schemeClr val="accent1"/>
+          </a:effectRef>
+          <a:fontRef idx="minor">
+            <a:schemeClr val="tx1"/>
+          </a:fontRef>
+        </p:style>
+      </p:cxnSp>
+      <p:cxnSp>
+        <p:nvCxnSpPr>
+          <p:cNvPr id="15" name="Gerade Verbindung mit Pfeil 14">
+            <a:extLst>
+              <a:ext uri="{FF2B5EF4-FFF2-40B4-BE49-F238E27FC236}">
+                <a16:creationId xmlns:a16="http://schemas.microsoft.com/office/drawing/2014/main" id="{684FDD4B-75E5-457A-8170-BC4DDFFE014D}"/>
+              </a:ext>
+            </a:extLst>
+          </p:cNvPr>
+          <p:cNvCxnSpPr>
+            <a:cxnSpLocks/>
+          </p:cNvCxnSpPr>
+          <p:nvPr/>
+        </p:nvCxnSpPr>
+        <p:spPr>
+          <a:xfrm>
+            <a:off x="2886187" y="3428999"/>
+            <a:ext cx="328350" cy="0"/>
+          </a:xfrm>
+          <a:prstGeom prst="straightConnector1">
+            <a:avLst/>
+          </a:prstGeom>
+          <a:ln>
+            <a:tailEnd type="triangle"/>
+          </a:ln>
+        </p:spPr>
+        <p:style>
+          <a:lnRef idx="1">
+            <a:schemeClr val="accent1"/>
+          </a:lnRef>
+          <a:fillRef idx="0">
+            <a:schemeClr val="accent1"/>
+          </a:fillRef>
+          <a:effectRef idx="0">
+            <a:schemeClr val="accent1"/>
+          </a:effectRef>
+          <a:fontRef idx="minor">
+            <a:schemeClr val="tx1"/>
+          </a:fontRef>
+        </p:style>
+      </p:cxnSp>
+      <p:cxnSp>
+        <p:nvCxnSpPr>
+          <p:cNvPr id="17" name="Gerade Verbindung mit Pfeil 16">
+            <a:extLst>
+              <a:ext uri="{FF2B5EF4-FFF2-40B4-BE49-F238E27FC236}">
+                <a16:creationId xmlns:a16="http://schemas.microsoft.com/office/drawing/2014/main" id="{F14CE581-BC47-416B-81B3-F692705DA692}"/>
+              </a:ext>
+            </a:extLst>
+          </p:cNvPr>
+          <p:cNvCxnSpPr>
+            <a:cxnSpLocks/>
+          </p:cNvCxnSpPr>
+          <p:nvPr/>
+        </p:nvCxnSpPr>
+        <p:spPr>
+          <a:xfrm>
+            <a:off x="6178395" y="3752122"/>
+            <a:ext cx="1848005" cy="1632678"/>
+          </a:xfrm>
+          <a:prstGeom prst="straightConnector1">
+            <a:avLst/>
+          </a:prstGeom>
+          <a:ln>
+            <a:tailEnd type="triangle"/>
+          </a:ln>
+        </p:spPr>
+        <p:style>
+          <a:lnRef idx="1">
+            <a:schemeClr val="accent1"/>
+          </a:lnRef>
+          <a:fillRef idx="0">
+            <a:schemeClr val="accent1"/>
+          </a:fillRef>
+          <a:effectRef idx="0">
+            <a:schemeClr val="accent1"/>
+          </a:effectRef>
+          <a:fontRef idx="minor">
+            <a:schemeClr val="tx1"/>
+          </a:fontRef>
+        </p:style>
+      </p:cxnSp>
+      <p:sp>
+        <p:nvSpPr>
+          <p:cNvPr id="21" name="Textfeld 20">
+            <a:extLst>
+              <a:ext uri="{FF2B5EF4-FFF2-40B4-BE49-F238E27FC236}">
+                <a16:creationId xmlns:a16="http://schemas.microsoft.com/office/drawing/2014/main" id="{C30C8485-A5C8-4D82-AB6C-62E03891C1EF}"/>
+              </a:ext>
+            </a:extLst>
+          </p:cNvPr>
+          <p:cNvSpPr txBox="1"/>
+          <p:nvPr/>
+        </p:nvSpPr>
+        <p:spPr>
+          <a:xfrm>
+            <a:off x="838199" y="5079993"/>
+            <a:ext cx="5914293" cy="923330"/>
+          </a:xfrm>
+          <a:prstGeom prst="rect">
+            <a:avLst/>
+          </a:prstGeom>
+          <a:noFill/>
+        </p:spPr>
+        <p:txBody>
+          <a:bodyPr wrap="square" rtlCol="0">
+            <a:spAutoFit/>
+          </a:bodyPr>
+          <a:lstStyle/>
+          <a:p>
+            <a:r>
+              <a:rPr lang="de-DE" dirty="0"/>
+              <a:t>Neue Funktionen zum spalten- oder zeilenweise zusammenführen von Zellen, sowie Funktionen um diese wieder zu trennen.</a:t>
+            </a:r>
+          </a:p>
+        </p:txBody>
+      </p:sp>
+    </p:spTree>
+    <p:extLst>
+      <p:ext uri="{BB962C8B-B14F-4D97-AF65-F5344CB8AC3E}">
+        <p14:creationId xmlns:p14="http://schemas.microsoft.com/office/powerpoint/2010/main" val="1034647483"/>
+      </p:ext>
+    </p:extLst>
+  </p:cSld>
+  <p:clrMapOvr>
+    <a:masterClrMapping/>
+  </p:clrMapOvr>
+</p:sld>
+</file>
+
+<file path=ppt/slides/slide51.xml><?xml version="1.0" encoding="utf-8"?>
+<p:sld xmlns:a="http://schemas.openxmlformats.org/drawingml/2006/main" xmlns:r="http://schemas.openxmlformats.org/officeDocument/2006/relationships" xmlns:p="http://schemas.openxmlformats.org/presentationml/2006/main">
+  <p:cSld>
+    <p:spTree>
+      <p:nvGrpSpPr>
+        <p:cNvPr id="1" name=""/>
+        <p:cNvGrpSpPr/>
+        <p:nvPr/>
+      </p:nvGrpSpPr>
+      <p:grpSpPr>
+        <a:xfrm>
+          <a:off x="0" y="0"/>
+          <a:ext cx="0" cy="0"/>
+          <a:chOff x="0" y="0"/>
+          <a:chExt cx="0" cy="0"/>
+        </a:xfrm>
+      </p:grpSpPr>
+      <p:sp>
+        <p:nvSpPr>
+          <p:cNvPr id="2" name="Titel 1">
+            <a:extLst>
+              <a:ext uri="{FF2B5EF4-FFF2-40B4-BE49-F238E27FC236}">
+                <a16:creationId xmlns:a16="http://schemas.microsoft.com/office/drawing/2014/main" id="{F844096B-E1B1-474F-822E-A45C7BA9F1A7}"/>
+              </a:ext>
+            </a:extLst>
+          </p:cNvPr>
+          <p:cNvSpPr>
+            <a:spLocks noGrp="1"/>
+          </p:cNvSpPr>
+          <p:nvPr>
+            <p:ph type="title"/>
+          </p:nvPr>
+        </p:nvSpPr>
+        <p:spPr/>
+        <p:txBody>
+          <a:bodyPr/>
+          <a:lstStyle/>
+          <a:p>
+            <a:r>
+              <a:rPr lang="de-DE" dirty="0"/>
+              <a:t>Für Excel: Reguläre Ausdrücke auf Zellen anwenden</a:t>
+            </a:r>
+          </a:p>
+        </p:txBody>
+      </p:sp>
+      <p:pic>
+        <p:nvPicPr>
+          <p:cNvPr id="3" name="Grafik 2">
+            <a:extLst>
+              <a:ext uri="{FF2B5EF4-FFF2-40B4-BE49-F238E27FC236}">
+                <a16:creationId xmlns:a16="http://schemas.microsoft.com/office/drawing/2014/main" id="{7065A4C2-3BBD-4980-9452-7EC0014A9125}"/>
+              </a:ext>
+            </a:extLst>
+          </p:cNvPr>
+          <p:cNvPicPr>
+            <a:picLocks noChangeAspect="1"/>
+          </p:cNvPicPr>
+          <p:nvPr/>
+        </p:nvPicPr>
+        <p:blipFill>
+          <a:blip r:embed="rId2"/>
+          <a:stretch>
+            <a:fillRect/>
+          </a:stretch>
+        </p:blipFill>
+        <p:spPr>
+          <a:xfrm>
+            <a:off x="1930114" y="2703433"/>
+            <a:ext cx="2248214" cy="1600423"/>
+          </a:xfrm>
+          <a:prstGeom prst="rect">
+            <a:avLst/>
+          </a:prstGeom>
+        </p:spPr>
+      </p:pic>
+      <p:pic>
+        <p:nvPicPr>
+          <p:cNvPr id="4" name="Grafik 3">
+            <a:extLst>
+              <a:ext uri="{FF2B5EF4-FFF2-40B4-BE49-F238E27FC236}">
+                <a16:creationId xmlns:a16="http://schemas.microsoft.com/office/drawing/2014/main" id="{24AAF6A7-0B21-4832-8F7F-D233896E51F4}"/>
+              </a:ext>
+            </a:extLst>
+          </p:cNvPr>
+          <p:cNvPicPr>
+            <a:picLocks noChangeAspect="1"/>
+          </p:cNvPicPr>
+          <p:nvPr/>
+        </p:nvPicPr>
+        <p:blipFill>
+          <a:blip r:embed="rId3"/>
+          <a:stretch>
+            <a:fillRect/>
+          </a:stretch>
+        </p:blipFill>
+        <p:spPr>
+          <a:xfrm>
+            <a:off x="6246541" y="1476818"/>
+            <a:ext cx="4696480" cy="3381847"/>
+          </a:xfrm>
+          <a:prstGeom prst="rect">
+            <a:avLst/>
+          </a:prstGeom>
+        </p:spPr>
+      </p:pic>
+      <p:sp>
+        <p:nvSpPr>
+          <p:cNvPr id="5" name="Textfeld 4">
+            <a:extLst>
+              <a:ext uri="{FF2B5EF4-FFF2-40B4-BE49-F238E27FC236}">
+                <a16:creationId xmlns:a16="http://schemas.microsoft.com/office/drawing/2014/main" id="{D61631A0-D4D0-4971-AFF6-64C87360B81A}"/>
+              </a:ext>
+            </a:extLst>
+          </p:cNvPr>
+          <p:cNvSpPr txBox="1"/>
+          <p:nvPr/>
+        </p:nvSpPr>
+        <p:spPr>
+          <a:xfrm>
+            <a:off x="2217695" y="5316601"/>
+            <a:ext cx="8598798" cy="646331"/>
+          </a:xfrm>
+          <a:prstGeom prst="rect">
+            <a:avLst/>
+          </a:prstGeom>
+          <a:noFill/>
+        </p:spPr>
+        <p:txBody>
+          <a:bodyPr wrap="square" rtlCol="0">
+            <a:spAutoFit/>
+          </a:bodyPr>
+          <a:lstStyle/>
+          <a:p>
+            <a:r>
+              <a:rPr lang="de-DE" dirty="0"/>
+              <a:t>Mit regulären Ausdrücken können Filter erstellt werden, Daten getrennt werden, oder komplexe Suchen und Ersetzen Anfragen erstellt werden</a:t>
+            </a:r>
+          </a:p>
+        </p:txBody>
+      </p:sp>
+    </p:spTree>
+    <p:extLst>
+      <p:ext uri="{BB962C8B-B14F-4D97-AF65-F5344CB8AC3E}">
+        <p14:creationId xmlns:p14="http://schemas.microsoft.com/office/powerpoint/2010/main" val="3808148863"/>
+      </p:ext>
+    </p:extLst>
+  </p:cSld>
+  <p:clrMapOvr>
+    <a:masterClrMapping/>
+  </p:clrMapOvr>
+</p:sld>
+</file>
+
+<file path=ppt/slides/slide52.xml><?xml version="1.0" encoding="utf-8"?>
+<p:sld xmlns:a="http://schemas.openxmlformats.org/drawingml/2006/main" xmlns:r="http://schemas.openxmlformats.org/officeDocument/2006/relationships" xmlns:p="http://schemas.openxmlformats.org/presentationml/2006/main">
+  <p:cSld>
+    <p:spTree>
+      <p:nvGrpSpPr>
+        <p:cNvPr id="1" name=""/>
+        <p:cNvGrpSpPr/>
+        <p:nvPr/>
+      </p:nvGrpSpPr>
+      <p:grpSpPr>
+        <a:xfrm>
+          <a:off x="0" y="0"/>
+          <a:ext cx="0" cy="0"/>
+          <a:chOff x="0" y="0"/>
+          <a:chExt cx="0" cy="0"/>
+        </a:xfrm>
+      </p:grpSpPr>
+      <p:sp>
+        <p:nvSpPr>
           <p:cNvPr id="4" name="Titel 3">
             <a:extLst>
               <a:ext uri="{FF2B5EF4-FFF2-40B4-BE49-F238E27FC236}">
@@ -39002,7 +39324,7 @@
 </p:sld>
 </file>
 
-<file path=ppt/slides/slide51.xml><?xml version="1.0" encoding="utf-8"?>
+<file path=ppt/slides/slide53.xml><?xml version="1.0" encoding="utf-8"?>
 <p:sld xmlns:a="http://schemas.openxmlformats.org/drawingml/2006/main" xmlns:r="http://schemas.openxmlformats.org/officeDocument/2006/relationships" xmlns:p="http://schemas.openxmlformats.org/presentationml/2006/main">
   <p:cSld>
     <p:spTree>
@@ -39838,7 +40160,7 @@
 </p:sld>
 </file>
 
-<file path=ppt/slides/slide52.xml><?xml version="1.0" encoding="utf-8"?>
+<file path=ppt/slides/slide54.xml><?xml version="1.0" encoding="utf-8"?>
 <p:sld xmlns:a="http://schemas.openxmlformats.org/drawingml/2006/main" xmlns:r="http://schemas.openxmlformats.org/officeDocument/2006/relationships" xmlns:p="http://schemas.openxmlformats.org/presentationml/2006/main">
   <p:cSld>
     <p:spTree>
@@ -39937,7 +40259,7 @@
 </p:sld>
 </file>
 
-<file path=ppt/slides/slide53.xml><?xml version="1.0" encoding="utf-8"?>
+<file path=ppt/slides/slide55.xml><?xml version="1.0" encoding="utf-8"?>
 <p:sld xmlns:a="http://schemas.openxmlformats.org/drawingml/2006/main" xmlns:r="http://schemas.openxmlformats.org/officeDocument/2006/relationships" xmlns:p="http://schemas.openxmlformats.org/presentationml/2006/main">
   <p:cSld>
     <p:spTree>
@@ -41289,7 +41611,7 @@
 </p:sld>
 </file>
 
-<file path=ppt/slides/slide54.xml><?xml version="1.0" encoding="utf-8"?>
+<file path=ppt/slides/slide56.xml><?xml version="1.0" encoding="utf-8"?>
 <p:sld xmlns:a="http://schemas.openxmlformats.org/drawingml/2006/main" xmlns:r="http://schemas.openxmlformats.org/officeDocument/2006/relationships" xmlns:p="http://schemas.openxmlformats.org/presentationml/2006/main">
   <p:cSld>
     <p:spTree>
@@ -41388,7 +41710,7 @@
 </p:sld>
 </file>
 
-<file path=ppt/slides/slide55.xml><?xml version="1.0" encoding="utf-8"?>
+<file path=ppt/slides/slide57.xml><?xml version="1.0" encoding="utf-8"?>
 <p:sld xmlns:a="http://schemas.openxmlformats.org/drawingml/2006/main" xmlns:r="http://schemas.openxmlformats.org/officeDocument/2006/relationships" xmlns:p="http://schemas.openxmlformats.org/presentationml/2006/main">
   <p:cSld>
     <p:spTree>
@@ -43852,7 +44174,7 @@
 </p:sld>
 </file>
 
-<file path=ppt/slides/slide56.xml><?xml version="1.0" encoding="utf-8"?>
+<file path=ppt/slides/slide58.xml><?xml version="1.0" encoding="utf-8"?>
 <p:sld xmlns:a="http://schemas.openxmlformats.org/drawingml/2006/main" xmlns:r="http://schemas.openxmlformats.org/officeDocument/2006/relationships" xmlns:p="http://schemas.openxmlformats.org/presentationml/2006/main">
   <p:cSld>
     <p:spTree>
@@ -45192,7 +45514,7 @@
 </p:sld>
 </file>
 
-<file path=ppt/slides/slide57.xml><?xml version="1.0" encoding="utf-8"?>
+<file path=ppt/slides/slide59.xml><?xml version="1.0" encoding="utf-8"?>
 <p:sld xmlns:a="http://schemas.openxmlformats.org/drawingml/2006/main" xmlns:r="http://schemas.openxmlformats.org/officeDocument/2006/relationships" xmlns:p="http://schemas.openxmlformats.org/presentationml/2006/main">
   <p:cSld>
     <p:spTree>
@@ -46398,7 +46720,268 @@
 </p:sld>
 </file>
 
-<file path=ppt/slides/slide58.xml><?xml version="1.0" encoding="utf-8"?>
+<file path=ppt/slides/slide6.xml><?xml version="1.0" encoding="utf-8"?>
+<p:sld xmlns:a="http://schemas.openxmlformats.org/drawingml/2006/main" xmlns:r="http://schemas.openxmlformats.org/officeDocument/2006/relationships" xmlns:p="http://schemas.openxmlformats.org/presentationml/2006/main">
+  <p:cSld>
+    <p:spTree>
+      <p:nvGrpSpPr>
+        <p:cNvPr id="1" name=""/>
+        <p:cNvGrpSpPr/>
+        <p:nvPr/>
+      </p:nvGrpSpPr>
+      <p:grpSpPr>
+        <a:xfrm>
+          <a:off x="0" y="0"/>
+          <a:ext cx="0" cy="0"/>
+          <a:chOff x="0" y="0"/>
+          <a:chExt cx="0" cy="0"/>
+        </a:xfrm>
+      </p:grpSpPr>
+      <p:graphicFrame>
+        <p:nvGraphicFramePr>
+          <p:cNvPr id="8" name="think-cell data - do not delete" hidden="1">
+            <a:extLst>
+              <a:ext uri="{FF2B5EF4-FFF2-40B4-BE49-F238E27FC236}">
+                <a16:creationId xmlns:a16="http://schemas.microsoft.com/office/drawing/2014/main" id="{A8B022A5-FB0C-1D48-AC2A-29461A1E4CED}"/>
+              </a:ext>
+            </a:extLst>
+          </p:cNvPr>
+          <p:cNvGraphicFramePr>
+            <a:graphicFrameLocks noChangeAspect="1"/>
+          </p:cNvGraphicFramePr>
+          <p:nvPr>
+            <p:custDataLst>
+              <p:tags r:id="rId1"/>
+            </p:custDataLst>
+            <p:extLst>
+              <p:ext uri="{D42A27DB-BD31-4B8C-83A1-F6EECF244321}">
+                <p14:modId xmlns:p14="http://schemas.microsoft.com/office/powerpoint/2010/main" val="1008553636"/>
+              </p:ext>
+            </p:extLst>
+          </p:nvPr>
+        </p:nvGraphicFramePr>
+        <p:xfrm>
+          <a:off x="1588" y="1588"/>
+          <a:ext cx="1588" cy="1588"/>
+        </p:xfrm>
+        <a:graphic>
+          <a:graphicData uri="http://schemas.openxmlformats.org/presentationml/2006/ole">
+            <mc:AlternateContent xmlns:mc="http://schemas.openxmlformats.org/markup-compatibility/2006">
+              <mc:Choice xmlns:v="urn:schemas-microsoft-com:vml" Requires="v">
+                <p:oleObj name="think-cell Folie" r:id="rId3" imgW="540" imgH="540" progId="TCLayout.ActiveDocument.1">
+                  <p:embed/>
+                </p:oleObj>
+              </mc:Choice>
+              <mc:Fallback>
+                <p:oleObj name="think-cell Folie" r:id="rId3" imgW="540" imgH="540" progId="TCLayout.ActiveDocument.1">
+                  <p:embed/>
+                  <p:pic>
+                    <p:nvPicPr>
+                      <p:cNvPr id="0" name=""/>
+                      <p:cNvPicPr/>
+                      <p:nvPr/>
+                    </p:nvPicPr>
+                    <p:blipFill>
+                      <a:blip r:embed="rId4"/>
+                      <a:stretch>
+                        <a:fillRect/>
+                      </a:stretch>
+                    </p:blipFill>
+                    <p:spPr>
+                      <a:xfrm>
+                        <a:off x="1588" y="1588"/>
+                        <a:ext cx="1588" cy="1588"/>
+                      </a:xfrm>
+                      <a:prstGeom prst="rect">
+                        <a:avLst/>
+                      </a:prstGeom>
+                    </p:spPr>
+                  </p:pic>
+                </p:oleObj>
+              </mc:Fallback>
+            </mc:AlternateContent>
+          </a:graphicData>
+        </a:graphic>
+      </p:graphicFrame>
+      <p:sp>
+        <p:nvSpPr>
+          <p:cNvPr id="2" name="Titel 1">
+            <a:extLst>
+              <a:ext uri="{FF2B5EF4-FFF2-40B4-BE49-F238E27FC236}">
+                <a16:creationId xmlns:a16="http://schemas.microsoft.com/office/drawing/2014/main" id="{C6E360AC-D065-54D4-D2F4-A158C3710DF5}"/>
+              </a:ext>
+            </a:extLst>
+          </p:cNvPr>
+          <p:cNvSpPr>
+            <a:spLocks noGrp="1"/>
+          </p:cNvSpPr>
+          <p:nvPr>
+            <p:ph type="title"/>
+          </p:nvPr>
+        </p:nvSpPr>
+        <p:spPr/>
+        <p:txBody>
+          <a:bodyPr vert="horz"/>
+          <a:lstStyle/>
+          <a:p>
+            <a:r>
+              <a:rPr lang="de-DE"/>
+              <a:t>Shape verknüpfen </a:t>
+            </a:r>
+            <a:br>
+              <a:rPr lang="de-DE"/>
+            </a:br>
+            <a:r>
+              <a:rPr lang="de-DE"/>
+              <a:t>und synchronisieren</a:t>
+            </a:r>
+            <a:endParaRPr lang="de-DE" dirty="0"/>
+          </a:p>
+        </p:txBody>
+      </p:sp>
+      <p:pic>
+        <p:nvPicPr>
+          <p:cNvPr id="5" name="Grafik 4">
+            <a:extLst>
+              <a:ext uri="{FF2B5EF4-FFF2-40B4-BE49-F238E27FC236}">
+                <a16:creationId xmlns:a16="http://schemas.microsoft.com/office/drawing/2014/main" id="{E2BA60E0-BA3E-597E-4019-347FAFBADC8B}"/>
+              </a:ext>
+            </a:extLst>
+          </p:cNvPr>
+          <p:cNvPicPr>
+            <a:picLocks noChangeAspect="1"/>
+          </p:cNvPicPr>
+          <p:nvPr/>
+        </p:nvPicPr>
+        <p:blipFill>
+          <a:blip r:embed="rId5"/>
+          <a:stretch>
+            <a:fillRect/>
+          </a:stretch>
+        </p:blipFill>
+        <p:spPr>
+          <a:xfrm>
+            <a:off x="7941717" y="1244566"/>
+            <a:ext cx="3258005" cy="5039428"/>
+          </a:xfrm>
+          <a:prstGeom prst="rect">
+            <a:avLst/>
+          </a:prstGeom>
+        </p:spPr>
+      </p:pic>
+      <p:sp>
+        <p:nvSpPr>
+          <p:cNvPr id="6" name="Rechteck 5">
+            <a:extLst>
+              <a:ext uri="{FF2B5EF4-FFF2-40B4-BE49-F238E27FC236}">
+                <a16:creationId xmlns:a16="http://schemas.microsoft.com/office/drawing/2014/main" id="{E71042C2-F7F7-F214-427A-477C536F2036}"/>
+              </a:ext>
+            </a:extLst>
+          </p:cNvPr>
+          <p:cNvSpPr/>
+          <p:nvPr/>
+        </p:nvSpPr>
+        <p:spPr>
+          <a:xfrm>
+            <a:off x="8086196" y="4949613"/>
+            <a:ext cx="3028844" cy="933027"/>
+          </a:xfrm>
+          <a:prstGeom prst="rect">
+            <a:avLst/>
+          </a:prstGeom>
+          <a:noFill/>
+          <a:ln w="28575" cap="flat" cmpd="sng" algn="ctr">
+            <a:solidFill>
+              <a:srgbClr val="FF0000"/>
+            </a:solidFill>
+            <a:prstDash val="solid"/>
+            <a:miter lim="800000"/>
+          </a:ln>
+          <a:effectLst/>
+          <a:extLst>
+            <a:ext uri="{909E8E84-426E-40DD-AFC4-6F175D3DCCD1}">
+              <a14:hiddenFill xmlns:a14="http://schemas.microsoft.com/office/drawing/2010/main">
+                <a:solidFill>
+                  <a:schemeClr val="accent1"/>
+                </a:solidFill>
+              </a14:hiddenFill>
+            </a:ext>
+          </a:extLst>
+        </p:spPr>
+        <p:style>
+          <a:lnRef idx="2">
+            <a:schemeClr val="accent1">
+              <a:shade val="50000"/>
+            </a:schemeClr>
+          </a:lnRef>
+          <a:fillRef idx="1">
+            <a:schemeClr val="accent1"/>
+          </a:fillRef>
+          <a:effectRef idx="0">
+            <a:schemeClr val="accent1"/>
+          </a:effectRef>
+          <a:fontRef idx="minor">
+            <a:schemeClr val="lt1"/>
+          </a:fontRef>
+        </p:style>
+        <p:txBody>
+          <a:bodyPr rtlCol="0" anchor="ctr"/>
+          <a:lstStyle/>
+          <a:p>
+            <a:pPr algn="ctr"/>
+            <a:endParaRPr lang="de-DE" dirty="0"/>
+          </a:p>
+        </p:txBody>
+      </p:sp>
+      <p:sp>
+        <p:nvSpPr>
+          <p:cNvPr id="16" name="Textfeld 15">
+            <a:extLst>
+              <a:ext uri="{FF2B5EF4-FFF2-40B4-BE49-F238E27FC236}">
+                <a16:creationId xmlns:a16="http://schemas.microsoft.com/office/drawing/2014/main" id="{616C1703-EC83-6349-0EE1-C46C5BA28BD8}"/>
+              </a:ext>
+            </a:extLst>
+          </p:cNvPr>
+          <p:cNvSpPr txBox="1"/>
+          <p:nvPr/>
+        </p:nvSpPr>
+        <p:spPr>
+          <a:xfrm>
+            <a:off x="2245360" y="3227030"/>
+            <a:ext cx="5371369" cy="923330"/>
+          </a:xfrm>
+          <a:prstGeom prst="rect">
+            <a:avLst/>
+          </a:prstGeom>
+          <a:noFill/>
+        </p:spPr>
+        <p:txBody>
+          <a:bodyPr wrap="square" rtlCol="0">
+            <a:spAutoFit/>
+          </a:bodyPr>
+          <a:lstStyle/>
+          <a:p>
+            <a:r>
+              <a:rPr lang="de-DE" dirty="0"/>
+              <a:t>Beim suchen und verknüpfen von Shapes kann sofort danach eine Synchronisierung der wesentlichen Eigenschaften stattfinden.</a:t>
+            </a:r>
+          </a:p>
+        </p:txBody>
+      </p:sp>
+    </p:spTree>
+    <p:extLst>
+      <p:ext uri="{BB962C8B-B14F-4D97-AF65-F5344CB8AC3E}">
+        <p14:creationId xmlns:p14="http://schemas.microsoft.com/office/powerpoint/2010/main" val="3367903751"/>
+      </p:ext>
+    </p:extLst>
+  </p:cSld>
+  <p:clrMapOvr>
+    <a:masterClrMapping/>
+  </p:clrMapOvr>
+</p:sld>
+</file>
+
+<file path=ppt/slides/slide60.xml><?xml version="1.0" encoding="utf-8"?>
 <p:sld xmlns:a="http://schemas.openxmlformats.org/drawingml/2006/main" xmlns:r="http://schemas.openxmlformats.org/officeDocument/2006/relationships" xmlns:p="http://schemas.openxmlformats.org/presentationml/2006/main">
   <p:cSld>
     <p:spTree>
@@ -47494,7 +48077,344 @@
 </p:sld>
 </file>
 
-<file path=ppt/slides/slide6.xml><?xml version="1.0" encoding="utf-8"?>
+<file path=ppt/slides/slide7.xml><?xml version="1.0" encoding="utf-8"?>
+<p:sld xmlns:a="http://schemas.openxmlformats.org/drawingml/2006/main" xmlns:r="http://schemas.openxmlformats.org/officeDocument/2006/relationships" xmlns:p="http://schemas.openxmlformats.org/presentationml/2006/main">
+  <p:cSld>
+    <p:spTree>
+      <p:nvGrpSpPr>
+        <p:cNvPr id="1" name=""/>
+        <p:cNvGrpSpPr/>
+        <p:nvPr/>
+      </p:nvGrpSpPr>
+      <p:grpSpPr>
+        <a:xfrm>
+          <a:off x="0" y="0"/>
+          <a:ext cx="0" cy="0"/>
+          <a:chOff x="0" y="0"/>
+          <a:chExt cx="0" cy="0"/>
+        </a:xfrm>
+      </p:grpSpPr>
+      <p:graphicFrame>
+        <p:nvGraphicFramePr>
+          <p:cNvPr id="5" name="think-cell data - do not delete" hidden="1">
+            <a:extLst>
+              <a:ext uri="{FF2B5EF4-FFF2-40B4-BE49-F238E27FC236}">
+                <a16:creationId xmlns:a16="http://schemas.microsoft.com/office/drawing/2014/main" id="{3F2898AB-8B0B-31B8-E446-A3D7BC1A9782}"/>
+              </a:ext>
+            </a:extLst>
+          </p:cNvPr>
+          <p:cNvGraphicFramePr>
+            <a:graphicFrameLocks noChangeAspect="1"/>
+          </p:cNvGraphicFramePr>
+          <p:nvPr>
+            <p:custDataLst>
+              <p:tags r:id="rId1"/>
+            </p:custDataLst>
+            <p:extLst>
+              <p:ext uri="{D42A27DB-BD31-4B8C-83A1-F6EECF244321}">
+                <p14:modId xmlns:p14="http://schemas.microsoft.com/office/powerpoint/2010/main" val="2712840536"/>
+              </p:ext>
+            </p:extLst>
+          </p:nvPr>
+        </p:nvGraphicFramePr>
+        <p:xfrm>
+          <a:off x="1588" y="1588"/>
+          <a:ext cx="1588" cy="1588"/>
+        </p:xfrm>
+        <a:graphic>
+          <a:graphicData uri="http://schemas.openxmlformats.org/presentationml/2006/ole">
+            <mc:AlternateContent xmlns:mc="http://schemas.openxmlformats.org/markup-compatibility/2006">
+              <mc:Choice xmlns:v="urn:schemas-microsoft-com:vml" Requires="v">
+                <p:oleObj name="think-cell Folie" r:id="rId3" imgW="540" imgH="540" progId="TCLayout.ActiveDocument.1">
+                  <p:embed/>
+                </p:oleObj>
+              </mc:Choice>
+              <mc:Fallback>
+                <p:oleObj name="think-cell Folie" r:id="rId3" imgW="540" imgH="540" progId="TCLayout.ActiveDocument.1">
+                  <p:embed/>
+                  <p:pic>
+                    <p:nvPicPr>
+                      <p:cNvPr id="0" name=""/>
+                      <p:cNvPicPr/>
+                      <p:nvPr/>
+                    </p:nvPicPr>
+                    <p:blipFill>
+                      <a:blip r:embed="rId4"/>
+                      <a:stretch>
+                        <a:fillRect/>
+                      </a:stretch>
+                    </p:blipFill>
+                    <p:spPr>
+                      <a:xfrm>
+                        <a:off x="1588" y="1588"/>
+                        <a:ext cx="1588" cy="1588"/>
+                      </a:xfrm>
+                      <a:prstGeom prst="rect">
+                        <a:avLst/>
+                      </a:prstGeom>
+                    </p:spPr>
+                  </p:pic>
+                </p:oleObj>
+              </mc:Fallback>
+            </mc:AlternateContent>
+          </a:graphicData>
+        </a:graphic>
+      </p:graphicFrame>
+      <p:sp>
+        <p:nvSpPr>
+          <p:cNvPr id="2" name="Titel 1">
+            <a:extLst>
+              <a:ext uri="{FF2B5EF4-FFF2-40B4-BE49-F238E27FC236}">
+                <a16:creationId xmlns:a16="http://schemas.microsoft.com/office/drawing/2014/main" id="{EA65AC97-7BB1-3E98-0D76-C51E6EE702A7}"/>
+              </a:ext>
+            </a:extLst>
+          </p:cNvPr>
+          <p:cNvSpPr>
+            <a:spLocks noGrp="1"/>
+          </p:cNvSpPr>
+          <p:nvPr>
+            <p:ph type="title"/>
+          </p:nvPr>
+        </p:nvSpPr>
+        <p:spPr/>
+        <p:txBody>
+          <a:bodyPr vert="horz"/>
+          <a:lstStyle/>
+          <a:p>
+            <a:r>
+              <a:rPr lang="de-DE" dirty="0"/>
+              <a:t>Verbesserte UI</a:t>
+            </a:r>
+          </a:p>
+        </p:txBody>
+      </p:sp>
+      <p:sp>
+        <p:nvSpPr>
+          <p:cNvPr id="11" name="Textfeld 10">
+            <a:extLst>
+              <a:ext uri="{FF2B5EF4-FFF2-40B4-BE49-F238E27FC236}">
+                <a16:creationId xmlns:a16="http://schemas.microsoft.com/office/drawing/2014/main" id="{FF663BB1-D2E8-AED3-1669-BD05D88BECB5}"/>
+              </a:ext>
+            </a:extLst>
+          </p:cNvPr>
+          <p:cNvSpPr txBox="1"/>
+          <p:nvPr/>
+        </p:nvSpPr>
+        <p:spPr>
+          <a:xfrm>
+            <a:off x="838200" y="2282831"/>
+            <a:ext cx="10515600" cy="646331"/>
+          </a:xfrm>
+          <a:prstGeom prst="rect">
+            <a:avLst/>
+          </a:prstGeom>
+          <a:noFill/>
+        </p:spPr>
+        <p:txBody>
+          <a:bodyPr wrap="square" rtlCol="0">
+            <a:spAutoFit/>
+          </a:bodyPr>
+          <a:lstStyle/>
+          <a:p>
+            <a:r>
+              <a:rPr lang="de-DE" dirty="0"/>
+              <a:t>Bei typischer Notebook-Auflösung (bspw. 2560x1600 mit 150% Skalierung) passt die gesamte Toolbar ohne Einklappen von Gruppen auf den Bildschirm (insb. unter </a:t>
+            </a:r>
+            <a:r>
+              <a:rPr lang="de-DE" dirty="0" err="1"/>
+              <a:t>Win</a:t>
+            </a:r>
+            <a:r>
+              <a:rPr lang="de-DE" dirty="0"/>
+              <a:t> 11)</a:t>
+            </a:r>
+          </a:p>
+        </p:txBody>
+      </p:sp>
+      <p:pic>
+        <p:nvPicPr>
+          <p:cNvPr id="14" name="Grafik 13">
+            <a:extLst>
+              <a:ext uri="{FF2B5EF4-FFF2-40B4-BE49-F238E27FC236}">
+                <a16:creationId xmlns:a16="http://schemas.microsoft.com/office/drawing/2014/main" id="{8CBA523A-C877-B886-8E76-C646866158A5}"/>
+              </a:ext>
+            </a:extLst>
+          </p:cNvPr>
+          <p:cNvPicPr>
+            <a:picLocks noChangeAspect="1"/>
+          </p:cNvPicPr>
+          <p:nvPr/>
+        </p:nvPicPr>
+        <p:blipFill>
+          <a:blip r:embed="rId5"/>
+          <a:stretch>
+            <a:fillRect/>
+          </a:stretch>
+        </p:blipFill>
+        <p:spPr>
+          <a:xfrm>
+            <a:off x="0" y="4932332"/>
+            <a:ext cx="12192000" cy="725232"/>
+          </a:xfrm>
+          <a:prstGeom prst="rect">
+            <a:avLst/>
+          </a:prstGeom>
+        </p:spPr>
+      </p:pic>
+      <p:sp>
+        <p:nvSpPr>
+          <p:cNvPr id="15" name="Pfeil: nach unten 14">
+            <a:extLst>
+              <a:ext uri="{FF2B5EF4-FFF2-40B4-BE49-F238E27FC236}">
+                <a16:creationId xmlns:a16="http://schemas.microsoft.com/office/drawing/2014/main" id="{5110ABB1-EC34-1746-540D-87E7D5D42202}"/>
+              </a:ext>
+            </a:extLst>
+          </p:cNvPr>
+          <p:cNvSpPr/>
+          <p:nvPr/>
+        </p:nvSpPr>
+        <p:spPr>
+          <a:xfrm>
+            <a:off x="5939118" y="4313312"/>
+            <a:ext cx="313765" cy="322730"/>
+          </a:xfrm>
+          <a:prstGeom prst="downArrow">
+            <a:avLst/>
+          </a:prstGeom>
+        </p:spPr>
+        <p:style>
+          <a:lnRef idx="2">
+            <a:schemeClr val="accent1">
+              <a:shade val="15000"/>
+            </a:schemeClr>
+          </a:lnRef>
+          <a:fillRef idx="1">
+            <a:schemeClr val="accent1"/>
+          </a:fillRef>
+          <a:effectRef idx="0">
+            <a:schemeClr val="accent1"/>
+          </a:effectRef>
+          <a:fontRef idx="minor">
+            <a:schemeClr val="lt1"/>
+          </a:fontRef>
+        </p:style>
+        <p:txBody>
+          <a:bodyPr rtlCol="0" anchor="ctr"/>
+          <a:lstStyle/>
+          <a:p>
+            <a:pPr algn="ctr"/>
+            <a:endParaRPr lang="en-US"/>
+          </a:p>
+        </p:txBody>
+      </p:sp>
+      <p:pic>
+        <p:nvPicPr>
+          <p:cNvPr id="4" name="Grafik 3">
+            <a:extLst>
+              <a:ext uri="{FF2B5EF4-FFF2-40B4-BE49-F238E27FC236}">
+                <a16:creationId xmlns:a16="http://schemas.microsoft.com/office/drawing/2014/main" id="{DEB116EB-EAF9-7C19-D36A-FCC8D4B84054}"/>
+              </a:ext>
+            </a:extLst>
+          </p:cNvPr>
+          <p:cNvPicPr>
+            <a:picLocks noChangeAspect="1"/>
+          </p:cNvPicPr>
+          <p:nvPr/>
+        </p:nvPicPr>
+        <p:blipFill>
+          <a:blip r:embed="rId6"/>
+          <a:stretch>
+            <a:fillRect/>
+          </a:stretch>
+        </p:blipFill>
+        <p:spPr>
+          <a:xfrm>
+            <a:off x="0" y="3291791"/>
+            <a:ext cx="12192000" cy="725232"/>
+          </a:xfrm>
+          <a:prstGeom prst="rect">
+            <a:avLst/>
+          </a:prstGeom>
+        </p:spPr>
+      </p:pic>
+      <p:sp>
+        <p:nvSpPr>
+          <p:cNvPr id="6" name="Rechteck 5">
+            <a:extLst>
+              <a:ext uri="{FF2B5EF4-FFF2-40B4-BE49-F238E27FC236}">
+                <a16:creationId xmlns:a16="http://schemas.microsoft.com/office/drawing/2014/main" id="{BB1E9A52-023D-5BF6-6880-B51A0B413C39}"/>
+              </a:ext>
+            </a:extLst>
+          </p:cNvPr>
+          <p:cNvSpPr/>
+          <p:nvPr/>
+        </p:nvSpPr>
+        <p:spPr>
+          <a:xfrm>
+            <a:off x="9242191" y="3240291"/>
+            <a:ext cx="2906850" cy="2468774"/>
+          </a:xfrm>
+          <a:prstGeom prst="rect">
+            <a:avLst/>
+          </a:prstGeom>
+          <a:noFill/>
+          <a:ln w="28575" cap="flat" cmpd="sng" algn="ctr">
+            <a:solidFill>
+              <a:srgbClr val="FF0000"/>
+            </a:solidFill>
+            <a:prstDash val="solid"/>
+            <a:miter lim="800000"/>
+          </a:ln>
+          <a:effectLst/>
+          <a:extLst>
+            <a:ext uri="{909E8E84-426E-40DD-AFC4-6F175D3DCCD1}">
+              <a14:hiddenFill xmlns:a14="http://schemas.microsoft.com/office/drawing/2010/main">
+                <a:solidFill>
+                  <a:schemeClr val="accent1"/>
+                </a:solidFill>
+              </a14:hiddenFill>
+            </a:ext>
+          </a:extLst>
+        </p:spPr>
+        <p:style>
+          <a:lnRef idx="2">
+            <a:schemeClr val="accent1">
+              <a:shade val="50000"/>
+            </a:schemeClr>
+          </a:lnRef>
+          <a:fillRef idx="1">
+            <a:schemeClr val="accent1"/>
+          </a:fillRef>
+          <a:effectRef idx="0">
+            <a:schemeClr val="accent1"/>
+          </a:effectRef>
+          <a:fontRef idx="minor">
+            <a:schemeClr val="lt1"/>
+          </a:fontRef>
+        </p:style>
+        <p:txBody>
+          <a:bodyPr rtlCol="0" anchor="ctr"/>
+          <a:lstStyle/>
+          <a:p>
+            <a:pPr algn="ctr"/>
+            <a:endParaRPr lang="de-DE" dirty="0"/>
+          </a:p>
+        </p:txBody>
+      </p:sp>
+    </p:spTree>
+    <p:extLst>
+      <p:ext uri="{BB962C8B-B14F-4D97-AF65-F5344CB8AC3E}">
+        <p14:creationId xmlns:p14="http://schemas.microsoft.com/office/powerpoint/2010/main" val="2494079803"/>
+      </p:ext>
+    </p:extLst>
+  </p:cSld>
+  <p:clrMapOvr>
+    <a:masterClrMapping/>
+  </p:clrMapOvr>
+</p:sld>
+</file>
+
+<file path=ppt/slides/slide8.xml><?xml version="1.0" encoding="utf-8"?>
 <p:sld xmlns:a="http://schemas.openxmlformats.org/drawingml/2006/main" xmlns:r="http://schemas.openxmlformats.org/officeDocument/2006/relationships" xmlns:p="http://schemas.openxmlformats.org/presentationml/2006/main">
   <p:cSld>
     <p:spTree>
@@ -47749,7 +48669,7 @@
 </p:sld>
 </file>
 
-<file path=ppt/slides/slide7.xml><?xml version="1.0" encoding="utf-8"?>
+<file path=ppt/slides/slide9.xml><?xml version="1.0" encoding="utf-8"?>
 <p:sld xmlns:a="http://schemas.openxmlformats.org/drawingml/2006/main" xmlns:r="http://schemas.openxmlformats.org/officeDocument/2006/relationships" xmlns:p="http://schemas.openxmlformats.org/presentationml/2006/main">
   <p:cSld>
     <p:spTree>
@@ -47999,431 +48919,6 @@
 </p:sld>
 </file>
 
-<file path=ppt/slides/slide8.xml><?xml version="1.0" encoding="utf-8"?>
-<p:sld xmlns:a="http://schemas.openxmlformats.org/drawingml/2006/main" xmlns:r="http://schemas.openxmlformats.org/officeDocument/2006/relationships" xmlns:p="http://schemas.openxmlformats.org/presentationml/2006/main">
-  <p:cSld>
-    <p:spTree>
-      <p:nvGrpSpPr>
-        <p:cNvPr id="1" name=""/>
-        <p:cNvGrpSpPr/>
-        <p:nvPr/>
-      </p:nvGrpSpPr>
-      <p:grpSpPr>
-        <a:xfrm>
-          <a:off x="0" y="0"/>
-          <a:ext cx="0" cy="0"/>
-          <a:chOff x="0" y="0"/>
-          <a:chExt cx="0" cy="0"/>
-        </a:xfrm>
-      </p:grpSpPr>
-      <p:graphicFrame>
-        <p:nvGraphicFramePr>
-          <p:cNvPr id="5" name="think-cell data - do not delete" hidden="1">
-            <a:extLst>
-              <a:ext uri="{FF2B5EF4-FFF2-40B4-BE49-F238E27FC236}">
-                <a16:creationId xmlns:a16="http://schemas.microsoft.com/office/drawing/2014/main" id="{B3E647CA-BD1F-94A9-09D9-98D87C881453}"/>
-              </a:ext>
-            </a:extLst>
-          </p:cNvPr>
-          <p:cNvGraphicFramePr>
-            <a:graphicFrameLocks noChangeAspect="1"/>
-          </p:cNvGraphicFramePr>
-          <p:nvPr>
-            <p:custDataLst>
-              <p:tags r:id="rId1"/>
-            </p:custDataLst>
-            <p:extLst>
-              <p:ext uri="{D42A27DB-BD31-4B8C-83A1-F6EECF244321}">
-                <p14:modId xmlns:p14="http://schemas.microsoft.com/office/powerpoint/2010/main" val="2425650701"/>
-              </p:ext>
-            </p:extLst>
-          </p:nvPr>
-        </p:nvGraphicFramePr>
-        <p:xfrm>
-          <a:off x="1588" y="1588"/>
-          <a:ext cx="1588" cy="1588"/>
-        </p:xfrm>
-        <a:graphic>
-          <a:graphicData uri="http://schemas.openxmlformats.org/presentationml/2006/ole">
-            <mc:AlternateContent xmlns:mc="http://schemas.openxmlformats.org/markup-compatibility/2006">
-              <mc:Choice xmlns:v="urn:schemas-microsoft-com:vml" Requires="v">
-                <p:oleObj name="think-cell Folie" r:id="rId3" imgW="592" imgH="595" progId="TCLayout.ActiveDocument.1">
-                  <p:embed/>
-                </p:oleObj>
-              </mc:Choice>
-              <mc:Fallback>
-                <p:oleObj name="think-cell Folie" r:id="rId3" imgW="592" imgH="595" progId="TCLayout.ActiveDocument.1">
-                  <p:embed/>
-                  <p:pic>
-                    <p:nvPicPr>
-                      <p:cNvPr id="0" name=""/>
-                      <p:cNvPicPr/>
-                      <p:nvPr/>
-                    </p:nvPicPr>
-                    <p:blipFill>
-                      <a:blip r:embed="rId4"/>
-                      <a:stretch>
-                        <a:fillRect/>
-                      </a:stretch>
-                    </p:blipFill>
-                    <p:spPr>
-                      <a:xfrm>
-                        <a:off x="1588" y="1588"/>
-                        <a:ext cx="1588" cy="1588"/>
-                      </a:xfrm>
-                      <a:prstGeom prst="rect">
-                        <a:avLst/>
-                      </a:prstGeom>
-                    </p:spPr>
-                  </p:pic>
-                </p:oleObj>
-              </mc:Fallback>
-            </mc:AlternateContent>
-          </a:graphicData>
-        </a:graphic>
-      </p:graphicFrame>
-      <p:sp>
-        <p:nvSpPr>
-          <p:cNvPr id="2" name="Titel 1">
-            <a:extLst>
-              <a:ext uri="{FF2B5EF4-FFF2-40B4-BE49-F238E27FC236}">
-                <a16:creationId xmlns:a16="http://schemas.microsoft.com/office/drawing/2014/main" id="{36B99A4E-E562-AF2E-DCB9-089C7EA5BCB9}"/>
-              </a:ext>
-            </a:extLst>
-          </p:cNvPr>
-          <p:cNvSpPr>
-            <a:spLocks noGrp="1"/>
-          </p:cNvSpPr>
-          <p:nvPr>
-            <p:ph type="title"/>
-          </p:nvPr>
-        </p:nvSpPr>
-        <p:spPr/>
-        <p:txBody>
-          <a:bodyPr vert="horz"/>
-          <a:lstStyle/>
-          <a:p>
-            <a:r>
-              <a:rPr lang="en-US"/>
-              <a:t>Upgrade auf IronPython</a:t>
-            </a:r>
-            <a:r>
-              <a:rPr lang="en-US" dirty="0"/>
-              <a:t> 3.4.1</a:t>
-            </a:r>
-          </a:p>
-        </p:txBody>
-      </p:sp>
-      <p:pic>
-        <p:nvPicPr>
-          <p:cNvPr id="1026" name="Picture 2" descr="IronPython - 开放百科- 灰狐">
-            <a:extLst>
-              <a:ext uri="{FF2B5EF4-FFF2-40B4-BE49-F238E27FC236}">
-                <a16:creationId xmlns:a16="http://schemas.microsoft.com/office/drawing/2014/main" id="{2055868C-1067-5774-6DD1-34DA6E7289B2}"/>
-              </a:ext>
-            </a:extLst>
-          </p:cNvPr>
-          <p:cNvPicPr>
-            <a:picLocks noChangeAspect="1" noChangeArrowheads="1"/>
-          </p:cNvPicPr>
-          <p:nvPr/>
-        </p:nvPicPr>
-        <p:blipFill>
-          <a:blip r:embed="rId5">
-            <a:extLst>
-              <a:ext uri="{28A0092B-C50C-407E-A947-70E740481C1C}">
-                <a14:useLocalDpi xmlns:a14="http://schemas.microsoft.com/office/drawing/2010/main" val="0"/>
-              </a:ext>
-            </a:extLst>
-          </a:blip>
-          <a:srcRect/>
-          <a:stretch>
-            <a:fillRect/>
-          </a:stretch>
-        </p:blipFill>
-        <p:spPr bwMode="auto">
-          <a:xfrm>
-            <a:off x="3729038" y="2786063"/>
-            <a:ext cx="4733925" cy="1285875"/>
-          </a:xfrm>
-          <a:prstGeom prst="rect">
-            <a:avLst/>
-          </a:prstGeom>
-          <a:noFill/>
-          <a:extLst>
-            <a:ext uri="{909E8E84-426E-40DD-AFC4-6F175D3DCCD1}">
-              <a14:hiddenFill xmlns:a14="http://schemas.microsoft.com/office/drawing/2010/main">
-                <a:solidFill>
-                  <a:srgbClr val="FFFFFF"/>
-                </a:solidFill>
-              </a14:hiddenFill>
-            </a:ext>
-          </a:extLst>
-        </p:spPr>
-      </p:pic>
-    </p:spTree>
-    <p:extLst>
-      <p:ext uri="{BB962C8B-B14F-4D97-AF65-F5344CB8AC3E}">
-        <p14:creationId xmlns:p14="http://schemas.microsoft.com/office/powerpoint/2010/main" val="3710865324"/>
-      </p:ext>
-    </p:extLst>
-  </p:cSld>
-  <p:clrMapOvr>
-    <a:masterClrMapping/>
-  </p:clrMapOvr>
-</p:sld>
-</file>
-
-<file path=ppt/slides/slide9.xml><?xml version="1.0" encoding="utf-8"?>
-<p:sld xmlns:a="http://schemas.openxmlformats.org/drawingml/2006/main" xmlns:r="http://schemas.openxmlformats.org/officeDocument/2006/relationships" xmlns:p="http://schemas.openxmlformats.org/presentationml/2006/main">
-  <p:cSld>
-    <p:spTree>
-      <p:nvGrpSpPr>
-        <p:cNvPr id="1" name=""/>
-        <p:cNvGrpSpPr/>
-        <p:nvPr/>
-      </p:nvGrpSpPr>
-      <p:grpSpPr>
-        <a:xfrm>
-          <a:off x="0" y="0"/>
-          <a:ext cx="0" cy="0"/>
-          <a:chOff x="0" y="0"/>
-          <a:chExt cx="0" cy="0"/>
-        </a:xfrm>
-      </p:grpSpPr>
-      <p:graphicFrame>
-        <p:nvGraphicFramePr>
-          <p:cNvPr id="3" name="Objekt 2" hidden="1"/>
-          <p:cNvGraphicFramePr>
-            <a:graphicFrameLocks noChangeAspect="1"/>
-          </p:cNvGraphicFramePr>
-          <p:nvPr>
-            <p:custDataLst>
-              <p:tags r:id="rId1"/>
-            </p:custDataLst>
-            <p:extLst>
-              <p:ext uri="{D42A27DB-BD31-4B8C-83A1-F6EECF244321}">
-                <p14:modId xmlns:p14="http://schemas.microsoft.com/office/powerpoint/2010/main" val="965112342"/>
-              </p:ext>
-            </p:extLst>
-          </p:nvPr>
-        </p:nvGraphicFramePr>
-        <p:xfrm>
-          <a:off x="1588" y="1588"/>
-          <a:ext cx="1588" cy="1588"/>
-        </p:xfrm>
-        <a:graphic>
-          <a:graphicData uri="http://schemas.openxmlformats.org/presentationml/2006/ole">
-            <mc:AlternateContent xmlns:mc="http://schemas.openxmlformats.org/markup-compatibility/2006">
-              <mc:Choice xmlns:v="urn:schemas-microsoft-com:vml" Requires="v">
-                <p:oleObj name="think-cell Folie" r:id="rId4" imgW="526" imgH="526" progId="TCLayout.ActiveDocument.1">
-                  <p:embed/>
-                </p:oleObj>
-              </mc:Choice>
-              <mc:Fallback>
-                <p:oleObj name="think-cell Folie" r:id="rId4" imgW="526" imgH="526" progId="TCLayout.ActiveDocument.1">
-                  <p:embed/>
-                  <p:pic>
-                    <p:nvPicPr>
-                      <p:cNvPr id="3" name="Objekt 2" hidden="1"/>
-                      <p:cNvPicPr/>
-                      <p:nvPr/>
-                    </p:nvPicPr>
-                    <p:blipFill>
-                      <a:blip r:embed="rId5"/>
-                      <a:stretch>
-                        <a:fillRect/>
-                      </a:stretch>
-                    </p:blipFill>
-                    <p:spPr>
-                      <a:xfrm>
-                        <a:off x="1588" y="1588"/>
-                        <a:ext cx="1588" cy="1588"/>
-                      </a:xfrm>
-                      <a:prstGeom prst="rect">
-                        <a:avLst/>
-                      </a:prstGeom>
-                    </p:spPr>
-                  </p:pic>
-                </p:oleObj>
-              </mc:Fallback>
-            </mc:AlternateContent>
-          </a:graphicData>
-        </a:graphic>
-      </p:graphicFrame>
-      <p:sp>
-        <p:nvSpPr>
-          <p:cNvPr id="2" name="Rechteck 1" hidden="1"/>
-          <p:cNvSpPr/>
-          <p:nvPr>
-            <p:custDataLst>
-              <p:tags r:id="rId2"/>
-            </p:custDataLst>
-          </p:nvPr>
-        </p:nvSpPr>
-        <p:spPr>
-          <a:xfrm>
-            <a:off x="0" y="0"/>
-            <a:ext cx="158750" cy="158750"/>
-          </a:xfrm>
-          <a:prstGeom prst="rect">
-            <a:avLst/>
-          </a:prstGeom>
-        </p:spPr>
-        <p:style>
-          <a:lnRef idx="2">
-            <a:schemeClr val="accent1">
-              <a:shade val="50000"/>
-            </a:schemeClr>
-          </a:lnRef>
-          <a:fillRef idx="1">
-            <a:schemeClr val="accent1"/>
-          </a:fillRef>
-          <a:effectRef idx="0">
-            <a:schemeClr val="accent1"/>
-          </a:effectRef>
-          <a:fontRef idx="minor">
-            <a:schemeClr val="lt1"/>
-          </a:fontRef>
-        </p:style>
-        <p:txBody>
-          <a:bodyPr wrap="none" lIns="0" tIns="0" rIns="0" bIns="0" numCol="1" spcCol="0" rtlCol="0" anchor="ctr" anchorCtr="0">
-            <a:noAutofit/>
-          </a:bodyPr>
-          <a:lstStyle/>
-          <a:p>
-            <a:pPr algn="ctr"/>
-            <a:endParaRPr lang="de-DE" sz="6000" dirty="0">
-              <a:latin typeface="Consolas" panose="020B0609020204030204" pitchFamily="49" charset="0"/>
-              <a:ea typeface="+mj-ea"/>
-              <a:cs typeface="+mj-cs"/>
-              <a:sym typeface="Consolas" panose="020B0609020204030204" pitchFamily="49" charset="0"/>
-            </a:endParaRPr>
-          </a:p>
-        </p:txBody>
-      </p:sp>
-      <p:sp>
-        <p:nvSpPr>
-          <p:cNvPr id="4" name="Titel 3">
-            <a:extLst>
-              <a:ext uri="{FF2B5EF4-FFF2-40B4-BE49-F238E27FC236}">
-                <a16:creationId xmlns:a16="http://schemas.microsoft.com/office/drawing/2014/main" id="{EF97E3DC-D649-402F-8C47-2BB766F2F884}"/>
-              </a:ext>
-            </a:extLst>
-          </p:cNvPr>
-          <p:cNvSpPr>
-            <a:spLocks noGrp="1"/>
-          </p:cNvSpPr>
-          <p:nvPr>
-            <p:ph type="ctrTitle"/>
-          </p:nvPr>
-        </p:nvSpPr>
-        <p:spPr>
-          <a:xfrm>
-            <a:off x="1524000" y="1122363"/>
-            <a:ext cx="9144000" cy="2387600"/>
-          </a:xfrm>
-        </p:spPr>
-        <p:txBody>
-          <a:bodyPr vert="horz"/>
-          <a:lstStyle/>
-          <a:p>
-            <a:r>
-              <a:rPr lang="de-DE" dirty="0"/>
-              <a:t>BKT v2.7.5</a:t>
-            </a:r>
-          </a:p>
-        </p:txBody>
-      </p:sp>
-      <p:pic>
-        <p:nvPicPr>
-          <p:cNvPr id="7" name="Grafik 6">
-            <a:extLst>
-              <a:ext uri="{FF2B5EF4-FFF2-40B4-BE49-F238E27FC236}">
-                <a16:creationId xmlns:a16="http://schemas.microsoft.com/office/drawing/2014/main" id="{3536E11D-4A04-4FF1-B181-F60850174264}"/>
-              </a:ext>
-            </a:extLst>
-          </p:cNvPr>
-          <p:cNvPicPr>
-            <a:picLocks noChangeAspect="1"/>
-          </p:cNvPicPr>
-          <p:nvPr/>
-        </p:nvPicPr>
-        <p:blipFill>
-          <a:blip r:embed="rId6" cstate="hqprint">
-            <a:extLst>
-              <a:ext uri="{28A0092B-C50C-407E-A947-70E740481C1C}">
-                <a14:useLocalDpi xmlns:a14="http://schemas.microsoft.com/office/drawing/2010/main" val="0"/>
-              </a:ext>
-            </a:extLst>
-          </a:blip>
-          <a:stretch>
-            <a:fillRect/>
-          </a:stretch>
-        </p:blipFill>
-        <p:spPr>
-          <a:xfrm>
-            <a:off x="5362575" y="849313"/>
-            <a:ext cx="1466850" cy="1466850"/>
-          </a:xfrm>
-          <a:prstGeom prst="rect">
-            <a:avLst/>
-          </a:prstGeom>
-        </p:spPr>
-      </p:pic>
-      <p:sp>
-        <p:nvSpPr>
-          <p:cNvPr id="6" name="Rechteck 5">
-            <a:extLst>
-              <a:ext uri="{FF2B5EF4-FFF2-40B4-BE49-F238E27FC236}">
-                <a16:creationId xmlns:a16="http://schemas.microsoft.com/office/drawing/2014/main" id="{D1F145E7-73BA-4E3F-9DD8-F650B27DFACB}"/>
-              </a:ext>
-            </a:extLst>
-          </p:cNvPr>
-          <p:cNvSpPr/>
-          <p:nvPr/>
-        </p:nvSpPr>
-        <p:spPr>
-          <a:xfrm>
-            <a:off x="3473616" y="3783013"/>
-            <a:ext cx="5244769" cy="369332"/>
-          </a:xfrm>
-          <a:prstGeom prst="rect">
-            <a:avLst/>
-          </a:prstGeom>
-        </p:spPr>
-        <p:txBody>
-          <a:bodyPr wrap="none">
-            <a:spAutoFit/>
-          </a:bodyPr>
-          <a:lstStyle/>
-          <a:p>
-            <a:r>
-              <a:rPr lang="de-DE" dirty="0">
-                <a:hlinkClick r:id="rId7"/>
-              </a:rPr>
-              <a:t>https://www.bkt-toolbox.de/overview.html</a:t>
-            </a:r>
-            <a:r>
-              <a:rPr lang="de-DE" dirty="0"/>
-              <a:t> </a:t>
-            </a:r>
-          </a:p>
-        </p:txBody>
-      </p:sp>
-    </p:spTree>
-    <p:extLst>
-      <p:ext uri="{BB962C8B-B14F-4D97-AF65-F5344CB8AC3E}">
-        <p14:creationId xmlns:p14="http://schemas.microsoft.com/office/powerpoint/2010/main" val="3388339299"/>
-      </p:ext>
-    </p:extLst>
-  </p:cSld>
-  <p:clrMapOvr>
-    <a:masterClrMapping/>
-  </p:clrMapOvr>
-</p:sld>
-</file>
-
 <file path=ppt/tags/tag1.xml><?xml version="1.0" encoding="utf-8"?>
 <p:tagLst xmlns:a="http://schemas.openxmlformats.org/drawingml/2006/main" xmlns:r="http://schemas.openxmlformats.org/officeDocument/2006/relationships" xmlns:p="http://schemas.openxmlformats.org/presentationml/2006/main">
   <p:tag name="THINKCELLUNDODONOTDELETE" val="0"/>
@@ -48446,46 +48941,49 @@
 
 <file path=ppt/tags/tag101.xml><?xml version="1.0" encoding="utf-8"?>
 <p:tagLst xmlns:a="http://schemas.openxmlformats.org/drawingml/2006/main" xmlns:r="http://schemas.openxmlformats.org/officeDocument/2006/relationships" xmlns:p="http://schemas.openxmlformats.org/presentationml/2006/main">
+  <p:tag name="BKT_THUMBNAIL" val="{&quot;content_only&quot;: false, &quot;slide_id&quot;: 264, &quot;slide_path&quot;: &quot;CURRENT&quot;, &quot;data_type&quot;: 6}"/>
+  <p:tag name="BKT_CONTEXTDIALOG" val="BKT_THUMBNAIL"/>
+</p:tagLst>
+</file>
+
+<file path=ppt/tags/tag102.xml><?xml version="1.0" encoding="utf-8"?>
+<p:tagLst xmlns:a="http://schemas.openxmlformats.org/drawingml/2006/main" xmlns:r="http://schemas.openxmlformats.org/officeDocument/2006/relationships" xmlns:p="http://schemas.openxmlformats.org/presentationml/2006/main">
+  <p:tag name="BKT_CONTEXTDIALOG" val="BKT_DIALOG_STATESHAPE"/>
+</p:tagLst>
+</file>
+
+<file path=ppt/tags/tag103.xml><?xml version="1.0" encoding="utf-8"?>
+<p:tagLst xmlns:a="http://schemas.openxmlformats.org/drawingml/2006/main" xmlns:r="http://schemas.openxmlformats.org/officeDocument/2006/relationships" xmlns:p="http://schemas.openxmlformats.org/presentationml/2006/main">
   <p:tag name="BKT_SHAPE_HARVEY" val="BKT_HARVEY_V1"/>
   <p:tag name="BKT_CONTEXTDIALOG" val="BKT_SHAPE_HARVEY"/>
   <p:tag name="BKT_HARVEY_DENOM_TAG" val="4"/>
 </p:tagLst>
 </file>
 
-<file path=ppt/tags/tag102.xml><?xml version="1.0" encoding="utf-8"?>
+<file path=ppt/tags/tag104.xml><?xml version="1.0" encoding="utf-8"?>
+<p:tagLst xmlns:a="http://schemas.openxmlformats.org/drawingml/2006/main" xmlns:r="http://schemas.openxmlformats.org/officeDocument/2006/relationships" xmlns:p="http://schemas.openxmlformats.org/presentationml/2006/main">
+  <p:tag name="BKT_SHAPE_HARVEY" val="BKT_HARVEY_V1"/>
+  <p:tag name="BKT_CONTEXTDIALOG" val="BKT_SHAPE_HARVEY"/>
+  <p:tag name="BKT_HARVEY_DENOM_TAG" val="4"/>
+</p:tagLst>
+</file>
+
+<file path=ppt/tags/tag105.xml><?xml version="1.0" encoding="utf-8"?>
 <p:tagLst xmlns:a="http://schemas.openxmlformats.org/drawingml/2006/main" xmlns:r="http://schemas.openxmlformats.org/officeDocument/2006/relationships" xmlns:p="http://schemas.openxmlformats.org/presentationml/2006/main">
   <p:tag name="BKT_THUMBNAIL" val="{&quot;content_only&quot;: false, &quot;slide_id&quot;: 264, &quot;slide_path&quot;: &quot;CURRENT&quot;, &quot;data_type&quot;: 6}"/>
   <p:tag name="BKT_CONTEXTDIALOG" val="BKT_THUMBNAIL"/>
 </p:tagLst>
 </file>
 
-<file path=ppt/tags/tag103.xml><?xml version="1.0" encoding="utf-8"?>
+<file path=ppt/tags/tag106.xml><?xml version="1.0" encoding="utf-8"?>
 <p:tagLst xmlns:a="http://schemas.openxmlformats.org/drawingml/2006/main" xmlns:r="http://schemas.openxmlformats.org/officeDocument/2006/relationships" xmlns:p="http://schemas.openxmlformats.org/presentationml/2006/main">
   <p:tag name="THINKCELLSHAPEDONOTDELETE" val="thinkcellActiveDocDoNotDelete"/>
 </p:tagLst>
 </file>
 
-<file path=ppt/tags/tag104.xml><?xml version="1.0" encoding="utf-8"?>
+<file path=ppt/tags/tag107.xml><?xml version="1.0" encoding="utf-8"?>
 <p:tagLst xmlns:a="http://schemas.openxmlformats.org/drawingml/2006/main" xmlns:r="http://schemas.openxmlformats.org/officeDocument/2006/relationships" xmlns:p="http://schemas.openxmlformats.org/presentationml/2006/main">
   <p:tag name="THINKCELLSHAPEDONOTDELETE" val="t0lrq6NLARaiyXQhnfxG.fw"/>
-</p:tagLst>
-</file>
-
-<file path=ppt/tags/tag105.xml><?xml version="1.0" encoding="utf-8"?>
-<p:tagLst xmlns:a="http://schemas.openxmlformats.org/drawingml/2006/main" xmlns:r="http://schemas.openxmlformats.org/officeDocument/2006/relationships" xmlns:p="http://schemas.openxmlformats.org/presentationml/2006/main">
-  <p:tag name="THINKCELLSHAPEDONOTDELETE" val="thinkcellActiveDocDoNotDelete"/>
-</p:tagLst>
-</file>
-
-<file path=ppt/tags/tag106.xml><?xml version="1.0" encoding="utf-8"?>
-<p:tagLst xmlns:a="http://schemas.openxmlformats.org/drawingml/2006/main" xmlns:r="http://schemas.openxmlformats.org/officeDocument/2006/relationships" xmlns:p="http://schemas.openxmlformats.org/presentationml/2006/main">
-  <p:tag name="THINKCELLSHAPEDONOTDELETE" val="t0lrq6NLARaiyXQhnfxG.fw"/>
-</p:tagLst>
-</file>
-
-<file path=ppt/tags/tag107.xml><?xml version="1.0" encoding="utf-8"?>
-<p:tagLst xmlns:a="http://schemas.openxmlformats.org/drawingml/2006/main" xmlns:r="http://schemas.openxmlformats.org/officeDocument/2006/relationships" xmlns:p="http://schemas.openxmlformats.org/presentationml/2006/main">
-  <p:tag name="BKT_SHAPE_CONNECTORS" val="{&quot;shape2_side&quot;: &quot;top&quot;, &quot;shape1_side&quot;: &quot;bottom&quot;, &quot;shape2_id&quot;: 117, &quot;shape1_id&quot;: 116}"/>
 </p:tagLst>
 </file>
 
@@ -48509,23 +49007,41 @@
 
 <file path=ppt/tags/tag110.xml><?xml version="1.0" encoding="utf-8"?>
 <p:tagLst xmlns:a="http://schemas.openxmlformats.org/drawingml/2006/main" xmlns:r="http://schemas.openxmlformats.org/officeDocument/2006/relationships" xmlns:p="http://schemas.openxmlformats.org/presentationml/2006/main">
-  <p:tag name="THINKCELLSHAPEDONOTDELETE" val="thinkcellActiveDocDoNotDelete"/>
+  <p:tag name="BKT_SHAPE_CONNECTORS" val="{&quot;shape2_side&quot;: &quot;top&quot;, &quot;shape1_side&quot;: &quot;bottom&quot;, &quot;shape2_id&quot;: 117, &quot;shape1_id&quot;: 116}"/>
 </p:tagLst>
 </file>
 
 <file path=ppt/tags/tag111.xml><?xml version="1.0" encoding="utf-8"?>
 <p:tagLst xmlns:a="http://schemas.openxmlformats.org/drawingml/2006/main" xmlns:r="http://schemas.openxmlformats.org/officeDocument/2006/relationships" xmlns:p="http://schemas.openxmlformats.org/presentationml/2006/main">
-  <p:tag name="THINKCELLSHAPEDONOTDELETE" val="ty2ovgFxlQzOVaHuOYItxlQ"/>
+  <p:tag name="THINKCELLSHAPEDONOTDELETE" val="thinkcellActiveDocDoNotDelete"/>
 </p:tagLst>
 </file>
 
 <file path=ppt/tags/tag112.xml><?xml version="1.0" encoding="utf-8"?>
 <p:tagLst xmlns:a="http://schemas.openxmlformats.org/drawingml/2006/main" xmlns:r="http://schemas.openxmlformats.org/officeDocument/2006/relationships" xmlns:p="http://schemas.openxmlformats.org/presentationml/2006/main">
+  <p:tag name="THINKCELLSHAPEDONOTDELETE" val="t0lrq6NLARaiyXQhnfxG.fw"/>
+</p:tagLst>
+</file>
+
+<file path=ppt/tags/tag113.xml><?xml version="1.0" encoding="utf-8"?>
+<p:tagLst xmlns:a="http://schemas.openxmlformats.org/drawingml/2006/main" xmlns:r="http://schemas.openxmlformats.org/officeDocument/2006/relationships" xmlns:p="http://schemas.openxmlformats.org/presentationml/2006/main">
   <p:tag name="THINKCELLSHAPEDONOTDELETE" val="thinkcellActiveDocDoNotDelete"/>
 </p:tagLst>
 </file>
 
-<file path=ppt/tags/tag113.xml><?xml version="1.0" encoding="utf-8"?>
+<file path=ppt/tags/tag114.xml><?xml version="1.0" encoding="utf-8"?>
+<p:tagLst xmlns:a="http://schemas.openxmlformats.org/drawingml/2006/main" xmlns:r="http://schemas.openxmlformats.org/officeDocument/2006/relationships" xmlns:p="http://schemas.openxmlformats.org/presentationml/2006/main">
+  <p:tag name="THINKCELLSHAPEDONOTDELETE" val="ty2ovgFxlQzOVaHuOYItxlQ"/>
+</p:tagLst>
+</file>
+
+<file path=ppt/tags/tag115.xml><?xml version="1.0" encoding="utf-8"?>
+<p:tagLst xmlns:a="http://schemas.openxmlformats.org/drawingml/2006/main" xmlns:r="http://schemas.openxmlformats.org/officeDocument/2006/relationships" xmlns:p="http://schemas.openxmlformats.org/presentationml/2006/main">
+  <p:tag name="THINKCELLSHAPEDONOTDELETE" val="thinkcellActiveDocDoNotDelete"/>
+</p:tagLst>
+</file>
+
+<file path=ppt/tags/tag116.xml><?xml version="1.0" encoding="utf-8"?>
 <p:tagLst xmlns:a="http://schemas.openxmlformats.org/drawingml/2006/main" xmlns:r="http://schemas.openxmlformats.org/officeDocument/2006/relationships" xmlns:p="http://schemas.openxmlformats.org/presentationml/2006/main">
   <p:tag name="THINKCELLSHAPEDONOTDELETE" val="tju1ROJXtTnab04WA7axZvg"/>
 </p:tagLst>
@@ -48539,7 +49055,7 @@
 
 <file path=ppt/tags/tag13.xml><?xml version="1.0" encoding="utf-8"?>
 <p:tagLst xmlns:a="http://schemas.openxmlformats.org/drawingml/2006/main" xmlns:r="http://schemas.openxmlformats.org/officeDocument/2006/relationships" xmlns:p="http://schemas.openxmlformats.org/presentationml/2006/main">
-  <p:tag name="THINKCELLSHAPEDONOTDELETE" val="tNc.ANk4CJuJNL2tC6Ea5Ug"/>
+  <p:tag name="THINKCELLSHAPEDONOTDELETE" val="thinkcellActiveDocDoNotDelete"/>
 </p:tagLst>
 </file>
 
@@ -48569,14 +49085,13 @@
 
 <file path=ppt/tags/tag18.xml><?xml version="1.0" encoding="utf-8"?>
 <p:tagLst xmlns:a="http://schemas.openxmlformats.org/drawingml/2006/main" xmlns:r="http://schemas.openxmlformats.org/officeDocument/2006/relationships" xmlns:p="http://schemas.openxmlformats.org/presentationml/2006/main">
-  <p:tag name="BKT_THUMBNAIL" val="{&quot;slide_path&quot;: &quot;CURRENT&quot;, &quot;data_type&quot;: 6, &quot;slide_id&quot;: 296, &quot;content_only&quot;: false}"/>
-  <p:tag name="BKT_CONTEXTDIALOG" val="BKT_THUMBNAIL"/>
+  <p:tag name="THINKCELLSHAPEDONOTDELETE" val="thinkcellActiveDocDoNotDelete"/>
 </p:tagLst>
 </file>
 
 <file path=ppt/tags/tag19.xml><?xml version="1.0" encoding="utf-8"?>
 <p:tagLst xmlns:a="http://schemas.openxmlformats.org/drawingml/2006/main" xmlns:r="http://schemas.openxmlformats.org/officeDocument/2006/relationships" xmlns:p="http://schemas.openxmlformats.org/presentationml/2006/main">
-  <p:tag name="THINKCELLSHAPEDONOTDELETE" val="thinkcellActiveDocDoNotDelete"/>
+  <p:tag name="THINKCELLSHAPEDONOTDELETE" val="tNc.ANk4CJuJNL2tC6Ea5Ug"/>
 </p:tagLst>
 </file>
 
@@ -48588,25 +49103,20 @@
 
 <file path=ppt/tags/tag20.xml><?xml version="1.0" encoding="utf-8"?>
 <p:tagLst xmlns:a="http://schemas.openxmlformats.org/drawingml/2006/main" xmlns:r="http://schemas.openxmlformats.org/officeDocument/2006/relationships" xmlns:p="http://schemas.openxmlformats.org/presentationml/2006/main">
-  <p:tag name="BKT_SHAPE_HARVEY" val="BKT_HARVEY_V2"/>
-  <p:tag name="BKT_CONTEXTDIALOG" val="BKT_SHAPE_HARVEY"/>
-  <p:tag name="BKT_HARVEY_DENOM_TAG" val="4"/>
+  <p:tag name="THINKCELLSHAPEDONOTDELETE" val="thinkcellActiveDocDoNotDelete"/>
 </p:tagLst>
 </file>
 
 <file path=ppt/tags/tag21.xml><?xml version="1.0" encoding="utf-8"?>
 <p:tagLst xmlns:a="http://schemas.openxmlformats.org/drawingml/2006/main" xmlns:r="http://schemas.openxmlformats.org/officeDocument/2006/relationships" xmlns:p="http://schemas.openxmlformats.org/presentationml/2006/main">
-  <p:tag name="BKT_SHAPE_HARVEY" val="BKT_HARVEY_V2"/>
-  <p:tag name="BKT_CONTEXTDIALOG" val="BKT_SHAPE_HARVEY"/>
-  <p:tag name="BKT_HARVEY_DENOM_TAG" val="4"/>
+  <p:tag name="BKT_THUMBNAIL" val="{&quot;slide_path&quot;: &quot;CURRENT&quot;, &quot;data_type&quot;: 6, &quot;slide_id&quot;: 296, &quot;content_only&quot;: false}"/>
+  <p:tag name="BKT_CONTEXTDIALOG" val="BKT_THUMBNAIL"/>
 </p:tagLst>
 </file>
 
 <file path=ppt/tags/tag22.xml><?xml version="1.0" encoding="utf-8"?>
 <p:tagLst xmlns:a="http://schemas.openxmlformats.org/drawingml/2006/main" xmlns:r="http://schemas.openxmlformats.org/officeDocument/2006/relationships" xmlns:p="http://schemas.openxmlformats.org/presentationml/2006/main">
-  <p:tag name="BKT_SHAPE_HARVEY" val="BKT_HARVEY_V2"/>
-  <p:tag name="BKT_CONTEXTDIALOG" val="BKT_SHAPE_HARVEY"/>
-  <p:tag name="BKT_HARVEY_DENOM_TAG" val="4"/>
+  <p:tag name="THINKCELLSHAPEDONOTDELETE" val="thinkcellActiveDocDoNotDelete"/>
 </p:tagLst>
 </file>
 
@@ -48636,19 +49146,25 @@
 
 <file path=ppt/tags/tag26.xml><?xml version="1.0" encoding="utf-8"?>
 <p:tagLst xmlns:a="http://schemas.openxmlformats.org/drawingml/2006/main" xmlns:r="http://schemas.openxmlformats.org/officeDocument/2006/relationships" xmlns:p="http://schemas.openxmlformats.org/presentationml/2006/main">
-  <p:tag name="THINKCELLSHAPEDONOTDELETE" val="thinkcellActiveDocDoNotDelete"/>
+  <p:tag name="BKT_SHAPE_HARVEY" val="BKT_HARVEY_V2"/>
+  <p:tag name="BKT_CONTEXTDIALOG" val="BKT_SHAPE_HARVEY"/>
+  <p:tag name="BKT_HARVEY_DENOM_TAG" val="4"/>
 </p:tagLst>
 </file>
 
 <file path=ppt/tags/tag27.xml><?xml version="1.0" encoding="utf-8"?>
 <p:tagLst xmlns:a="http://schemas.openxmlformats.org/drawingml/2006/main" xmlns:r="http://schemas.openxmlformats.org/officeDocument/2006/relationships" xmlns:p="http://schemas.openxmlformats.org/presentationml/2006/main">
-  <p:tag name="THINKCELLSHAPEDONOTDELETE" val="thinkcellActiveDocDoNotDelete"/>
+  <p:tag name="BKT_SHAPE_HARVEY" val="BKT_HARVEY_V2"/>
+  <p:tag name="BKT_CONTEXTDIALOG" val="BKT_SHAPE_HARVEY"/>
+  <p:tag name="BKT_HARVEY_DENOM_TAG" val="4"/>
 </p:tagLst>
 </file>
 
 <file path=ppt/tags/tag28.xml><?xml version="1.0" encoding="utf-8"?>
 <p:tagLst xmlns:a="http://schemas.openxmlformats.org/drawingml/2006/main" xmlns:r="http://schemas.openxmlformats.org/officeDocument/2006/relationships" xmlns:p="http://schemas.openxmlformats.org/presentationml/2006/main">
-  <p:tag name="THINKCELLSHAPEDONOTDELETE" val="t7mciGcsXpTXrqyWmiR_FCw"/>
+  <p:tag name="BKT_SHAPE_HARVEY" val="BKT_HARVEY_V2"/>
+  <p:tag name="BKT_CONTEXTDIALOG" val="BKT_SHAPE_HARVEY"/>
+  <p:tag name="BKT_HARVEY_DENOM_TAG" val="4"/>
 </p:tagLst>
 </file>
 
@@ -48666,48 +49182,45 @@
 
 <file path=ppt/tags/tag30.xml><?xml version="1.0" encoding="utf-8"?>
 <p:tagLst xmlns:a="http://schemas.openxmlformats.org/drawingml/2006/main" xmlns:r="http://schemas.openxmlformats.org/officeDocument/2006/relationships" xmlns:p="http://schemas.openxmlformats.org/presentationml/2006/main">
-  <p:tag name="THINKCELLSHAPEDONOTDELETE" val="tNc.ANk4CJuJNL2tC6Ea5Ug"/>
+  <p:tag name="THINKCELLSHAPEDONOTDELETE" val="thinkcellActiveDocDoNotDelete"/>
 </p:tagLst>
 </file>
 
 <file path=ppt/tags/tag31.xml><?xml version="1.0" encoding="utf-8"?>
 <p:tagLst xmlns:a="http://schemas.openxmlformats.org/drawingml/2006/main" xmlns:r="http://schemas.openxmlformats.org/officeDocument/2006/relationships" xmlns:p="http://schemas.openxmlformats.org/presentationml/2006/main">
+  <p:tag name="THINKCELLSHAPEDONOTDELETE" val="t7mciGcsXpTXrqyWmiR_FCw"/>
+</p:tagLst>
+</file>
+
+<file path=ppt/tags/tag32.xml><?xml version="1.0" encoding="utf-8"?>
+<p:tagLst xmlns:a="http://schemas.openxmlformats.org/drawingml/2006/main" xmlns:r="http://schemas.openxmlformats.org/officeDocument/2006/relationships" xmlns:p="http://schemas.openxmlformats.org/presentationml/2006/main">
   <p:tag name="THINKCELLSHAPEDONOTDELETE" val="thinkcellActiveDocDoNotDelete"/>
 </p:tagLst>
 </file>
 
-<file path=ppt/tags/tag32.xml><?xml version="1.0" encoding="utf-8"?>
+<file path=ppt/tags/tag33.xml><?xml version="1.0" encoding="utf-8"?>
+<p:tagLst xmlns:a="http://schemas.openxmlformats.org/drawingml/2006/main" xmlns:r="http://schemas.openxmlformats.org/officeDocument/2006/relationships" xmlns:p="http://schemas.openxmlformats.org/presentationml/2006/main">
+  <p:tag name="THINKCELLSHAPEDONOTDELETE" val="tNc.ANk4CJuJNL2tC6Ea5Ug"/>
+</p:tagLst>
+</file>
+
+<file path=ppt/tags/tag34.xml><?xml version="1.0" encoding="utf-8"?>
+<p:tagLst xmlns:a="http://schemas.openxmlformats.org/drawingml/2006/main" xmlns:r="http://schemas.openxmlformats.org/officeDocument/2006/relationships" xmlns:p="http://schemas.openxmlformats.org/presentationml/2006/main">
+  <p:tag name="THINKCELLSHAPEDONOTDELETE" val="thinkcellActiveDocDoNotDelete"/>
+</p:tagLst>
+</file>
+
+<file path=ppt/tags/tag35.xml><?xml version="1.0" encoding="utf-8"?>
 <p:tagLst xmlns:a="http://schemas.openxmlformats.org/drawingml/2006/main" xmlns:r="http://schemas.openxmlformats.org/officeDocument/2006/relationships" xmlns:p="http://schemas.openxmlformats.org/presentationml/2006/main">
   <p:tag name="BKT_PROCESS_CHEVRONS" val="c392e0f8-83b6-4550-a60d-83ce0f1ba16d"/>
   <p:tag name="BKT_CONTEXTDIALOG" val="BKT_PROCESS_CHEVRONS"/>
 </p:tagLst>
 </file>
 
-<file path=ppt/tags/tag33.xml><?xml version="1.0" encoding="utf-8"?>
+<file path=ppt/tags/tag36.xml><?xml version="1.0" encoding="utf-8"?>
 <p:tagLst xmlns:a="http://schemas.openxmlformats.org/drawingml/2006/main" xmlns:r="http://schemas.openxmlformats.org/officeDocument/2006/relationships" xmlns:p="http://schemas.openxmlformats.org/presentationml/2006/main">
   <p:tag name="BKT_PROCESS_CHEVRONS_ROW" val="c392e0f8-83b6-4550-a60d-83ce0f1ba16d"/>
   <p:tag name="BKT_CONTEXTDIALOG" val="BKT_PROCESS_CHEVRONS_ROW"/>
-</p:tagLst>
-</file>
-
-<file path=ppt/tags/tag34.xml><?xml version="1.0" encoding="utf-8"?>
-<p:tagLst xmlns:a="http://schemas.openxmlformats.org/drawingml/2006/main" xmlns:r="http://schemas.openxmlformats.org/officeDocument/2006/relationships" xmlns:p="http://schemas.openxmlformats.org/presentationml/2006/main">
-  <p:tag name="BKT_PROCESS_CHEVRONS_ROW" val="c392e0f8-83b6-4550-a60d-83ce0f1ba16d"/>
-  <p:tag name="BKT_CONTEXTDIALOG" val="BKT_PROCESS_CHEVRONS_ROW"/>
-</p:tagLst>
-</file>
-
-<file path=ppt/tags/tag35.xml><?xml version="1.0" encoding="utf-8"?>
-<p:tagLst xmlns:a="http://schemas.openxmlformats.org/drawingml/2006/main" xmlns:r="http://schemas.openxmlformats.org/officeDocument/2006/relationships" xmlns:p="http://schemas.openxmlformats.org/presentationml/2006/main">
-  <p:tag name="BKT_PROCESS_CHEVRONS_ROW" val="c392e0f8-83b6-4550-a60d-83ce0f1ba16d"/>
-  <p:tag name="BKT_CONTEXTDIALOG" val="BKT_PROCESS_CHEVRONS_ROW"/>
-</p:tagLst>
-</file>
-
-<file path=ppt/tags/tag36.xml><?xml version="1.0" encoding="utf-8"?>
-<p:tagLst xmlns:a="http://schemas.openxmlformats.org/drawingml/2006/main" xmlns:r="http://schemas.openxmlformats.org/officeDocument/2006/relationships" xmlns:p="http://schemas.openxmlformats.org/presentationml/2006/main">
-  <p:tag name="BKT_CONTEXTDIALOG" val="BKT_PROCESS_CHEVRONS"/>
-  <p:tag name="BKT_PROCESS_CHEVRONS" val="c392e0f8-83b6-4550-a60d-83ce0f1ba16d"/>
 </p:tagLst>
 </file>
 
@@ -48727,7 +49240,8 @@
 
 <file path=ppt/tags/tag39.xml><?xml version="1.0" encoding="utf-8"?>
 <p:tagLst xmlns:a="http://schemas.openxmlformats.org/drawingml/2006/main" xmlns:r="http://schemas.openxmlformats.org/officeDocument/2006/relationships" xmlns:p="http://schemas.openxmlformats.org/presentationml/2006/main">
-  <p:tag name="THINKCELLSHAPEDONOTDELETE" val="thinkcellActiveDocDoNotDelete"/>
+  <p:tag name="BKT_CONTEXTDIALOG" val="BKT_PROCESS_CHEVRONS"/>
+  <p:tag name="BKT_PROCESS_CHEVRONS" val="c392e0f8-83b6-4550-a60d-83ce0f1ba16d"/>
 </p:tagLst>
 </file>
 
@@ -48739,19 +49253,21 @@
 
 <file path=ppt/tags/tag40.xml><?xml version="1.0" encoding="utf-8"?>
 <p:tagLst xmlns:a="http://schemas.openxmlformats.org/drawingml/2006/main" xmlns:r="http://schemas.openxmlformats.org/officeDocument/2006/relationships" xmlns:p="http://schemas.openxmlformats.org/presentationml/2006/main">
-  <p:tag name="THINKCELLSHAPEDONOTDELETE" val="thinkcellActiveDocDoNotDelete"/>
+  <p:tag name="BKT_PROCESS_CHEVRONS_ROW" val="c392e0f8-83b6-4550-a60d-83ce0f1ba16d"/>
+  <p:tag name="BKT_CONTEXTDIALOG" val="BKT_PROCESS_CHEVRONS_ROW"/>
 </p:tagLst>
 </file>
 
 <file path=ppt/tags/tag41.xml><?xml version="1.0" encoding="utf-8"?>
 <p:tagLst xmlns:a="http://schemas.openxmlformats.org/drawingml/2006/main" xmlns:r="http://schemas.openxmlformats.org/officeDocument/2006/relationships" xmlns:p="http://schemas.openxmlformats.org/presentationml/2006/main">
-  <p:tag name="THINKCELLSHAPEDONOTDELETE" val="thinkcellActiveDocDoNotDelete"/>
+  <p:tag name="BKT_PROCESS_CHEVRONS_ROW" val="c392e0f8-83b6-4550-a60d-83ce0f1ba16d"/>
+  <p:tag name="BKT_CONTEXTDIALOG" val="BKT_PROCESS_CHEVRONS_ROW"/>
 </p:tagLst>
 </file>
 
 <file path=ppt/tags/tag42.xml><?xml version="1.0" encoding="utf-8"?>
 <p:tagLst xmlns:a="http://schemas.openxmlformats.org/drawingml/2006/main" xmlns:r="http://schemas.openxmlformats.org/officeDocument/2006/relationships" xmlns:p="http://schemas.openxmlformats.org/presentationml/2006/main">
-  <p:tag name="THINKCELLSHAPEDONOTDELETE" val="t7mciGcsXpTXrqyWmiR_FCw"/>
+  <p:tag name="THINKCELLSHAPEDONOTDELETE" val="thinkcellActiveDocDoNotDelete"/>
 </p:tagLst>
 </file>
 
@@ -48763,37 +49279,37 @@
 
 <file path=ppt/tags/tag44.xml><?xml version="1.0" encoding="utf-8"?>
 <p:tagLst xmlns:a="http://schemas.openxmlformats.org/drawingml/2006/main" xmlns:r="http://schemas.openxmlformats.org/officeDocument/2006/relationships" xmlns:p="http://schemas.openxmlformats.org/presentationml/2006/main">
-  <p:tag name="THINKCELLSHAPEDONOTDELETE" val="tNc.ANk4CJuJNL2tC6Ea5Ug"/>
+  <p:tag name="THINKCELLSHAPEDONOTDELETE" val="thinkcellActiveDocDoNotDelete"/>
 </p:tagLst>
 </file>
 
 <file path=ppt/tags/tag45.xml><?xml version="1.0" encoding="utf-8"?>
 <p:tagLst xmlns:a="http://schemas.openxmlformats.org/drawingml/2006/main" xmlns:r="http://schemas.openxmlformats.org/officeDocument/2006/relationships" xmlns:p="http://schemas.openxmlformats.org/presentationml/2006/main">
-  <p:tag name="THINKCELLSHAPEDONOTDELETE" val="thinkcellActiveDocDoNotDelete"/>
+  <p:tag name="THINKCELLSHAPEDONOTDELETE" val="t7mciGcsXpTXrqyWmiR_FCw"/>
 </p:tagLst>
 </file>
 
 <file path=ppt/tags/tag46.xml><?xml version="1.0" encoding="utf-8"?>
 <p:tagLst xmlns:a="http://schemas.openxmlformats.org/drawingml/2006/main" xmlns:r="http://schemas.openxmlformats.org/officeDocument/2006/relationships" xmlns:p="http://schemas.openxmlformats.org/presentationml/2006/main">
-  <p:tag name="THINKCELLSHAPEDONOTDELETE" val="tSyu_YA5Q8CL6k_Z4av7sVw"/>
+  <p:tag name="THINKCELLSHAPEDONOTDELETE" val="thinkcellActiveDocDoNotDelete"/>
 </p:tagLst>
 </file>
 
 <file path=ppt/tags/tag47.xml><?xml version="1.0" encoding="utf-8"?>
 <p:tagLst xmlns:a="http://schemas.openxmlformats.org/drawingml/2006/main" xmlns:r="http://schemas.openxmlformats.org/officeDocument/2006/relationships" xmlns:p="http://schemas.openxmlformats.org/presentationml/2006/main">
-  <p:tag name="THINKCELLSHAPEDONOTDELETE" val="thinkcellActiveDocDoNotDelete"/>
+  <p:tag name="THINKCELLSHAPEDONOTDELETE" val="tNc.ANk4CJuJNL2tC6Ea5Ug"/>
 </p:tagLst>
 </file>
 
 <file path=ppt/tags/tag48.xml><?xml version="1.0" encoding="utf-8"?>
 <p:tagLst xmlns:a="http://schemas.openxmlformats.org/drawingml/2006/main" xmlns:r="http://schemas.openxmlformats.org/officeDocument/2006/relationships" xmlns:p="http://schemas.openxmlformats.org/presentationml/2006/main">
-  <p:tag name="THINKCELLSHAPEDONOTDELETE" val="tSyu_YA5Q8CL6k_Z4av7sVw"/>
+  <p:tag name="THINKCELLSHAPEDONOTDELETE" val="thinkcellActiveDocDoNotDelete"/>
 </p:tagLst>
 </file>
 
 <file path=ppt/tags/tag49.xml><?xml version="1.0" encoding="utf-8"?>
 <p:tagLst xmlns:a="http://schemas.openxmlformats.org/drawingml/2006/main" xmlns:r="http://schemas.openxmlformats.org/officeDocument/2006/relationships" xmlns:p="http://schemas.openxmlformats.org/presentationml/2006/main">
-  <p:tag name="THINKCELLSHAPEDONOTDELETE" val="thinkcellActiveDocDoNotDelete"/>
+  <p:tag name="THINKCELLSHAPEDONOTDELETE" val="tSyu_YA5Q8CL6k_Z4av7sVw"/>
 </p:tagLst>
 </file>
 
@@ -48805,37 +49321,37 @@
 
 <file path=ppt/tags/tag50.xml><?xml version="1.0" encoding="utf-8"?>
 <p:tagLst xmlns:a="http://schemas.openxmlformats.org/drawingml/2006/main" xmlns:r="http://schemas.openxmlformats.org/officeDocument/2006/relationships" xmlns:p="http://schemas.openxmlformats.org/presentationml/2006/main">
-  <p:tag name="THINKCELLSHAPEDONOTDELETE" val="tNc.ANk4CJuJNL2tC6Ea5Ug"/>
+  <p:tag name="THINKCELLSHAPEDONOTDELETE" val="thinkcellActiveDocDoNotDelete"/>
 </p:tagLst>
 </file>
 
 <file path=ppt/tags/tag51.xml><?xml version="1.0" encoding="utf-8"?>
 <p:tagLst xmlns:a="http://schemas.openxmlformats.org/drawingml/2006/main" xmlns:r="http://schemas.openxmlformats.org/officeDocument/2006/relationships" xmlns:p="http://schemas.openxmlformats.org/presentationml/2006/main">
-  <p:tag name="THINKCELLSHAPEDONOTDELETE" val="thinkcellActiveDocDoNotDelete"/>
+  <p:tag name="THINKCELLSHAPEDONOTDELETE" val="tSyu_YA5Q8CL6k_Z4av7sVw"/>
 </p:tagLst>
 </file>
 
 <file path=ppt/tags/tag52.xml><?xml version="1.0" encoding="utf-8"?>
 <p:tagLst xmlns:a="http://schemas.openxmlformats.org/drawingml/2006/main" xmlns:r="http://schemas.openxmlformats.org/officeDocument/2006/relationships" xmlns:p="http://schemas.openxmlformats.org/presentationml/2006/main">
-  <p:tag name="THINKCELLSHAPEDONOTDELETE" val="tSyu_YA5Q8CL6k_Z4av7sVw"/>
+  <p:tag name="THINKCELLSHAPEDONOTDELETE" val="thinkcellActiveDocDoNotDelete"/>
 </p:tagLst>
 </file>
 
 <file path=ppt/tags/tag53.xml><?xml version="1.0" encoding="utf-8"?>
 <p:tagLst xmlns:a="http://schemas.openxmlformats.org/drawingml/2006/main" xmlns:r="http://schemas.openxmlformats.org/officeDocument/2006/relationships" xmlns:p="http://schemas.openxmlformats.org/presentationml/2006/main">
-  <p:tag name="BKT_CONTEXTDIALOG" val="BKT_DIALOG_AMPEL3"/>
+  <p:tag name="THINKCELLSHAPEDONOTDELETE" val="tNc.ANk4CJuJNL2tC6Ea5Ug"/>
 </p:tagLst>
 </file>
 
 <file path=ppt/tags/tag54.xml><?xml version="1.0" encoding="utf-8"?>
 <p:tagLst xmlns:a="http://schemas.openxmlformats.org/drawingml/2006/main" xmlns:r="http://schemas.openxmlformats.org/officeDocument/2006/relationships" xmlns:p="http://schemas.openxmlformats.org/presentationml/2006/main">
-  <p:tag name="BKT_CONTEXTDIALOG" val="BKT_DIALOG_AMPEL3"/>
+  <p:tag name="THINKCELLSHAPEDONOTDELETE" val="thinkcellActiveDocDoNotDelete"/>
 </p:tagLst>
 </file>
 
 <file path=ppt/tags/tag55.xml><?xml version="1.0" encoding="utf-8"?>
 <p:tagLst xmlns:a="http://schemas.openxmlformats.org/drawingml/2006/main" xmlns:r="http://schemas.openxmlformats.org/officeDocument/2006/relationships" xmlns:p="http://schemas.openxmlformats.org/presentationml/2006/main">
-  <p:tag name="BKT_CONTEXTDIALOG" val="BKT_DIALOG_AMPEL3"/>
+  <p:tag name="THINKCELLSHAPEDONOTDELETE" val="tSyu_YA5Q8CL6k_Z4av7sVw"/>
 </p:tagLst>
 </file>
 
@@ -48859,7 +49375,7 @@
 
 <file path=ppt/tags/tag59.xml><?xml version="1.0" encoding="utf-8"?>
 <p:tagLst xmlns:a="http://schemas.openxmlformats.org/drawingml/2006/main" xmlns:r="http://schemas.openxmlformats.org/officeDocument/2006/relationships" xmlns:p="http://schemas.openxmlformats.org/presentationml/2006/main">
-  <p:tag name="THINKCELLSHAPEDONOTDELETE" val="thinkcellActiveDocDoNotDelete"/>
+  <p:tag name="BKT_CONTEXTDIALOG" val="BKT_DIALOG_AMPEL3"/>
 </p:tagLst>
 </file>
 
@@ -48871,61 +49387,61 @@
 
 <file path=ppt/tags/tag60.xml><?xml version="1.0" encoding="utf-8"?>
 <p:tagLst xmlns:a="http://schemas.openxmlformats.org/drawingml/2006/main" xmlns:r="http://schemas.openxmlformats.org/officeDocument/2006/relationships" xmlns:p="http://schemas.openxmlformats.org/presentationml/2006/main">
-  <p:tag name="THINKCELLSHAPEDONOTDELETE" val="t61mmcnfM.m73i0Za.eELKw"/>
+  <p:tag name="BKT_CONTEXTDIALOG" val="BKT_DIALOG_AMPEL3"/>
 </p:tagLst>
 </file>
 
 <file path=ppt/tags/tag61.xml><?xml version="1.0" encoding="utf-8"?>
 <p:tagLst xmlns:a="http://schemas.openxmlformats.org/drawingml/2006/main" xmlns:r="http://schemas.openxmlformats.org/officeDocument/2006/relationships" xmlns:p="http://schemas.openxmlformats.org/presentationml/2006/main">
-  <p:tag name="THINKCELLSHAPEDONOTDELETE" val="thinkcellActiveDocDoNotDelete"/>
+  <p:tag name="BKT_CONTEXTDIALOG" val="BKT_DIALOG_AMPEL3"/>
 </p:tagLst>
 </file>
 
 <file path=ppt/tags/tag62.xml><?xml version="1.0" encoding="utf-8"?>
 <p:tagLst xmlns:a="http://schemas.openxmlformats.org/drawingml/2006/main" xmlns:r="http://schemas.openxmlformats.org/officeDocument/2006/relationships" xmlns:p="http://schemas.openxmlformats.org/presentationml/2006/main">
-  <p:tag name="THINKCELLSHAPEDONOTDELETE" val="tZVUV13hD4.8AenO4xrBmlg"/>
+  <p:tag name="THINKCELLSHAPEDONOTDELETE" val="thinkcellActiveDocDoNotDelete"/>
 </p:tagLst>
 </file>
 
 <file path=ppt/tags/tag63.xml><?xml version="1.0" encoding="utf-8"?>
 <p:tagLst xmlns:a="http://schemas.openxmlformats.org/drawingml/2006/main" xmlns:r="http://schemas.openxmlformats.org/officeDocument/2006/relationships" xmlns:p="http://schemas.openxmlformats.org/presentationml/2006/main">
-  <p:tag name="THINKCELLSHAPEDONOTDELETE" val="thinkcellActiveDocDoNotDelete"/>
+  <p:tag name="THINKCELLSHAPEDONOTDELETE" val="t61mmcnfM.m73i0Za.eELKw"/>
 </p:tagLst>
 </file>
 
 <file path=ppt/tags/tag64.xml><?xml version="1.0" encoding="utf-8"?>
 <p:tagLst xmlns:a="http://schemas.openxmlformats.org/drawingml/2006/main" xmlns:r="http://schemas.openxmlformats.org/officeDocument/2006/relationships" xmlns:p="http://schemas.openxmlformats.org/presentationml/2006/main">
-  <p:tag name="THINKCELLSHAPEDONOTDELETE" val="tbpiMVFsSr15x5BEjUBksng"/>
+  <p:tag name="THINKCELLSHAPEDONOTDELETE" val="thinkcellActiveDocDoNotDelete"/>
 </p:tagLst>
 </file>
 
 <file path=ppt/tags/tag65.xml><?xml version="1.0" encoding="utf-8"?>
 <p:tagLst xmlns:a="http://schemas.openxmlformats.org/drawingml/2006/main" xmlns:r="http://schemas.openxmlformats.org/officeDocument/2006/relationships" xmlns:p="http://schemas.openxmlformats.org/presentationml/2006/main">
-  <p:tag name="THINKCELLSHAPEDONOTDELETE" val="thinkcellActiveDocDoNotDelete"/>
+  <p:tag name="THINKCELLSHAPEDONOTDELETE" val="tZVUV13hD4.8AenO4xrBmlg"/>
 </p:tagLst>
 </file>
 
 <file path=ppt/tags/tag66.xml><?xml version="1.0" encoding="utf-8"?>
 <p:tagLst xmlns:a="http://schemas.openxmlformats.org/drawingml/2006/main" xmlns:r="http://schemas.openxmlformats.org/officeDocument/2006/relationships" xmlns:p="http://schemas.openxmlformats.org/presentationml/2006/main">
-  <p:tag name="THINKCELLSHAPEDONOTDELETE" val="t_cBnA8Qi3i2s1bjTIBYShg"/>
+  <p:tag name="THINKCELLSHAPEDONOTDELETE" val="thinkcellActiveDocDoNotDelete"/>
 </p:tagLst>
 </file>
 
 <file path=ppt/tags/tag67.xml><?xml version="1.0" encoding="utf-8"?>
 <p:tagLst xmlns:a="http://schemas.openxmlformats.org/drawingml/2006/main" xmlns:r="http://schemas.openxmlformats.org/officeDocument/2006/relationships" xmlns:p="http://schemas.openxmlformats.org/presentationml/2006/main">
-  <p:tag name="THINKCELLSHAPEDONOTDELETE" val="thinkcellActiveDocDoNotDelete"/>
+  <p:tag name="THINKCELLSHAPEDONOTDELETE" val="tbpiMVFsSr15x5BEjUBksng"/>
 </p:tagLst>
 </file>
 
 <file path=ppt/tags/tag68.xml><?xml version="1.0" encoding="utf-8"?>
 <p:tagLst xmlns:a="http://schemas.openxmlformats.org/drawingml/2006/main" xmlns:r="http://schemas.openxmlformats.org/officeDocument/2006/relationships" xmlns:p="http://schemas.openxmlformats.org/presentationml/2006/main">
-  <p:tag name="THINKCELLSHAPEDONOTDELETE" val="tNc.ANk4CJuJNL2tC6Ea5Ug"/>
+  <p:tag name="THINKCELLSHAPEDONOTDELETE" val="thinkcellActiveDocDoNotDelete"/>
 </p:tagLst>
 </file>
 
 <file path=ppt/tags/tag69.xml><?xml version="1.0" encoding="utf-8"?>
 <p:tagLst xmlns:a="http://schemas.openxmlformats.org/drawingml/2006/main" xmlns:r="http://schemas.openxmlformats.org/officeDocument/2006/relationships" xmlns:p="http://schemas.openxmlformats.org/presentationml/2006/main">
-  <p:tag name="THINKCELLSHAPEDONOTDELETE" val="thinkcellActiveDocDoNotDelete"/>
+  <p:tag name="THINKCELLSHAPEDONOTDELETE" val="t_cBnA8Qi3i2s1bjTIBYShg"/>
 </p:tagLst>
 </file>
 
@@ -48937,66 +49453,65 @@
 
 <file path=ppt/tags/tag70.xml><?xml version="1.0" encoding="utf-8"?>
 <p:tagLst xmlns:a="http://schemas.openxmlformats.org/drawingml/2006/main" xmlns:r="http://schemas.openxmlformats.org/officeDocument/2006/relationships" xmlns:p="http://schemas.openxmlformats.org/presentationml/2006/main">
-  <p:tag name="THINKCELLSHAPEDONOTDELETE" val="txxS.hN7WrnarVM0w02DXSQ"/>
+  <p:tag name="THINKCELLSHAPEDONOTDELETE" val="thinkcellActiveDocDoNotDelete"/>
 </p:tagLst>
 </file>
 
 <file path=ppt/tags/tag71.xml><?xml version="1.0" encoding="utf-8"?>
 <p:tagLst xmlns:a="http://schemas.openxmlformats.org/drawingml/2006/main" xmlns:r="http://schemas.openxmlformats.org/officeDocument/2006/relationships" xmlns:p="http://schemas.openxmlformats.org/presentationml/2006/main">
-  <p:tag name="THINKCELLSHAPEDONOTDELETE" val="thinkcellActiveDocDoNotDelete"/>
+  <p:tag name="THINKCELLSHAPEDONOTDELETE" val="tNc.ANk4CJuJNL2tC6Ea5Ug"/>
 </p:tagLst>
 </file>
 
 <file path=ppt/tags/tag72.xml><?xml version="1.0" encoding="utf-8"?>
 <p:tagLst xmlns:a="http://schemas.openxmlformats.org/drawingml/2006/main" xmlns:r="http://schemas.openxmlformats.org/officeDocument/2006/relationships" xmlns:p="http://schemas.openxmlformats.org/presentationml/2006/main">
+  <p:tag name="THINKCELLSHAPEDONOTDELETE" val="thinkcellActiveDocDoNotDelete"/>
+</p:tagLst>
+</file>
+
+<file path=ppt/tags/tag73.xml><?xml version="1.0" encoding="utf-8"?>
+<p:tagLst xmlns:a="http://schemas.openxmlformats.org/drawingml/2006/main" xmlns:r="http://schemas.openxmlformats.org/officeDocument/2006/relationships" xmlns:p="http://schemas.openxmlformats.org/presentationml/2006/main">
+  <p:tag name="THINKCELLSHAPEDONOTDELETE" val="txxS.hN7WrnarVM0w02DXSQ"/>
+</p:tagLst>
+</file>
+
+<file path=ppt/tags/tag74.xml><?xml version="1.0" encoding="utf-8"?>
+<p:tagLst xmlns:a="http://schemas.openxmlformats.org/drawingml/2006/main" xmlns:r="http://schemas.openxmlformats.org/officeDocument/2006/relationships" xmlns:p="http://schemas.openxmlformats.org/presentationml/2006/main">
+  <p:tag name="THINKCELLSHAPEDONOTDELETE" val="thinkcellActiveDocDoNotDelete"/>
+</p:tagLst>
+</file>
+
+<file path=ppt/tags/tag75.xml><?xml version="1.0" encoding="utf-8"?>
+<p:tagLst xmlns:a="http://schemas.openxmlformats.org/drawingml/2006/main" xmlns:r="http://schemas.openxmlformats.org/officeDocument/2006/relationships" xmlns:p="http://schemas.openxmlformats.org/presentationml/2006/main">
   <p:tag name="THINKCELLSHAPEDONOTDELETE" val="tWHg80xrZUdocwykmm1b9ag"/>
 </p:tagLst>
 </file>
 
-<file path=ppt/tags/tag73.xml><?xml version="1.0" encoding="utf-8"?>
+<file path=ppt/tags/tag76.xml><?xml version="1.0" encoding="utf-8"?>
 <p:tagLst xmlns:a="http://schemas.openxmlformats.org/drawingml/2006/main" xmlns:r="http://schemas.openxmlformats.org/officeDocument/2006/relationships" xmlns:p="http://schemas.openxmlformats.org/presentationml/2006/main">
   <p:tag name="BKT_CONTEXTDIALOG" val="BKT_PROCESS_CHEVRONS"/>
   <p:tag name="BKT_PROCESS_CHEVRONS" val="3f8da89c-deb1-491a-9054-55eb03f09025"/>
 </p:tagLst>
 </file>
 
-<file path=ppt/tags/tag74.xml><?xml version="1.0" encoding="utf-8"?>
+<file path=ppt/tags/tag77.xml><?xml version="1.0" encoding="utf-8"?>
 <p:tagLst xmlns:a="http://schemas.openxmlformats.org/drawingml/2006/main" xmlns:r="http://schemas.openxmlformats.org/officeDocument/2006/relationships" xmlns:p="http://schemas.openxmlformats.org/presentationml/2006/main">
   <p:tag name="BKT_CONTEXTDIALOG" val="BKT_PROCESS_CHEVRONS_ROW"/>
   <p:tag name="BKT_PROCESS_CHEVRONS_ROW" val="3f8da89c-deb1-491a-9054-55eb03f09025"/>
 </p:tagLst>
 </file>
 
-<file path=ppt/tags/tag75.xml><?xml version="1.0" encoding="utf-8"?>
+<file path=ppt/tags/tag78.xml><?xml version="1.0" encoding="utf-8"?>
 <p:tagLst xmlns:a="http://schemas.openxmlformats.org/drawingml/2006/main" xmlns:r="http://schemas.openxmlformats.org/officeDocument/2006/relationships" xmlns:p="http://schemas.openxmlformats.org/presentationml/2006/main">
   <p:tag name="BKT_CONTEXTDIALOG" val="BKT_PROCESS_CHEVRONS_ROW"/>
   <p:tag name="BKT_PROCESS_CHEVRONS_ROW" val="3f8da89c-deb1-491a-9054-55eb03f09025"/>
 </p:tagLst>
 </file>
 
-<file path=ppt/tags/tag76.xml><?xml version="1.0" encoding="utf-8"?>
+<file path=ppt/tags/tag79.xml><?xml version="1.0" encoding="utf-8"?>
 <p:tagLst xmlns:a="http://schemas.openxmlformats.org/drawingml/2006/main" xmlns:r="http://schemas.openxmlformats.org/officeDocument/2006/relationships" xmlns:p="http://schemas.openxmlformats.org/presentationml/2006/main">
   <p:tag name="BKT_CONTEXTDIALOG" val="BKT_DIALOG_STATESHAPE"/>
   <p:tag name="BKT_DIALOG_STATESHAPE" val="BKT_CHECKBOX"/>
-</p:tagLst>
-</file>
-
-<file path=ppt/tags/tag77.xml><?xml version="1.0" encoding="utf-8"?>
-<p:tagLst xmlns:a="http://schemas.openxmlformats.org/drawingml/2006/main" xmlns:r="http://schemas.openxmlformats.org/officeDocument/2006/relationships" xmlns:p="http://schemas.openxmlformats.org/presentationml/2006/main">
-  <p:tag name="BKT_CONTEXTDIALOG" val="BKT_DIALOG_AMPEL3"/>
-</p:tagLst>
-</file>
-
-<file path=ppt/tags/tag78.xml><?xml version="1.0" encoding="utf-8"?>
-<p:tagLst xmlns:a="http://schemas.openxmlformats.org/drawingml/2006/main" xmlns:r="http://schemas.openxmlformats.org/officeDocument/2006/relationships" xmlns:p="http://schemas.openxmlformats.org/presentationml/2006/main">
-  <p:tag name="BKT_CONTEXTDIALOG" val="BKT_DIALOG_STATESHAPE"/>
-  <p:tag name="BKT_DIALOG_STATESHAPE" val="BKT_CHECKBOX"/>
-</p:tagLst>
-</file>
-
-<file path=ppt/tags/tag79.xml><?xml version="1.0" encoding="utf-8"?>
-<p:tagLst xmlns:a="http://schemas.openxmlformats.org/drawingml/2006/main" xmlns:r="http://schemas.openxmlformats.org/officeDocument/2006/relationships" xmlns:p="http://schemas.openxmlformats.org/presentationml/2006/main">
-  <p:tag name="THINKCELLSHAPEDONOTDELETE" val="thinkcellActiveDocDoNotDelete"/>
 </p:tagLst>
 </file>
 
@@ -49008,79 +49523,80 @@
 
 <file path=ppt/tags/tag80.xml><?xml version="1.0" encoding="utf-8"?>
 <p:tagLst xmlns:a="http://schemas.openxmlformats.org/drawingml/2006/main" xmlns:r="http://schemas.openxmlformats.org/officeDocument/2006/relationships" xmlns:p="http://schemas.openxmlformats.org/presentationml/2006/main">
-  <p:tag name="THINKCELLSHAPEDONOTDELETE" val="tbYtRv1ZISYCOgUunnBVvZQ"/>
+  <p:tag name="BKT_CONTEXTDIALOG" val="BKT_DIALOG_AMPEL3"/>
 </p:tagLst>
 </file>
 
 <file path=ppt/tags/tag81.xml><?xml version="1.0" encoding="utf-8"?>
 <p:tagLst xmlns:a="http://schemas.openxmlformats.org/drawingml/2006/main" xmlns:r="http://schemas.openxmlformats.org/officeDocument/2006/relationships" xmlns:p="http://schemas.openxmlformats.org/presentationml/2006/main">
-  <p:tag name="BKT_SHAPE_CONNECTORS" val="{&quot;shape2_side&quot;: &quot;top&quot;, &quot;shape1_side&quot;: &quot;bottom&quot;, &quot;shape2_id&quot;: 10, &quot;shape1_id&quot;: 9}"/>
+  <p:tag name="BKT_CONTEXTDIALOG" val="BKT_DIALOG_STATESHAPE"/>
+  <p:tag name="BKT_DIALOG_STATESHAPE" val="BKT_CHECKBOX"/>
 </p:tagLst>
 </file>
 
 <file path=ppt/tags/tag82.xml><?xml version="1.0" encoding="utf-8"?>
 <p:tagLst xmlns:a="http://schemas.openxmlformats.org/drawingml/2006/main" xmlns:r="http://schemas.openxmlformats.org/officeDocument/2006/relationships" xmlns:p="http://schemas.openxmlformats.org/presentationml/2006/main">
-  <p:tag name="BKT_SHAPE_CONNECTORS" val="{&quot;shape2_side&quot;: &quot;top&quot;, &quot;shape1_side&quot;: &quot;bottom&quot;, &quot;shape2_id&quot;: 4, &quot;shape1_id&quot;: 3}"/>
+  <p:tag name="THINKCELLSHAPEDONOTDELETE" val="thinkcellActiveDocDoNotDelete"/>
 </p:tagLst>
 </file>
 
 <file path=ppt/tags/tag83.xml><?xml version="1.0" encoding="utf-8"?>
 <p:tagLst xmlns:a="http://schemas.openxmlformats.org/drawingml/2006/main" xmlns:r="http://schemas.openxmlformats.org/officeDocument/2006/relationships" xmlns:p="http://schemas.openxmlformats.org/presentationml/2006/main">
-  <p:tag name="THINKCELLSHAPEDONOTDELETE" val="thinkcellActiveDocDoNotDelete"/>
+  <p:tag name="THINKCELLSHAPEDONOTDELETE" val="tbYtRv1ZISYCOgUunnBVvZQ"/>
 </p:tagLst>
 </file>
 
 <file path=ppt/tags/tag84.xml><?xml version="1.0" encoding="utf-8"?>
 <p:tagLst xmlns:a="http://schemas.openxmlformats.org/drawingml/2006/main" xmlns:r="http://schemas.openxmlformats.org/officeDocument/2006/relationships" xmlns:p="http://schemas.openxmlformats.org/presentationml/2006/main">
-  <p:tag name="THINKCELLSHAPEDONOTDELETE" val="tgNPcX8WiWahoYGGEuJ0MQw"/>
+  <p:tag name="BKT_SHAPE_CONNECTORS" val="{&quot;shape2_side&quot;: &quot;top&quot;, &quot;shape1_side&quot;: &quot;bottom&quot;, &quot;shape2_id&quot;: 10, &quot;shape1_id&quot;: 9}"/>
 </p:tagLst>
 </file>
 
 <file path=ppt/tags/tag85.xml><?xml version="1.0" encoding="utf-8"?>
 <p:tagLst xmlns:a="http://schemas.openxmlformats.org/drawingml/2006/main" xmlns:r="http://schemas.openxmlformats.org/officeDocument/2006/relationships" xmlns:p="http://schemas.openxmlformats.org/presentationml/2006/main">
-  <p:tag name="THINKCELLSHAPEDONOTDELETE" val="thinkcellActiveDocDoNotDelete"/>
+  <p:tag name="BKT_SHAPE_CONNECTORS" val="{&quot;shape2_side&quot;: &quot;top&quot;, &quot;shape1_side&quot;: &quot;bottom&quot;, &quot;shape2_id&quot;: 4, &quot;shape1_id&quot;: 3}"/>
 </p:tagLst>
 </file>
 
 <file path=ppt/tags/tag86.xml><?xml version="1.0" encoding="utf-8"?>
 <p:tagLst xmlns:a="http://schemas.openxmlformats.org/drawingml/2006/main" xmlns:r="http://schemas.openxmlformats.org/officeDocument/2006/relationships" xmlns:p="http://schemas.openxmlformats.org/presentationml/2006/main">
-  <p:tag name="THINKCELLSHAPEDONOTDELETE" val="tiEr7co1_w0RrNSbhy87nzw"/>
+  <p:tag name="THINKCELLSHAPEDONOTDELETE" val="thinkcellActiveDocDoNotDelete"/>
 </p:tagLst>
 </file>
 
 <file path=ppt/tags/tag87.xml><?xml version="1.0" encoding="utf-8"?>
 <p:tagLst xmlns:a="http://schemas.openxmlformats.org/drawingml/2006/main" xmlns:r="http://schemas.openxmlformats.org/officeDocument/2006/relationships" xmlns:p="http://schemas.openxmlformats.org/presentationml/2006/main">
-  <p:tag name="THINKCELLSHAPEDONOTDELETE" val="thinkcellActiveDocDoNotDelete"/>
+  <p:tag name="THINKCELLSHAPEDONOTDELETE" val="tgNPcX8WiWahoYGGEuJ0MQw"/>
 </p:tagLst>
 </file>
 
 <file path=ppt/tags/tag88.xml><?xml version="1.0" encoding="utf-8"?>
 <p:tagLst xmlns:a="http://schemas.openxmlformats.org/drawingml/2006/main" xmlns:r="http://schemas.openxmlformats.org/officeDocument/2006/relationships" xmlns:p="http://schemas.openxmlformats.org/presentationml/2006/main">
-  <p:tag name="THINKCELLSHAPEDONOTDELETE" val="twVytc4S6XtDclqsGTqYoJw"/>
+  <p:tag name="THINKCELLSHAPEDONOTDELETE" val="thinkcellActiveDocDoNotDelete"/>
 </p:tagLst>
 </file>
 
 <file path=ppt/tags/tag89.xml><?xml version="1.0" encoding="utf-8"?>
 <p:tagLst xmlns:a="http://schemas.openxmlformats.org/drawingml/2006/main" xmlns:r="http://schemas.openxmlformats.org/officeDocument/2006/relationships" xmlns:p="http://schemas.openxmlformats.org/presentationml/2006/main">
-  <p:tag name="THINKCELLSHAPEDONOTDELETE" val="thinkcellActiveDocDoNotDelete"/>
+  <p:tag name="THINKCELLSHAPEDONOTDELETE" val="tiEr7co1_w0RrNSbhy87nzw"/>
 </p:tagLst>
 </file>
 
 <file path=ppt/tags/tag9.xml><?xml version="1.0" encoding="utf-8"?>
 <p:tagLst xmlns:a="http://schemas.openxmlformats.org/drawingml/2006/main" xmlns:r="http://schemas.openxmlformats.org/officeDocument/2006/relationships" xmlns:p="http://schemas.openxmlformats.org/presentationml/2006/main">
-  <p:tag name="THINKCELLSHAPEDONOTDELETE" val="thinkcellActiveDocDoNotDelete"/>
+  <p:tag name="THINKCELLSHAPEDONOTDELETE" val="tNc.ANk4CJuJNL2tC6Ea5Ug"/>
 </p:tagLst>
 </file>
 
 <file path=ppt/tags/tag90.xml><?xml version="1.0" encoding="utf-8"?>
 <p:tagLst xmlns:a="http://schemas.openxmlformats.org/drawingml/2006/main" xmlns:r="http://schemas.openxmlformats.org/officeDocument/2006/relationships" xmlns:p="http://schemas.openxmlformats.org/presentationml/2006/main">
-  <p:tag name="THINKCELLSHAPEDONOTDELETE" val="tprTTfE8_H9x_u1RmY4xh_w"/>
+  <p:tag name="THINKCELLSHAPEDONOTDELETE" val="thinkcellActiveDocDoNotDelete"/>
 </p:tagLst>
 </file>
 
 <file path=ppt/tags/tag91.xml><?xml version="1.0" encoding="utf-8"?>
 <p:tagLst xmlns:a="http://schemas.openxmlformats.org/drawingml/2006/main" xmlns:r="http://schemas.openxmlformats.org/officeDocument/2006/relationships" xmlns:p="http://schemas.openxmlformats.org/presentationml/2006/main">
-  <p:tag name="THINKCELLSHAPEDONOTDELETE" val="thinkcellActiveDocDoNotDelete"/>
+  <p:tag name="THINKCELLSHAPEDONOTDELETE" val="twVytc4S6XtDclqsGTqYoJw"/>
 </p:tagLst>
 </file>
 
@@ -49092,48 +49608,45 @@
 
 <file path=ppt/tags/tag93.xml><?xml version="1.0" encoding="utf-8"?>
 <p:tagLst xmlns:a="http://schemas.openxmlformats.org/drawingml/2006/main" xmlns:r="http://schemas.openxmlformats.org/officeDocument/2006/relationships" xmlns:p="http://schemas.openxmlformats.org/presentationml/2006/main">
+  <p:tag name="THINKCELLSHAPEDONOTDELETE" val="tprTTfE8_H9x_u1RmY4xh_w"/>
+</p:tagLst>
+</file>
+
+<file path=ppt/tags/tag94.xml><?xml version="1.0" encoding="utf-8"?>
+<p:tagLst xmlns:a="http://schemas.openxmlformats.org/drawingml/2006/main" xmlns:r="http://schemas.openxmlformats.org/officeDocument/2006/relationships" xmlns:p="http://schemas.openxmlformats.org/presentationml/2006/main">
+  <p:tag name="THINKCELLSHAPEDONOTDELETE" val="thinkcellActiveDocDoNotDelete"/>
+</p:tagLst>
+</file>
+
+<file path=ppt/tags/tag95.xml><?xml version="1.0" encoding="utf-8"?>
+<p:tagLst xmlns:a="http://schemas.openxmlformats.org/drawingml/2006/main" xmlns:r="http://schemas.openxmlformats.org/officeDocument/2006/relationships" xmlns:p="http://schemas.openxmlformats.org/presentationml/2006/main">
+  <p:tag name="THINKCELLSHAPEDONOTDELETE" val="thinkcellActiveDocDoNotDelete"/>
+</p:tagLst>
+</file>
+
+<file path=ppt/tags/tag96.xml><?xml version="1.0" encoding="utf-8"?>
+<p:tagLst xmlns:a="http://schemas.openxmlformats.org/drawingml/2006/main" xmlns:r="http://schemas.openxmlformats.org/officeDocument/2006/relationships" xmlns:p="http://schemas.openxmlformats.org/presentationml/2006/main">
   <p:tag name="THINKCELLSHAPEDONOTDELETE" val="t7mciGcsXpTXrqyWmiR_FCw"/>
 </p:tagLst>
 </file>
 
-<file path=ppt/tags/tag94.xml><?xml version="1.0" encoding="utf-8"?>
+<file path=ppt/tags/tag97.xml><?xml version="1.0" encoding="utf-8"?>
 <p:tagLst xmlns:a="http://schemas.openxmlformats.org/drawingml/2006/main" xmlns:r="http://schemas.openxmlformats.org/officeDocument/2006/relationships" xmlns:p="http://schemas.openxmlformats.org/presentationml/2006/main">
   <p:tag name="BKT_THUMBNAIL" val="{&quot;content_only&quot;: false, &quot;slide_id&quot;: 265, &quot;slide_path&quot;: &quot;CURRENT&quot;, &quot;data_type&quot;: 6}"/>
   <p:tag name="BKT_CONTEXTDIALOG" val="BKT_THUMBNAIL"/>
 </p:tagLst>
 </file>
 
-<file path=ppt/tags/tag95.xml><?xml version="1.0" encoding="utf-8"?>
+<file path=ppt/tags/tag98.xml><?xml version="1.0" encoding="utf-8"?>
 <p:tagLst xmlns:a="http://schemas.openxmlformats.org/drawingml/2006/main" xmlns:r="http://schemas.openxmlformats.org/officeDocument/2006/relationships" xmlns:p="http://schemas.openxmlformats.org/presentationml/2006/main">
   <p:tag name="BKT_CONTEXTDIALOG" val="BKT_THUMBNAIL"/>
   <p:tag name="BKT_THUMBNAIL" val="{&quot;content_only&quot;: false, &quot;slide_id&quot;: 265, &quot;slide_path&quot;: &quot;CURRENT&quot;, &quot;data_type&quot;: 1}"/>
 </p:tagLst>
 </file>
 
-<file path=ppt/tags/tag96.xml><?xml version="1.0" encoding="utf-8"?>
+<file path=ppt/tags/tag99.xml><?xml version="1.0" encoding="utf-8"?>
 <p:tagLst xmlns:a="http://schemas.openxmlformats.org/drawingml/2006/main" xmlns:r="http://schemas.openxmlformats.org/officeDocument/2006/relationships" xmlns:p="http://schemas.openxmlformats.org/presentationml/2006/main">
   <p:tag name="BKT_CONTEXTDIALOG" val="BKT_DIALOG_AMPEL3"/>
-</p:tagLst>
-</file>
-
-<file path=ppt/tags/tag97.xml><?xml version="1.0" encoding="utf-8"?>
-<p:tagLst xmlns:a="http://schemas.openxmlformats.org/drawingml/2006/main" xmlns:r="http://schemas.openxmlformats.org/officeDocument/2006/relationships" xmlns:p="http://schemas.openxmlformats.org/presentationml/2006/main">
-  <p:tag name="BKT_SHAPE_HARVEY" val="BKT_HARVEY_V1"/>
-  <p:tag name="BKT_CONTEXTDIALOG" val="BKT_SHAPE_HARVEY"/>
-  <p:tag name="BKT_HARVEY_DENOM_TAG" val="4"/>
-</p:tagLst>
-</file>
-
-<file path=ppt/tags/tag98.xml><?xml version="1.0" encoding="utf-8"?>
-<p:tagLst xmlns:a="http://schemas.openxmlformats.org/drawingml/2006/main" xmlns:r="http://schemas.openxmlformats.org/officeDocument/2006/relationships" xmlns:p="http://schemas.openxmlformats.org/presentationml/2006/main">
-  <p:tag name="BKT_THUMBNAIL" val="{&quot;content_only&quot;: false, &quot;slide_id&quot;: 264, &quot;slide_path&quot;: &quot;CURRENT&quot;, &quot;data_type&quot;: 6}"/>
-  <p:tag name="BKT_CONTEXTDIALOG" val="BKT_THUMBNAIL"/>
-</p:tagLst>
-</file>
-
-<file path=ppt/tags/tag99.xml><?xml version="1.0" encoding="utf-8"?>
-<p:tagLst xmlns:a="http://schemas.openxmlformats.org/drawingml/2006/main" xmlns:r="http://schemas.openxmlformats.org/officeDocument/2006/relationships" xmlns:p="http://schemas.openxmlformats.org/presentationml/2006/main">
-  <p:tag name="BKT_CONTEXTDIALOG" val="BKT_DIALOG_STATESHAPE"/>
 </p:tagLst>
 </file>
 
